--- a/decks/Chem_04_Endocrine-and-Protein-Testing.pptx
+++ b/decks/Chem_04_Endocrine-and-Protein-Testing.pptx
@@ -27,9 +27,13 @@
     <p:sldId id="275" r:id="rId21"/>
     <p:sldId id="276" r:id="rId22"/>
     <p:sldId id="277" r:id="rId23"/>
+    <p:sldId id="278" r:id="rId24"/>
+    <p:sldId id="279" r:id="rId25"/>
+    <p:sldId id="280" r:id="rId26"/>
+    <p:sldId id="281" r:id="rId27"/>
   </p:sldIdLst>
   <p:notesMasterIdLst>
-    <p:notesMasterId r:id="rId24"/>
+    <p:notesMasterId r:id="rId28"/>
   </p:notesMasterIdLst>
   <p:sldSz cx="12191695" cy="6858000"/>
   <p:notesSz cx="6858000" cy="12191695"/>
@@ -1779,6 +1783,358 @@
             <a:fld id="{F7021451-1387-4CA6-816F-3879F97B5CBC}" type="slidenum">
               <a:rPr lang="en-US"/>
               <a:t>22</a:t>
+            </a:fld>
+            <a:endParaRPr lang="en-US"/>
+          </a:p>
+        </p:txBody>
+      </p:sp>
+    </p:spTree>
+    <p:extLst>
+      <p:ext uri="{BB962C8B-B14F-4D97-AF65-F5344CB8AC3E}">
+        <p14:creationId xmlns:p14="http://schemas.microsoft.com/office/powerpoint/2010/main" val="1024086991"/>
+      </p:ext>
+    </p:extLst>
+  </p:cSld>
+  <p:clrMapOvr>
+    <a:masterClrMapping/>
+  </p:clrMapOvr>
+</p:notes>
+</file>
+
+<file path=ppt/notesSlides/notesSlide23.xml><?xml version="1.0" encoding="utf-8"?>
+<p:notes xmlns:a="http://schemas.openxmlformats.org/drawingml/2006/main" xmlns:r="http://schemas.openxmlformats.org/officeDocument/2006/relationships" xmlns:p="http://schemas.openxmlformats.org/presentationml/2006/main">
+  <p:cSld>
+    <p:spTree>
+      <p:nvGrpSpPr>
+        <p:cNvPr id="1" name=""/>
+        <p:cNvGrpSpPr/>
+        <p:nvPr/>
+      </p:nvGrpSpPr>
+      <p:grpSpPr>
+        <a:xfrm>
+          <a:off x="0" y="0"/>
+          <a:ext cx="0" cy="0"/>
+          <a:chOff x="0" y="0"/>
+          <a:chExt cx="0" cy="0"/>
+        </a:xfrm>
+      </p:grpSpPr>
+      <p:sp>
+        <p:nvSpPr>
+          <p:cNvPr id="2" name="Slide Image Placeholder 1"/>
+          <p:cNvSpPr>
+            <a:spLocks noGrp="1" noRot="1" noChangeAspect="1"/>
+          </p:cNvSpPr>
+          <p:nvPr>
+            <p:ph type="sldImg"/>
+          </p:nvPr>
+        </p:nvSpPr>
+        <p:spPr/>
+      </p:sp>
+      <p:sp>
+        <p:nvSpPr>
+          <p:cNvPr id="3" name="Notes Placeholder 2"/>
+          <p:cNvSpPr>
+            <a:spLocks noGrp="1"/>
+          </p:cNvSpPr>
+          <p:nvPr>
+            <p:ph type="body" idx="1"/>
+          </p:nvPr>
+        </p:nvSpPr>
+        <p:spPr/>
+        <p:txBody>
+          <a:bodyPr/>
+          <a:lstStyle/>
+          <a:p>
+            <a:r>
+              <a:rPr lang="en-US" dirty="0"/>
+              <a:t/>
+            </a:r>
+            <a:endParaRPr lang="en-US" dirty="0"/>
+          </a:p>
+        </p:txBody>
+      </p:sp>
+      <p:sp>
+        <p:nvSpPr>
+          <p:cNvPr id="4" name="Slide Number Placeholder 3"/>
+          <p:cNvSpPr>
+            <a:spLocks noGrp="1"/>
+          </p:cNvSpPr>
+          <p:nvPr>
+            <p:ph type="sldNum" sz="quarter" idx="10"/>
+          </p:nvPr>
+        </p:nvSpPr>
+        <p:spPr/>
+        <p:txBody>
+          <a:bodyPr/>
+          <a:lstStyle/>
+          <a:p>
+            <a:fld id="{F7021451-1387-4CA6-816F-3879F97B5CBC}" type="slidenum">
+              <a:rPr lang="en-US"/>
+              <a:t>23</a:t>
+            </a:fld>
+            <a:endParaRPr lang="en-US"/>
+          </a:p>
+        </p:txBody>
+      </p:sp>
+    </p:spTree>
+    <p:extLst>
+      <p:ext uri="{BB962C8B-B14F-4D97-AF65-F5344CB8AC3E}">
+        <p14:creationId xmlns:p14="http://schemas.microsoft.com/office/powerpoint/2010/main" val="1024086991"/>
+      </p:ext>
+    </p:extLst>
+  </p:cSld>
+  <p:clrMapOvr>
+    <a:masterClrMapping/>
+  </p:clrMapOvr>
+</p:notes>
+</file>
+
+<file path=ppt/notesSlides/notesSlide24.xml><?xml version="1.0" encoding="utf-8"?>
+<p:notes xmlns:a="http://schemas.openxmlformats.org/drawingml/2006/main" xmlns:r="http://schemas.openxmlformats.org/officeDocument/2006/relationships" xmlns:p="http://schemas.openxmlformats.org/presentationml/2006/main">
+  <p:cSld>
+    <p:spTree>
+      <p:nvGrpSpPr>
+        <p:cNvPr id="1" name=""/>
+        <p:cNvGrpSpPr/>
+        <p:nvPr/>
+      </p:nvGrpSpPr>
+      <p:grpSpPr>
+        <a:xfrm>
+          <a:off x="0" y="0"/>
+          <a:ext cx="0" cy="0"/>
+          <a:chOff x="0" y="0"/>
+          <a:chExt cx="0" cy="0"/>
+        </a:xfrm>
+      </p:grpSpPr>
+      <p:sp>
+        <p:nvSpPr>
+          <p:cNvPr id="2" name="Slide Image Placeholder 1"/>
+          <p:cNvSpPr>
+            <a:spLocks noGrp="1" noRot="1" noChangeAspect="1"/>
+          </p:cNvSpPr>
+          <p:nvPr>
+            <p:ph type="sldImg"/>
+          </p:nvPr>
+        </p:nvSpPr>
+        <p:spPr/>
+      </p:sp>
+      <p:sp>
+        <p:nvSpPr>
+          <p:cNvPr id="3" name="Notes Placeholder 2"/>
+          <p:cNvSpPr>
+            <a:spLocks noGrp="1"/>
+          </p:cNvSpPr>
+          <p:nvPr>
+            <p:ph type="body" idx="1"/>
+          </p:nvPr>
+        </p:nvSpPr>
+        <p:spPr/>
+        <p:txBody>
+          <a:bodyPr/>
+          <a:lstStyle/>
+          <a:p>
+            <a:r>
+              <a:rPr lang="en-US" dirty="0"/>
+              <a:t/>
+            </a:r>
+            <a:endParaRPr lang="en-US" dirty="0"/>
+          </a:p>
+        </p:txBody>
+      </p:sp>
+      <p:sp>
+        <p:nvSpPr>
+          <p:cNvPr id="4" name="Slide Number Placeholder 3"/>
+          <p:cNvSpPr>
+            <a:spLocks noGrp="1"/>
+          </p:cNvSpPr>
+          <p:nvPr>
+            <p:ph type="sldNum" sz="quarter" idx="10"/>
+          </p:nvPr>
+        </p:nvSpPr>
+        <p:spPr/>
+        <p:txBody>
+          <a:bodyPr/>
+          <a:lstStyle/>
+          <a:p>
+            <a:fld id="{F7021451-1387-4CA6-816F-3879F97B5CBC}" type="slidenum">
+              <a:rPr lang="en-US"/>
+              <a:t>24</a:t>
+            </a:fld>
+            <a:endParaRPr lang="en-US"/>
+          </a:p>
+        </p:txBody>
+      </p:sp>
+    </p:spTree>
+    <p:extLst>
+      <p:ext uri="{BB962C8B-B14F-4D97-AF65-F5344CB8AC3E}">
+        <p14:creationId xmlns:p14="http://schemas.microsoft.com/office/powerpoint/2010/main" val="1024086991"/>
+      </p:ext>
+    </p:extLst>
+  </p:cSld>
+  <p:clrMapOvr>
+    <a:masterClrMapping/>
+  </p:clrMapOvr>
+</p:notes>
+</file>
+
+<file path=ppt/notesSlides/notesSlide25.xml><?xml version="1.0" encoding="utf-8"?>
+<p:notes xmlns:a="http://schemas.openxmlformats.org/drawingml/2006/main" xmlns:r="http://schemas.openxmlformats.org/officeDocument/2006/relationships" xmlns:p="http://schemas.openxmlformats.org/presentationml/2006/main">
+  <p:cSld>
+    <p:spTree>
+      <p:nvGrpSpPr>
+        <p:cNvPr id="1" name=""/>
+        <p:cNvGrpSpPr/>
+        <p:nvPr/>
+      </p:nvGrpSpPr>
+      <p:grpSpPr>
+        <a:xfrm>
+          <a:off x="0" y="0"/>
+          <a:ext cx="0" cy="0"/>
+          <a:chOff x="0" y="0"/>
+          <a:chExt cx="0" cy="0"/>
+        </a:xfrm>
+      </p:grpSpPr>
+      <p:sp>
+        <p:nvSpPr>
+          <p:cNvPr id="2" name="Slide Image Placeholder 1"/>
+          <p:cNvSpPr>
+            <a:spLocks noGrp="1" noRot="1" noChangeAspect="1"/>
+          </p:cNvSpPr>
+          <p:nvPr>
+            <p:ph type="sldImg"/>
+          </p:nvPr>
+        </p:nvSpPr>
+        <p:spPr/>
+      </p:sp>
+      <p:sp>
+        <p:nvSpPr>
+          <p:cNvPr id="3" name="Notes Placeholder 2"/>
+          <p:cNvSpPr>
+            <a:spLocks noGrp="1"/>
+          </p:cNvSpPr>
+          <p:nvPr>
+            <p:ph type="body" idx="1"/>
+          </p:nvPr>
+        </p:nvSpPr>
+        <p:spPr/>
+        <p:txBody>
+          <a:bodyPr/>
+          <a:lstStyle/>
+          <a:p>
+            <a:r>
+              <a:rPr lang="en-US" dirty="0"/>
+              <a:t/>
+            </a:r>
+            <a:endParaRPr lang="en-US" dirty="0"/>
+          </a:p>
+        </p:txBody>
+      </p:sp>
+      <p:sp>
+        <p:nvSpPr>
+          <p:cNvPr id="4" name="Slide Number Placeholder 3"/>
+          <p:cNvSpPr>
+            <a:spLocks noGrp="1"/>
+          </p:cNvSpPr>
+          <p:nvPr>
+            <p:ph type="sldNum" sz="quarter" idx="10"/>
+          </p:nvPr>
+        </p:nvSpPr>
+        <p:spPr/>
+        <p:txBody>
+          <a:bodyPr/>
+          <a:lstStyle/>
+          <a:p>
+            <a:fld id="{F7021451-1387-4CA6-816F-3879F97B5CBC}" type="slidenum">
+              <a:rPr lang="en-US"/>
+              <a:t>25</a:t>
+            </a:fld>
+            <a:endParaRPr lang="en-US"/>
+          </a:p>
+        </p:txBody>
+      </p:sp>
+    </p:spTree>
+    <p:extLst>
+      <p:ext uri="{BB962C8B-B14F-4D97-AF65-F5344CB8AC3E}">
+        <p14:creationId xmlns:p14="http://schemas.microsoft.com/office/powerpoint/2010/main" val="1024086991"/>
+      </p:ext>
+    </p:extLst>
+  </p:cSld>
+  <p:clrMapOvr>
+    <a:masterClrMapping/>
+  </p:clrMapOvr>
+</p:notes>
+</file>
+
+<file path=ppt/notesSlides/notesSlide26.xml><?xml version="1.0" encoding="utf-8"?>
+<p:notes xmlns:a="http://schemas.openxmlformats.org/drawingml/2006/main" xmlns:r="http://schemas.openxmlformats.org/officeDocument/2006/relationships" xmlns:p="http://schemas.openxmlformats.org/presentationml/2006/main">
+  <p:cSld>
+    <p:spTree>
+      <p:nvGrpSpPr>
+        <p:cNvPr id="1" name=""/>
+        <p:cNvGrpSpPr/>
+        <p:nvPr/>
+      </p:nvGrpSpPr>
+      <p:grpSpPr>
+        <a:xfrm>
+          <a:off x="0" y="0"/>
+          <a:ext cx="0" cy="0"/>
+          <a:chOff x="0" y="0"/>
+          <a:chExt cx="0" cy="0"/>
+        </a:xfrm>
+      </p:grpSpPr>
+      <p:sp>
+        <p:nvSpPr>
+          <p:cNvPr id="2" name="Slide Image Placeholder 1"/>
+          <p:cNvSpPr>
+            <a:spLocks noGrp="1" noRot="1" noChangeAspect="1"/>
+          </p:cNvSpPr>
+          <p:nvPr>
+            <p:ph type="sldImg"/>
+          </p:nvPr>
+        </p:nvSpPr>
+        <p:spPr/>
+      </p:sp>
+      <p:sp>
+        <p:nvSpPr>
+          <p:cNvPr id="3" name="Notes Placeholder 2"/>
+          <p:cNvSpPr>
+            <a:spLocks noGrp="1"/>
+          </p:cNvSpPr>
+          <p:nvPr>
+            <p:ph type="body" idx="1"/>
+          </p:nvPr>
+        </p:nvSpPr>
+        <p:spPr/>
+        <p:txBody>
+          <a:bodyPr/>
+          <a:lstStyle/>
+          <a:p>
+            <a:r>
+              <a:rPr lang="en-US" dirty="0"/>
+              <a:t/>
+            </a:r>
+            <a:endParaRPr lang="en-US" dirty="0"/>
+          </a:p>
+        </p:txBody>
+      </p:sp>
+      <p:sp>
+        <p:nvSpPr>
+          <p:cNvPr id="4" name="Slide Number Placeholder 3"/>
+          <p:cNvSpPr>
+            <a:spLocks noGrp="1"/>
+          </p:cNvSpPr>
+          <p:nvPr>
+            <p:ph type="sldNum" sz="quarter" idx="10"/>
+          </p:nvPr>
+        </p:nvSpPr>
+        <p:spPr/>
+        <p:txBody>
+          <a:bodyPr/>
+          <a:lstStyle/>
+          <a:p>
+            <a:fld id="{F7021451-1387-4CA6-816F-3879F97B5CBC}" type="slidenum">
+              <a:rPr lang="en-US"/>
+              <a:t>26</a:t>
             </a:fld>
             <a:endParaRPr lang="en-US"/>
           </a:p>
@@ -2982,7 +3338,7 @@
                 <a:ea typeface="Calibri" pitchFamily="34" charset="-122"/>
                 <a:cs typeface="Calibri" pitchFamily="34" charset="-120"/>
               </a:rPr>
-              <a:t>Thyroid, Adrenal Axes, SPEP and Free Light Chains</a:t>
+              <a:t>Thyroid &amp; Adrenal Axes, SPEP Zones, and Free Light Chains</a:t>
             </a:r>
             <a:endParaRPr lang="en-US" sz="1900" dirty="0"/>
           </a:p>
@@ -3213,7 +3569,7 @@
                 <a:ea typeface="Calibri" pitchFamily="34" charset="-122"/>
                 <a:cs typeface="Calibri" pitchFamily="34" charset="-120"/>
               </a:rPr>
-              <a:t>Serum Protein Electrophoresis: Normal vs Monoclonal</a:t>
+              <a:t>The Five SPEP Zones and Their Proteins</a:t>
             </a:r>
             <a:endParaRPr lang="en-US" sz="3000" dirty="0"/>
           </a:p>
@@ -3228,11 +3584,11 @@
         <p:spPr>
           <a:xfrm>
             <a:off x="1066648" y="1481328"/>
-            <a:ext cx="10058400" cy="4023360"/>
+            <a:ext cx="10058400" cy="4288536"/>
           </a:xfrm>
           <a:prstGeom prst="roundRect">
             <a:avLst>
-              <a:gd name="adj" fmla="val 2045"/>
+              <a:gd name="adj" fmla="val 1919"/>
             </a:avLst>
           </a:prstGeom>
           <a:solidFill>
@@ -3255,7 +3611,7 @@
       </p:sp>
       <p:pic>
         <p:nvPicPr>
-          <p:cNvPr id="5" name="Image 0" descr="/tmp/cp_work2/art/chem_spep.png">    </p:cNvPr>
+          <p:cNvPr id="5" name="Image 0" descr="/tmp/cp_work2/art/chem_spepzones.png">    </p:cNvPr>
           <p:cNvPicPr>
             <a:picLocks noChangeAspect="1"/>
           </p:cNvPicPr>
@@ -3270,7 +3626,7 @@
         <p:spPr>
           <a:xfrm>
             <a:off x="1194664" y="1609344"/>
-            <a:ext cx="9802368" cy="3767328"/>
+            <a:ext cx="9802368" cy="4032504"/>
           </a:xfrm>
           <a:prstGeom prst="rect">
             <a:avLst/>
@@ -3285,7 +3641,7 @@
         </p:nvSpPr>
         <p:spPr>
           <a:xfrm>
-            <a:off x="566928" y="5577840"/>
+            <a:off x="566928" y="5843016"/>
             <a:ext cx="11057839" cy="365760"/>
           </a:xfrm>
           <a:prstGeom prst="rect">
@@ -3310,7 +3666,7 @@
                 <a:ea typeface="Calibri" pitchFamily="34" charset="-122"/>
                 <a:cs typeface="Calibri" pitchFamily="34" charset="-120"/>
               </a:rPr>
-              <a:t>Original schematic. A discrete spike in the gamma region (M-protein) contrasts with the broad polyclonal gamma of reaction/inflammation.</a:t>
+              <a:t>Original schematic (department teaching: D. Keren). Each zone maps to specific proteins, enabling pattern-based interpretation.</a:t>
             </a:r>
             <a:endParaRPr lang="en-US" sz="1150" dirty="0"/>
           </a:p>
@@ -3526,7 +3882,7 @@
                 <a:ea typeface="Calibri" pitchFamily="34" charset="-122"/>
                 <a:cs typeface="Calibri" pitchFamily="34" charset="-120"/>
               </a:rPr>
-              <a:t>SPEP, UPEP, and Immunofixation</a:t>
+              <a:t>Zone-by-Zone Interpretation</a:t>
             </a:r>
             <a:endParaRPr lang="en-US" sz="3000" dirty="0"/>
           </a:p>
@@ -3594,7 +3950,7 @@
                 <a:ea typeface="Calibri" pitchFamily="34" charset="-122"/>
                 <a:cs typeface="Calibri" pitchFamily="34" charset="-120"/>
               </a:rPr>
-              <a:t>READING THE TRACING</a:t>
+              <a:t>ALBUMIN, Α₁, Α₂</a:t>
             </a:r>
             <a:endParaRPr lang="en-US" sz="1200" dirty="0"/>
           </a:p>
@@ -3629,7 +3985,7 @@
               <a:buChar char="•"/>
             </a:pPr>
             <a:r>
-              <a:rPr lang="en-US" sz="1250" b="1" dirty="0">
+              <a:rPr lang="en-US" sz="1200" b="1" dirty="0">
                 <a:solidFill>
                   <a:srgbClr val="1B2A38"/>
                 </a:solidFill>
@@ -3637,9 +3993,9 @@
                 <a:ea typeface="Calibri" pitchFamily="34" charset="-122"/>
                 <a:cs typeface="Calibri" pitchFamily="34" charset="-120"/>
               </a:rPr>
-              <a:t>SPEP separates albumin, α₁, α₂, β, and γ fractions.</a:t>
-            </a:r>
-            <a:endParaRPr lang="en-US" sz="1250" dirty="0"/>
+              <a:t>α₁ — mainly α₁-antitrypsin (A1AT); a flat/absent α₁ band suggests A1AT deficiency (MZ/ZZ).</a:t>
+            </a:r>
+            <a:endParaRPr lang="en-US" sz="1200" dirty="0"/>
           </a:p>
           <a:p>
             <a:pPr algn="l" marL="177800" indent="-177800">
@@ -3650,7 +4006,7 @@
               <a:buChar char="•"/>
             </a:pPr>
             <a:r>
-              <a:rPr lang="en-US" sz="1250" dirty="0">
+              <a:rPr lang="en-US" sz="1200" dirty="0">
                 <a:solidFill>
                   <a:srgbClr val="33444F"/>
                 </a:solidFill>
@@ -3658,9 +4014,9 @@
                 <a:ea typeface="Calibri" pitchFamily="34" charset="-122"/>
                 <a:cs typeface="Calibri" pitchFamily="34" charset="-120"/>
               </a:rPr>
-              <a:t>A discrete M-spike suggests a monoclonal process; a broad γ rise is polyclonal (infection/inflammation/liver).</a:t>
-            </a:r>
-            <a:endParaRPr lang="en-US" sz="1250" dirty="0"/>
+              <a:t>α₂ — haptoglobin and α₂-macroglobulin.</a:t>
+            </a:r>
+            <a:endParaRPr lang="en-US" sz="1200" dirty="0"/>
           </a:p>
           <a:p>
             <a:pPr algn="l" marL="177800" indent="-177800">
@@ -3671,7 +4027,7 @@
               <a:buChar char="•"/>
             </a:pPr>
             <a:r>
-              <a:rPr lang="en-US" sz="1250" dirty="0">
+              <a:rPr lang="en-US" sz="1200" dirty="0">
                 <a:solidFill>
                   <a:srgbClr val="33444F"/>
                 </a:solidFill>
@@ -3679,9 +4035,9 @@
                 <a:ea typeface="Calibri" pitchFamily="34" charset="-122"/>
                 <a:cs typeface="Calibri" pitchFamily="34" charset="-120"/>
               </a:rPr>
-              <a:t>Hypogammaglobulinemia may be the only SPEP clue to light-chain-only myeloma.</a:t>
-            </a:r>
-            <a:endParaRPr lang="en-US" sz="1250" dirty="0"/>
+              <a:t>Acute phase: ↑ α₁ and α₂ (positive acute-phase reactants); albumin falls (negative).</a:t>
+            </a:r>
+            <a:endParaRPr lang="en-US" sz="1200" dirty="0"/>
           </a:p>
           <a:p>
             <a:pPr algn="l" marL="177800" indent="-177800">
@@ -3692,7 +4048,7 @@
               <a:buChar char="•"/>
             </a:pPr>
             <a:r>
-              <a:rPr lang="en-US" sz="1250" dirty="0">
+              <a:rPr lang="en-US" sz="1200" dirty="0">
                 <a:solidFill>
                   <a:srgbClr val="33444F"/>
                 </a:solidFill>
@@ -3700,9 +4056,9 @@
                 <a:ea typeface="Calibri" pitchFamily="34" charset="-122"/>
                 <a:cs typeface="Calibri" pitchFamily="34" charset="-120"/>
               </a:rPr>
-              <a:t>Reflex immunofixation (IFE) identifies the heavy- and light-chain class.</a:t>
-            </a:r>
-            <a:endParaRPr lang="en-US" sz="1250" dirty="0"/>
+              <a:t>Nephrotic: low albumin with a prominent α₂ (retained α₂-macroglobulin).</a:t>
+            </a:r>
+            <a:endParaRPr lang="en-US" sz="1200" dirty="0"/>
           </a:p>
         </p:txBody>
       </p:sp>
@@ -3768,7 +4124,7 @@
                 <a:ea typeface="Calibri" pitchFamily="34" charset="-122"/>
                 <a:cs typeface="Calibri" pitchFamily="34" charset="-120"/>
               </a:rPr>
-              <a:t>URINE &amp; SPECIAL SITUATIONS</a:t>
+              <a:t>Β AND Γ REGIONS</a:t>
             </a:r>
             <a:endParaRPr lang="en-US" sz="1200" dirty="0"/>
           </a:p>
@@ -3803,7 +4159,7 @@
               <a:buChar char="•"/>
             </a:pPr>
             <a:r>
-              <a:rPr lang="en-US" sz="1250" b="1" dirty="0">
+              <a:rPr lang="en-US" sz="1200" b="1" dirty="0">
                 <a:solidFill>
                   <a:srgbClr val="1B2A38"/>
                 </a:solidFill>
@@ -3811,9 +4167,9 @@
                 <a:ea typeface="Calibri" pitchFamily="34" charset="-122"/>
                 <a:cs typeface="Calibri" pitchFamily="34" charset="-120"/>
               </a:rPr>
-              <a:t>UPEP/urine IFE detect Bence-Jones (free light-chain) proteinuria.</a:t>
-            </a:r>
-            <a:endParaRPr lang="en-US" sz="1250" dirty="0"/>
+              <a:t>β — transferrin (β₁) and C3 (β₂); iron deficiency raises transferrin (β).</a:t>
+            </a:r>
+            <a:endParaRPr lang="en-US" sz="1200" dirty="0"/>
           </a:p>
           <a:p>
             <a:pPr algn="l" marL="177800" indent="-177800">
@@ -3824,7 +4180,7 @@
               <a:buChar char="•"/>
             </a:pPr>
             <a:r>
-              <a:rPr lang="en-US" sz="1250" dirty="0">
+              <a:rPr lang="en-US" sz="1200" dirty="0">
                 <a:solidFill>
                   <a:srgbClr val="33444F"/>
                 </a:solidFill>
@@ -3832,9 +4188,9 @@
                 <a:ea typeface="Calibri" pitchFamily="34" charset="-122"/>
                 <a:cs typeface="Calibri" pitchFamily="34" charset="-120"/>
               </a:rPr>
-              <a:t>The β-region can hide an M-protein (IgA) — IFE resolves it.</a:t>
-            </a:r>
-            <a:endParaRPr lang="en-US" sz="1250" dirty="0"/>
+              <a:t>Cirrhosis: β–γ bridging (polyclonal IgA) and low albumin.</a:t>
+            </a:r>
+            <a:endParaRPr lang="en-US" sz="1200" dirty="0"/>
           </a:p>
           <a:p>
             <a:pPr algn="l" marL="177800" indent="-177800">
@@ -3845,7 +4201,7 @@
               <a:buChar char="•"/>
             </a:pPr>
             <a:r>
-              <a:rPr lang="en-US" sz="1250" dirty="0">
+              <a:rPr lang="en-US" sz="1200" dirty="0">
                 <a:solidFill>
                   <a:srgbClr val="33444F"/>
                 </a:solidFill>
@@ -3853,9 +4209,9 @@
                 <a:ea typeface="Calibri" pitchFamily="34" charset="-122"/>
                 <a:cs typeface="Calibri" pitchFamily="34" charset="-120"/>
               </a:rPr>
-              <a:t>Acute-phase changes alter α₁/α₂; nephrotic pattern shows low albumin and raised α₂.</a:t>
-            </a:r>
-            <a:endParaRPr lang="en-US" sz="1250" dirty="0"/>
+              <a:t>γ — immunoglobulins; broad rise = polyclonal (infection/inflammation/liver).</a:t>
+            </a:r>
+            <a:endParaRPr lang="en-US" sz="1200" dirty="0"/>
           </a:p>
           <a:p>
             <a:pPr algn="l" marL="177800" indent="-177800">
@@ -3866,7 +4222,7 @@
               <a:buChar char="•"/>
             </a:pPr>
             <a:r>
-              <a:rPr lang="en-US" sz="1250" dirty="0">
+              <a:rPr lang="en-US" sz="1200" dirty="0">
                 <a:solidFill>
                   <a:srgbClr val="33444F"/>
                 </a:solidFill>
@@ -3874,9 +4230,9 @@
                 <a:ea typeface="Calibri" pitchFamily="34" charset="-122"/>
                 <a:cs typeface="Calibri" pitchFamily="34" charset="-120"/>
               </a:rPr>
-              <a:t>Quantify the M-protein for monitoring.</a:t>
-            </a:r>
-            <a:endParaRPr lang="en-US" sz="1250" dirty="0"/>
+              <a:t>A discrete γ (or β) spike = monoclonal → reflex immunofixation.</a:t>
+            </a:r>
+            <a:endParaRPr lang="en-US" sz="1200" dirty="0"/>
           </a:p>
         </p:txBody>
       </p:sp>
@@ -4090,7 +4446,7 @@
                 <a:ea typeface="Calibri" pitchFamily="34" charset="-122"/>
                 <a:cs typeface="Calibri" pitchFamily="34" charset="-120"/>
               </a:rPr>
-              <a:t>Free Light Chains &amp; the IMWG Workup</a:t>
+              <a:t>SPEP, UPEP, and Immunofixation</a:t>
             </a:r>
             <a:endParaRPr lang="en-US" sz="3000" dirty="0"/>
           </a:p>
@@ -4158,7 +4514,7 @@
                 <a:ea typeface="Calibri" pitchFamily="34" charset="-122"/>
                 <a:cs typeface="Calibri" pitchFamily="34" charset="-120"/>
               </a:rPr>
-              <a:t>SERUM FREE LIGHT CHAINS</a:t>
+              <a:t>READING THE TRACING</a:t>
             </a:r>
             <a:endParaRPr lang="en-US" sz="1200" dirty="0"/>
           </a:p>
@@ -4201,7 +4557,7 @@
                 <a:ea typeface="Calibri" pitchFamily="34" charset="-122"/>
                 <a:cs typeface="Calibri" pitchFamily="34" charset="-120"/>
               </a:rPr>
-              <a:t>Measure free kappa and lambda and the κ/λ ratio — sensitive for light-chain disease and AL amyloid.</a:t>
+              <a:t>A discrete M-spike suggests a monoclonal process; a broad γ rise is polyclonal.</a:t>
             </a:r>
             <a:endParaRPr lang="en-US" sz="1250" dirty="0"/>
           </a:p>
@@ -4222,7 +4578,7 @@
                 <a:ea typeface="Calibri" pitchFamily="34" charset="-122"/>
                 <a:cs typeface="Calibri" pitchFamily="34" charset="-120"/>
               </a:rPr>
-              <a:t>An abnormal ratio indicates clonal excess of one light chain.</a:t>
+              <a:t>Hypogammaglobulinemia may be the only SPEP clue to light-chain-only myeloma.</a:t>
             </a:r>
             <a:endParaRPr lang="en-US" sz="1250" dirty="0"/>
           </a:p>
@@ -4243,7 +4599,7 @@
                 <a:ea typeface="Calibri" pitchFamily="34" charset="-122"/>
                 <a:cs typeface="Calibri" pitchFamily="34" charset="-120"/>
               </a:rPr>
-              <a:t>More sensitive than UPEP for some light-chain disorders.</a:t>
+              <a:t>An M-protein can hide in the β region (IgA) — IFE resolves it.</a:t>
             </a:r>
             <a:endParaRPr lang="en-US" sz="1250" dirty="0"/>
           </a:p>
@@ -4264,7 +4620,7 @@
                 <a:ea typeface="Calibri" pitchFamily="34" charset="-122"/>
                 <a:cs typeface="Calibri" pitchFamily="34" charset="-120"/>
               </a:rPr>
-              <a:t>Used in diagnosis, risk (e.g., MGUS), and response assessment.</a:t>
+              <a:t>Reflex immunofixation identifies the heavy- and light-chain class.</a:t>
             </a:r>
             <a:endParaRPr lang="en-US" sz="1250" dirty="0"/>
           </a:p>
@@ -4332,7 +4688,7 @@
                 <a:ea typeface="Calibri" pitchFamily="34" charset="-122"/>
                 <a:cs typeface="Calibri" pitchFamily="34" charset="-120"/>
               </a:rPr>
-              <a:t>PUTTING IT TOGETHER</a:t>
+              <a:t>URINE &amp; QUANTITATION</a:t>
             </a:r>
             <a:endParaRPr lang="en-US" sz="1200" dirty="0"/>
           </a:p>
@@ -4375,7 +4731,7 @@
                 <a:ea typeface="Calibri" pitchFamily="34" charset="-122"/>
                 <a:cs typeface="Calibri" pitchFamily="34" charset="-120"/>
               </a:rPr>
-              <a:t>Workup: SPEP + serum IFE + serum free light chains (± UPEP/urine IFE).</a:t>
+              <a:t>UPEP/urine IFE detect Bence-Jones (free light-chain) proteinuria.</a:t>
             </a:r>
             <a:endParaRPr lang="en-US" sz="1250" dirty="0"/>
           </a:p>
@@ -4396,7 +4752,7 @@
                 <a:ea typeface="Calibri" pitchFamily="34" charset="-122"/>
                 <a:cs typeface="Calibri" pitchFamily="34" charset="-120"/>
               </a:rPr>
-              <a:t>Distinguish MGUS, smoldering, and myeloma by M-protein, marrow plasma cells, and end-organ damage (CRAB).</a:t>
+              <a:t>Quantify the M-protein (densitometry) for monitoring.</a:t>
             </a:r>
             <a:endParaRPr lang="en-US" sz="1250" dirty="0"/>
           </a:p>
@@ -4417,7 +4773,7 @@
                 <a:ea typeface="Calibri" pitchFamily="34" charset="-122"/>
                 <a:cs typeface="Calibri" pitchFamily="34" charset="-120"/>
               </a:rPr>
-              <a:t>Renal impairment raises both light chains — interpret the RATIO.</a:t>
+              <a:t>Contrast-dye and fibrinogen can mimic small bands — know the artifacts.</a:t>
             </a:r>
             <a:endParaRPr lang="en-US" sz="1250" dirty="0"/>
           </a:p>
@@ -4438,7 +4794,7 @@
                 <a:ea typeface="Calibri" pitchFamily="34" charset="-122"/>
                 <a:cs typeface="Calibri" pitchFamily="34" charset="-120"/>
               </a:rPr>
-              <a:t>Report quantitatively for trend monitoring.</a:t>
+              <a:t>Combine with serum free light chains for sensitivity.</a:t>
             </a:r>
             <a:endParaRPr lang="en-US" sz="1250" dirty="0"/>
           </a:p>
@@ -4561,6 +4917,570 @@
 <file path=ppt/slides/slide13.xml><?xml version="1.0" encoding="utf-8"?>
 <p:sld xmlns:a="http://schemas.openxmlformats.org/drawingml/2006/main" xmlns:r="http://schemas.openxmlformats.org/officeDocument/2006/relationships" xmlns:p="http://schemas.openxmlformats.org/presentationml/2006/main">
   <p:cSld name="Slide 13">
+    <p:bg>
+      <p:bgPr>
+        <a:solidFill>
+          <a:srgbClr val="FFFFFF"/>
+        </a:solidFill>
+      </p:bgPr>
+    </p:bg>
+    <p:spTree>
+      <p:nvGrpSpPr>
+        <p:cNvPr id="1" name=""/>
+        <p:cNvGrpSpPr/>
+        <p:nvPr/>
+      </p:nvGrpSpPr>
+      <p:grpSpPr>
+        <a:xfrm>
+          <a:off x="0" y="0"/>
+          <a:ext cx="0" cy="0"/>
+          <a:chOff x="0" y="0"/>
+          <a:chExt cx="0" cy="0"/>
+        </a:xfrm>
+      </p:grpSpPr>
+      <p:sp>
+        <p:nvSpPr>
+          <p:cNvPr id="2" name="Text 0"/>
+          <p:cNvSpPr/>
+          <p:nvPr/>
+        </p:nvSpPr>
+        <p:spPr>
+          <a:xfrm>
+            <a:off x="566928" y="329184"/>
+            <a:ext cx="10515600" cy="310896"/>
+          </a:xfrm>
+          <a:prstGeom prst="rect">
+            <a:avLst/>
+          </a:prstGeom>
+          <a:noFill/>
+          <a:ln/>
+        </p:spPr>
+        <p:txBody>
+          <a:bodyPr wrap="square" lIns="0" tIns="0" rIns="0" bIns="0" rtlCol="0" anchor="ctr"/>
+          <a:lstStyle/>
+          <a:p>
+            <a:pPr algn="l" indent="0" marL="0">
+              <a:buNone/>
+            </a:pPr>
+            <a:r>
+              <a:rPr lang="en-US" sz="1100" b="1" spc="150" kern="0" dirty="0">
+                <a:solidFill>
+                  <a:srgbClr val="1565C0"/>
+                </a:solidFill>
+                <a:latin typeface="Calibri" pitchFamily="34" charset="0"/>
+                <a:ea typeface="Calibri" pitchFamily="34" charset="-122"/>
+                <a:cs typeface="Calibri" pitchFamily="34" charset="-120"/>
+              </a:rPr>
+              <a:t>CLINICAL CHEMISTRY   ·   GAMMOPATHY</a:t>
+            </a:r>
+            <a:endParaRPr lang="en-US" sz="1100" dirty="0"/>
+          </a:p>
+        </p:txBody>
+      </p:sp>
+      <p:sp>
+        <p:nvSpPr>
+          <p:cNvPr id="3" name="Text 1"/>
+          <p:cNvSpPr/>
+          <p:nvPr/>
+        </p:nvSpPr>
+        <p:spPr>
+          <a:xfrm>
+            <a:off x="566928" y="713232"/>
+            <a:ext cx="11064240" cy="749808"/>
+          </a:xfrm>
+          <a:prstGeom prst="rect">
+            <a:avLst/>
+          </a:prstGeom>
+          <a:noFill/>
+          <a:ln/>
+        </p:spPr>
+        <p:txBody>
+          <a:bodyPr wrap="square" lIns="0" tIns="0" rIns="0" bIns="0" rtlCol="0" anchor="ctr"/>
+          <a:lstStyle/>
+          <a:p>
+            <a:pPr algn="l" indent="0" marL="0">
+              <a:buNone/>
+            </a:pPr>
+            <a:r>
+              <a:rPr lang="en-US" sz="3000" b="1" dirty="0">
+                <a:solidFill>
+                  <a:srgbClr val="0E3A5F"/>
+                </a:solidFill>
+                <a:latin typeface="Calibri" pitchFamily="34" charset="0"/>
+                <a:ea typeface="Calibri" pitchFamily="34" charset="-122"/>
+                <a:cs typeface="Calibri" pitchFamily="34" charset="-120"/>
+              </a:rPr>
+              <a:t>Free Light Chains &amp; the IMWG Workup</a:t>
+            </a:r>
+            <a:endParaRPr lang="en-US" sz="3000" dirty="0"/>
+          </a:p>
+        </p:txBody>
+      </p:sp>
+      <p:sp>
+        <p:nvSpPr>
+          <p:cNvPr id="4" name="Shape 2"/>
+          <p:cNvSpPr/>
+          <p:nvPr/>
+        </p:nvSpPr>
+        <p:spPr>
+          <a:xfrm>
+            <a:off x="566928" y="1517904"/>
+            <a:ext cx="5346040" cy="4114800"/>
+          </a:xfrm>
+          <a:prstGeom prst="roundRect">
+            <a:avLst>
+              <a:gd name="adj" fmla="val 2000"/>
+            </a:avLst>
+          </a:prstGeom>
+          <a:solidFill>
+            <a:srgbClr val="E7EFFA"/>
+          </a:solidFill>
+          <a:ln/>
+          <a:effectLst>
+            <a:outerShdw sx="100000" sy="100000" kx="0" ky="0" algn="bl" rotWithShape="0" blurRad="88900" dist="25400" dir="5400000">
+              <a:srgbClr val="22303C">
+                <a:alpha val="12000"/>
+              </a:srgbClr>
+            </a:outerShdw>
+          </a:effectLst>
+        </p:spPr>
+      </p:sp>
+      <p:sp>
+        <p:nvSpPr>
+          <p:cNvPr id="5" name="Text 3"/>
+          <p:cNvSpPr/>
+          <p:nvPr/>
+        </p:nvSpPr>
+        <p:spPr>
+          <a:xfrm>
+            <a:off x="804672" y="1682496"/>
+            <a:ext cx="4888840" cy="274320"/>
+          </a:xfrm>
+          <a:prstGeom prst="rect">
+            <a:avLst/>
+          </a:prstGeom>
+          <a:noFill/>
+          <a:ln/>
+        </p:spPr>
+        <p:txBody>
+          <a:bodyPr wrap="square" lIns="0" tIns="0" rIns="0" bIns="0" rtlCol="0" anchor="ctr"/>
+          <a:lstStyle/>
+          <a:p>
+            <a:pPr indent="0" marL="0">
+              <a:buNone/>
+            </a:pPr>
+            <a:r>
+              <a:rPr lang="en-US" sz="1200" b="1" spc="100" kern="0" dirty="0">
+                <a:solidFill>
+                  <a:srgbClr val="0D4A92"/>
+                </a:solidFill>
+                <a:latin typeface="Calibri" pitchFamily="34" charset="0"/>
+                <a:ea typeface="Calibri" pitchFamily="34" charset="-122"/>
+                <a:cs typeface="Calibri" pitchFamily="34" charset="-120"/>
+              </a:rPr>
+              <a:t>SERUM FREE LIGHT CHAINS</a:t>
+            </a:r>
+            <a:endParaRPr lang="en-US" sz="1200" dirty="0"/>
+          </a:p>
+        </p:txBody>
+      </p:sp>
+      <p:sp>
+        <p:nvSpPr>
+          <p:cNvPr id="6" name="Text 4"/>
+          <p:cNvSpPr/>
+          <p:nvPr/>
+        </p:nvSpPr>
+        <p:spPr>
+          <a:xfrm>
+            <a:off x="804672" y="2029968"/>
+            <a:ext cx="4870552" cy="3474720"/>
+          </a:xfrm>
+          <a:prstGeom prst="rect">
+            <a:avLst/>
+          </a:prstGeom>
+          <a:noFill/>
+          <a:ln/>
+        </p:spPr>
+        <p:txBody>
+          <a:bodyPr wrap="square" lIns="0" tIns="0" rIns="0" bIns="0" rtlCol="0" anchor="t"/>
+          <a:lstStyle/>
+          <a:p>
+            <a:pPr algn="l" marL="177800" indent="-177800">
+              <a:spcAft>
+                <a:spcPts val="900"/>
+              </a:spcAft>
+              <a:buSzPct val="100000"/>
+              <a:buChar char="•"/>
+            </a:pPr>
+            <a:r>
+              <a:rPr lang="en-US" sz="1250" b="1" dirty="0">
+                <a:solidFill>
+                  <a:srgbClr val="1B2A38"/>
+                </a:solidFill>
+                <a:latin typeface="Calibri" pitchFamily="34" charset="0"/>
+                <a:ea typeface="Calibri" pitchFamily="34" charset="-122"/>
+                <a:cs typeface="Calibri" pitchFamily="34" charset="-120"/>
+              </a:rPr>
+              <a:t>Measure free κ and λ and the κ/λ ratio — sensitive for light-chain disease and AL amyloid.</a:t>
+            </a:r>
+            <a:endParaRPr lang="en-US" sz="1250" dirty="0"/>
+          </a:p>
+          <a:p>
+            <a:pPr algn="l" marL="177800" indent="-177800">
+              <a:spcAft>
+                <a:spcPts val="900"/>
+              </a:spcAft>
+              <a:buSzPct val="100000"/>
+              <a:buChar char="•"/>
+            </a:pPr>
+            <a:r>
+              <a:rPr lang="en-US" sz="1250" dirty="0">
+                <a:solidFill>
+                  <a:srgbClr val="33444F"/>
+                </a:solidFill>
+                <a:latin typeface="Calibri" pitchFamily="34" charset="0"/>
+                <a:ea typeface="Calibri" pitchFamily="34" charset="-122"/>
+                <a:cs typeface="Calibri" pitchFamily="34" charset="-120"/>
+              </a:rPr>
+              <a:t>An abnormal ratio indicates clonal excess.</a:t>
+            </a:r>
+            <a:endParaRPr lang="en-US" sz="1250" dirty="0"/>
+          </a:p>
+          <a:p>
+            <a:pPr algn="l" marL="177800" indent="-177800">
+              <a:spcAft>
+                <a:spcPts val="900"/>
+              </a:spcAft>
+              <a:buSzPct val="100000"/>
+              <a:buChar char="•"/>
+            </a:pPr>
+            <a:r>
+              <a:rPr lang="en-US" sz="1250" dirty="0">
+                <a:solidFill>
+                  <a:srgbClr val="33444F"/>
+                </a:solidFill>
+                <a:latin typeface="Calibri" pitchFamily="34" charset="0"/>
+                <a:ea typeface="Calibri" pitchFamily="34" charset="-122"/>
+                <a:cs typeface="Calibri" pitchFamily="34" charset="-120"/>
+              </a:rPr>
+              <a:t>More sensitive than UPEP for some light-chain disorders.</a:t>
+            </a:r>
+            <a:endParaRPr lang="en-US" sz="1250" dirty="0"/>
+          </a:p>
+          <a:p>
+            <a:pPr algn="l" marL="177800" indent="-177800">
+              <a:spcAft>
+                <a:spcPts val="900"/>
+              </a:spcAft>
+              <a:buSzPct val="100000"/>
+              <a:buChar char="•"/>
+            </a:pPr>
+            <a:r>
+              <a:rPr lang="en-US" sz="1250" dirty="0">
+                <a:solidFill>
+                  <a:srgbClr val="33444F"/>
+                </a:solidFill>
+                <a:latin typeface="Calibri" pitchFamily="34" charset="0"/>
+                <a:ea typeface="Calibri" pitchFamily="34" charset="-122"/>
+                <a:cs typeface="Calibri" pitchFamily="34" charset="-120"/>
+              </a:rPr>
+              <a:t>Renal impairment raises both chains — interpret the RATIO.</a:t>
+            </a:r>
+            <a:endParaRPr lang="en-US" sz="1250" dirty="0"/>
+          </a:p>
+        </p:txBody>
+      </p:sp>
+      <p:sp>
+        <p:nvSpPr>
+          <p:cNvPr id="7" name="Shape 5"/>
+          <p:cNvSpPr/>
+          <p:nvPr/>
+        </p:nvSpPr>
+        <p:spPr>
+          <a:xfrm>
+            <a:off x="6278728" y="1517904"/>
+            <a:ext cx="5346040" cy="4114800"/>
+          </a:xfrm>
+          <a:prstGeom prst="roundRect">
+            <a:avLst>
+              <a:gd name="adj" fmla="val 2000"/>
+            </a:avLst>
+          </a:prstGeom>
+          <a:solidFill>
+            <a:srgbClr val="E7EFFA"/>
+          </a:solidFill>
+          <a:ln/>
+          <a:effectLst>
+            <a:outerShdw sx="100000" sy="100000" kx="0" ky="0" algn="bl" rotWithShape="0" blurRad="88900" dist="25400" dir="5400000">
+              <a:srgbClr val="22303C">
+                <a:alpha val="12000"/>
+              </a:srgbClr>
+            </a:outerShdw>
+          </a:effectLst>
+        </p:spPr>
+      </p:sp>
+      <p:sp>
+        <p:nvSpPr>
+          <p:cNvPr id="8" name="Text 6"/>
+          <p:cNvSpPr/>
+          <p:nvPr/>
+        </p:nvSpPr>
+        <p:spPr>
+          <a:xfrm>
+            <a:off x="6516472" y="1682496"/>
+            <a:ext cx="4888840" cy="274320"/>
+          </a:xfrm>
+          <a:prstGeom prst="rect">
+            <a:avLst/>
+          </a:prstGeom>
+          <a:noFill/>
+          <a:ln/>
+        </p:spPr>
+        <p:txBody>
+          <a:bodyPr wrap="square" lIns="0" tIns="0" rIns="0" bIns="0" rtlCol="0" anchor="ctr"/>
+          <a:lstStyle/>
+          <a:p>
+            <a:pPr indent="0" marL="0">
+              <a:buNone/>
+            </a:pPr>
+            <a:r>
+              <a:rPr lang="en-US" sz="1200" b="1" spc="100" kern="0" dirty="0">
+                <a:solidFill>
+                  <a:srgbClr val="0D4A92"/>
+                </a:solidFill>
+                <a:latin typeface="Calibri" pitchFamily="34" charset="0"/>
+                <a:ea typeface="Calibri" pitchFamily="34" charset="-122"/>
+                <a:cs typeface="Calibri" pitchFamily="34" charset="-120"/>
+              </a:rPr>
+              <a:t>PUTTING IT TOGETHER</a:t>
+            </a:r>
+            <a:endParaRPr lang="en-US" sz="1200" dirty="0"/>
+          </a:p>
+        </p:txBody>
+      </p:sp>
+      <p:sp>
+        <p:nvSpPr>
+          <p:cNvPr id="9" name="Text 7"/>
+          <p:cNvSpPr/>
+          <p:nvPr/>
+        </p:nvSpPr>
+        <p:spPr>
+          <a:xfrm>
+            <a:off x="6516472" y="2029968"/>
+            <a:ext cx="4870552" cy="3474720"/>
+          </a:xfrm>
+          <a:prstGeom prst="rect">
+            <a:avLst/>
+          </a:prstGeom>
+          <a:noFill/>
+          <a:ln/>
+        </p:spPr>
+        <p:txBody>
+          <a:bodyPr wrap="square" lIns="0" tIns="0" rIns="0" bIns="0" rtlCol="0" anchor="t"/>
+          <a:lstStyle/>
+          <a:p>
+            <a:pPr algn="l" marL="177800" indent="-177800">
+              <a:spcAft>
+                <a:spcPts val="900"/>
+              </a:spcAft>
+              <a:buSzPct val="100000"/>
+              <a:buChar char="•"/>
+            </a:pPr>
+            <a:r>
+              <a:rPr lang="en-US" sz="1250" b="1" dirty="0">
+                <a:solidFill>
+                  <a:srgbClr val="1B2A38"/>
+                </a:solidFill>
+                <a:latin typeface="Calibri" pitchFamily="34" charset="0"/>
+                <a:ea typeface="Calibri" pitchFamily="34" charset="-122"/>
+                <a:cs typeface="Calibri" pitchFamily="34" charset="-120"/>
+              </a:rPr>
+              <a:t>Workup: SPEP + serum IFE + serum free light chains (± UPEP/urine IFE).</a:t>
+            </a:r>
+            <a:endParaRPr lang="en-US" sz="1250" dirty="0"/>
+          </a:p>
+          <a:p>
+            <a:pPr algn="l" marL="177800" indent="-177800">
+              <a:spcAft>
+                <a:spcPts val="900"/>
+              </a:spcAft>
+              <a:buSzPct val="100000"/>
+              <a:buChar char="•"/>
+            </a:pPr>
+            <a:r>
+              <a:rPr lang="en-US" sz="1250" dirty="0">
+                <a:solidFill>
+                  <a:srgbClr val="33444F"/>
+                </a:solidFill>
+                <a:latin typeface="Calibri" pitchFamily="34" charset="0"/>
+                <a:ea typeface="Calibri" pitchFamily="34" charset="-122"/>
+                <a:cs typeface="Calibri" pitchFamily="34" charset="-120"/>
+              </a:rPr>
+              <a:t>Distinguish MGUS, smoldering, and myeloma by M-protein, marrow plasma cells, and CRAB.</a:t>
+            </a:r>
+            <a:endParaRPr lang="en-US" sz="1250" dirty="0"/>
+          </a:p>
+          <a:p>
+            <a:pPr algn="l" marL="177800" indent="-177800">
+              <a:spcAft>
+                <a:spcPts val="900"/>
+              </a:spcAft>
+              <a:buSzPct val="100000"/>
+              <a:buChar char="•"/>
+            </a:pPr>
+            <a:r>
+              <a:rPr lang="en-US" sz="1250" dirty="0">
+                <a:solidFill>
+                  <a:srgbClr val="33444F"/>
+                </a:solidFill>
+                <a:latin typeface="Calibri" pitchFamily="34" charset="0"/>
+                <a:ea typeface="Calibri" pitchFamily="34" charset="-122"/>
+                <a:cs typeface="Calibri" pitchFamily="34" charset="-120"/>
+              </a:rPr>
+              <a:t>Report quantitatively for trend monitoring.</a:t>
+            </a:r>
+            <a:endParaRPr lang="en-US" sz="1250" dirty="0"/>
+          </a:p>
+          <a:p>
+            <a:pPr algn="l" marL="177800" indent="-177800">
+              <a:spcAft>
+                <a:spcPts val="900"/>
+              </a:spcAft>
+              <a:buSzPct val="100000"/>
+              <a:buChar char="•"/>
+            </a:pPr>
+            <a:r>
+              <a:rPr lang="en-US" sz="1250" dirty="0">
+                <a:solidFill>
+                  <a:srgbClr val="33444F"/>
+                </a:solidFill>
+                <a:latin typeface="Calibri" pitchFamily="34" charset="0"/>
+                <a:ea typeface="Calibri" pitchFamily="34" charset="-122"/>
+                <a:cs typeface="Calibri" pitchFamily="34" charset="-120"/>
+              </a:rPr>
+              <a:t>Refer significant findings for hematology evaluation.</a:t>
+            </a:r>
+            <a:endParaRPr lang="en-US" sz="1250" dirty="0"/>
+          </a:p>
+        </p:txBody>
+      </p:sp>
+      <p:sp>
+        <p:nvSpPr>
+          <p:cNvPr id="10" name="Text 8"/>
+          <p:cNvSpPr/>
+          <p:nvPr/>
+        </p:nvSpPr>
+        <p:spPr>
+          <a:xfrm>
+            <a:off x="566928" y="6473952"/>
+            <a:ext cx="7772400" cy="274320"/>
+          </a:xfrm>
+          <a:prstGeom prst="rect">
+            <a:avLst/>
+          </a:prstGeom>
+          <a:noFill/>
+          <a:ln/>
+        </p:spPr>
+        <p:txBody>
+          <a:bodyPr wrap="square" lIns="0" tIns="0" rIns="0" bIns="0" rtlCol="0" anchor="ctr"/>
+          <a:lstStyle/>
+          <a:p>
+            <a:pPr algn="l" indent="0" marL="0">
+              <a:buNone/>
+            </a:pPr>
+            <a:r>
+              <a:rPr lang="en-US" sz="850" dirty="0">
+                <a:solidFill>
+                  <a:srgbClr val="9AA8B4"/>
+                </a:solidFill>
+                <a:latin typeface="Calibri" pitchFamily="34" charset="0"/>
+                <a:ea typeface="Calibri" pitchFamily="34" charset="-122"/>
+                <a:cs typeface="Calibri" pitchFamily="34" charset="-120"/>
+              </a:rPr>
+              <a:t>Makassed General Hospital  ·  Department of Laboratory Medicine</a:t>
+            </a:r>
+            <a:endParaRPr lang="en-US" sz="850" dirty="0"/>
+          </a:p>
+        </p:txBody>
+      </p:sp>
+      <p:sp>
+        <p:nvSpPr>
+          <p:cNvPr id="11" name="Text 9"/>
+          <p:cNvSpPr/>
+          <p:nvPr/>
+        </p:nvSpPr>
+        <p:spPr>
+          <a:xfrm>
+            <a:off x="9814255" y="6473952"/>
+            <a:ext cx="1828800" cy="274320"/>
+          </a:xfrm>
+          <a:prstGeom prst="rect">
+            <a:avLst/>
+          </a:prstGeom>
+          <a:noFill/>
+          <a:ln/>
+        </p:spPr>
+        <p:txBody>
+          <a:bodyPr wrap="square" lIns="0" tIns="0" rIns="0" bIns="0" rtlCol="0" anchor="ctr"/>
+          <a:lstStyle/>
+          <a:p>
+            <a:pPr algn="r" indent="0" marL="0">
+              <a:buNone/>
+            </a:pPr>
+            <a:r>
+              <a:rPr lang="en-US" sz="850" dirty="0">
+                <a:solidFill>
+                  <a:srgbClr val="9AA8B4"/>
+                </a:solidFill>
+                <a:latin typeface="Calibri" pitchFamily="34" charset="0"/>
+                <a:ea typeface="Calibri" pitchFamily="34" charset="-122"/>
+                <a:cs typeface="Calibri" pitchFamily="34" charset="-120"/>
+              </a:rPr>
+              <a:t>CP Lecture Series</a:t>
+            </a:r>
+            <a:pPr algn="r" indent="0" marL="0">
+              <a:buNone/>
+            </a:pPr>
+            <a:r>
+              <a:rPr lang="en-US" sz="850" dirty="0">
+                <a:solidFill>
+                  <a:srgbClr val="DCE4EC"/>
+                </a:solidFill>
+                <a:latin typeface="Calibri" pitchFamily="34" charset="0"/>
+                <a:ea typeface="Calibri" pitchFamily="34" charset="-122"/>
+                <a:cs typeface="Calibri" pitchFamily="34" charset="-120"/>
+              </a:rPr>
+              <a:t>   ·   </a:t>
+            </a:r>
+            <a:pPr algn="r" indent="0" marL="0">
+              <a:buNone/>
+            </a:pPr>
+            <a:r>
+              <a:rPr lang="en-US" sz="850" b="1" dirty="0">
+                <a:solidFill>
+                  <a:srgbClr val="1565C0"/>
+                </a:solidFill>
+                <a:latin typeface="Calibri" pitchFamily="34" charset="0"/>
+                <a:ea typeface="Calibri" pitchFamily="34" charset="-122"/>
+                <a:cs typeface="Calibri" pitchFamily="34" charset="-120"/>
+              </a:rPr>
+              <a:t>11</a:t>
+            </a:r>
+            <a:endParaRPr lang="en-US" sz="850" dirty="0"/>
+          </a:p>
+        </p:txBody>
+      </p:sp>
+    </p:spTree>
+  </p:cSld>
+  <p:clrMapOvr>
+    <a:masterClrMapping/>
+  </p:clrMapOvr>
+</p:sld>
+</file>
+
+<file path=ppt/slides/slide14.xml><?xml version="1.0" encoding="utf-8"?>
+<p:sld xmlns:a="http://schemas.openxmlformats.org/drawingml/2006/main" xmlns:r="http://schemas.openxmlformats.org/officeDocument/2006/relationships" xmlns:p="http://schemas.openxmlformats.org/presentationml/2006/main">
+  <p:cSld name="Slide 14">
     <p:bg>
       <p:bgPr>
         <a:solidFill>
@@ -4740,439 +5660,6 @@
               <a:t>Cases &amp; Board Review</a:t>
             </a:r>
             <a:endParaRPr lang="en-US" sz="3800" dirty="0"/>
-          </a:p>
-        </p:txBody>
-      </p:sp>
-    </p:spTree>
-  </p:cSld>
-  <p:clrMapOvr>
-    <a:masterClrMapping/>
-  </p:clrMapOvr>
-</p:sld>
-</file>
-
-<file path=ppt/slides/slide14.xml><?xml version="1.0" encoding="utf-8"?>
-<p:sld xmlns:a="http://schemas.openxmlformats.org/drawingml/2006/main" xmlns:r="http://schemas.openxmlformats.org/officeDocument/2006/relationships" xmlns:p="http://schemas.openxmlformats.org/presentationml/2006/main">
-  <p:cSld name="Slide 14">
-    <p:bg>
-      <p:bgPr>
-        <a:solidFill>
-          <a:srgbClr val="FFFFFF"/>
-        </a:solidFill>
-      </p:bgPr>
-    </p:bg>
-    <p:spTree>
-      <p:nvGrpSpPr>
-        <p:cNvPr id="1" name=""/>
-        <p:cNvGrpSpPr/>
-        <p:nvPr/>
-      </p:nvGrpSpPr>
-      <p:grpSpPr>
-        <a:xfrm>
-          <a:off x="0" y="0"/>
-          <a:ext cx="0" cy="0"/>
-          <a:chOff x="0" y="0"/>
-          <a:chExt cx="0" cy="0"/>
-        </a:xfrm>
-      </p:grpSpPr>
-      <p:sp>
-        <p:nvSpPr>
-          <p:cNvPr id="2" name="Text 0"/>
-          <p:cNvSpPr/>
-          <p:nvPr/>
-        </p:nvSpPr>
-        <p:spPr>
-          <a:xfrm>
-            <a:off x="566928" y="329184"/>
-            <a:ext cx="10515600" cy="310896"/>
-          </a:xfrm>
-          <a:prstGeom prst="rect">
-            <a:avLst/>
-          </a:prstGeom>
-          <a:noFill/>
-          <a:ln/>
-        </p:spPr>
-        <p:txBody>
-          <a:bodyPr wrap="square" lIns="0" tIns="0" rIns="0" bIns="0" rtlCol="0" anchor="ctr"/>
-          <a:lstStyle/>
-          <a:p>
-            <a:pPr algn="l" indent="0" marL="0">
-              <a:buNone/>
-            </a:pPr>
-            <a:r>
-              <a:rPr lang="en-US" sz="1100" b="1" spc="150" kern="0" dirty="0">
-                <a:solidFill>
-                  <a:srgbClr val="1565C0"/>
-                </a:solidFill>
-                <a:latin typeface="Calibri" pitchFamily="34" charset="0"/>
-                <a:ea typeface="Calibri" pitchFamily="34" charset="-122"/>
-                <a:cs typeface="Calibri" pitchFamily="34" charset="-120"/>
-              </a:rPr>
-              <a:t>CLINICAL CHEMISTRY   ·   CASE 1</a:t>
-            </a:r>
-            <a:endParaRPr lang="en-US" sz="1100" dirty="0"/>
-          </a:p>
-        </p:txBody>
-      </p:sp>
-      <p:sp>
-        <p:nvSpPr>
-          <p:cNvPr id="3" name="Text 1"/>
-          <p:cNvSpPr/>
-          <p:nvPr/>
-        </p:nvSpPr>
-        <p:spPr>
-          <a:xfrm>
-            <a:off x="566928" y="713232"/>
-            <a:ext cx="11064240" cy="749808"/>
-          </a:xfrm>
-          <a:prstGeom prst="rect">
-            <a:avLst/>
-          </a:prstGeom>
-          <a:noFill/>
-          <a:ln/>
-        </p:spPr>
-        <p:txBody>
-          <a:bodyPr wrap="square" lIns="0" tIns="0" rIns="0" bIns="0" rtlCol="0" anchor="ctr"/>
-          <a:lstStyle/>
-          <a:p>
-            <a:pPr algn="l" indent="0" marL="0">
-              <a:buNone/>
-            </a:pPr>
-            <a:r>
-              <a:rPr lang="en-US" sz="3000" b="1" dirty="0">
-                <a:solidFill>
-                  <a:srgbClr val="0E3A5F"/>
-                </a:solidFill>
-                <a:latin typeface="Calibri" pitchFamily="34" charset="0"/>
-                <a:ea typeface="Calibri" pitchFamily="34" charset="-122"/>
-                <a:cs typeface="Calibri" pitchFamily="34" charset="-120"/>
-              </a:rPr>
-              <a:t>Case 1</a:t>
-            </a:r>
-            <a:endParaRPr lang="en-US" sz="3000" dirty="0"/>
-          </a:p>
-        </p:txBody>
-      </p:sp>
-      <p:sp>
-        <p:nvSpPr>
-          <p:cNvPr id="4" name="Shape 2"/>
-          <p:cNvSpPr/>
-          <p:nvPr/>
-        </p:nvSpPr>
-        <p:spPr>
-          <a:xfrm>
-            <a:off x="566928" y="1517904"/>
-            <a:ext cx="11057839" cy="2788920"/>
-          </a:xfrm>
-          <a:prstGeom prst="roundRect">
-            <a:avLst>
-              <a:gd name="adj" fmla="val 2951"/>
-            </a:avLst>
-          </a:prstGeom>
-          <a:solidFill>
-            <a:srgbClr val="E7EFFA"/>
-          </a:solidFill>
-          <a:ln/>
-          <a:effectLst>
-            <a:outerShdw sx="100000" sy="100000" kx="0" ky="0" algn="bl" rotWithShape="0" blurRad="88900" dist="25400" dir="5400000">
-              <a:srgbClr val="22303C">
-                <a:alpha val="12000"/>
-              </a:srgbClr>
-            </a:outerShdw>
-          </a:effectLst>
-        </p:spPr>
-      </p:sp>
-      <p:sp>
-        <p:nvSpPr>
-          <p:cNvPr id="5" name="Text 3"/>
-          <p:cNvSpPr/>
-          <p:nvPr/>
-        </p:nvSpPr>
-        <p:spPr>
-          <a:xfrm>
-            <a:off x="841248" y="1700784"/>
-            <a:ext cx="5486400" cy="292608"/>
-          </a:xfrm>
-          <a:prstGeom prst="rect">
-            <a:avLst/>
-          </a:prstGeom>
-          <a:noFill/>
-          <a:ln/>
-        </p:spPr>
-        <p:txBody>
-          <a:bodyPr wrap="square" lIns="0" tIns="0" rIns="0" bIns="0" rtlCol="0" anchor="ctr"/>
-          <a:lstStyle/>
-          <a:p>
-            <a:pPr indent="0" marL="0">
-              <a:buNone/>
-            </a:pPr>
-            <a:r>
-              <a:rPr lang="en-US" sz="1100" b="1" spc="150" kern="0" dirty="0">
-                <a:solidFill>
-                  <a:srgbClr val="1565C0"/>
-                </a:solidFill>
-                <a:latin typeface="Calibri" pitchFamily="34" charset="0"/>
-                <a:ea typeface="Calibri" pitchFamily="34" charset="-122"/>
-                <a:cs typeface="Calibri" pitchFamily="34" charset="-120"/>
-              </a:rPr>
-              <a:t>CLINICAL VIGNETTE</a:t>
-            </a:r>
-            <a:endParaRPr lang="en-US" sz="1100" dirty="0"/>
-          </a:p>
-        </p:txBody>
-      </p:sp>
-      <p:sp>
-        <p:nvSpPr>
-          <p:cNvPr id="6" name="Text 4"/>
-          <p:cNvSpPr/>
-          <p:nvPr/>
-        </p:nvSpPr>
-        <p:spPr>
-          <a:xfrm>
-            <a:off x="841248" y="2029968"/>
-            <a:ext cx="10509199" cy="2148840"/>
-          </a:xfrm>
-          <a:prstGeom prst="rect">
-            <a:avLst/>
-          </a:prstGeom>
-          <a:noFill/>
-          <a:ln/>
-        </p:spPr>
-        <p:txBody>
-          <a:bodyPr wrap="square" lIns="0" tIns="0" rIns="0" bIns="0" rtlCol="0" anchor="t"/>
-          <a:lstStyle/>
-          <a:p>
-            <a:pPr algn="l" indent="0" marL="0">
-              <a:lnSpc>
-                <a:spcPct val="108000"/>
-              </a:lnSpc>
-              <a:buNone/>
-            </a:pPr>
-            <a:r>
-              <a:rPr lang="en-US" sz="1450" dirty="0">
-                <a:solidFill>
-                  <a:srgbClr val="33444F"/>
-                </a:solidFill>
-                <a:latin typeface="Calibri" pitchFamily="34" charset="0"/>
-                <a:ea typeface="Calibri" pitchFamily="34" charset="-122"/>
-                <a:cs typeface="Calibri" pitchFamily="34" charset="-120"/>
-              </a:rPr>
-              <a:t>A clinically euthyroid patient on a hair-and-nail supplement has a suppressed TSH with an elevated free T4. Repeat testing after a 3-day pause from the supplement is entirely normal.</a:t>
-            </a:r>
-            <a:endParaRPr lang="en-US" sz="1450" dirty="0"/>
-          </a:p>
-        </p:txBody>
-      </p:sp>
-      <p:sp>
-        <p:nvSpPr>
-          <p:cNvPr id="7" name="Shape 5"/>
-          <p:cNvSpPr/>
-          <p:nvPr/>
-        </p:nvSpPr>
-        <p:spPr>
-          <a:xfrm>
-            <a:off x="566928" y="4553712"/>
-            <a:ext cx="11057839" cy="1325880"/>
-          </a:xfrm>
-          <a:prstGeom prst="roundRect">
-            <a:avLst>
-              <a:gd name="adj" fmla="val 6207"/>
-            </a:avLst>
-          </a:prstGeom>
-          <a:solidFill>
-            <a:srgbClr val="0E3A5F"/>
-          </a:solidFill>
-          <a:ln/>
-          <a:effectLst>
-            <a:outerShdw sx="100000" sy="100000" kx="0" ky="0" algn="bl" rotWithShape="0" blurRad="88900" dist="25400" dir="5400000">
-              <a:srgbClr val="22303C">
-                <a:alpha val="12000"/>
-              </a:srgbClr>
-            </a:outerShdw>
-          </a:effectLst>
-        </p:spPr>
-      </p:sp>
-      <p:sp>
-        <p:nvSpPr>
-          <p:cNvPr id="8" name="Text 6"/>
-          <p:cNvSpPr/>
-          <p:nvPr/>
-        </p:nvSpPr>
-        <p:spPr>
-          <a:xfrm>
-            <a:off x="822960" y="4681728"/>
-            <a:ext cx="640080" cy="960120"/>
-          </a:xfrm>
-          <a:prstGeom prst="rect">
-            <a:avLst/>
-          </a:prstGeom>
-          <a:noFill/>
-          <a:ln/>
-        </p:spPr>
-        <p:txBody>
-          <a:bodyPr wrap="square" lIns="0" tIns="0" rIns="0" bIns="0" rtlCol="0" anchor="ctr"/>
-          <a:lstStyle/>
-          <a:p>
-            <a:pPr algn="ctr" indent="0" marL="0">
-              <a:buNone/>
-            </a:pPr>
-            <a:r>
-              <a:rPr lang="en-US" sz="4000" b="1" dirty="0">
-                <a:solidFill>
-                  <a:srgbClr val="1565C0"/>
-                </a:solidFill>
-                <a:latin typeface="Calibri" pitchFamily="34" charset="0"/>
-                <a:ea typeface="Calibri" pitchFamily="34" charset="-122"/>
-                <a:cs typeface="Calibri" pitchFamily="34" charset="-120"/>
-              </a:rPr>
-              <a:t>?</a:t>
-            </a:r>
-            <a:endParaRPr lang="en-US" sz="4000" dirty="0"/>
-          </a:p>
-        </p:txBody>
-      </p:sp>
-      <p:sp>
-        <p:nvSpPr>
-          <p:cNvPr id="9" name="Text 7"/>
-          <p:cNvSpPr/>
-          <p:nvPr/>
-        </p:nvSpPr>
-        <p:spPr>
-          <a:xfrm>
-            <a:off x="1618488" y="4553712"/>
-            <a:ext cx="9686239" cy="1325880"/>
-          </a:xfrm>
-          <a:prstGeom prst="rect">
-            <a:avLst/>
-          </a:prstGeom>
-          <a:noFill/>
-          <a:ln/>
-        </p:spPr>
-        <p:txBody>
-          <a:bodyPr wrap="square" lIns="0" tIns="0" rIns="0" bIns="0" rtlCol="0" anchor="ctr"/>
-          <a:lstStyle/>
-          <a:p>
-            <a:pPr algn="l" indent="0" marL="0">
-              <a:buNone/>
-            </a:pPr>
-            <a:r>
-              <a:rPr lang="en-US" sz="1500" b="1" dirty="0">
-                <a:solidFill>
-                  <a:srgbClr val="FFFFFF"/>
-                </a:solidFill>
-                <a:latin typeface="Calibri" pitchFamily="34" charset="0"/>
-                <a:ea typeface="Calibri" pitchFamily="34" charset="-122"/>
-                <a:cs typeface="Calibri" pitchFamily="34" charset="-120"/>
-              </a:rPr>
-              <a:t>What caused the misleading pattern, and what is the practical advice?</a:t>
-            </a:r>
-            <a:endParaRPr lang="en-US" sz="1500" dirty="0"/>
-          </a:p>
-        </p:txBody>
-      </p:sp>
-      <p:sp>
-        <p:nvSpPr>
-          <p:cNvPr id="10" name="Text 8"/>
-          <p:cNvSpPr/>
-          <p:nvPr/>
-        </p:nvSpPr>
-        <p:spPr>
-          <a:xfrm>
-            <a:off x="566928" y="6473952"/>
-            <a:ext cx="7772400" cy="274320"/>
-          </a:xfrm>
-          <a:prstGeom prst="rect">
-            <a:avLst/>
-          </a:prstGeom>
-          <a:noFill/>
-          <a:ln/>
-        </p:spPr>
-        <p:txBody>
-          <a:bodyPr wrap="square" lIns="0" tIns="0" rIns="0" bIns="0" rtlCol="0" anchor="ctr"/>
-          <a:lstStyle/>
-          <a:p>
-            <a:pPr algn="l" indent="0" marL="0">
-              <a:buNone/>
-            </a:pPr>
-            <a:r>
-              <a:rPr lang="en-US" sz="850" dirty="0">
-                <a:solidFill>
-                  <a:srgbClr val="9AA8B4"/>
-                </a:solidFill>
-                <a:latin typeface="Calibri" pitchFamily="34" charset="0"/>
-                <a:ea typeface="Calibri" pitchFamily="34" charset="-122"/>
-                <a:cs typeface="Calibri" pitchFamily="34" charset="-120"/>
-              </a:rPr>
-              <a:t>Makassed General Hospital  ·  Department of Laboratory Medicine</a:t>
-            </a:r>
-            <a:endParaRPr lang="en-US" sz="850" dirty="0"/>
-          </a:p>
-        </p:txBody>
-      </p:sp>
-      <p:sp>
-        <p:nvSpPr>
-          <p:cNvPr id="11" name="Text 9"/>
-          <p:cNvSpPr/>
-          <p:nvPr/>
-        </p:nvSpPr>
-        <p:spPr>
-          <a:xfrm>
-            <a:off x="9814255" y="6473952"/>
-            <a:ext cx="1828800" cy="274320"/>
-          </a:xfrm>
-          <a:prstGeom prst="rect">
-            <a:avLst/>
-          </a:prstGeom>
-          <a:noFill/>
-          <a:ln/>
-        </p:spPr>
-        <p:txBody>
-          <a:bodyPr wrap="square" lIns="0" tIns="0" rIns="0" bIns="0" rtlCol="0" anchor="ctr"/>
-          <a:lstStyle/>
-          <a:p>
-            <a:pPr algn="r" indent="0" marL="0">
-              <a:buNone/>
-            </a:pPr>
-            <a:r>
-              <a:rPr lang="en-US" sz="850" dirty="0">
-                <a:solidFill>
-                  <a:srgbClr val="9AA8B4"/>
-                </a:solidFill>
-                <a:latin typeface="Calibri" pitchFamily="34" charset="0"/>
-                <a:ea typeface="Calibri" pitchFamily="34" charset="-122"/>
-                <a:cs typeface="Calibri" pitchFamily="34" charset="-120"/>
-              </a:rPr>
-              <a:t>CP Lecture Series</a:t>
-            </a:r>
-            <a:pPr algn="r" indent="0" marL="0">
-              <a:buNone/>
-            </a:pPr>
-            <a:r>
-              <a:rPr lang="en-US" sz="850" dirty="0">
-                <a:solidFill>
-                  <a:srgbClr val="DCE4EC"/>
-                </a:solidFill>
-                <a:latin typeface="Calibri" pitchFamily="34" charset="0"/>
-                <a:ea typeface="Calibri" pitchFamily="34" charset="-122"/>
-                <a:cs typeface="Calibri" pitchFamily="34" charset="-120"/>
-              </a:rPr>
-              <a:t>   ·   </a:t>
-            </a:r>
-            <a:pPr algn="r" indent="0" marL="0">
-              <a:buNone/>
-            </a:pPr>
-            <a:r>
-              <a:rPr lang="en-US" sz="850" b="1" dirty="0">
-                <a:solidFill>
-                  <a:srgbClr val="1565C0"/>
-                </a:solidFill>
-                <a:latin typeface="Calibri" pitchFamily="34" charset="0"/>
-                <a:ea typeface="Calibri" pitchFamily="34" charset="-122"/>
-                <a:cs typeface="Calibri" pitchFamily="34" charset="-120"/>
-              </a:rPr>
-              <a:t>11</a:t>
-            </a:r>
-            <a:endParaRPr lang="en-US" sz="850" dirty="0"/>
           </a:p>
         </p:txBody>
       </p:sp>
@@ -5241,7 +5728,7 @@
                 <a:ea typeface="Calibri" pitchFamily="34" charset="-122"/>
                 <a:cs typeface="Calibri" pitchFamily="34" charset="-120"/>
               </a:rPr>
-              <a:t>CLINICAL CHEMISTRY   ·   CASE 1  ·  RESOLUTION</a:t>
+              <a:t>CLINICAL CHEMISTRY   ·   CASE 1</a:t>
             </a:r>
             <a:endParaRPr lang="en-US" sz="1100" dirty="0"/>
           </a:p>
@@ -5280,7 +5767,7 @@
                 <a:ea typeface="Calibri" pitchFamily="34" charset="-122"/>
                 <a:cs typeface="Calibri" pitchFamily="34" charset="-120"/>
               </a:rPr>
-              <a:t>Case 1: Biotin Interference</a:t>
+              <a:t>Case 1</a:t>
             </a:r>
             <a:endParaRPr lang="en-US" sz="3000" dirty="0"/>
           </a:p>
@@ -5288,124 +5775,18 @@
       </p:sp>
       <p:sp>
         <p:nvSpPr>
-          <p:cNvPr id="4" name="Text 2"/>
-          <p:cNvSpPr/>
-          <p:nvPr/>
-        </p:nvSpPr>
-        <p:spPr>
-          <a:xfrm>
-            <a:off x="566928" y="1554480"/>
-            <a:ext cx="6413547" cy="4023360"/>
-          </a:xfrm>
-          <a:prstGeom prst="rect">
-            <a:avLst/>
-          </a:prstGeom>
-          <a:noFill/>
-          <a:ln/>
-        </p:spPr>
-        <p:txBody>
-          <a:bodyPr wrap="square" lIns="0" tIns="0" rIns="0" bIns="0" rtlCol="0" anchor="t"/>
-          <a:lstStyle/>
-          <a:p>
-            <a:pPr algn="l" marL="177800" indent="-177800">
-              <a:spcAft>
-                <a:spcPts val="900"/>
-              </a:spcAft>
-              <a:buSzPct val="100000"/>
-              <a:buChar char="•"/>
-            </a:pPr>
-            <a:r>
-              <a:rPr lang="en-US" sz="1400" b="1" dirty="0">
-                <a:solidFill>
-                  <a:srgbClr val="1B2A38"/>
-                </a:solidFill>
-                <a:latin typeface="Calibri" pitchFamily="34" charset="0"/>
-                <a:ea typeface="Calibri" pitchFamily="34" charset="-122"/>
-                <a:cs typeface="Calibri" pitchFamily="34" charset="-120"/>
-              </a:rPr>
-              <a:t>High-dose biotin in the supplement interfered with the streptavidin-biotin thyroid immunoassays.</a:t>
-            </a:r>
-            <a:endParaRPr lang="en-US" sz="1400" dirty="0"/>
-          </a:p>
-          <a:p>
-            <a:pPr algn="l" marL="177800" indent="-177800">
-              <a:spcAft>
-                <a:spcPts val="900"/>
-              </a:spcAft>
-              <a:buSzPct val="100000"/>
-              <a:buChar char="•"/>
-            </a:pPr>
-            <a:r>
-              <a:rPr lang="en-US" sz="1400" dirty="0">
-                <a:solidFill>
-                  <a:srgbClr val="33444F"/>
-                </a:solidFill>
-                <a:latin typeface="Calibri" pitchFamily="34" charset="0"/>
-                <a:ea typeface="Calibri" pitchFamily="34" charset="-122"/>
-                <a:cs typeface="Calibri" pitchFamily="34" charset="-120"/>
-              </a:rPr>
-              <a:t>The pattern (low TSH, high free T4) mimicked hyperthyroidism in a euthyroid patient.</a:t>
-            </a:r>
-            <a:endParaRPr lang="en-US" sz="1400" dirty="0"/>
-          </a:p>
-          <a:p>
-            <a:pPr algn="l" marL="177800" indent="-177800">
-              <a:spcAft>
-                <a:spcPts val="900"/>
-              </a:spcAft>
-              <a:buSzPct val="100000"/>
-              <a:buChar char="•"/>
-            </a:pPr>
-            <a:r>
-              <a:rPr lang="en-US" sz="1400" dirty="0">
-                <a:solidFill>
-                  <a:srgbClr val="33444F"/>
-                </a:solidFill>
-                <a:latin typeface="Calibri" pitchFamily="34" charset="0"/>
-                <a:ea typeface="Calibri" pitchFamily="34" charset="-122"/>
-                <a:cs typeface="Calibri" pitchFamily="34" charset="-120"/>
-              </a:rPr>
-              <a:t>Holding biotin (often ~48–72 h) before testing resolves it.</a:t>
-            </a:r>
-            <a:endParaRPr lang="en-US" sz="1400" dirty="0"/>
-          </a:p>
-          <a:p>
-            <a:pPr algn="l" marL="177800" indent="-177800">
-              <a:spcAft>
-                <a:spcPts val="900"/>
-              </a:spcAft>
-              <a:buSzPct val="100000"/>
-              <a:buChar char="•"/>
-            </a:pPr>
-            <a:r>
-              <a:rPr lang="en-US" sz="1400" dirty="0">
-                <a:solidFill>
-                  <a:srgbClr val="33444F"/>
-                </a:solidFill>
-                <a:latin typeface="Calibri" pitchFamily="34" charset="0"/>
-                <a:ea typeface="Calibri" pitchFamily="34" charset="-122"/>
-                <a:cs typeface="Calibri" pitchFamily="34" charset="-120"/>
-              </a:rPr>
-              <a:t>Always reconcile thyroid numbers with the clinical state.</a:t>
-            </a:r>
-            <a:endParaRPr lang="en-US" sz="1400" dirty="0"/>
-          </a:p>
-        </p:txBody>
-      </p:sp>
-      <p:sp>
-        <p:nvSpPr>
-          <p:cNvPr id="5" name="Shape 3"/>
-          <p:cNvSpPr/>
-          <p:nvPr/>
-        </p:nvSpPr>
-        <p:spPr>
-          <a:xfrm>
-            <a:off x="7422788" y="1554480"/>
-            <a:ext cx="4201979" cy="3977640"/>
+          <p:cNvPr id="4" name="Shape 2"/>
+          <p:cNvSpPr/>
+          <p:nvPr/>
+        </p:nvSpPr>
+        <p:spPr>
+          <a:xfrm>
+            <a:off x="566928" y="1517904"/>
+            <a:ext cx="11057839" cy="2788920"/>
           </a:xfrm>
           <a:prstGeom prst="roundRect">
             <a:avLst>
-              <a:gd name="adj" fmla="val 2069"/>
+              <a:gd name="adj" fmla="val 2951"/>
             </a:avLst>
           </a:prstGeom>
           <a:solidFill>
@@ -5423,53 +5804,53 @@
       </p:sp>
       <p:sp>
         <p:nvSpPr>
+          <p:cNvPr id="5" name="Text 3"/>
+          <p:cNvSpPr/>
+          <p:nvPr/>
+        </p:nvSpPr>
+        <p:spPr>
+          <a:xfrm>
+            <a:off x="841248" y="1700784"/>
+            <a:ext cx="5486400" cy="292608"/>
+          </a:xfrm>
+          <a:prstGeom prst="rect">
+            <a:avLst/>
+          </a:prstGeom>
+          <a:noFill/>
+          <a:ln/>
+        </p:spPr>
+        <p:txBody>
+          <a:bodyPr wrap="square" lIns="0" tIns="0" rIns="0" bIns="0" rtlCol="0" anchor="ctr"/>
+          <a:lstStyle/>
+          <a:p>
+            <a:pPr indent="0" marL="0">
+              <a:buNone/>
+            </a:pPr>
+            <a:r>
+              <a:rPr lang="en-US" sz="1100" b="1" spc="150" kern="0" dirty="0">
+                <a:solidFill>
+                  <a:srgbClr val="1565C0"/>
+                </a:solidFill>
+                <a:latin typeface="Calibri" pitchFamily="34" charset="0"/>
+                <a:ea typeface="Calibri" pitchFamily="34" charset="-122"/>
+                <a:cs typeface="Calibri" pitchFamily="34" charset="-120"/>
+              </a:rPr>
+              <a:t>CLINICAL VIGNETTE</a:t>
+            </a:r>
+            <a:endParaRPr lang="en-US" sz="1100" dirty="0"/>
+          </a:p>
+        </p:txBody>
+      </p:sp>
+      <p:sp>
+        <p:nvSpPr>
           <p:cNvPr id="6" name="Text 4"/>
           <p:cNvSpPr/>
           <p:nvPr/>
         </p:nvSpPr>
         <p:spPr>
           <a:xfrm>
-            <a:off x="7660532" y="1755648"/>
-            <a:ext cx="3744779" cy="310896"/>
-          </a:xfrm>
-          <a:prstGeom prst="rect">
-            <a:avLst/>
-          </a:prstGeom>
-          <a:noFill/>
-          <a:ln/>
-        </p:spPr>
-        <p:txBody>
-          <a:bodyPr wrap="square" lIns="0" tIns="0" rIns="0" bIns="0" rtlCol="0" anchor="ctr"/>
-          <a:lstStyle/>
-          <a:p>
-            <a:pPr indent="0" marL="0">
-              <a:buNone/>
-            </a:pPr>
-            <a:r>
-              <a:rPr lang="en-US" sz="1100" b="1" spc="140" kern="0" dirty="0">
-                <a:solidFill>
-                  <a:srgbClr val="1565C0"/>
-                </a:solidFill>
-                <a:latin typeface="Calibri" pitchFamily="34" charset="0"/>
-                <a:ea typeface="Calibri" pitchFamily="34" charset="-122"/>
-                <a:cs typeface="Calibri" pitchFamily="34" charset="-120"/>
-              </a:rPr>
-              <a:t>TEACHING POINT</a:t>
-            </a:r>
-            <a:endParaRPr lang="en-US" sz="1100" dirty="0"/>
-          </a:p>
-        </p:txBody>
-      </p:sp>
-      <p:sp>
-        <p:nvSpPr>
-          <p:cNvPr id="7" name="Text 5"/>
-          <p:cNvSpPr/>
-          <p:nvPr/>
-        </p:nvSpPr>
-        <p:spPr>
-          <a:xfrm>
-            <a:off x="7660532" y="2121408"/>
-            <a:ext cx="3726491" cy="3291840"/>
+            <a:off x="841248" y="2029968"/>
+            <a:ext cx="10509199" cy="2148840"/>
           </a:xfrm>
           <a:prstGeom prst="rect">
             <a:avLst/>
@@ -5483,12 +5864,12 @@
           <a:p>
             <a:pPr algn="l" indent="0" marL="0">
               <a:lnSpc>
-                <a:spcPct val="110000"/>
+                <a:spcPct val="108000"/>
               </a:lnSpc>
               <a:buNone/>
             </a:pPr>
             <a:r>
-              <a:rPr lang="en-US" sz="1350" dirty="0">
+              <a:rPr lang="en-US" sz="1450" dirty="0">
                 <a:solidFill>
                   <a:srgbClr val="33444F"/>
                 </a:solidFill>
@@ -5496,15 +5877,122 @@
                 <a:ea typeface="Calibri" pitchFamily="34" charset="-122"/>
                 <a:cs typeface="Calibri" pitchFamily="34" charset="-120"/>
               </a:rPr>
-              <a:t>Ask about biotin whenever thyroid results don’t fit the patient — a one-question history prevents an erroneous diagnosis and treatment.</a:t>
-            </a:r>
-            <a:endParaRPr lang="en-US" sz="1350" dirty="0"/>
-          </a:p>
-        </p:txBody>
+              <a:t>A clinically euthyroid patient on a hair-and-nail supplement has a suppressed TSH with elevated free T4. Repeat testing after a 3-day pause is normal.</a:t>
+            </a:r>
+            <a:endParaRPr lang="en-US" sz="1450" dirty="0"/>
+          </a:p>
+        </p:txBody>
+      </p:sp>
+      <p:sp>
+        <p:nvSpPr>
+          <p:cNvPr id="7" name="Shape 5"/>
+          <p:cNvSpPr/>
+          <p:nvPr/>
+        </p:nvSpPr>
+        <p:spPr>
+          <a:xfrm>
+            <a:off x="566928" y="4553712"/>
+            <a:ext cx="11057839" cy="1325880"/>
+          </a:xfrm>
+          <a:prstGeom prst="roundRect">
+            <a:avLst>
+              <a:gd name="adj" fmla="val 6207"/>
+            </a:avLst>
+          </a:prstGeom>
+          <a:solidFill>
+            <a:srgbClr val="0E3A5F"/>
+          </a:solidFill>
+          <a:ln/>
+          <a:effectLst>
+            <a:outerShdw sx="100000" sy="100000" kx="0" ky="0" algn="bl" rotWithShape="0" blurRad="88900" dist="25400" dir="5400000">
+              <a:srgbClr val="22303C">
+                <a:alpha val="12000"/>
+              </a:srgbClr>
+            </a:outerShdw>
+          </a:effectLst>
+        </p:spPr>
       </p:sp>
       <p:sp>
         <p:nvSpPr>
           <p:cNvPr id="8" name="Text 6"/>
+          <p:cNvSpPr/>
+          <p:nvPr/>
+        </p:nvSpPr>
+        <p:spPr>
+          <a:xfrm>
+            <a:off x="822960" y="4681728"/>
+            <a:ext cx="640080" cy="960120"/>
+          </a:xfrm>
+          <a:prstGeom prst="rect">
+            <a:avLst/>
+          </a:prstGeom>
+          <a:noFill/>
+          <a:ln/>
+        </p:spPr>
+        <p:txBody>
+          <a:bodyPr wrap="square" lIns="0" tIns="0" rIns="0" bIns="0" rtlCol="0" anchor="ctr"/>
+          <a:lstStyle/>
+          <a:p>
+            <a:pPr algn="ctr" indent="0" marL="0">
+              <a:buNone/>
+            </a:pPr>
+            <a:r>
+              <a:rPr lang="en-US" sz="4000" b="1" dirty="0">
+                <a:solidFill>
+                  <a:srgbClr val="1565C0"/>
+                </a:solidFill>
+                <a:latin typeface="Calibri" pitchFamily="34" charset="0"/>
+                <a:ea typeface="Calibri" pitchFamily="34" charset="-122"/>
+                <a:cs typeface="Calibri" pitchFamily="34" charset="-120"/>
+              </a:rPr>
+              <a:t>?</a:t>
+            </a:r>
+            <a:endParaRPr lang="en-US" sz="4000" dirty="0"/>
+          </a:p>
+        </p:txBody>
+      </p:sp>
+      <p:sp>
+        <p:nvSpPr>
+          <p:cNvPr id="9" name="Text 7"/>
+          <p:cNvSpPr/>
+          <p:nvPr/>
+        </p:nvSpPr>
+        <p:spPr>
+          <a:xfrm>
+            <a:off x="1618488" y="4553712"/>
+            <a:ext cx="9686239" cy="1325880"/>
+          </a:xfrm>
+          <a:prstGeom prst="rect">
+            <a:avLst/>
+          </a:prstGeom>
+          <a:noFill/>
+          <a:ln/>
+        </p:spPr>
+        <p:txBody>
+          <a:bodyPr wrap="square" lIns="0" tIns="0" rIns="0" bIns="0" rtlCol="0" anchor="ctr"/>
+          <a:lstStyle/>
+          <a:p>
+            <a:pPr algn="l" indent="0" marL="0">
+              <a:buNone/>
+            </a:pPr>
+            <a:r>
+              <a:rPr lang="en-US" sz="1500" b="1" dirty="0">
+                <a:solidFill>
+                  <a:srgbClr val="FFFFFF"/>
+                </a:solidFill>
+                <a:latin typeface="Calibri" pitchFamily="34" charset="0"/>
+                <a:ea typeface="Calibri" pitchFamily="34" charset="-122"/>
+                <a:cs typeface="Calibri" pitchFamily="34" charset="-120"/>
+              </a:rPr>
+              <a:t>What caused the misleading pattern, and the practical advice?</a:t>
+            </a:r>
+            <a:endParaRPr lang="en-US" sz="1500" dirty="0"/>
+          </a:p>
+        </p:txBody>
+      </p:sp>
+      <p:sp>
+        <p:nvSpPr>
+          <p:cNvPr id="10" name="Text 8"/>
           <p:cNvSpPr/>
           <p:nvPr/>
         </p:nvSpPr>
@@ -5543,7 +6031,7 @@
       </p:sp>
       <p:sp>
         <p:nvSpPr>
-          <p:cNvPr id="9" name="Text 7"/>
+          <p:cNvPr id="11" name="Text 9"/>
           <p:cNvSpPr/>
           <p:nvPr/>
         </p:nvSpPr>
@@ -5673,7 +6161,7 @@
                 <a:ea typeface="Calibri" pitchFamily="34" charset="-122"/>
                 <a:cs typeface="Calibri" pitchFamily="34" charset="-120"/>
               </a:rPr>
-              <a:t>CLINICAL CHEMISTRY   ·   CASE 2</a:t>
+              <a:t>CLINICAL CHEMISTRY   ·   CASE 1  ·  RESOLUTION</a:t>
             </a:r>
             <a:endParaRPr lang="en-US" sz="1100" dirty="0"/>
           </a:p>
@@ -5712,7 +6200,7 @@
                 <a:ea typeface="Calibri" pitchFamily="34" charset="-122"/>
                 <a:cs typeface="Calibri" pitchFamily="34" charset="-120"/>
               </a:rPr>
-              <a:t>Case 2</a:t>
+              <a:t>Case 1: Biotin Interference</a:t>
             </a:r>
             <a:endParaRPr lang="en-US" sz="3000" dirty="0"/>
           </a:p>
@@ -5720,18 +6208,124 @@
       </p:sp>
       <p:sp>
         <p:nvSpPr>
-          <p:cNvPr id="4" name="Shape 2"/>
-          <p:cNvSpPr/>
-          <p:nvPr/>
-        </p:nvSpPr>
-        <p:spPr>
-          <a:xfrm>
-            <a:off x="566928" y="1517904"/>
-            <a:ext cx="11057839" cy="2788920"/>
+          <p:cNvPr id="4" name="Text 2"/>
+          <p:cNvSpPr/>
+          <p:nvPr/>
+        </p:nvSpPr>
+        <p:spPr>
+          <a:xfrm>
+            <a:off x="566928" y="1554480"/>
+            <a:ext cx="6413547" cy="4023360"/>
+          </a:xfrm>
+          <a:prstGeom prst="rect">
+            <a:avLst/>
+          </a:prstGeom>
+          <a:noFill/>
+          <a:ln/>
+        </p:spPr>
+        <p:txBody>
+          <a:bodyPr wrap="square" lIns="0" tIns="0" rIns="0" bIns="0" rtlCol="0" anchor="t"/>
+          <a:lstStyle/>
+          <a:p>
+            <a:pPr algn="l" marL="177800" indent="-177800">
+              <a:spcAft>
+                <a:spcPts val="900"/>
+              </a:spcAft>
+              <a:buSzPct val="100000"/>
+              <a:buChar char="•"/>
+            </a:pPr>
+            <a:r>
+              <a:rPr lang="en-US" sz="1400" b="1" dirty="0">
+                <a:solidFill>
+                  <a:srgbClr val="1B2A38"/>
+                </a:solidFill>
+                <a:latin typeface="Calibri" pitchFamily="34" charset="0"/>
+                <a:ea typeface="Calibri" pitchFamily="34" charset="-122"/>
+                <a:cs typeface="Calibri" pitchFamily="34" charset="-120"/>
+              </a:rPr>
+              <a:t>High-dose biotin interfered with streptavidin-biotin thyroid immunoassays.</a:t>
+            </a:r>
+            <a:endParaRPr lang="en-US" sz="1400" dirty="0"/>
+          </a:p>
+          <a:p>
+            <a:pPr algn="l" marL="177800" indent="-177800">
+              <a:spcAft>
+                <a:spcPts val="900"/>
+              </a:spcAft>
+              <a:buSzPct val="100000"/>
+              <a:buChar char="•"/>
+            </a:pPr>
+            <a:r>
+              <a:rPr lang="en-US" sz="1400" dirty="0">
+                <a:solidFill>
+                  <a:srgbClr val="33444F"/>
+                </a:solidFill>
+                <a:latin typeface="Calibri" pitchFamily="34" charset="0"/>
+                <a:ea typeface="Calibri" pitchFamily="34" charset="-122"/>
+                <a:cs typeface="Calibri" pitchFamily="34" charset="-120"/>
+              </a:rPr>
+              <a:t>The pattern (low TSH, high free T4) mimicked hyperthyroidism in a euthyroid patient.</a:t>
+            </a:r>
+            <a:endParaRPr lang="en-US" sz="1400" dirty="0"/>
+          </a:p>
+          <a:p>
+            <a:pPr algn="l" marL="177800" indent="-177800">
+              <a:spcAft>
+                <a:spcPts val="900"/>
+              </a:spcAft>
+              <a:buSzPct val="100000"/>
+              <a:buChar char="•"/>
+            </a:pPr>
+            <a:r>
+              <a:rPr lang="en-US" sz="1400" dirty="0">
+                <a:solidFill>
+                  <a:srgbClr val="33444F"/>
+                </a:solidFill>
+                <a:latin typeface="Calibri" pitchFamily="34" charset="0"/>
+                <a:ea typeface="Calibri" pitchFamily="34" charset="-122"/>
+                <a:cs typeface="Calibri" pitchFamily="34" charset="-120"/>
+              </a:rPr>
+              <a:t>Holding biotin (often 48–72 h) resolves it.</a:t>
+            </a:r>
+            <a:endParaRPr lang="en-US" sz="1400" dirty="0"/>
+          </a:p>
+          <a:p>
+            <a:pPr algn="l" marL="177800" indent="-177800">
+              <a:spcAft>
+                <a:spcPts val="900"/>
+              </a:spcAft>
+              <a:buSzPct val="100000"/>
+              <a:buChar char="•"/>
+            </a:pPr>
+            <a:r>
+              <a:rPr lang="en-US" sz="1400" dirty="0">
+                <a:solidFill>
+                  <a:srgbClr val="33444F"/>
+                </a:solidFill>
+                <a:latin typeface="Calibri" pitchFamily="34" charset="0"/>
+                <a:ea typeface="Calibri" pitchFamily="34" charset="-122"/>
+                <a:cs typeface="Calibri" pitchFamily="34" charset="-120"/>
+              </a:rPr>
+              <a:t>Reconcile thyroid numbers with the clinical state.</a:t>
+            </a:r>
+            <a:endParaRPr lang="en-US" sz="1400" dirty="0"/>
+          </a:p>
+        </p:txBody>
+      </p:sp>
+      <p:sp>
+        <p:nvSpPr>
+          <p:cNvPr id="5" name="Shape 3"/>
+          <p:cNvSpPr/>
+          <p:nvPr/>
+        </p:nvSpPr>
+        <p:spPr>
+          <a:xfrm>
+            <a:off x="7422788" y="1554480"/>
+            <a:ext cx="4201979" cy="3977640"/>
           </a:xfrm>
           <a:prstGeom prst="roundRect">
             <a:avLst>
-              <a:gd name="adj" fmla="val 2951"/>
+              <a:gd name="adj" fmla="val 2069"/>
             </a:avLst>
           </a:prstGeom>
           <a:solidFill>
@@ -5749,14 +6343,14 @@
       </p:sp>
       <p:sp>
         <p:nvSpPr>
-          <p:cNvPr id="5" name="Text 3"/>
-          <p:cNvSpPr/>
-          <p:nvPr/>
-        </p:nvSpPr>
-        <p:spPr>
-          <a:xfrm>
-            <a:off x="841248" y="1700784"/>
-            <a:ext cx="5486400" cy="292608"/>
+          <p:cNvPr id="6" name="Text 4"/>
+          <p:cNvSpPr/>
+          <p:nvPr/>
+        </p:nvSpPr>
+        <p:spPr>
+          <a:xfrm>
+            <a:off x="7660532" y="1755648"/>
+            <a:ext cx="3744779" cy="310896"/>
           </a:xfrm>
           <a:prstGeom prst="rect">
             <a:avLst/>
@@ -5772,7 +6366,7 @@
               <a:buNone/>
             </a:pPr>
             <a:r>
-              <a:rPr lang="en-US" sz="1100" b="1" spc="150" kern="0" dirty="0">
+              <a:rPr lang="en-US" sz="1100" b="1" spc="140" kern="0" dirty="0">
                 <a:solidFill>
                   <a:srgbClr val="1565C0"/>
                 </a:solidFill>
@@ -5780,7 +6374,7 @@
                 <a:ea typeface="Calibri" pitchFamily="34" charset="-122"/>
                 <a:cs typeface="Calibri" pitchFamily="34" charset="-120"/>
               </a:rPr>
-              <a:t>CLINICAL VIGNETTE</a:t>
+              <a:t>TEACHING POINT</a:t>
             </a:r>
             <a:endParaRPr lang="en-US" sz="1100" dirty="0"/>
           </a:p>
@@ -5788,14 +6382,14 @@
       </p:sp>
       <p:sp>
         <p:nvSpPr>
-          <p:cNvPr id="6" name="Text 4"/>
-          <p:cNvSpPr/>
-          <p:nvPr/>
-        </p:nvSpPr>
-        <p:spPr>
-          <a:xfrm>
-            <a:off x="841248" y="2029968"/>
-            <a:ext cx="10509199" cy="2148840"/>
+          <p:cNvPr id="7" name="Text 5"/>
+          <p:cNvSpPr/>
+          <p:nvPr/>
+        </p:nvSpPr>
+        <p:spPr>
+          <a:xfrm>
+            <a:off x="7660532" y="2121408"/>
+            <a:ext cx="3726491" cy="3291840"/>
           </a:xfrm>
           <a:prstGeom prst="rect">
             <a:avLst/>
@@ -5809,12 +6403,12 @@
           <a:p>
             <a:pPr algn="l" indent="0" marL="0">
               <a:lnSpc>
-                <a:spcPct val="108000"/>
+                <a:spcPct val="110000"/>
               </a:lnSpc>
               <a:buNone/>
             </a:pPr>
             <a:r>
-              <a:rPr lang="en-US" sz="1450" dirty="0">
+              <a:rPr lang="en-US" sz="1350" dirty="0">
                 <a:solidFill>
                   <a:srgbClr val="33444F"/>
                 </a:solidFill>
@@ -5822,122 +6416,15 @@
                 <a:ea typeface="Calibri" pitchFamily="34" charset="-122"/>
                 <a:cs typeface="Calibri" pitchFamily="34" charset="-120"/>
               </a:rPr>
-              <a:t>An older patient with anemia and renal impairment has a normal SPEP but hypogammaglobulinemia. Serum free light chains show a markedly elevated kappa with a very high κ/λ ratio; urine IFE shows free kappa.</a:t>
-            </a:r>
-            <a:endParaRPr lang="en-US" sz="1450" dirty="0"/>
-          </a:p>
-        </p:txBody>
-      </p:sp>
-      <p:sp>
-        <p:nvSpPr>
-          <p:cNvPr id="7" name="Shape 5"/>
-          <p:cNvSpPr/>
-          <p:nvPr/>
-        </p:nvSpPr>
-        <p:spPr>
-          <a:xfrm>
-            <a:off x="566928" y="4553712"/>
-            <a:ext cx="11057839" cy="1325880"/>
-          </a:xfrm>
-          <a:prstGeom prst="roundRect">
-            <a:avLst>
-              <a:gd name="adj" fmla="val 6207"/>
-            </a:avLst>
-          </a:prstGeom>
-          <a:solidFill>
-            <a:srgbClr val="0E3A5F"/>
-          </a:solidFill>
-          <a:ln/>
-          <a:effectLst>
-            <a:outerShdw sx="100000" sy="100000" kx="0" ky="0" algn="bl" rotWithShape="0" blurRad="88900" dist="25400" dir="5400000">
-              <a:srgbClr val="22303C">
-                <a:alpha val="12000"/>
-              </a:srgbClr>
-            </a:outerShdw>
-          </a:effectLst>
-        </p:spPr>
+              <a:t>Ask about biotin whenever thyroid results don’t fit — a one-question history prevents an erroneous diagnosis.</a:t>
+            </a:r>
+            <a:endParaRPr lang="en-US" sz="1350" dirty="0"/>
+          </a:p>
+        </p:txBody>
       </p:sp>
       <p:sp>
         <p:nvSpPr>
           <p:cNvPr id="8" name="Text 6"/>
-          <p:cNvSpPr/>
-          <p:nvPr/>
-        </p:nvSpPr>
-        <p:spPr>
-          <a:xfrm>
-            <a:off x="822960" y="4681728"/>
-            <a:ext cx="640080" cy="960120"/>
-          </a:xfrm>
-          <a:prstGeom prst="rect">
-            <a:avLst/>
-          </a:prstGeom>
-          <a:noFill/>
-          <a:ln/>
-        </p:spPr>
-        <p:txBody>
-          <a:bodyPr wrap="square" lIns="0" tIns="0" rIns="0" bIns="0" rtlCol="0" anchor="ctr"/>
-          <a:lstStyle/>
-          <a:p>
-            <a:pPr algn="ctr" indent="0" marL="0">
-              <a:buNone/>
-            </a:pPr>
-            <a:r>
-              <a:rPr lang="en-US" sz="4000" b="1" dirty="0">
-                <a:solidFill>
-                  <a:srgbClr val="1565C0"/>
-                </a:solidFill>
-                <a:latin typeface="Calibri" pitchFamily="34" charset="0"/>
-                <a:ea typeface="Calibri" pitchFamily="34" charset="-122"/>
-                <a:cs typeface="Calibri" pitchFamily="34" charset="-120"/>
-              </a:rPr>
-              <a:t>?</a:t>
-            </a:r>
-            <a:endParaRPr lang="en-US" sz="4000" dirty="0"/>
-          </a:p>
-        </p:txBody>
-      </p:sp>
-      <p:sp>
-        <p:nvSpPr>
-          <p:cNvPr id="9" name="Text 7"/>
-          <p:cNvSpPr/>
-          <p:nvPr/>
-        </p:nvSpPr>
-        <p:spPr>
-          <a:xfrm>
-            <a:off x="1618488" y="4553712"/>
-            <a:ext cx="9686239" cy="1325880"/>
-          </a:xfrm>
-          <a:prstGeom prst="rect">
-            <a:avLst/>
-          </a:prstGeom>
-          <a:noFill/>
-          <a:ln/>
-        </p:spPr>
-        <p:txBody>
-          <a:bodyPr wrap="square" lIns="0" tIns="0" rIns="0" bIns="0" rtlCol="0" anchor="ctr"/>
-          <a:lstStyle/>
-          <a:p>
-            <a:pPr algn="l" indent="0" marL="0">
-              <a:buNone/>
-            </a:pPr>
-            <a:r>
-              <a:rPr lang="en-US" sz="1500" b="1" dirty="0">
-                <a:solidFill>
-                  <a:srgbClr val="FFFFFF"/>
-                </a:solidFill>
-                <a:latin typeface="Calibri" pitchFamily="34" charset="0"/>
-                <a:ea typeface="Calibri" pitchFamily="34" charset="-122"/>
-                <a:cs typeface="Calibri" pitchFamily="34" charset="-120"/>
-              </a:rPr>
-              <a:t>What is the diagnosis pathway, and why was the SPEP nearly normal?</a:t>
-            </a:r>
-            <a:endParaRPr lang="en-US" sz="1500" dirty="0"/>
-          </a:p>
-        </p:txBody>
-      </p:sp>
-      <p:sp>
-        <p:nvSpPr>
-          <p:cNvPr id="10" name="Text 8"/>
           <p:cNvSpPr/>
           <p:nvPr/>
         </p:nvSpPr>
@@ -5976,7 +6463,7 @@
       </p:sp>
       <p:sp>
         <p:nvSpPr>
-          <p:cNvPr id="11" name="Text 9"/>
+          <p:cNvPr id="9" name="Text 7"/>
           <p:cNvSpPr/>
           <p:nvPr/>
         </p:nvSpPr>
@@ -6106,7 +6593,7 @@
                 <a:ea typeface="Calibri" pitchFamily="34" charset="-122"/>
                 <a:cs typeface="Calibri" pitchFamily="34" charset="-120"/>
               </a:rPr>
-              <a:t>CLINICAL CHEMISTRY   ·   CASE 2  ·  RESOLUTION</a:t>
+              <a:t>CLINICAL CHEMISTRY   ·   CASE 2</a:t>
             </a:r>
             <a:endParaRPr lang="en-US" sz="1100" dirty="0"/>
           </a:p>
@@ -6145,7 +6632,7 @@
                 <a:ea typeface="Calibri" pitchFamily="34" charset="-122"/>
                 <a:cs typeface="Calibri" pitchFamily="34" charset="-120"/>
               </a:rPr>
-              <a:t>Case 2: Light-Chain Multiple Myeloma</a:t>
+              <a:t>Case 2</a:t>
             </a:r>
             <a:endParaRPr lang="en-US" sz="3000" dirty="0"/>
           </a:p>
@@ -6153,124 +6640,18 @@
       </p:sp>
       <p:sp>
         <p:nvSpPr>
-          <p:cNvPr id="4" name="Text 2"/>
-          <p:cNvSpPr/>
-          <p:nvPr/>
-        </p:nvSpPr>
-        <p:spPr>
-          <a:xfrm>
-            <a:off x="566928" y="1554480"/>
-            <a:ext cx="6413547" cy="4023360"/>
-          </a:xfrm>
-          <a:prstGeom prst="rect">
-            <a:avLst/>
-          </a:prstGeom>
-          <a:noFill/>
-          <a:ln/>
-        </p:spPr>
-        <p:txBody>
-          <a:bodyPr wrap="square" lIns="0" tIns="0" rIns="0" bIns="0" rtlCol="0" anchor="t"/>
-          <a:lstStyle/>
-          <a:p>
-            <a:pPr algn="l" marL="177800" indent="-177800">
-              <a:spcAft>
-                <a:spcPts val="900"/>
-              </a:spcAft>
-              <a:buSzPct val="100000"/>
-              <a:buChar char="•"/>
-            </a:pPr>
-            <a:r>
-              <a:rPr lang="en-US" sz="1400" b="1" dirty="0">
-                <a:solidFill>
-                  <a:srgbClr val="1B2A38"/>
-                </a:solidFill>
-                <a:latin typeface="Calibri" pitchFamily="34" charset="0"/>
-                <a:ea typeface="Calibri" pitchFamily="34" charset="-122"/>
-                <a:cs typeface="Calibri" pitchFamily="34" charset="-120"/>
-              </a:rPr>
-              <a:t>Light-chain-only myeloma — the clone secretes free light chains, not intact immunoglobulin, so the SPEP lacks an M-spike.</a:t>
-            </a:r>
-            <a:endParaRPr lang="en-US" sz="1400" dirty="0"/>
-          </a:p>
-          <a:p>
-            <a:pPr algn="l" marL="177800" indent="-177800">
-              <a:spcAft>
-                <a:spcPts val="900"/>
-              </a:spcAft>
-              <a:buSzPct val="100000"/>
-              <a:buChar char="•"/>
-            </a:pPr>
-            <a:r>
-              <a:rPr lang="en-US" sz="1400" dirty="0">
-                <a:solidFill>
-                  <a:srgbClr val="33444F"/>
-                </a:solidFill>
-                <a:latin typeface="Calibri" pitchFamily="34" charset="0"/>
-                <a:ea typeface="Calibri" pitchFamily="34" charset="-122"/>
-                <a:cs typeface="Calibri" pitchFamily="34" charset="-120"/>
-              </a:rPr>
-              <a:t>Hypogammaglobulinemia and an abnormal free light-chain ratio are the clues.</a:t>
-            </a:r>
-            <a:endParaRPr lang="en-US" sz="1400" dirty="0"/>
-          </a:p>
-          <a:p>
-            <a:pPr algn="l" marL="177800" indent="-177800">
-              <a:spcAft>
-                <a:spcPts val="900"/>
-              </a:spcAft>
-              <a:buSzPct val="100000"/>
-              <a:buChar char="•"/>
-            </a:pPr>
-            <a:r>
-              <a:rPr lang="en-US" sz="1400" dirty="0">
-                <a:solidFill>
-                  <a:srgbClr val="33444F"/>
-                </a:solidFill>
-                <a:latin typeface="Calibri" pitchFamily="34" charset="0"/>
-                <a:ea typeface="Calibri" pitchFamily="34" charset="-122"/>
-                <a:cs typeface="Calibri" pitchFamily="34" charset="-120"/>
-              </a:rPr>
-              <a:t>Urine IFE confirms Bence-Jones (free kappa) proteinuria.</a:t>
-            </a:r>
-            <a:endParaRPr lang="en-US" sz="1400" dirty="0"/>
-          </a:p>
-          <a:p>
-            <a:pPr algn="l" marL="177800" indent="-177800">
-              <a:spcAft>
-                <a:spcPts val="900"/>
-              </a:spcAft>
-              <a:buSzPct val="100000"/>
-              <a:buChar char="•"/>
-            </a:pPr>
-            <a:r>
-              <a:rPr lang="en-US" sz="1400" dirty="0">
-                <a:solidFill>
-                  <a:srgbClr val="33444F"/>
-                </a:solidFill>
-                <a:latin typeface="Calibri" pitchFamily="34" charset="0"/>
-                <a:ea typeface="Calibri" pitchFamily="34" charset="-122"/>
-                <a:cs typeface="Calibri" pitchFamily="34" charset="-120"/>
-              </a:rPr>
-              <a:t>Confirm with marrow plasma cells and CRAB end-organ features.</a:t>
-            </a:r>
-            <a:endParaRPr lang="en-US" sz="1400" dirty="0"/>
-          </a:p>
-        </p:txBody>
-      </p:sp>
-      <p:sp>
-        <p:nvSpPr>
-          <p:cNvPr id="5" name="Shape 3"/>
-          <p:cNvSpPr/>
-          <p:nvPr/>
-        </p:nvSpPr>
-        <p:spPr>
-          <a:xfrm>
-            <a:off x="7422788" y="1554480"/>
-            <a:ext cx="4201979" cy="3977640"/>
+          <p:cNvPr id="4" name="Shape 2"/>
+          <p:cNvSpPr/>
+          <p:nvPr/>
+        </p:nvSpPr>
+        <p:spPr>
+          <a:xfrm>
+            <a:off x="566928" y="1517904"/>
+            <a:ext cx="11057839" cy="2788920"/>
           </a:xfrm>
           <a:prstGeom prst="roundRect">
             <a:avLst>
-              <a:gd name="adj" fmla="val 2069"/>
+              <a:gd name="adj" fmla="val 2951"/>
             </a:avLst>
           </a:prstGeom>
           <a:solidFill>
@@ -6288,53 +6669,53 @@
       </p:sp>
       <p:sp>
         <p:nvSpPr>
+          <p:cNvPr id="5" name="Text 3"/>
+          <p:cNvSpPr/>
+          <p:nvPr/>
+        </p:nvSpPr>
+        <p:spPr>
+          <a:xfrm>
+            <a:off x="841248" y="1700784"/>
+            <a:ext cx="5486400" cy="292608"/>
+          </a:xfrm>
+          <a:prstGeom prst="rect">
+            <a:avLst/>
+          </a:prstGeom>
+          <a:noFill/>
+          <a:ln/>
+        </p:spPr>
+        <p:txBody>
+          <a:bodyPr wrap="square" lIns="0" tIns="0" rIns="0" bIns="0" rtlCol="0" anchor="ctr"/>
+          <a:lstStyle/>
+          <a:p>
+            <a:pPr indent="0" marL="0">
+              <a:buNone/>
+            </a:pPr>
+            <a:r>
+              <a:rPr lang="en-US" sz="1100" b="1" spc="150" kern="0" dirty="0">
+                <a:solidFill>
+                  <a:srgbClr val="1565C0"/>
+                </a:solidFill>
+                <a:latin typeface="Calibri" pitchFamily="34" charset="0"/>
+                <a:ea typeface="Calibri" pitchFamily="34" charset="-122"/>
+                <a:cs typeface="Calibri" pitchFamily="34" charset="-120"/>
+              </a:rPr>
+              <a:t>CLINICAL VIGNETTE</a:t>
+            </a:r>
+            <a:endParaRPr lang="en-US" sz="1100" dirty="0"/>
+          </a:p>
+        </p:txBody>
+      </p:sp>
+      <p:sp>
+        <p:nvSpPr>
           <p:cNvPr id="6" name="Text 4"/>
           <p:cNvSpPr/>
           <p:nvPr/>
         </p:nvSpPr>
         <p:spPr>
           <a:xfrm>
-            <a:off x="7660532" y="1755648"/>
-            <a:ext cx="3744779" cy="310896"/>
-          </a:xfrm>
-          <a:prstGeom prst="rect">
-            <a:avLst/>
-          </a:prstGeom>
-          <a:noFill/>
-          <a:ln/>
-        </p:spPr>
-        <p:txBody>
-          <a:bodyPr wrap="square" lIns="0" tIns="0" rIns="0" bIns="0" rtlCol="0" anchor="ctr"/>
-          <a:lstStyle/>
-          <a:p>
-            <a:pPr indent="0" marL="0">
-              <a:buNone/>
-            </a:pPr>
-            <a:r>
-              <a:rPr lang="en-US" sz="1100" b="1" spc="140" kern="0" dirty="0">
-                <a:solidFill>
-                  <a:srgbClr val="1565C0"/>
-                </a:solidFill>
-                <a:latin typeface="Calibri" pitchFamily="34" charset="0"/>
-                <a:ea typeface="Calibri" pitchFamily="34" charset="-122"/>
-                <a:cs typeface="Calibri" pitchFamily="34" charset="-120"/>
-              </a:rPr>
-              <a:t>TEACHING POINT</a:t>
-            </a:r>
-            <a:endParaRPr lang="en-US" sz="1100" dirty="0"/>
-          </a:p>
-        </p:txBody>
-      </p:sp>
-      <p:sp>
-        <p:nvSpPr>
-          <p:cNvPr id="7" name="Text 5"/>
-          <p:cNvSpPr/>
-          <p:nvPr/>
-        </p:nvSpPr>
-        <p:spPr>
-          <a:xfrm>
-            <a:off x="7660532" y="2121408"/>
-            <a:ext cx="3726491" cy="3291840"/>
+            <a:off x="841248" y="2029968"/>
+            <a:ext cx="10509199" cy="2148840"/>
           </a:xfrm>
           <a:prstGeom prst="rect">
             <a:avLst/>
@@ -6348,12 +6729,12 @@
           <a:p>
             <a:pPr algn="l" indent="0" marL="0">
               <a:lnSpc>
-                <a:spcPct val="110000"/>
+                <a:spcPct val="108000"/>
               </a:lnSpc>
               <a:buNone/>
             </a:pPr>
             <a:r>
-              <a:rPr lang="en-US" sz="1350" dirty="0">
+              <a:rPr lang="en-US" sz="1450" dirty="0">
                 <a:solidFill>
                   <a:srgbClr val="33444F"/>
                 </a:solidFill>
@@ -6361,15 +6742,122 @@
                 <a:ea typeface="Calibri" pitchFamily="34" charset="-122"/>
                 <a:cs typeface="Calibri" pitchFamily="34" charset="-120"/>
               </a:rPr>
-              <a:t>A normal SPEP does not exclude a plasma-cell disorder — serum free light chains (and the ratio) catch light-chain-only disease.</a:t>
-            </a:r>
-            <a:endParaRPr lang="en-US" sz="1350" dirty="0"/>
-          </a:p>
-        </p:txBody>
+              <a:t>An SPEP shows low albumin, a prominent α₂ band, and reduced γ globulins in a patient with heavy proteinuria and edema.</a:t>
+            </a:r>
+            <a:endParaRPr lang="en-US" sz="1450" dirty="0"/>
+          </a:p>
+        </p:txBody>
+      </p:sp>
+      <p:sp>
+        <p:nvSpPr>
+          <p:cNvPr id="7" name="Shape 5"/>
+          <p:cNvSpPr/>
+          <p:nvPr/>
+        </p:nvSpPr>
+        <p:spPr>
+          <a:xfrm>
+            <a:off x="566928" y="4553712"/>
+            <a:ext cx="11057839" cy="1325880"/>
+          </a:xfrm>
+          <a:prstGeom prst="roundRect">
+            <a:avLst>
+              <a:gd name="adj" fmla="val 6207"/>
+            </a:avLst>
+          </a:prstGeom>
+          <a:solidFill>
+            <a:srgbClr val="0E3A5F"/>
+          </a:solidFill>
+          <a:ln/>
+          <a:effectLst>
+            <a:outerShdw sx="100000" sy="100000" kx="0" ky="0" algn="bl" rotWithShape="0" blurRad="88900" dist="25400" dir="5400000">
+              <a:srgbClr val="22303C">
+                <a:alpha val="12000"/>
+              </a:srgbClr>
+            </a:outerShdw>
+          </a:effectLst>
+        </p:spPr>
       </p:sp>
       <p:sp>
         <p:nvSpPr>
           <p:cNvPr id="8" name="Text 6"/>
+          <p:cNvSpPr/>
+          <p:nvPr/>
+        </p:nvSpPr>
+        <p:spPr>
+          <a:xfrm>
+            <a:off x="822960" y="4681728"/>
+            <a:ext cx="640080" cy="960120"/>
+          </a:xfrm>
+          <a:prstGeom prst="rect">
+            <a:avLst/>
+          </a:prstGeom>
+          <a:noFill/>
+          <a:ln/>
+        </p:spPr>
+        <p:txBody>
+          <a:bodyPr wrap="square" lIns="0" tIns="0" rIns="0" bIns="0" rtlCol="0" anchor="ctr"/>
+          <a:lstStyle/>
+          <a:p>
+            <a:pPr algn="ctr" indent="0" marL="0">
+              <a:buNone/>
+            </a:pPr>
+            <a:r>
+              <a:rPr lang="en-US" sz="4000" b="1" dirty="0">
+                <a:solidFill>
+                  <a:srgbClr val="1565C0"/>
+                </a:solidFill>
+                <a:latin typeface="Calibri" pitchFamily="34" charset="0"/>
+                <a:ea typeface="Calibri" pitchFamily="34" charset="-122"/>
+                <a:cs typeface="Calibri" pitchFamily="34" charset="-120"/>
+              </a:rPr>
+              <a:t>?</a:t>
+            </a:r>
+            <a:endParaRPr lang="en-US" sz="4000" dirty="0"/>
+          </a:p>
+        </p:txBody>
+      </p:sp>
+      <p:sp>
+        <p:nvSpPr>
+          <p:cNvPr id="9" name="Text 7"/>
+          <p:cNvSpPr/>
+          <p:nvPr/>
+        </p:nvSpPr>
+        <p:spPr>
+          <a:xfrm>
+            <a:off x="1618488" y="4553712"/>
+            <a:ext cx="9686239" cy="1325880"/>
+          </a:xfrm>
+          <a:prstGeom prst="rect">
+            <a:avLst/>
+          </a:prstGeom>
+          <a:noFill/>
+          <a:ln/>
+        </p:spPr>
+        <p:txBody>
+          <a:bodyPr wrap="square" lIns="0" tIns="0" rIns="0" bIns="0" rtlCol="0" anchor="ctr"/>
+          <a:lstStyle/>
+          <a:p>
+            <a:pPr algn="l" indent="0" marL="0">
+              <a:buNone/>
+            </a:pPr>
+            <a:r>
+              <a:rPr lang="en-US" sz="1500" b="1" dirty="0">
+                <a:solidFill>
+                  <a:srgbClr val="FFFFFF"/>
+                </a:solidFill>
+                <a:latin typeface="Calibri" pitchFamily="34" charset="0"/>
+                <a:ea typeface="Calibri" pitchFamily="34" charset="-122"/>
+                <a:cs typeface="Calibri" pitchFamily="34" charset="-120"/>
+              </a:rPr>
+              <a:t>What SPEP pattern is this, and what is the mechanism?</a:t>
+            </a:r>
+            <a:endParaRPr lang="en-US" sz="1500" dirty="0"/>
+          </a:p>
+        </p:txBody>
+      </p:sp>
+      <p:sp>
+        <p:nvSpPr>
+          <p:cNvPr id="10" name="Text 8"/>
           <p:cNvSpPr/>
           <p:nvPr/>
         </p:nvSpPr>
@@ -6408,7 +6896,7 @@
       </p:sp>
       <p:sp>
         <p:nvSpPr>
-          <p:cNvPr id="9" name="Text 7"/>
+          <p:cNvPr id="11" name="Text 9"/>
           <p:cNvSpPr/>
           <p:nvPr/>
         </p:nvSpPr>
@@ -6538,7 +7026,7 @@
                 <a:ea typeface="Calibri" pitchFamily="34" charset="-122"/>
                 <a:cs typeface="Calibri" pitchFamily="34" charset="-120"/>
               </a:rPr>
-              <a:t>CLINICAL CHEMISTRY   ·   BOARD REVIEW  ·  Q1</a:t>
+              <a:t>CLINICAL CHEMISTRY   ·   CASE 2  ·  RESOLUTION</a:t>
             </a:r>
             <a:endParaRPr lang="en-US" sz="1100" dirty="0"/>
           </a:p>
@@ -6569,7 +7057,7 @@
               <a:buNone/>
             </a:pPr>
             <a:r>
-              <a:rPr lang="en-US" sz="2600" b="1" dirty="0">
+              <a:rPr lang="en-US" sz="3000" b="1" dirty="0">
                 <a:solidFill>
                   <a:srgbClr val="0E3A5F"/>
                 </a:solidFill>
@@ -6577,9 +7065,9 @@
                 <a:ea typeface="Calibri" pitchFamily="34" charset="-122"/>
                 <a:cs typeface="Calibri" pitchFamily="34" charset="-120"/>
               </a:rPr>
-              <a:t>Board-Style Review</a:t>
-            </a:r>
-            <a:endParaRPr lang="en-US" sz="2600" dirty="0"/>
+              <a:t>Case 2: Nephrotic SPEP Pattern</a:t>
+            </a:r>
+            <a:endParaRPr lang="en-US" sz="3000" dirty="0"/>
           </a:p>
         </p:txBody>
       </p:sp>
@@ -6591,8 +7079,8 @@
         </p:nvSpPr>
         <p:spPr>
           <a:xfrm>
-            <a:off x="566928" y="1417320"/>
-            <a:ext cx="11057839" cy="914400"/>
+            <a:off x="566928" y="1554480"/>
+            <a:ext cx="6413547" cy="4023360"/>
           </a:xfrm>
           <a:prstGeom prst="rect">
             <a:avLst/>
@@ -6604,14 +7092,15 @@
           <a:bodyPr wrap="square" lIns="0" tIns="0" rIns="0" bIns="0" rtlCol="0" anchor="t"/>
           <a:lstStyle/>
           <a:p>
-            <a:pPr algn="l" indent="0" marL="0">
-              <a:lnSpc>
-                <a:spcPct val="105000"/>
-              </a:lnSpc>
-              <a:buNone/>
-            </a:pPr>
-            <a:r>
-              <a:rPr lang="en-US" sz="1450" b="1" dirty="0">
+            <a:pPr algn="l" marL="177800" indent="-177800">
+              <a:spcAft>
+                <a:spcPts val="900"/>
+              </a:spcAft>
+              <a:buSzPct val="100000"/>
+              <a:buChar char="•"/>
+            </a:pPr>
+            <a:r>
+              <a:rPr lang="en-US" sz="1400" b="1" dirty="0">
                 <a:solidFill>
                   <a:srgbClr val="1B2A38"/>
                 </a:solidFill>
@@ -6619,41 +7108,20 @@
                 <a:ea typeface="Calibri" pitchFamily="34" charset="-122"/>
                 <a:cs typeface="Calibri" pitchFamily="34" charset="-120"/>
               </a:rPr>
-              <a:t>Which single test is the most sensitive initial screen for thyroid dysfunction in an ambulatory patient?</a:t>
-            </a:r>
-            <a:endParaRPr lang="en-US" sz="1450" dirty="0"/>
-          </a:p>
-        </p:txBody>
-      </p:sp>
-      <p:sp>
-        <p:nvSpPr>
-          <p:cNvPr id="5" name="Text 3"/>
-          <p:cNvSpPr/>
-          <p:nvPr/>
-        </p:nvSpPr>
-        <p:spPr>
-          <a:xfrm>
-            <a:off x="658368" y="2395728"/>
-            <a:ext cx="6192390" cy="3017520"/>
-          </a:xfrm>
-          <a:prstGeom prst="rect">
-            <a:avLst/>
-          </a:prstGeom>
-          <a:noFill/>
-          <a:ln/>
-        </p:spPr>
-        <p:txBody>
-          <a:bodyPr wrap="square" lIns="0" tIns="0" rIns="0" bIns="0" rtlCol="0" anchor="t"/>
-          <a:lstStyle/>
-          <a:p>
-            <a:pPr algn="l" indent="0" marL="0">
+              <a:t>Nephrotic pattern — urinary loss of smaller proteins (albumin, immunoglobulins) with retention of large α₂-macroglobulin.</a:t>
+            </a:r>
+            <a:endParaRPr lang="en-US" sz="1400" dirty="0"/>
+          </a:p>
+          <a:p>
+            <a:pPr algn="l" marL="177800" indent="-177800">
               <a:spcAft>
-                <a:spcPts val="600"/>
+                <a:spcPts val="900"/>
               </a:spcAft>
-              <a:buNone/>
-            </a:pPr>
-            <a:r>
-              <a:rPr lang="en-US" sz="1350" dirty="0">
+              <a:buSzPct val="100000"/>
+              <a:buChar char="•"/>
+            </a:pPr>
+            <a:r>
+              <a:rPr lang="en-US" sz="1400" dirty="0">
                 <a:solidFill>
                   <a:srgbClr val="33444F"/>
                 </a:solidFill>
@@ -6661,19 +7129,20 @@
                 <a:ea typeface="Calibri" pitchFamily="34" charset="-122"/>
                 <a:cs typeface="Calibri" pitchFamily="34" charset="-120"/>
               </a:rPr>
-              <a:t>A. Total T4</a:t>
-            </a:r>
-            <a:endParaRPr lang="en-US" sz="1350" dirty="0"/>
-          </a:p>
-          <a:p>
-            <a:pPr algn="l" indent="0" marL="0">
+              <a:t>Low albumin + prominent α₂ + low γ is characteristic.</a:t>
+            </a:r>
+            <a:endParaRPr lang="en-US" sz="1400" dirty="0"/>
+          </a:p>
+          <a:p>
+            <a:pPr algn="l" marL="177800" indent="-177800">
               <a:spcAft>
-                <a:spcPts val="600"/>
+                <a:spcPts val="900"/>
               </a:spcAft>
-              <a:buNone/>
-            </a:pPr>
-            <a:r>
-              <a:rPr lang="en-US" sz="1350" dirty="0">
+              <a:buSzPct val="100000"/>
+              <a:buChar char="•"/>
+            </a:pPr>
+            <a:r>
+              <a:rPr lang="en-US" sz="1400" dirty="0">
                 <a:solidFill>
                   <a:srgbClr val="33444F"/>
                 </a:solidFill>
@@ -6681,39 +7150,20 @@
                 <a:ea typeface="Calibri" pitchFamily="34" charset="-122"/>
                 <a:cs typeface="Calibri" pitchFamily="34" charset="-120"/>
               </a:rPr>
-              <a:t>B. Free T3</a:t>
-            </a:r>
-            <a:endParaRPr lang="en-US" sz="1350" dirty="0"/>
-          </a:p>
-          <a:p>
-            <a:pPr algn="l" indent="0" marL="0">
+              <a:t>Confirms heavy selective proteinuria.</a:t>
+            </a:r>
+            <a:endParaRPr lang="en-US" sz="1400" dirty="0"/>
+          </a:p>
+          <a:p>
+            <a:pPr algn="l" marL="177800" indent="-177800">
               <a:spcAft>
-                <a:spcPts val="600"/>
+                <a:spcPts val="900"/>
               </a:spcAft>
-              <a:buNone/>
-            </a:pPr>
-            <a:r>
-              <a:rPr lang="en-US" sz="1350" b="1" dirty="0">
-                <a:solidFill>
-                  <a:srgbClr val="0D4A92"/>
-                </a:solidFill>
-                <a:latin typeface="Calibri" pitchFamily="34" charset="0"/>
-                <a:ea typeface="Calibri" pitchFamily="34" charset="-122"/>
-                <a:cs typeface="Calibri" pitchFamily="34" charset="-120"/>
-              </a:rPr>
-              <a:t>C. TSH</a:t>
-            </a:r>
-            <a:endParaRPr lang="en-US" sz="1350" dirty="0"/>
-          </a:p>
-          <a:p>
-            <a:pPr algn="l" indent="0" marL="0">
-              <a:spcAft>
-                <a:spcPts val="600"/>
-              </a:spcAft>
-              <a:buNone/>
-            </a:pPr>
-            <a:r>
-              <a:rPr lang="en-US" sz="1350" dirty="0">
+              <a:buSzPct val="100000"/>
+              <a:buChar char="•"/>
+            </a:pPr>
+            <a:r>
+              <a:rPr lang="en-US" sz="1400" dirty="0">
                 <a:solidFill>
                   <a:srgbClr val="33444F"/>
                 </a:solidFill>
@@ -6721,46 +7171,26 @@
                 <a:ea typeface="Calibri" pitchFamily="34" charset="-122"/>
                 <a:cs typeface="Calibri" pitchFamily="34" charset="-120"/>
               </a:rPr>
-              <a:t>D. Thyroid antibodies</a:t>
-            </a:r>
-            <a:endParaRPr lang="en-US" sz="1350" dirty="0"/>
-          </a:p>
-          <a:p>
-            <a:pPr algn="l" indent="0" marL="0">
-              <a:spcAft>
-                <a:spcPts val="600"/>
-              </a:spcAft>
-              <a:buNone/>
-            </a:pPr>
-            <a:r>
-              <a:rPr lang="en-US" sz="1350" dirty="0">
-                <a:solidFill>
-                  <a:srgbClr val="33444F"/>
-                </a:solidFill>
-                <a:latin typeface="Calibri" pitchFamily="34" charset="0"/>
-                <a:ea typeface="Calibri" pitchFamily="34" charset="-122"/>
-                <a:cs typeface="Calibri" pitchFamily="34" charset="-120"/>
-              </a:rPr>
-              <a:t>E. Reverse T3</a:t>
-            </a:r>
-            <a:endParaRPr lang="en-US" sz="1350" dirty="0"/>
-          </a:p>
-        </p:txBody>
-      </p:sp>
-      <p:sp>
-        <p:nvSpPr>
-          <p:cNvPr id="6" name="Shape 4"/>
-          <p:cNvSpPr/>
-          <p:nvPr/>
-        </p:nvSpPr>
-        <p:spPr>
-          <a:xfrm>
-            <a:off x="7201632" y="2395728"/>
-            <a:ext cx="4423136" cy="3246120"/>
+              <a:t>Correlate with urine protein and clinical nephrotic syndrome.</a:t>
+            </a:r>
+            <a:endParaRPr lang="en-US" sz="1400" dirty="0"/>
+          </a:p>
+        </p:txBody>
+      </p:sp>
+      <p:sp>
+        <p:nvSpPr>
+          <p:cNvPr id="5" name="Shape 3"/>
+          <p:cNvSpPr/>
+          <p:nvPr/>
+        </p:nvSpPr>
+        <p:spPr>
+          <a:xfrm>
+            <a:off x="7422788" y="1554480"/>
+            <a:ext cx="4201979" cy="3977640"/>
           </a:xfrm>
           <a:prstGeom prst="roundRect">
             <a:avLst>
-              <a:gd name="adj" fmla="val 2535"/>
+              <a:gd name="adj" fmla="val 2069"/>
             </a:avLst>
           </a:prstGeom>
           <a:solidFill>
@@ -6778,67 +7208,53 @@
       </p:sp>
       <p:sp>
         <p:nvSpPr>
+          <p:cNvPr id="6" name="Text 4"/>
+          <p:cNvSpPr/>
+          <p:nvPr/>
+        </p:nvSpPr>
+        <p:spPr>
+          <a:xfrm>
+            <a:off x="7660532" y="1755648"/>
+            <a:ext cx="3744779" cy="310896"/>
+          </a:xfrm>
+          <a:prstGeom prst="rect">
+            <a:avLst/>
+          </a:prstGeom>
+          <a:noFill/>
+          <a:ln/>
+        </p:spPr>
+        <p:txBody>
+          <a:bodyPr wrap="square" lIns="0" tIns="0" rIns="0" bIns="0" rtlCol="0" anchor="ctr"/>
+          <a:lstStyle/>
+          <a:p>
+            <a:pPr indent="0" marL="0">
+              <a:buNone/>
+            </a:pPr>
+            <a:r>
+              <a:rPr lang="en-US" sz="1100" b="1" spc="140" kern="0" dirty="0">
+                <a:solidFill>
+                  <a:srgbClr val="1565C0"/>
+                </a:solidFill>
+                <a:latin typeface="Calibri" pitchFamily="34" charset="0"/>
+                <a:ea typeface="Calibri" pitchFamily="34" charset="-122"/>
+                <a:cs typeface="Calibri" pitchFamily="34" charset="-120"/>
+              </a:rPr>
+              <a:t>TEACHING POINT</a:t>
+            </a:r>
+            <a:endParaRPr lang="en-US" sz="1100" dirty="0"/>
+          </a:p>
+        </p:txBody>
+      </p:sp>
+      <p:sp>
+        <p:nvSpPr>
           <p:cNvPr id="7" name="Text 5"/>
           <p:cNvSpPr/>
           <p:nvPr/>
         </p:nvSpPr>
         <p:spPr>
           <a:xfrm>
-            <a:off x="7439376" y="2578608"/>
-            <a:ext cx="3965936" cy="457200"/>
-          </a:xfrm>
-          <a:prstGeom prst="rect">
-            <a:avLst/>
-          </a:prstGeom>
-          <a:noFill/>
-          <a:ln/>
-        </p:spPr>
-        <p:txBody>
-          <a:bodyPr wrap="square" lIns="0" tIns="0" rIns="0" bIns="0" rtlCol="0" anchor="ctr"/>
-          <a:lstStyle/>
-          <a:p>
-            <a:pPr indent="0" marL="0">
-              <a:buNone/>
-            </a:pPr>
-            <a:r>
-              <a:rPr lang="en-US" sz="1500" b="1" dirty="0">
-                <a:solidFill>
-                  <a:srgbClr val="1565C0"/>
-                </a:solidFill>
-                <a:latin typeface="Calibri" pitchFamily="34" charset="0"/>
-                <a:ea typeface="Calibri" pitchFamily="34" charset="-122"/>
-                <a:cs typeface="Calibri" pitchFamily="34" charset="-120"/>
-              </a:rPr>
-              <a:t>ANSWER  </a:t>
-            </a:r>
-            <a:pPr indent="0" marL="0">
-              <a:buNone/>
-            </a:pPr>
-            <a:r>
-              <a:rPr lang="en-US" sz="1500" b="1" dirty="0">
-                <a:solidFill>
-                  <a:srgbClr val="1B2A38"/>
-                </a:solidFill>
-                <a:latin typeface="Calibri" pitchFamily="34" charset="0"/>
-                <a:ea typeface="Calibri" pitchFamily="34" charset="-122"/>
-                <a:cs typeface="Calibri" pitchFamily="34" charset="-120"/>
-              </a:rPr>
-              <a:t>C — TSH</a:t>
-            </a:r>
-            <a:endParaRPr lang="en-US" sz="1500" dirty="0"/>
-          </a:p>
-        </p:txBody>
-      </p:sp>
-      <p:sp>
-        <p:nvSpPr>
-          <p:cNvPr id="8" name="Text 6"/>
-          <p:cNvSpPr/>
-          <p:nvPr/>
-        </p:nvSpPr>
-        <p:spPr>
-          <a:xfrm>
-            <a:off x="7439376" y="3127248"/>
-            <a:ext cx="3947648" cy="2377440"/>
+            <a:off x="7660532" y="2121408"/>
+            <a:ext cx="3726491" cy="3291840"/>
           </a:xfrm>
           <a:prstGeom prst="rect">
             <a:avLst/>
@@ -6852,12 +7268,12 @@
           <a:p>
             <a:pPr algn="l" indent="0" marL="0">
               <a:lnSpc>
-                <a:spcPct val="108000"/>
+                <a:spcPct val="110000"/>
               </a:lnSpc>
               <a:buNone/>
             </a:pPr>
             <a:r>
-              <a:rPr lang="en-US" sz="1250" dirty="0">
+              <a:rPr lang="en-US" sz="1350" dirty="0">
                 <a:solidFill>
                   <a:srgbClr val="33444F"/>
                 </a:solidFill>
@@ -6865,15 +7281,15 @@
                 <a:ea typeface="Calibri" pitchFamily="34" charset="-122"/>
                 <a:cs typeface="Calibri" pitchFamily="34" charset="-120"/>
               </a:rPr>
-              <a:t>Because of the log-linear pituitary feedback, small changes in thyroid hormone cause large TSH changes, making TSH the most sensitive first-line screen (barring central disease or interference).</a:t>
-            </a:r>
-            <a:endParaRPr lang="en-US" sz="1250" dirty="0"/>
-          </a:p>
-        </p:txBody>
-      </p:sp>
-      <p:sp>
-        <p:nvSpPr>
-          <p:cNvPr id="9" name="Text 7"/>
+              <a:t>SPEP patterns are diagnostic: the nephrotic pattern (↓albumin, ↑α₂, ↓γ) reflects size-selective renal protein loss.</a:t>
+            </a:r>
+            <a:endParaRPr lang="en-US" sz="1350" dirty="0"/>
+          </a:p>
+        </p:txBody>
+      </p:sp>
+      <p:sp>
+        <p:nvSpPr>
+          <p:cNvPr id="8" name="Text 6"/>
           <p:cNvSpPr/>
           <p:nvPr/>
         </p:nvSpPr>
@@ -6912,7 +7328,7 @@
       </p:sp>
       <p:sp>
         <p:nvSpPr>
-          <p:cNvPr id="10" name="Text 8"/>
+          <p:cNvPr id="9" name="Text 7"/>
           <p:cNvSpPr/>
           <p:nvPr/>
         </p:nvSpPr>
@@ -7042,7 +7458,7 @@
                 <a:ea typeface="Calibri" pitchFamily="34" charset="-122"/>
                 <a:cs typeface="Calibri" pitchFamily="34" charset="-120"/>
               </a:rPr>
-              <a:t>CLINICAL CHEMISTRY   ·   BOARD REVIEW  ·  Q2</a:t>
+              <a:t>CLINICAL CHEMISTRY   ·   CASE 3</a:t>
             </a:r>
             <a:endParaRPr lang="en-US" sz="1100" dirty="0"/>
           </a:p>
@@ -7073,7 +7489,7 @@
               <a:buNone/>
             </a:pPr>
             <a:r>
-              <a:rPr lang="en-US" sz="2600" b="1" dirty="0">
+              <a:rPr lang="en-US" sz="3000" b="1" dirty="0">
                 <a:solidFill>
                   <a:srgbClr val="0E3A5F"/>
                 </a:solidFill>
@@ -7081,190 +7497,26 @@
                 <a:ea typeface="Calibri" pitchFamily="34" charset="-122"/>
                 <a:cs typeface="Calibri" pitchFamily="34" charset="-120"/>
               </a:rPr>
-              <a:t>Board-Style Review</a:t>
-            </a:r>
-            <a:endParaRPr lang="en-US" sz="2600" dirty="0"/>
-          </a:p>
-        </p:txBody>
-      </p:sp>
-      <p:sp>
-        <p:nvSpPr>
-          <p:cNvPr id="4" name="Text 2"/>
-          <p:cNvSpPr/>
-          <p:nvPr/>
-        </p:nvSpPr>
-        <p:spPr>
-          <a:xfrm>
-            <a:off x="566928" y="1417320"/>
-            <a:ext cx="11057839" cy="914400"/>
-          </a:xfrm>
-          <a:prstGeom prst="rect">
-            <a:avLst/>
-          </a:prstGeom>
-          <a:noFill/>
-          <a:ln/>
-        </p:spPr>
-        <p:txBody>
-          <a:bodyPr wrap="square" lIns="0" tIns="0" rIns="0" bIns="0" rtlCol="0" anchor="t"/>
-          <a:lstStyle/>
-          <a:p>
-            <a:pPr algn="l" indent="0" marL="0">
-              <a:lnSpc>
-                <a:spcPct val="105000"/>
-              </a:lnSpc>
-              <a:buNone/>
-            </a:pPr>
-            <a:r>
-              <a:rPr lang="en-US" sz="1450" b="1" dirty="0">
-                <a:solidFill>
-                  <a:srgbClr val="1B2A38"/>
-                </a:solidFill>
-                <a:latin typeface="Calibri" pitchFamily="34" charset="0"/>
-                <a:ea typeface="Calibri" pitchFamily="34" charset="-122"/>
-                <a:cs typeface="Calibri" pitchFamily="34" charset="-120"/>
-              </a:rPr>
-              <a:t>A discrete spike in the gamma region on SPEP should prompt which reflex test?</a:t>
-            </a:r>
-            <a:endParaRPr lang="en-US" sz="1450" dirty="0"/>
-          </a:p>
-        </p:txBody>
-      </p:sp>
-      <p:sp>
-        <p:nvSpPr>
-          <p:cNvPr id="5" name="Text 3"/>
-          <p:cNvSpPr/>
-          <p:nvPr/>
-        </p:nvSpPr>
-        <p:spPr>
-          <a:xfrm>
-            <a:off x="658368" y="2395728"/>
-            <a:ext cx="6192390" cy="3017520"/>
-          </a:xfrm>
-          <a:prstGeom prst="rect">
-            <a:avLst/>
-          </a:prstGeom>
-          <a:noFill/>
-          <a:ln/>
-        </p:spPr>
-        <p:txBody>
-          <a:bodyPr wrap="square" lIns="0" tIns="0" rIns="0" bIns="0" rtlCol="0" anchor="t"/>
-          <a:lstStyle/>
-          <a:p>
-            <a:pPr algn="l" indent="0" marL="0">
-              <a:spcAft>
-                <a:spcPts val="600"/>
-              </a:spcAft>
-              <a:buNone/>
-            </a:pPr>
-            <a:r>
-              <a:rPr lang="en-US" sz="1350" dirty="0">
-                <a:solidFill>
-                  <a:srgbClr val="33444F"/>
-                </a:solidFill>
-                <a:latin typeface="Calibri" pitchFamily="34" charset="0"/>
-                <a:ea typeface="Calibri" pitchFamily="34" charset="-122"/>
-                <a:cs typeface="Calibri" pitchFamily="34" charset="-120"/>
-              </a:rPr>
-              <a:t>A. Repeat SPEP</a:t>
-            </a:r>
-            <a:endParaRPr lang="en-US" sz="1350" dirty="0"/>
-          </a:p>
-          <a:p>
-            <a:pPr algn="l" indent="0" marL="0">
-              <a:spcAft>
-                <a:spcPts val="600"/>
-              </a:spcAft>
-              <a:buNone/>
-            </a:pPr>
-            <a:r>
-              <a:rPr lang="en-US" sz="1350" b="1" dirty="0">
-                <a:solidFill>
-                  <a:srgbClr val="0D4A92"/>
-                </a:solidFill>
-                <a:latin typeface="Calibri" pitchFamily="34" charset="0"/>
-                <a:ea typeface="Calibri" pitchFamily="34" charset="-122"/>
-                <a:cs typeface="Calibri" pitchFamily="34" charset="-120"/>
-              </a:rPr>
-              <a:t>B. Immunofixation electrophoresis</a:t>
-            </a:r>
-            <a:endParaRPr lang="en-US" sz="1350" dirty="0"/>
-          </a:p>
-          <a:p>
-            <a:pPr algn="l" indent="0" marL="0">
-              <a:spcAft>
-                <a:spcPts val="600"/>
-              </a:spcAft>
-              <a:buNone/>
-            </a:pPr>
-            <a:r>
-              <a:rPr lang="en-US" sz="1350" dirty="0">
-                <a:solidFill>
-                  <a:srgbClr val="33444F"/>
-                </a:solidFill>
-                <a:latin typeface="Calibri" pitchFamily="34" charset="0"/>
-                <a:ea typeface="Calibri" pitchFamily="34" charset="-122"/>
-                <a:cs typeface="Calibri" pitchFamily="34" charset="-120"/>
-              </a:rPr>
-              <a:t>C. C-reactive protein</a:t>
-            </a:r>
-            <a:endParaRPr lang="en-US" sz="1350" dirty="0"/>
-          </a:p>
-          <a:p>
-            <a:pPr algn="l" indent="0" marL="0">
-              <a:spcAft>
-                <a:spcPts val="600"/>
-              </a:spcAft>
-              <a:buNone/>
-            </a:pPr>
-            <a:r>
-              <a:rPr lang="en-US" sz="1350" dirty="0">
-                <a:solidFill>
-                  <a:srgbClr val="33444F"/>
-                </a:solidFill>
-                <a:latin typeface="Calibri" pitchFamily="34" charset="0"/>
-                <a:ea typeface="Calibri" pitchFamily="34" charset="-122"/>
-                <a:cs typeface="Calibri" pitchFamily="34" charset="-120"/>
-              </a:rPr>
-              <a:t>D. Serum iron</a:t>
-            </a:r>
-            <a:endParaRPr lang="en-US" sz="1350" dirty="0"/>
-          </a:p>
-          <a:p>
-            <a:pPr algn="l" indent="0" marL="0">
-              <a:spcAft>
-                <a:spcPts val="600"/>
-              </a:spcAft>
-              <a:buNone/>
-            </a:pPr>
-            <a:r>
-              <a:rPr lang="en-US" sz="1350" dirty="0">
-                <a:solidFill>
-                  <a:srgbClr val="33444F"/>
-                </a:solidFill>
-                <a:latin typeface="Calibri" pitchFamily="34" charset="0"/>
-                <a:ea typeface="Calibri" pitchFamily="34" charset="-122"/>
-                <a:cs typeface="Calibri" pitchFamily="34" charset="-120"/>
-              </a:rPr>
-              <a:t>E. Haptoglobin</a:t>
-            </a:r>
-            <a:endParaRPr lang="en-US" sz="1350" dirty="0"/>
-          </a:p>
-        </p:txBody>
-      </p:sp>
-      <p:sp>
-        <p:nvSpPr>
-          <p:cNvPr id="6" name="Shape 4"/>
-          <p:cNvSpPr/>
-          <p:nvPr/>
-        </p:nvSpPr>
-        <p:spPr>
-          <a:xfrm>
-            <a:off x="7201632" y="2395728"/>
-            <a:ext cx="4423136" cy="3246120"/>
+              <a:t>Case 3</a:t>
+            </a:r>
+            <a:endParaRPr lang="en-US" sz="3000" dirty="0"/>
+          </a:p>
+        </p:txBody>
+      </p:sp>
+      <p:sp>
+        <p:nvSpPr>
+          <p:cNvPr id="4" name="Shape 2"/>
+          <p:cNvSpPr/>
+          <p:nvPr/>
+        </p:nvSpPr>
+        <p:spPr>
+          <a:xfrm>
+            <a:off x="566928" y="1517904"/>
+            <a:ext cx="11057839" cy="2788920"/>
           </a:xfrm>
           <a:prstGeom prst="roundRect">
             <a:avLst>
-              <a:gd name="adj" fmla="val 2535"/>
+              <a:gd name="adj" fmla="val 2951"/>
             </a:avLst>
           </a:prstGeom>
           <a:solidFill>
@@ -7282,14 +7534,14 @@
       </p:sp>
       <p:sp>
         <p:nvSpPr>
-          <p:cNvPr id="7" name="Text 5"/>
-          <p:cNvSpPr/>
-          <p:nvPr/>
-        </p:nvSpPr>
-        <p:spPr>
-          <a:xfrm>
-            <a:off x="7439376" y="2578608"/>
-            <a:ext cx="3965936" cy="457200"/>
+          <p:cNvPr id="5" name="Text 3"/>
+          <p:cNvSpPr/>
+          <p:nvPr/>
+        </p:nvSpPr>
+        <p:spPr>
+          <a:xfrm>
+            <a:off x="841248" y="1700784"/>
+            <a:ext cx="5486400" cy="292608"/>
           </a:xfrm>
           <a:prstGeom prst="rect">
             <a:avLst/>
@@ -7305,7 +7557,7 @@
               <a:buNone/>
             </a:pPr>
             <a:r>
-              <a:rPr lang="en-US" sz="1500" b="1" dirty="0">
+              <a:rPr lang="en-US" sz="1100" b="1" spc="150" kern="0" dirty="0">
                 <a:solidFill>
                   <a:srgbClr val="1565C0"/>
                 </a:solidFill>
@@ -7313,36 +7565,22 @@
                 <a:ea typeface="Calibri" pitchFamily="34" charset="-122"/>
                 <a:cs typeface="Calibri" pitchFamily="34" charset="-120"/>
               </a:rPr>
-              <a:t>ANSWER  </a:t>
-            </a:r>
-            <a:pPr indent="0" marL="0">
-              <a:buNone/>
-            </a:pPr>
-            <a:r>
-              <a:rPr lang="en-US" sz="1500" b="1" dirty="0">
-                <a:solidFill>
-                  <a:srgbClr val="1B2A38"/>
-                </a:solidFill>
-                <a:latin typeface="Calibri" pitchFamily="34" charset="0"/>
-                <a:ea typeface="Calibri" pitchFamily="34" charset="-122"/>
-                <a:cs typeface="Calibri" pitchFamily="34" charset="-120"/>
-              </a:rPr>
-              <a:t>B — Immunofixation</a:t>
-            </a:r>
-            <a:endParaRPr lang="en-US" sz="1500" dirty="0"/>
-          </a:p>
-        </p:txBody>
-      </p:sp>
-      <p:sp>
-        <p:nvSpPr>
-          <p:cNvPr id="8" name="Text 6"/>
-          <p:cNvSpPr/>
-          <p:nvPr/>
-        </p:nvSpPr>
-        <p:spPr>
-          <a:xfrm>
-            <a:off x="7439376" y="3127248"/>
-            <a:ext cx="3947648" cy="2377440"/>
+              <a:t>CLINICAL VIGNETTE</a:t>
+            </a:r>
+            <a:endParaRPr lang="en-US" sz="1100" dirty="0"/>
+          </a:p>
+        </p:txBody>
+      </p:sp>
+      <p:sp>
+        <p:nvSpPr>
+          <p:cNvPr id="6" name="Text 4"/>
+          <p:cNvSpPr/>
+          <p:nvPr/>
+        </p:nvSpPr>
+        <p:spPr>
+          <a:xfrm>
+            <a:off x="841248" y="2029968"/>
+            <a:ext cx="10509199" cy="2148840"/>
           </a:xfrm>
           <a:prstGeom prst="rect">
             <a:avLst/>
@@ -7361,7 +7599,7 @@
               <a:buNone/>
             </a:pPr>
             <a:r>
-              <a:rPr lang="en-US" sz="1250" dirty="0">
+              <a:rPr lang="en-US" sz="1450" dirty="0">
                 <a:solidFill>
                   <a:srgbClr val="33444F"/>
                 </a:solidFill>
@@ -7369,15 +7607,122 @@
                 <a:ea typeface="Calibri" pitchFamily="34" charset="-122"/>
                 <a:cs typeface="Calibri" pitchFamily="34" charset="-120"/>
               </a:rPr>
-              <a:t>Immunofixation identifies the heavy- and light-chain type of the monoclonal protein, confirming and characterizing the M-spike.</a:t>
-            </a:r>
-            <a:endParaRPr lang="en-US" sz="1250" dirty="0"/>
+              <a:t>An older patient with anemia and renal impairment has a normal SPEP but hypogammaglobulinemia. Serum free light chains show markedly elevated κ with a very high κ/λ ratio; urine IFE shows free κ.</a:t>
+            </a:r>
+            <a:endParaRPr lang="en-US" sz="1450" dirty="0"/>
+          </a:p>
+        </p:txBody>
+      </p:sp>
+      <p:sp>
+        <p:nvSpPr>
+          <p:cNvPr id="7" name="Shape 5"/>
+          <p:cNvSpPr/>
+          <p:nvPr/>
+        </p:nvSpPr>
+        <p:spPr>
+          <a:xfrm>
+            <a:off x="566928" y="4553712"/>
+            <a:ext cx="11057839" cy="1325880"/>
+          </a:xfrm>
+          <a:prstGeom prst="roundRect">
+            <a:avLst>
+              <a:gd name="adj" fmla="val 6207"/>
+            </a:avLst>
+          </a:prstGeom>
+          <a:solidFill>
+            <a:srgbClr val="0E3A5F"/>
+          </a:solidFill>
+          <a:ln/>
+          <a:effectLst>
+            <a:outerShdw sx="100000" sy="100000" kx="0" ky="0" algn="bl" rotWithShape="0" blurRad="88900" dist="25400" dir="5400000">
+              <a:srgbClr val="22303C">
+                <a:alpha val="12000"/>
+              </a:srgbClr>
+            </a:outerShdw>
+          </a:effectLst>
+        </p:spPr>
+      </p:sp>
+      <p:sp>
+        <p:nvSpPr>
+          <p:cNvPr id="8" name="Text 6"/>
+          <p:cNvSpPr/>
+          <p:nvPr/>
+        </p:nvSpPr>
+        <p:spPr>
+          <a:xfrm>
+            <a:off x="822960" y="4681728"/>
+            <a:ext cx="640080" cy="960120"/>
+          </a:xfrm>
+          <a:prstGeom prst="rect">
+            <a:avLst/>
+          </a:prstGeom>
+          <a:noFill/>
+          <a:ln/>
+        </p:spPr>
+        <p:txBody>
+          <a:bodyPr wrap="square" lIns="0" tIns="0" rIns="0" bIns="0" rtlCol="0" anchor="ctr"/>
+          <a:lstStyle/>
+          <a:p>
+            <a:pPr algn="ctr" indent="0" marL="0">
+              <a:buNone/>
+            </a:pPr>
+            <a:r>
+              <a:rPr lang="en-US" sz="4000" b="1" dirty="0">
+                <a:solidFill>
+                  <a:srgbClr val="1565C0"/>
+                </a:solidFill>
+                <a:latin typeface="Calibri" pitchFamily="34" charset="0"/>
+                <a:ea typeface="Calibri" pitchFamily="34" charset="-122"/>
+                <a:cs typeface="Calibri" pitchFamily="34" charset="-120"/>
+              </a:rPr>
+              <a:t>?</a:t>
+            </a:r>
+            <a:endParaRPr lang="en-US" sz="4000" dirty="0"/>
           </a:p>
         </p:txBody>
       </p:sp>
       <p:sp>
         <p:nvSpPr>
           <p:cNvPr id="9" name="Text 7"/>
+          <p:cNvSpPr/>
+          <p:nvPr/>
+        </p:nvSpPr>
+        <p:spPr>
+          <a:xfrm>
+            <a:off x="1618488" y="4553712"/>
+            <a:ext cx="9686239" cy="1325880"/>
+          </a:xfrm>
+          <a:prstGeom prst="rect">
+            <a:avLst/>
+          </a:prstGeom>
+          <a:noFill/>
+          <a:ln/>
+        </p:spPr>
+        <p:txBody>
+          <a:bodyPr wrap="square" lIns="0" tIns="0" rIns="0" bIns="0" rtlCol="0" anchor="ctr"/>
+          <a:lstStyle/>
+          <a:p>
+            <a:pPr algn="l" indent="0" marL="0">
+              <a:buNone/>
+            </a:pPr>
+            <a:r>
+              <a:rPr lang="en-US" sz="1500" b="1" dirty="0">
+                <a:solidFill>
+                  <a:srgbClr val="FFFFFF"/>
+                </a:solidFill>
+                <a:latin typeface="Calibri" pitchFamily="34" charset="0"/>
+                <a:ea typeface="Calibri" pitchFamily="34" charset="-122"/>
+                <a:cs typeface="Calibri" pitchFamily="34" charset="-120"/>
+              </a:rPr>
+              <a:t>Diagnosis pathway, and why was the SPEP nearly normal?</a:t>
+            </a:r>
+            <a:endParaRPr lang="en-US" sz="1500" dirty="0"/>
+          </a:p>
+        </p:txBody>
+      </p:sp>
+      <p:sp>
+        <p:nvSpPr>
+          <p:cNvPr id="10" name="Text 8"/>
           <p:cNvSpPr/>
           <p:nvPr/>
         </p:nvSpPr>
@@ -7416,7 +7761,7 @@
       </p:sp>
       <p:sp>
         <p:nvSpPr>
-          <p:cNvPr id="10" name="Text 8"/>
+          <p:cNvPr id="11" name="Text 9"/>
           <p:cNvSpPr/>
           <p:nvPr/>
         </p:nvSpPr>
@@ -7760,7 +8105,7 @@
                 <a:ea typeface="Calibri" pitchFamily="34" charset="-122"/>
                 <a:cs typeface="Calibri" pitchFamily="34" charset="-120"/>
               </a:rPr>
-              <a:t>M-spike</a:t>
+              <a:t>Zones</a:t>
             </a:r>
             <a:endParaRPr lang="en-US" sz="3600" dirty="0"/>
           </a:p>
@@ -7799,7 +8144,7 @@
                 <a:ea typeface="Calibri" pitchFamily="34" charset="-122"/>
                 <a:cs typeface="Calibri" pitchFamily="34" charset="-120"/>
               </a:rPr>
-              <a:t>A discrete SPEP band triggers reflex immunofixation</a:t>
+              <a:t>Each SPEP region maps to specific proteins and diseases</a:t>
             </a:r>
             <a:endParaRPr lang="en-US" sz="1150" dirty="0"/>
           </a:p>
@@ -7977,7 +8322,7 @@
                 <a:ea typeface="Calibri" pitchFamily="34" charset="-122"/>
                 <a:cs typeface="Calibri" pitchFamily="34" charset="-120"/>
               </a:rPr>
-              <a:t>Endocrine and protein testing reward an understanding of feedback axes, dynamic testing, and electrophoretic patterns — and a healthy suspicion for assay interference.</a:t>
+              <a:t>Endocrine and protein testing reward an understanding of feedback axes, dynamic testing, and electrophoretic patterns — and a healthy suspicion for assay interference. The SPEP section follows the department’s own teaching (D. Keren).</a:t>
             </a:r>
             <a:endParaRPr lang="en-US" sz="1450" dirty="0"/>
           </a:p>
@@ -8020,7 +8365,7 @@
                 <a:ea typeface="Calibri" pitchFamily="34" charset="-122"/>
                 <a:cs typeface="Calibri" pitchFamily="34" charset="-120"/>
               </a:rPr>
-              <a:t>Interpret hormones as axes (stimulator + effector together), and proteins as patterns (SPEP/IFE/FLC together), not as isolated numbers.</a:t>
+              <a:t>Interpret hormones as axes (stimulator + effector) and proteins as patterns (SPEP/IFE/FLC together), not as isolated numbers.</a:t>
             </a:r>
             <a:endParaRPr lang="en-US" sz="1300" dirty="0"/>
           </a:p>
@@ -8197,7 +8542,7 @@
                 <a:ea typeface="Calibri" pitchFamily="34" charset="-122"/>
                 <a:cs typeface="Calibri" pitchFamily="34" charset="-120"/>
               </a:rPr>
-              <a:t>CLINICAL CHEMISTRY   ·   BOARD REVIEW  ·  Q3</a:t>
+              <a:t>CLINICAL CHEMISTRY   ·   CASE 3  ·  RESOLUTION</a:t>
             </a:r>
             <a:endParaRPr lang="en-US" sz="1100" dirty="0"/>
           </a:p>
@@ -8228,7 +8573,7 @@
               <a:buNone/>
             </a:pPr>
             <a:r>
-              <a:rPr lang="en-US" sz="2600" b="1" dirty="0">
+              <a:rPr lang="en-US" sz="3000" b="1" dirty="0">
                 <a:solidFill>
                   <a:srgbClr val="0E3A5F"/>
                 </a:solidFill>
@@ -8236,9 +8581,9 @@
                 <a:ea typeface="Calibri" pitchFamily="34" charset="-122"/>
                 <a:cs typeface="Calibri" pitchFamily="34" charset="-120"/>
               </a:rPr>
-              <a:t>Board-Style Review</a:t>
-            </a:r>
-            <a:endParaRPr lang="en-US" sz="2600" dirty="0"/>
+              <a:t>Case 3: Light-Chain Multiple Myeloma</a:t>
+            </a:r>
+            <a:endParaRPr lang="en-US" sz="3000" dirty="0"/>
           </a:p>
         </p:txBody>
       </p:sp>
@@ -8250,8 +8595,8 @@
         </p:nvSpPr>
         <p:spPr>
           <a:xfrm>
-            <a:off x="566928" y="1417320"/>
-            <a:ext cx="11057839" cy="914400"/>
+            <a:off x="566928" y="1554480"/>
+            <a:ext cx="6413547" cy="4023360"/>
           </a:xfrm>
           <a:prstGeom prst="rect">
             <a:avLst/>
@@ -8263,14 +8608,15 @@
           <a:bodyPr wrap="square" lIns="0" tIns="0" rIns="0" bIns="0" rtlCol="0" anchor="t"/>
           <a:lstStyle/>
           <a:p>
-            <a:pPr algn="l" indent="0" marL="0">
-              <a:lnSpc>
-                <a:spcPct val="105000"/>
-              </a:lnSpc>
-              <a:buNone/>
-            </a:pPr>
-            <a:r>
-              <a:rPr lang="en-US" sz="1450" b="1" dirty="0">
+            <a:pPr algn="l" marL="177800" indent="-177800">
+              <a:spcAft>
+                <a:spcPts val="900"/>
+              </a:spcAft>
+              <a:buSzPct val="100000"/>
+              <a:buChar char="•"/>
+            </a:pPr>
+            <a:r>
+              <a:rPr lang="en-US" sz="1400" b="1" dirty="0">
                 <a:solidFill>
                   <a:srgbClr val="1B2A38"/>
                 </a:solidFill>
@@ -8278,41 +8624,20 @@
                 <a:ea typeface="Calibri" pitchFamily="34" charset="-122"/>
                 <a:cs typeface="Calibri" pitchFamily="34" charset="-120"/>
               </a:rPr>
-              <a:t>A patient with suspected light-chain disease has a normal SPEP. Which test best detects clonal light-chain excess?</a:t>
-            </a:r>
-            <a:endParaRPr lang="en-US" sz="1450" dirty="0"/>
-          </a:p>
-        </p:txBody>
-      </p:sp>
-      <p:sp>
-        <p:nvSpPr>
-          <p:cNvPr id="5" name="Text 3"/>
-          <p:cNvSpPr/>
-          <p:nvPr/>
-        </p:nvSpPr>
-        <p:spPr>
-          <a:xfrm>
-            <a:off x="658368" y="2395728"/>
-            <a:ext cx="6192390" cy="3017520"/>
-          </a:xfrm>
-          <a:prstGeom prst="rect">
-            <a:avLst/>
-          </a:prstGeom>
-          <a:noFill/>
-          <a:ln/>
-        </p:spPr>
-        <p:txBody>
-          <a:bodyPr wrap="square" lIns="0" tIns="0" rIns="0" bIns="0" rtlCol="0" anchor="t"/>
-          <a:lstStyle/>
-          <a:p>
-            <a:pPr algn="l" indent="0" marL="0">
+              <a:t>Light-chain-only myeloma — the clone secretes free light chains, not intact immunoglobulin, so the SPEP lacks an M-spike.</a:t>
+            </a:r>
+            <a:endParaRPr lang="en-US" sz="1400" dirty="0"/>
+          </a:p>
+          <a:p>
+            <a:pPr algn="l" marL="177800" indent="-177800">
               <a:spcAft>
-                <a:spcPts val="600"/>
+                <a:spcPts val="900"/>
               </a:spcAft>
-              <a:buNone/>
-            </a:pPr>
-            <a:r>
-              <a:rPr lang="en-US" sz="1350" dirty="0">
+              <a:buSzPct val="100000"/>
+              <a:buChar char="•"/>
+            </a:pPr>
+            <a:r>
+              <a:rPr lang="en-US" sz="1400" dirty="0">
                 <a:solidFill>
                   <a:srgbClr val="33444F"/>
                 </a:solidFill>
@@ -8320,39 +8645,41 @@
                 <a:ea typeface="Calibri" pitchFamily="34" charset="-122"/>
                 <a:cs typeface="Calibri" pitchFamily="34" charset="-120"/>
               </a:rPr>
-              <a:t>A. Total protein</a:t>
-            </a:r>
-            <a:endParaRPr lang="en-US" sz="1350" dirty="0"/>
-          </a:p>
-          <a:p>
-            <a:pPr algn="l" indent="0" marL="0">
+              <a:t>Hypogammaglobulinemia and an abnormal free light-chain ratio are the clues.</a:t>
+            </a:r>
+            <a:endParaRPr lang="en-US" sz="1400" dirty="0"/>
+          </a:p>
+          <a:p>
+            <a:pPr algn="l" marL="177800" indent="-177800">
               <a:spcAft>
-                <a:spcPts val="600"/>
+                <a:spcPts val="900"/>
               </a:spcAft>
-              <a:buNone/>
-            </a:pPr>
-            <a:r>
-              <a:rPr lang="en-US" sz="1350" b="1" dirty="0">
-                <a:solidFill>
-                  <a:srgbClr val="0D4A92"/>
-                </a:solidFill>
-                <a:latin typeface="Calibri" pitchFamily="34" charset="0"/>
-                <a:ea typeface="Calibri" pitchFamily="34" charset="-122"/>
-                <a:cs typeface="Calibri" pitchFamily="34" charset="-120"/>
-              </a:rPr>
-              <a:t>B. Serum free light chain assay with κ/λ ratio</a:t>
-            </a:r>
-            <a:endParaRPr lang="en-US" sz="1350" dirty="0"/>
-          </a:p>
-          <a:p>
-            <a:pPr algn="l" indent="0" marL="0">
+              <a:buSzPct val="100000"/>
+              <a:buChar char="•"/>
+            </a:pPr>
+            <a:r>
+              <a:rPr lang="en-US" sz="1400" dirty="0">
+                <a:solidFill>
+                  <a:srgbClr val="33444F"/>
+                </a:solidFill>
+                <a:latin typeface="Calibri" pitchFamily="34" charset="0"/>
+                <a:ea typeface="Calibri" pitchFamily="34" charset="-122"/>
+                <a:cs typeface="Calibri" pitchFamily="34" charset="-120"/>
+              </a:rPr>
+              <a:t>Urine IFE confirms Bence-Jones (free κ) proteinuria.</a:t>
+            </a:r>
+            <a:endParaRPr lang="en-US" sz="1400" dirty="0"/>
+          </a:p>
+          <a:p>
+            <a:pPr algn="l" marL="177800" indent="-177800">
               <a:spcAft>
-                <a:spcPts val="600"/>
+                <a:spcPts val="900"/>
               </a:spcAft>
-              <a:buNone/>
-            </a:pPr>
-            <a:r>
-              <a:rPr lang="en-US" sz="1350" dirty="0">
+              <a:buSzPct val="100000"/>
+              <a:buChar char="•"/>
+            </a:pPr>
+            <a:r>
+              <a:rPr lang="en-US" sz="1400" dirty="0">
                 <a:solidFill>
                   <a:srgbClr val="33444F"/>
                 </a:solidFill>
@@ -8360,66 +8687,26 @@
                 <a:ea typeface="Calibri" pitchFamily="34" charset="-122"/>
                 <a:cs typeface="Calibri" pitchFamily="34" charset="-120"/>
               </a:rPr>
-              <a:t>C. Albumin</a:t>
-            </a:r>
-            <a:endParaRPr lang="en-US" sz="1350" dirty="0"/>
-          </a:p>
-          <a:p>
-            <a:pPr algn="l" indent="0" marL="0">
-              <a:spcAft>
-                <a:spcPts val="600"/>
-              </a:spcAft>
-              <a:buNone/>
-            </a:pPr>
-            <a:r>
-              <a:rPr lang="en-US" sz="1350" dirty="0">
-                <a:solidFill>
-                  <a:srgbClr val="33444F"/>
-                </a:solidFill>
-                <a:latin typeface="Calibri" pitchFamily="34" charset="0"/>
-                <a:ea typeface="Calibri" pitchFamily="34" charset="-122"/>
-                <a:cs typeface="Calibri" pitchFamily="34" charset="-120"/>
-              </a:rPr>
-              <a:t>D. Beta-2 microglobulin alone</a:t>
-            </a:r>
-            <a:endParaRPr lang="en-US" sz="1350" dirty="0"/>
-          </a:p>
-          <a:p>
-            <a:pPr algn="l" indent="0" marL="0">
-              <a:spcAft>
-                <a:spcPts val="600"/>
-              </a:spcAft>
-              <a:buNone/>
-            </a:pPr>
-            <a:r>
-              <a:rPr lang="en-US" sz="1350" dirty="0">
-                <a:solidFill>
-                  <a:srgbClr val="33444F"/>
-                </a:solidFill>
-                <a:latin typeface="Calibri" pitchFamily="34" charset="0"/>
-                <a:ea typeface="Calibri" pitchFamily="34" charset="-122"/>
-                <a:cs typeface="Calibri" pitchFamily="34" charset="-120"/>
-              </a:rPr>
-              <a:t>E. ESR</a:t>
-            </a:r>
-            <a:endParaRPr lang="en-US" sz="1350" dirty="0"/>
-          </a:p>
-        </p:txBody>
-      </p:sp>
-      <p:sp>
-        <p:nvSpPr>
-          <p:cNvPr id="6" name="Shape 4"/>
-          <p:cNvSpPr/>
-          <p:nvPr/>
-        </p:nvSpPr>
-        <p:spPr>
-          <a:xfrm>
-            <a:off x="7201632" y="2395728"/>
-            <a:ext cx="4423136" cy="3246120"/>
+              <a:t>Confirm with marrow plasma cells and CRAB end-organ features.</a:t>
+            </a:r>
+            <a:endParaRPr lang="en-US" sz="1400" dirty="0"/>
+          </a:p>
+        </p:txBody>
+      </p:sp>
+      <p:sp>
+        <p:nvSpPr>
+          <p:cNvPr id="5" name="Shape 3"/>
+          <p:cNvSpPr/>
+          <p:nvPr/>
+        </p:nvSpPr>
+        <p:spPr>
+          <a:xfrm>
+            <a:off x="7422788" y="1554480"/>
+            <a:ext cx="4201979" cy="3977640"/>
           </a:xfrm>
           <a:prstGeom prst="roundRect">
             <a:avLst>
-              <a:gd name="adj" fmla="val 2535"/>
+              <a:gd name="adj" fmla="val 2069"/>
             </a:avLst>
           </a:prstGeom>
           <a:solidFill>
@@ -8437,67 +8724,53 @@
       </p:sp>
       <p:sp>
         <p:nvSpPr>
+          <p:cNvPr id="6" name="Text 4"/>
+          <p:cNvSpPr/>
+          <p:nvPr/>
+        </p:nvSpPr>
+        <p:spPr>
+          <a:xfrm>
+            <a:off x="7660532" y="1755648"/>
+            <a:ext cx="3744779" cy="310896"/>
+          </a:xfrm>
+          <a:prstGeom prst="rect">
+            <a:avLst/>
+          </a:prstGeom>
+          <a:noFill/>
+          <a:ln/>
+        </p:spPr>
+        <p:txBody>
+          <a:bodyPr wrap="square" lIns="0" tIns="0" rIns="0" bIns="0" rtlCol="0" anchor="ctr"/>
+          <a:lstStyle/>
+          <a:p>
+            <a:pPr indent="0" marL="0">
+              <a:buNone/>
+            </a:pPr>
+            <a:r>
+              <a:rPr lang="en-US" sz="1100" b="1" spc="140" kern="0" dirty="0">
+                <a:solidFill>
+                  <a:srgbClr val="1565C0"/>
+                </a:solidFill>
+                <a:latin typeface="Calibri" pitchFamily="34" charset="0"/>
+                <a:ea typeface="Calibri" pitchFamily="34" charset="-122"/>
+                <a:cs typeface="Calibri" pitchFamily="34" charset="-120"/>
+              </a:rPr>
+              <a:t>TEACHING POINT</a:t>
+            </a:r>
+            <a:endParaRPr lang="en-US" sz="1100" dirty="0"/>
+          </a:p>
+        </p:txBody>
+      </p:sp>
+      <p:sp>
+        <p:nvSpPr>
           <p:cNvPr id="7" name="Text 5"/>
           <p:cNvSpPr/>
           <p:nvPr/>
         </p:nvSpPr>
         <p:spPr>
           <a:xfrm>
-            <a:off x="7439376" y="2578608"/>
-            <a:ext cx="3965936" cy="457200"/>
-          </a:xfrm>
-          <a:prstGeom prst="rect">
-            <a:avLst/>
-          </a:prstGeom>
-          <a:noFill/>
-          <a:ln/>
-        </p:spPr>
-        <p:txBody>
-          <a:bodyPr wrap="square" lIns="0" tIns="0" rIns="0" bIns="0" rtlCol="0" anchor="ctr"/>
-          <a:lstStyle/>
-          <a:p>
-            <a:pPr indent="0" marL="0">
-              <a:buNone/>
-            </a:pPr>
-            <a:r>
-              <a:rPr lang="en-US" sz="1500" b="1" dirty="0">
-                <a:solidFill>
-                  <a:srgbClr val="1565C0"/>
-                </a:solidFill>
-                <a:latin typeface="Calibri" pitchFamily="34" charset="0"/>
-                <a:ea typeface="Calibri" pitchFamily="34" charset="-122"/>
-                <a:cs typeface="Calibri" pitchFamily="34" charset="-120"/>
-              </a:rPr>
-              <a:t>ANSWER  </a:t>
-            </a:r>
-            <a:pPr indent="0" marL="0">
-              <a:buNone/>
-            </a:pPr>
-            <a:r>
-              <a:rPr lang="en-US" sz="1500" b="1" dirty="0">
-                <a:solidFill>
-                  <a:srgbClr val="1B2A38"/>
-                </a:solidFill>
-                <a:latin typeface="Calibri" pitchFamily="34" charset="0"/>
-                <a:ea typeface="Calibri" pitchFamily="34" charset="-122"/>
-                <a:cs typeface="Calibri" pitchFamily="34" charset="-120"/>
-              </a:rPr>
-              <a:t>B — Serum free light chains with ratio</a:t>
-            </a:r>
-            <a:endParaRPr lang="en-US" sz="1500" dirty="0"/>
-          </a:p>
-        </p:txBody>
-      </p:sp>
-      <p:sp>
-        <p:nvSpPr>
-          <p:cNvPr id="8" name="Text 6"/>
-          <p:cNvSpPr/>
-          <p:nvPr/>
-        </p:nvSpPr>
-        <p:spPr>
-          <a:xfrm>
-            <a:off x="7439376" y="3127248"/>
-            <a:ext cx="3947648" cy="2377440"/>
+            <a:off x="7660532" y="2121408"/>
+            <a:ext cx="3726491" cy="3291840"/>
           </a:xfrm>
           <a:prstGeom prst="rect">
             <a:avLst/>
@@ -8511,12 +8784,12 @@
           <a:p>
             <a:pPr algn="l" indent="0" marL="0">
               <a:lnSpc>
-                <a:spcPct val="108000"/>
+                <a:spcPct val="110000"/>
               </a:lnSpc>
               <a:buNone/>
             </a:pPr>
             <a:r>
-              <a:rPr lang="en-US" sz="1250" dirty="0">
+              <a:rPr lang="en-US" sz="1350" dirty="0">
                 <a:solidFill>
                   <a:srgbClr val="33444F"/>
                 </a:solidFill>
@@ -8524,15 +8797,15 @@
                 <a:ea typeface="Calibri" pitchFamily="34" charset="-122"/>
                 <a:cs typeface="Calibri" pitchFamily="34" charset="-120"/>
               </a:rPr>
-              <a:t>The serum free light-chain assay and κ/λ ratio detect light-chain-only disease that a normal SPEP can miss; the ratio corrects for renal retention.</a:t>
-            </a:r>
-            <a:endParaRPr lang="en-US" sz="1250" dirty="0"/>
-          </a:p>
-        </p:txBody>
-      </p:sp>
-      <p:sp>
-        <p:nvSpPr>
-          <p:cNvPr id="9" name="Text 7"/>
+              <a:t>A normal SPEP does not exclude plasma-cell disease — serum free light chains and the ratio catch light-chain-only disease.</a:t>
+            </a:r>
+            <a:endParaRPr lang="en-US" sz="1350" dirty="0"/>
+          </a:p>
+        </p:txBody>
+      </p:sp>
+      <p:sp>
+        <p:nvSpPr>
+          <p:cNvPr id="8" name="Text 6"/>
           <p:cNvSpPr/>
           <p:nvPr/>
         </p:nvSpPr>
@@ -8571,7 +8844,7 @@
       </p:sp>
       <p:sp>
         <p:nvSpPr>
-          <p:cNvPr id="10" name="Text 8"/>
+          <p:cNvPr id="9" name="Text 7"/>
           <p:cNvSpPr/>
           <p:nvPr/>
         </p:nvSpPr>
@@ -8650,7 +8923,7 @@
     <p:bg>
       <p:bgPr>
         <a:solidFill>
-          <a:srgbClr val="0A2A45"/>
+          <a:srgbClr val="FFFFFF"/>
         </a:solidFill>
       </p:bgPr>
     </p:bg>
@@ -8677,7 +8950,7 @@
         <p:spPr>
           <a:xfrm>
             <a:off x="566928" y="329184"/>
-            <a:ext cx="10058400" cy="310896"/>
+            <a:ext cx="10515600" cy="310896"/>
           </a:xfrm>
           <a:prstGeom prst="rect">
             <a:avLst/>
@@ -8689,7 +8962,7 @@
           <a:bodyPr wrap="square" lIns="0" tIns="0" rIns="0" bIns="0" rtlCol="0" anchor="ctr"/>
           <a:lstStyle/>
           <a:p>
-            <a:pPr indent="0" marL="0">
+            <a:pPr algn="l" indent="0" marL="0">
               <a:buNone/>
             </a:pPr>
             <a:r>
@@ -8701,7 +8974,7 @@
                 <a:ea typeface="Calibri" pitchFamily="34" charset="-122"/>
                 <a:cs typeface="Calibri" pitchFamily="34" charset="-120"/>
               </a:rPr>
-              <a:t>CLINICAL CHEMISTRY</a:t>
+              <a:t>CLINICAL CHEMISTRY   ·   BOARD REVIEW  ·  Q1</a:t>
             </a:r>
             <a:endParaRPr lang="en-US" sz="1100" dirty="0"/>
           </a:p>
@@ -8715,8 +8988,8 @@
         </p:nvSpPr>
         <p:spPr>
           <a:xfrm>
-            <a:off x="566928" y="676656"/>
-            <a:ext cx="10972800" cy="749808"/>
+            <a:off x="566928" y="713232"/>
+            <a:ext cx="11064240" cy="749808"/>
           </a:xfrm>
           <a:prstGeom prst="rect">
             <a:avLst/>
@@ -8728,62 +9001,206 @@
           <a:bodyPr wrap="square" lIns="0" tIns="0" rIns="0" bIns="0" rtlCol="0" anchor="ctr"/>
           <a:lstStyle/>
           <a:p>
-            <a:pPr indent="0" marL="0">
-              <a:buNone/>
-            </a:pPr>
-            <a:r>
-              <a:rPr lang="en-US" sz="3000" b="1" dirty="0">
-                <a:solidFill>
-                  <a:srgbClr val="FFFFFF"/>
-                </a:solidFill>
-                <a:latin typeface="Calibri" pitchFamily="34" charset="0"/>
-                <a:ea typeface="Calibri" pitchFamily="34" charset="-122"/>
-                <a:cs typeface="Calibri" pitchFamily="34" charset="-120"/>
-              </a:rPr>
-              <a:t>Key Take-Home Points</a:t>
-            </a:r>
-            <a:endParaRPr lang="en-US" sz="3000" dirty="0"/>
-          </a:p>
-        </p:txBody>
-      </p:sp>
-      <p:sp>
-        <p:nvSpPr>
-          <p:cNvPr id="4" name="Shape 2"/>
-          <p:cNvSpPr/>
-          <p:nvPr/>
-        </p:nvSpPr>
-        <p:spPr>
-          <a:xfrm>
-            <a:off x="566928" y="1517904"/>
-            <a:ext cx="11057839" cy="841248"/>
+            <a:pPr algn="l" indent="0" marL="0">
+              <a:buNone/>
+            </a:pPr>
+            <a:r>
+              <a:rPr lang="en-US" sz="2600" b="1" dirty="0">
+                <a:solidFill>
+                  <a:srgbClr val="0E3A5F"/>
+                </a:solidFill>
+                <a:latin typeface="Calibri" pitchFamily="34" charset="0"/>
+                <a:ea typeface="Calibri" pitchFamily="34" charset="-122"/>
+                <a:cs typeface="Calibri" pitchFamily="34" charset="-120"/>
+              </a:rPr>
+              <a:t>Board-Style Review</a:t>
+            </a:r>
+            <a:endParaRPr lang="en-US" sz="2600" dirty="0"/>
+          </a:p>
+        </p:txBody>
+      </p:sp>
+      <p:sp>
+        <p:nvSpPr>
+          <p:cNvPr id="4" name="Text 2"/>
+          <p:cNvSpPr/>
+          <p:nvPr/>
+        </p:nvSpPr>
+        <p:spPr>
+          <a:xfrm>
+            <a:off x="566928" y="1417320"/>
+            <a:ext cx="11057839" cy="914400"/>
+          </a:xfrm>
+          <a:prstGeom prst="rect">
+            <a:avLst/>
+          </a:prstGeom>
+          <a:noFill/>
+          <a:ln/>
+        </p:spPr>
+        <p:txBody>
+          <a:bodyPr wrap="square" lIns="0" tIns="0" rIns="0" bIns="0" rtlCol="0" anchor="t"/>
+          <a:lstStyle/>
+          <a:p>
+            <a:pPr algn="l" indent="0" marL="0">
+              <a:lnSpc>
+                <a:spcPct val="105000"/>
+              </a:lnSpc>
+              <a:buNone/>
+            </a:pPr>
+            <a:r>
+              <a:rPr lang="en-US" sz="1450" b="1" dirty="0">
+                <a:solidFill>
+                  <a:srgbClr val="1B2A38"/>
+                </a:solidFill>
+                <a:latin typeface="Calibri" pitchFamily="34" charset="0"/>
+                <a:ea typeface="Calibri" pitchFamily="34" charset="-122"/>
+                <a:cs typeface="Calibri" pitchFamily="34" charset="-120"/>
+              </a:rPr>
+              <a:t>Which single test is the most sensitive initial screen for thyroid dysfunction in an ambulatory patient?</a:t>
+            </a:r>
+            <a:endParaRPr lang="en-US" sz="1450" dirty="0"/>
+          </a:p>
+        </p:txBody>
+      </p:sp>
+      <p:sp>
+        <p:nvSpPr>
+          <p:cNvPr id="5" name="Text 3"/>
+          <p:cNvSpPr/>
+          <p:nvPr/>
+        </p:nvSpPr>
+        <p:spPr>
+          <a:xfrm>
+            <a:off x="658368" y="2395728"/>
+            <a:ext cx="6192390" cy="3017520"/>
+          </a:xfrm>
+          <a:prstGeom prst="rect">
+            <a:avLst/>
+          </a:prstGeom>
+          <a:noFill/>
+          <a:ln/>
+        </p:spPr>
+        <p:txBody>
+          <a:bodyPr wrap="square" lIns="0" tIns="0" rIns="0" bIns="0" rtlCol="0" anchor="t"/>
+          <a:lstStyle/>
+          <a:p>
+            <a:pPr algn="l" indent="0" marL="0">
+              <a:spcAft>
+                <a:spcPts val="600"/>
+              </a:spcAft>
+              <a:buNone/>
+            </a:pPr>
+            <a:r>
+              <a:rPr lang="en-US" sz="1350" dirty="0">
+                <a:solidFill>
+                  <a:srgbClr val="33444F"/>
+                </a:solidFill>
+                <a:latin typeface="Calibri" pitchFamily="34" charset="0"/>
+                <a:ea typeface="Calibri" pitchFamily="34" charset="-122"/>
+                <a:cs typeface="Calibri" pitchFamily="34" charset="-120"/>
+              </a:rPr>
+              <a:t>A. Total T4</a:t>
+            </a:r>
+            <a:endParaRPr lang="en-US" sz="1350" dirty="0"/>
+          </a:p>
+          <a:p>
+            <a:pPr algn="l" indent="0" marL="0">
+              <a:spcAft>
+                <a:spcPts val="600"/>
+              </a:spcAft>
+              <a:buNone/>
+            </a:pPr>
+            <a:r>
+              <a:rPr lang="en-US" sz="1350" dirty="0">
+                <a:solidFill>
+                  <a:srgbClr val="33444F"/>
+                </a:solidFill>
+                <a:latin typeface="Calibri" pitchFamily="34" charset="0"/>
+                <a:ea typeface="Calibri" pitchFamily="34" charset="-122"/>
+                <a:cs typeface="Calibri" pitchFamily="34" charset="-120"/>
+              </a:rPr>
+              <a:t>B. Free T3</a:t>
+            </a:r>
+            <a:endParaRPr lang="en-US" sz="1350" dirty="0"/>
+          </a:p>
+          <a:p>
+            <a:pPr algn="l" indent="0" marL="0">
+              <a:spcAft>
+                <a:spcPts val="600"/>
+              </a:spcAft>
+              <a:buNone/>
+            </a:pPr>
+            <a:r>
+              <a:rPr lang="en-US" sz="1350" b="1" dirty="0">
+                <a:solidFill>
+                  <a:srgbClr val="0D4A92"/>
+                </a:solidFill>
+                <a:latin typeface="Calibri" pitchFamily="34" charset="0"/>
+                <a:ea typeface="Calibri" pitchFamily="34" charset="-122"/>
+                <a:cs typeface="Calibri" pitchFamily="34" charset="-120"/>
+              </a:rPr>
+              <a:t>C. TSH</a:t>
+            </a:r>
+            <a:endParaRPr lang="en-US" sz="1350" dirty="0"/>
+          </a:p>
+          <a:p>
+            <a:pPr algn="l" indent="0" marL="0">
+              <a:spcAft>
+                <a:spcPts val="600"/>
+              </a:spcAft>
+              <a:buNone/>
+            </a:pPr>
+            <a:r>
+              <a:rPr lang="en-US" sz="1350" dirty="0">
+                <a:solidFill>
+                  <a:srgbClr val="33444F"/>
+                </a:solidFill>
+                <a:latin typeface="Calibri" pitchFamily="34" charset="0"/>
+                <a:ea typeface="Calibri" pitchFamily="34" charset="-122"/>
+                <a:cs typeface="Calibri" pitchFamily="34" charset="-120"/>
+              </a:rPr>
+              <a:t>D. Thyroid antibodies</a:t>
+            </a:r>
+            <a:endParaRPr lang="en-US" sz="1350" dirty="0"/>
+          </a:p>
+          <a:p>
+            <a:pPr algn="l" indent="0" marL="0">
+              <a:spcAft>
+                <a:spcPts val="600"/>
+              </a:spcAft>
+              <a:buNone/>
+            </a:pPr>
+            <a:r>
+              <a:rPr lang="en-US" sz="1350" dirty="0">
+                <a:solidFill>
+                  <a:srgbClr val="33444F"/>
+                </a:solidFill>
+                <a:latin typeface="Calibri" pitchFamily="34" charset="0"/>
+                <a:ea typeface="Calibri" pitchFamily="34" charset="-122"/>
+                <a:cs typeface="Calibri" pitchFamily="34" charset="-120"/>
+              </a:rPr>
+              <a:t>E. Reverse T3</a:t>
+            </a:r>
+            <a:endParaRPr lang="en-US" sz="1350" dirty="0"/>
+          </a:p>
+        </p:txBody>
+      </p:sp>
+      <p:sp>
+        <p:nvSpPr>
+          <p:cNvPr id="6" name="Shape 4"/>
+          <p:cNvSpPr/>
+          <p:nvPr/>
+        </p:nvSpPr>
+        <p:spPr>
+          <a:xfrm>
+            <a:off x="7201632" y="2395728"/>
+            <a:ext cx="4423136" cy="3246120"/>
           </a:xfrm>
           <a:prstGeom prst="roundRect">
             <a:avLst>
-              <a:gd name="adj" fmla="val 7609"/>
+              <a:gd name="adj" fmla="val 2535"/>
             </a:avLst>
           </a:prstGeom>
           <a:solidFill>
-            <a:srgbClr val="143651"/>
-          </a:solidFill>
-          <a:ln/>
-        </p:spPr>
-      </p:sp>
-      <p:sp>
-        <p:nvSpPr>
-          <p:cNvPr id="5" name="Shape 3"/>
-          <p:cNvSpPr/>
-          <p:nvPr/>
-        </p:nvSpPr>
-        <p:spPr>
-          <a:xfrm>
-            <a:off x="749808" y="1755648"/>
-            <a:ext cx="365760" cy="365760"/>
-          </a:xfrm>
-          <a:prstGeom prst="ellipse">
-            <a:avLst/>
-          </a:prstGeom>
-          <a:solidFill>
-            <a:srgbClr val="1565C0"/>
+            <a:srgbClr val="E7EFFA"/>
           </a:solidFill>
           <a:ln/>
           <a:effectLst>
@@ -8797,14 +9214,14 @@
       </p:sp>
       <p:sp>
         <p:nvSpPr>
-          <p:cNvPr id="6" name="Text 4"/>
-          <p:cNvSpPr/>
-          <p:nvPr/>
-        </p:nvSpPr>
-        <p:spPr>
-          <a:xfrm>
-            <a:off x="749808" y="1755648"/>
-            <a:ext cx="365760" cy="365760"/>
+          <p:cNvPr id="7" name="Text 5"/>
+          <p:cNvSpPr/>
+          <p:nvPr/>
+        </p:nvSpPr>
+        <p:spPr>
+          <a:xfrm>
+            <a:off x="7439376" y="2578608"/>
+            <a:ext cx="3965936" cy="457200"/>
           </a:xfrm>
           <a:prstGeom prst="rect">
             <a:avLst/>
@@ -8816,19 +9233,33 @@
           <a:bodyPr wrap="square" lIns="0" tIns="0" rIns="0" bIns="0" rtlCol="0" anchor="ctr"/>
           <a:lstStyle/>
           <a:p>
-            <a:pPr algn="ctr" indent="0" marL="0">
+            <a:pPr indent="0" marL="0">
               <a:buNone/>
             </a:pPr>
             <a:r>
               <a:rPr lang="en-US" sz="1500" b="1" dirty="0">
                 <a:solidFill>
-                  <a:srgbClr val="FFFFFF"/>
-                </a:solidFill>
-                <a:latin typeface="Calibri" pitchFamily="34" charset="0"/>
-                <a:ea typeface="Calibri" pitchFamily="34" charset="-122"/>
-                <a:cs typeface="Calibri" pitchFamily="34" charset="-120"/>
-              </a:rPr>
-              <a:t>1</a:t>
+                  <a:srgbClr val="1565C0"/>
+                </a:solidFill>
+                <a:latin typeface="Calibri" pitchFamily="34" charset="0"/>
+                <a:ea typeface="Calibri" pitchFamily="34" charset="-122"/>
+                <a:cs typeface="Calibri" pitchFamily="34" charset="-120"/>
+              </a:rPr>
+              <a:t>ANSWER  </a:t>
+            </a:r>
+            <a:pPr indent="0" marL="0">
+              <a:buNone/>
+            </a:pPr>
+            <a:r>
+              <a:rPr lang="en-US" sz="1500" b="1" dirty="0">
+                <a:solidFill>
+                  <a:srgbClr val="1B2A38"/>
+                </a:solidFill>
+                <a:latin typeface="Calibri" pitchFamily="34" charset="0"/>
+                <a:ea typeface="Calibri" pitchFamily="34" charset="-122"/>
+                <a:cs typeface="Calibri" pitchFamily="34" charset="-120"/>
+              </a:rPr>
+              <a:t>C — TSH</a:t>
             </a:r>
             <a:endParaRPr lang="en-US" sz="1500" dirty="0"/>
           </a:p>
@@ -8836,14 +9267,56 @@
       </p:sp>
       <p:sp>
         <p:nvSpPr>
-          <p:cNvPr id="7" name="Text 5"/>
-          <p:cNvSpPr/>
-          <p:nvPr/>
-        </p:nvSpPr>
-        <p:spPr>
-          <a:xfrm>
-            <a:off x="1280160" y="1517904"/>
-            <a:ext cx="10143439" cy="841248"/>
+          <p:cNvPr id="8" name="Text 6"/>
+          <p:cNvSpPr/>
+          <p:nvPr/>
+        </p:nvSpPr>
+        <p:spPr>
+          <a:xfrm>
+            <a:off x="7439376" y="3127248"/>
+            <a:ext cx="3947648" cy="2377440"/>
+          </a:xfrm>
+          <a:prstGeom prst="rect">
+            <a:avLst/>
+          </a:prstGeom>
+          <a:noFill/>
+          <a:ln/>
+        </p:spPr>
+        <p:txBody>
+          <a:bodyPr wrap="square" lIns="0" tIns="0" rIns="0" bIns="0" rtlCol="0" anchor="t"/>
+          <a:lstStyle/>
+          <a:p>
+            <a:pPr algn="l" indent="0" marL="0">
+              <a:lnSpc>
+                <a:spcPct val="108000"/>
+              </a:lnSpc>
+              <a:buNone/>
+            </a:pPr>
+            <a:r>
+              <a:rPr lang="en-US" sz="1250" dirty="0">
+                <a:solidFill>
+                  <a:srgbClr val="33444F"/>
+                </a:solidFill>
+                <a:latin typeface="Calibri" pitchFamily="34" charset="0"/>
+                <a:ea typeface="Calibri" pitchFamily="34" charset="-122"/>
+                <a:cs typeface="Calibri" pitchFamily="34" charset="-120"/>
+              </a:rPr>
+              <a:t>Log-linear pituitary feedback makes TSH the most sensitive first-line screen (barring central disease or interference).</a:t>
+            </a:r>
+            <a:endParaRPr lang="en-US" sz="1250" dirty="0"/>
+          </a:p>
+        </p:txBody>
+      </p:sp>
+      <p:sp>
+        <p:nvSpPr>
+          <p:cNvPr id="9" name="Text 7"/>
+          <p:cNvSpPr/>
+          <p:nvPr/>
+        </p:nvSpPr>
+        <p:spPr>
+          <a:xfrm>
+            <a:off x="566928" y="6473952"/>
+            <a:ext cx="7772400" cy="274320"/>
           </a:xfrm>
           <a:prstGeom prst="rect">
             <a:avLst/>
@@ -8859,68 +9332,19 @@
               <a:buNone/>
             </a:pPr>
             <a:r>
-              <a:rPr lang="en-US" sz="1350" dirty="0">
-                <a:solidFill>
-                  <a:srgbClr val="E7EEF4"/>
-                </a:solidFill>
-                <a:latin typeface="Calibri" pitchFamily="34" charset="0"/>
-                <a:ea typeface="Calibri" pitchFamily="34" charset="-122"/>
-                <a:cs typeface="Calibri" pitchFamily="34" charset="-120"/>
-              </a:rPr>
-              <a:t>TSH is the most sensitive thyroid screen; biotin and heterophile interferences can mimic thyroid disease — reconcile with the patient.</a:t>
-            </a:r>
-            <a:endParaRPr lang="en-US" sz="1350" dirty="0"/>
-          </a:p>
-        </p:txBody>
-      </p:sp>
-      <p:sp>
-        <p:nvSpPr>
-          <p:cNvPr id="8" name="Shape 6"/>
-          <p:cNvSpPr/>
-          <p:nvPr/>
-        </p:nvSpPr>
-        <p:spPr>
-          <a:xfrm>
-            <a:off x="566928" y="2505456"/>
-            <a:ext cx="11057839" cy="841248"/>
-          </a:xfrm>
-          <a:prstGeom prst="roundRect">
-            <a:avLst>
-              <a:gd name="adj" fmla="val 7609"/>
-            </a:avLst>
-          </a:prstGeom>
-          <a:solidFill>
-            <a:srgbClr val="143651"/>
-          </a:solidFill>
-          <a:ln/>
-        </p:spPr>
-      </p:sp>
-      <p:sp>
-        <p:nvSpPr>
-          <p:cNvPr id="9" name="Shape 7"/>
-          <p:cNvSpPr/>
-          <p:nvPr/>
-        </p:nvSpPr>
-        <p:spPr>
-          <a:xfrm>
-            <a:off x="749808" y="2743200"/>
-            <a:ext cx="365760" cy="365760"/>
-          </a:xfrm>
-          <a:prstGeom prst="ellipse">
-            <a:avLst/>
-          </a:prstGeom>
-          <a:solidFill>
-            <a:srgbClr val="1565C0"/>
-          </a:solidFill>
-          <a:ln/>
-          <a:effectLst>
-            <a:outerShdw sx="100000" sy="100000" kx="0" ky="0" algn="bl" rotWithShape="0" blurRad="88900" dist="25400" dir="5400000">
-              <a:srgbClr val="22303C">
-                <a:alpha val="12000"/>
-              </a:srgbClr>
-            </a:outerShdw>
-          </a:effectLst>
-        </p:spPr>
+              <a:rPr lang="en-US" sz="850" dirty="0">
+                <a:solidFill>
+                  <a:srgbClr val="9AA8B4"/>
+                </a:solidFill>
+                <a:latin typeface="Calibri" pitchFamily="34" charset="0"/>
+                <a:ea typeface="Calibri" pitchFamily="34" charset="-122"/>
+                <a:cs typeface="Calibri" pitchFamily="34" charset="-120"/>
+              </a:rPr>
+              <a:t>Makassed General Hospital  ·  Department of Laboratory Medicine</a:t>
+            </a:r>
+            <a:endParaRPr lang="en-US" sz="850" dirty="0"/>
+          </a:p>
+        </p:txBody>
       </p:sp>
       <p:sp>
         <p:nvSpPr>
@@ -8930,8 +9354,8 @@
         </p:nvSpPr>
         <p:spPr>
           <a:xfrm>
-            <a:off x="749808" y="2743200"/>
-            <a:ext cx="365760" cy="365760"/>
+            <a:off x="9814255" y="6473952"/>
+            <a:ext cx="1828800" cy="274320"/>
           </a:xfrm>
           <a:prstGeom prst="rect">
             <a:avLst/>
@@ -8943,504 +9367,34 @@
           <a:bodyPr wrap="square" lIns="0" tIns="0" rIns="0" bIns="0" rtlCol="0" anchor="ctr"/>
           <a:lstStyle/>
           <a:p>
-            <a:pPr algn="ctr" indent="0" marL="0">
-              <a:buNone/>
-            </a:pPr>
-            <a:r>
-              <a:rPr lang="en-US" sz="1500" b="1" dirty="0">
-                <a:solidFill>
-                  <a:srgbClr val="FFFFFF"/>
-                </a:solidFill>
-                <a:latin typeface="Calibri" pitchFamily="34" charset="0"/>
-                <a:ea typeface="Calibri" pitchFamily="34" charset="-122"/>
-                <a:cs typeface="Calibri" pitchFamily="34" charset="-120"/>
-              </a:rPr>
-              <a:t>2</a:t>
-            </a:r>
-            <a:endParaRPr lang="en-US" sz="1500" dirty="0"/>
-          </a:p>
-        </p:txBody>
-      </p:sp>
-      <p:sp>
-        <p:nvSpPr>
-          <p:cNvPr id="11" name="Text 9"/>
-          <p:cNvSpPr/>
-          <p:nvPr/>
-        </p:nvSpPr>
-        <p:spPr>
-          <a:xfrm>
-            <a:off x="1280160" y="2505456"/>
-            <a:ext cx="10143439" cy="841248"/>
-          </a:xfrm>
-          <a:prstGeom prst="rect">
-            <a:avLst/>
-          </a:prstGeom>
-          <a:noFill/>
-          <a:ln/>
-        </p:spPr>
-        <p:txBody>
-          <a:bodyPr wrap="square" lIns="0" tIns="0" rIns="0" bIns="0" rtlCol="0" anchor="ctr"/>
-          <a:lstStyle/>
-          <a:p>
-            <a:pPr algn="l" indent="0" marL="0">
-              <a:buNone/>
-            </a:pPr>
-            <a:r>
-              <a:rPr lang="en-US" sz="1350" dirty="0">
-                <a:solidFill>
-                  <a:srgbClr val="E7EEF4"/>
-                </a:solidFill>
-                <a:latin typeface="Calibri" pitchFamily="34" charset="0"/>
-                <a:ea typeface="Calibri" pitchFamily="34" charset="-122"/>
-                <a:cs typeface="Calibri" pitchFamily="34" charset="-120"/>
-              </a:rPr>
-              <a:t>Pair effector hormones with their stimulators (free T4 + TSH; cortisol + ACTH) and prefer dynamic testing for adrenal axes.</a:t>
-            </a:r>
-            <a:endParaRPr lang="en-US" sz="1350" dirty="0"/>
-          </a:p>
-        </p:txBody>
-      </p:sp>
-      <p:sp>
-        <p:nvSpPr>
-          <p:cNvPr id="12" name="Shape 10"/>
-          <p:cNvSpPr/>
-          <p:nvPr/>
-        </p:nvSpPr>
-        <p:spPr>
-          <a:xfrm>
-            <a:off x="566928" y="3493008"/>
-            <a:ext cx="11057839" cy="841248"/>
-          </a:xfrm>
-          <a:prstGeom prst="roundRect">
-            <a:avLst>
-              <a:gd name="adj" fmla="val 7609"/>
-            </a:avLst>
-          </a:prstGeom>
-          <a:solidFill>
-            <a:srgbClr val="143651"/>
-          </a:solidFill>
-          <a:ln/>
-        </p:spPr>
-      </p:sp>
-      <p:sp>
-        <p:nvSpPr>
-          <p:cNvPr id="13" name="Shape 11"/>
-          <p:cNvSpPr/>
-          <p:nvPr/>
-        </p:nvSpPr>
-        <p:spPr>
-          <a:xfrm>
-            <a:off x="749808" y="3730752"/>
-            <a:ext cx="365760" cy="365760"/>
-          </a:xfrm>
-          <a:prstGeom prst="ellipse">
-            <a:avLst/>
-          </a:prstGeom>
-          <a:solidFill>
-            <a:srgbClr val="1565C0"/>
-          </a:solidFill>
-          <a:ln/>
-          <a:effectLst>
-            <a:outerShdw sx="100000" sy="100000" kx="0" ky="0" algn="bl" rotWithShape="0" blurRad="88900" dist="25400" dir="5400000">
-              <a:srgbClr val="22303C">
-                <a:alpha val="12000"/>
-              </a:srgbClr>
-            </a:outerShdw>
-          </a:effectLst>
-        </p:spPr>
-      </p:sp>
-      <p:sp>
-        <p:nvSpPr>
-          <p:cNvPr id="14" name="Text 12"/>
-          <p:cNvSpPr/>
-          <p:nvPr/>
-        </p:nvSpPr>
-        <p:spPr>
-          <a:xfrm>
-            <a:off x="749808" y="3730752"/>
-            <a:ext cx="365760" cy="365760"/>
-          </a:xfrm>
-          <a:prstGeom prst="rect">
-            <a:avLst/>
-          </a:prstGeom>
-          <a:noFill/>
-          <a:ln/>
-        </p:spPr>
-        <p:txBody>
-          <a:bodyPr wrap="square" lIns="0" tIns="0" rIns="0" bIns="0" rtlCol="0" anchor="ctr"/>
-          <a:lstStyle/>
-          <a:p>
-            <a:pPr algn="ctr" indent="0" marL="0">
-              <a:buNone/>
-            </a:pPr>
-            <a:r>
-              <a:rPr lang="en-US" sz="1500" b="1" dirty="0">
-                <a:solidFill>
-                  <a:srgbClr val="FFFFFF"/>
-                </a:solidFill>
-                <a:latin typeface="Calibri" pitchFamily="34" charset="0"/>
-                <a:ea typeface="Calibri" pitchFamily="34" charset="-122"/>
-                <a:cs typeface="Calibri" pitchFamily="34" charset="-120"/>
-              </a:rPr>
-              <a:t>3</a:t>
-            </a:r>
-            <a:endParaRPr lang="en-US" sz="1500" dirty="0"/>
-          </a:p>
-        </p:txBody>
-      </p:sp>
-      <p:sp>
-        <p:nvSpPr>
-          <p:cNvPr id="15" name="Text 13"/>
-          <p:cNvSpPr/>
-          <p:nvPr/>
-        </p:nvSpPr>
-        <p:spPr>
-          <a:xfrm>
-            <a:off x="1280160" y="3493008"/>
-            <a:ext cx="10143439" cy="841248"/>
-          </a:xfrm>
-          <a:prstGeom prst="rect">
-            <a:avLst/>
-          </a:prstGeom>
-          <a:noFill/>
-          <a:ln/>
-        </p:spPr>
-        <p:txBody>
-          <a:bodyPr wrap="square" lIns="0" tIns="0" rIns="0" bIns="0" rtlCol="0" anchor="ctr"/>
-          <a:lstStyle/>
-          <a:p>
-            <a:pPr algn="l" indent="0" marL="0">
-              <a:buNone/>
-            </a:pPr>
-            <a:r>
-              <a:rPr lang="en-US" sz="1350" dirty="0">
-                <a:solidFill>
-                  <a:srgbClr val="E7EEF4"/>
-                </a:solidFill>
-                <a:latin typeface="Calibri" pitchFamily="34" charset="0"/>
-                <a:ea typeface="Calibri" pitchFamily="34" charset="-122"/>
-                <a:cs typeface="Calibri" pitchFamily="34" charset="-120"/>
-              </a:rPr>
-              <a:t>Read SPEP as a pattern: discrete M-spike (monoclonal) vs broad γ (polyclonal); reflex to immunofixation.</a:t>
-            </a:r>
-            <a:endParaRPr lang="en-US" sz="1350" dirty="0"/>
-          </a:p>
-        </p:txBody>
-      </p:sp>
-      <p:sp>
-        <p:nvSpPr>
-          <p:cNvPr id="16" name="Shape 14"/>
-          <p:cNvSpPr/>
-          <p:nvPr/>
-        </p:nvSpPr>
-        <p:spPr>
-          <a:xfrm>
-            <a:off x="566928" y="4480560"/>
-            <a:ext cx="11057839" cy="841248"/>
-          </a:xfrm>
-          <a:prstGeom prst="roundRect">
-            <a:avLst>
-              <a:gd name="adj" fmla="val 7609"/>
-            </a:avLst>
-          </a:prstGeom>
-          <a:solidFill>
-            <a:srgbClr val="143651"/>
-          </a:solidFill>
-          <a:ln/>
-        </p:spPr>
-      </p:sp>
-      <p:sp>
-        <p:nvSpPr>
-          <p:cNvPr id="17" name="Shape 15"/>
-          <p:cNvSpPr/>
-          <p:nvPr/>
-        </p:nvSpPr>
-        <p:spPr>
-          <a:xfrm>
-            <a:off x="749808" y="4718304"/>
-            <a:ext cx="365760" cy="365760"/>
-          </a:xfrm>
-          <a:prstGeom prst="ellipse">
-            <a:avLst/>
-          </a:prstGeom>
-          <a:solidFill>
-            <a:srgbClr val="1565C0"/>
-          </a:solidFill>
-          <a:ln/>
-          <a:effectLst>
-            <a:outerShdw sx="100000" sy="100000" kx="0" ky="0" algn="bl" rotWithShape="0" blurRad="88900" dist="25400" dir="5400000">
-              <a:srgbClr val="22303C">
-                <a:alpha val="12000"/>
-              </a:srgbClr>
-            </a:outerShdw>
-          </a:effectLst>
-        </p:spPr>
-      </p:sp>
-      <p:sp>
-        <p:nvSpPr>
-          <p:cNvPr id="18" name="Text 16"/>
-          <p:cNvSpPr/>
-          <p:nvPr/>
-        </p:nvSpPr>
-        <p:spPr>
-          <a:xfrm>
-            <a:off x="749808" y="4718304"/>
-            <a:ext cx="365760" cy="365760"/>
-          </a:xfrm>
-          <a:prstGeom prst="rect">
-            <a:avLst/>
-          </a:prstGeom>
-          <a:noFill/>
-          <a:ln/>
-        </p:spPr>
-        <p:txBody>
-          <a:bodyPr wrap="square" lIns="0" tIns="0" rIns="0" bIns="0" rtlCol="0" anchor="ctr"/>
-          <a:lstStyle/>
-          <a:p>
-            <a:pPr algn="ctr" indent="0" marL="0">
-              <a:buNone/>
-            </a:pPr>
-            <a:r>
-              <a:rPr lang="en-US" sz="1500" b="1" dirty="0">
-                <a:solidFill>
-                  <a:srgbClr val="FFFFFF"/>
-                </a:solidFill>
-                <a:latin typeface="Calibri" pitchFamily="34" charset="0"/>
-                <a:ea typeface="Calibri" pitchFamily="34" charset="-122"/>
-                <a:cs typeface="Calibri" pitchFamily="34" charset="-120"/>
-              </a:rPr>
-              <a:t>4</a:t>
-            </a:r>
-            <a:endParaRPr lang="en-US" sz="1500" dirty="0"/>
-          </a:p>
-        </p:txBody>
-      </p:sp>
-      <p:sp>
-        <p:nvSpPr>
-          <p:cNvPr id="19" name="Text 17"/>
-          <p:cNvSpPr/>
-          <p:nvPr/>
-        </p:nvSpPr>
-        <p:spPr>
-          <a:xfrm>
-            <a:off x="1280160" y="4480560"/>
-            <a:ext cx="10143439" cy="841248"/>
-          </a:xfrm>
-          <a:prstGeom prst="rect">
-            <a:avLst/>
-          </a:prstGeom>
-          <a:noFill/>
-          <a:ln/>
-        </p:spPr>
-        <p:txBody>
-          <a:bodyPr wrap="square" lIns="0" tIns="0" rIns="0" bIns="0" rtlCol="0" anchor="ctr"/>
-          <a:lstStyle/>
-          <a:p>
-            <a:pPr algn="l" indent="0" marL="0">
-              <a:buNone/>
-            </a:pPr>
-            <a:r>
-              <a:rPr lang="en-US" sz="1350" dirty="0">
-                <a:solidFill>
-                  <a:srgbClr val="E7EEF4"/>
-                </a:solidFill>
-                <a:latin typeface="Calibri" pitchFamily="34" charset="0"/>
-                <a:ea typeface="Calibri" pitchFamily="34" charset="-122"/>
-                <a:cs typeface="Calibri" pitchFamily="34" charset="-120"/>
-              </a:rPr>
-              <a:t>A normal SPEP does not exclude plasma-cell disease — serum free light chains and the κ/λ ratio detect light-chain-only disorders.</a:t>
-            </a:r>
-            <a:endParaRPr lang="en-US" sz="1350" dirty="0"/>
-          </a:p>
-        </p:txBody>
-      </p:sp>
-      <p:sp>
-        <p:nvSpPr>
-          <p:cNvPr id="20" name="Shape 18"/>
-          <p:cNvSpPr/>
-          <p:nvPr/>
-        </p:nvSpPr>
-        <p:spPr>
-          <a:xfrm>
-            <a:off x="566928" y="5468112"/>
-            <a:ext cx="11057839" cy="841248"/>
-          </a:xfrm>
-          <a:prstGeom prst="roundRect">
-            <a:avLst>
-              <a:gd name="adj" fmla="val 7609"/>
-            </a:avLst>
-          </a:prstGeom>
-          <a:solidFill>
-            <a:srgbClr val="143651"/>
-          </a:solidFill>
-          <a:ln/>
-        </p:spPr>
-      </p:sp>
-      <p:sp>
-        <p:nvSpPr>
-          <p:cNvPr id="21" name="Shape 19"/>
-          <p:cNvSpPr/>
-          <p:nvPr/>
-        </p:nvSpPr>
-        <p:spPr>
-          <a:xfrm>
-            <a:off x="749808" y="5705856"/>
-            <a:ext cx="365760" cy="365760"/>
-          </a:xfrm>
-          <a:prstGeom prst="ellipse">
-            <a:avLst/>
-          </a:prstGeom>
-          <a:solidFill>
-            <a:srgbClr val="1565C0"/>
-          </a:solidFill>
-          <a:ln/>
-          <a:effectLst>
-            <a:outerShdw sx="100000" sy="100000" kx="0" ky="0" algn="bl" rotWithShape="0" blurRad="88900" dist="25400" dir="5400000">
-              <a:srgbClr val="22303C">
-                <a:alpha val="12000"/>
-              </a:srgbClr>
-            </a:outerShdw>
-          </a:effectLst>
-        </p:spPr>
-      </p:sp>
-      <p:sp>
-        <p:nvSpPr>
-          <p:cNvPr id="22" name="Text 20"/>
-          <p:cNvSpPr/>
-          <p:nvPr/>
-        </p:nvSpPr>
-        <p:spPr>
-          <a:xfrm>
-            <a:off x="749808" y="5705856"/>
-            <a:ext cx="365760" cy="365760"/>
-          </a:xfrm>
-          <a:prstGeom prst="rect">
-            <a:avLst/>
-          </a:prstGeom>
-          <a:noFill/>
-          <a:ln/>
-        </p:spPr>
-        <p:txBody>
-          <a:bodyPr wrap="square" lIns="0" tIns="0" rIns="0" bIns="0" rtlCol="0" anchor="ctr"/>
-          <a:lstStyle/>
-          <a:p>
-            <a:pPr algn="ctr" indent="0" marL="0">
-              <a:buNone/>
-            </a:pPr>
-            <a:r>
-              <a:rPr lang="en-US" sz="1500" b="1" dirty="0">
-                <a:solidFill>
-                  <a:srgbClr val="FFFFFF"/>
-                </a:solidFill>
-                <a:latin typeface="Calibri" pitchFamily="34" charset="0"/>
-                <a:ea typeface="Calibri" pitchFamily="34" charset="-122"/>
-                <a:cs typeface="Calibri" pitchFamily="34" charset="-120"/>
-              </a:rPr>
-              <a:t>5</a:t>
-            </a:r>
-            <a:endParaRPr lang="en-US" sz="1500" dirty="0"/>
-          </a:p>
-        </p:txBody>
-      </p:sp>
-      <p:sp>
-        <p:nvSpPr>
-          <p:cNvPr id="23" name="Text 21"/>
-          <p:cNvSpPr/>
-          <p:nvPr/>
-        </p:nvSpPr>
-        <p:spPr>
-          <a:xfrm>
-            <a:off x="1280160" y="5468112"/>
-            <a:ext cx="10143439" cy="841248"/>
-          </a:xfrm>
-          <a:prstGeom prst="rect">
-            <a:avLst/>
-          </a:prstGeom>
-          <a:noFill/>
-          <a:ln/>
-        </p:spPr>
-        <p:txBody>
-          <a:bodyPr wrap="square" lIns="0" tIns="0" rIns="0" bIns="0" rtlCol="0" anchor="ctr"/>
-          <a:lstStyle/>
-          <a:p>
-            <a:pPr algn="l" indent="0" marL="0">
-              <a:buNone/>
-            </a:pPr>
-            <a:r>
-              <a:rPr lang="en-US" sz="1350" dirty="0">
-                <a:solidFill>
-                  <a:srgbClr val="E7EEF4"/>
-                </a:solidFill>
-                <a:latin typeface="Calibri" pitchFamily="34" charset="0"/>
-                <a:ea typeface="Calibri" pitchFamily="34" charset="-122"/>
-                <a:cs typeface="Calibri" pitchFamily="34" charset="-120"/>
-              </a:rPr>
-              <a:t>Quantify M-protein and light chains for monitoring; interpret the ratio in renal impairment.</a:t>
-            </a:r>
-            <a:endParaRPr lang="en-US" sz="1350" dirty="0"/>
-          </a:p>
-        </p:txBody>
-      </p:sp>
-      <p:sp>
-        <p:nvSpPr>
-          <p:cNvPr id="24" name="Text 22"/>
-          <p:cNvSpPr/>
-          <p:nvPr/>
-        </p:nvSpPr>
-        <p:spPr>
-          <a:xfrm>
-            <a:off x="566928" y="6473952"/>
-            <a:ext cx="8229600" cy="274320"/>
-          </a:xfrm>
-          <a:prstGeom prst="rect">
-            <a:avLst/>
-          </a:prstGeom>
-          <a:noFill/>
-          <a:ln/>
-        </p:spPr>
-        <p:txBody>
-          <a:bodyPr wrap="square" lIns="0" tIns="0" rIns="0" bIns="0" rtlCol="0" anchor="ctr"/>
-          <a:lstStyle/>
-          <a:p>
-            <a:pPr indent="0" marL="0">
+            <a:pPr algn="r" indent="0" marL="0">
               <a:buNone/>
             </a:pPr>
             <a:r>
               <a:rPr lang="en-US" sz="850" dirty="0">
                 <a:solidFill>
-                  <a:srgbClr val="5E7488"/>
-                </a:solidFill>
-                <a:latin typeface="Calibri" pitchFamily="34" charset="0"/>
-                <a:ea typeface="Calibri" pitchFamily="34" charset="-122"/>
-                <a:cs typeface="Calibri" pitchFamily="34" charset="-120"/>
-              </a:rPr>
-              <a:t>Makassed General Hospital  ·  Department of Laboratory Medicine</a:t>
-            </a:r>
-            <a:endParaRPr lang="en-US" sz="850" dirty="0"/>
-          </a:p>
-        </p:txBody>
-      </p:sp>
-      <p:sp>
-        <p:nvSpPr>
-          <p:cNvPr id="25" name="Text 23"/>
-          <p:cNvSpPr/>
-          <p:nvPr/>
-        </p:nvSpPr>
-        <p:spPr>
-          <a:xfrm>
-            <a:off x="11002975" y="6473952"/>
-            <a:ext cx="640080" cy="274320"/>
-          </a:xfrm>
-          <a:prstGeom prst="rect">
-            <a:avLst/>
-          </a:prstGeom>
-          <a:noFill/>
-          <a:ln/>
-        </p:spPr>
-        <p:txBody>
-          <a:bodyPr wrap="square" lIns="0" tIns="0" rIns="0" bIns="0" rtlCol="0" anchor="ctr"/>
-          <a:lstStyle/>
-          <a:p>
+                  <a:srgbClr val="9AA8B4"/>
+                </a:solidFill>
+                <a:latin typeface="Calibri" pitchFamily="34" charset="0"/>
+                <a:ea typeface="Calibri" pitchFamily="34" charset="-122"/>
+                <a:cs typeface="Calibri" pitchFamily="34" charset="-120"/>
+              </a:rPr>
+              <a:t>CP Lecture Series</a:t>
+            </a:r>
+            <a:pPr algn="r" indent="0" marL="0">
+              <a:buNone/>
+            </a:pPr>
+            <a:r>
+              <a:rPr lang="en-US" sz="850" dirty="0">
+                <a:solidFill>
+                  <a:srgbClr val="DCE4EC"/>
+                </a:solidFill>
+                <a:latin typeface="Calibri" pitchFamily="34" charset="0"/>
+                <a:ea typeface="Calibri" pitchFamily="34" charset="-122"/>
+                <a:cs typeface="Calibri" pitchFamily="34" charset="-120"/>
+              </a:rPr>
+              <a:t>   ·   </a:t>
+            </a:r>
             <a:pPr algn="r" indent="0" marL="0">
               <a:buNone/>
             </a:pPr>
@@ -9524,6 +9478,2341 @@
                 <a:ea typeface="Calibri" pitchFamily="34" charset="-122"/>
                 <a:cs typeface="Calibri" pitchFamily="34" charset="-120"/>
               </a:rPr>
+              <a:t>CLINICAL CHEMISTRY   ·   BOARD REVIEW  ·  Q2</a:t>
+            </a:r>
+            <a:endParaRPr lang="en-US" sz="1100" dirty="0"/>
+          </a:p>
+        </p:txBody>
+      </p:sp>
+      <p:sp>
+        <p:nvSpPr>
+          <p:cNvPr id="3" name="Text 1"/>
+          <p:cNvSpPr/>
+          <p:nvPr/>
+        </p:nvSpPr>
+        <p:spPr>
+          <a:xfrm>
+            <a:off x="566928" y="713232"/>
+            <a:ext cx="11064240" cy="749808"/>
+          </a:xfrm>
+          <a:prstGeom prst="rect">
+            <a:avLst/>
+          </a:prstGeom>
+          <a:noFill/>
+          <a:ln/>
+        </p:spPr>
+        <p:txBody>
+          <a:bodyPr wrap="square" lIns="0" tIns="0" rIns="0" bIns="0" rtlCol="0" anchor="ctr"/>
+          <a:lstStyle/>
+          <a:p>
+            <a:pPr algn="l" indent="0" marL="0">
+              <a:buNone/>
+            </a:pPr>
+            <a:r>
+              <a:rPr lang="en-US" sz="2600" b="1" dirty="0">
+                <a:solidFill>
+                  <a:srgbClr val="0E3A5F"/>
+                </a:solidFill>
+                <a:latin typeface="Calibri" pitchFamily="34" charset="0"/>
+                <a:ea typeface="Calibri" pitchFamily="34" charset="-122"/>
+                <a:cs typeface="Calibri" pitchFamily="34" charset="-120"/>
+              </a:rPr>
+              <a:t>Board-Style Review</a:t>
+            </a:r>
+            <a:endParaRPr lang="en-US" sz="2600" dirty="0"/>
+          </a:p>
+        </p:txBody>
+      </p:sp>
+      <p:sp>
+        <p:nvSpPr>
+          <p:cNvPr id="4" name="Text 2"/>
+          <p:cNvSpPr/>
+          <p:nvPr/>
+        </p:nvSpPr>
+        <p:spPr>
+          <a:xfrm>
+            <a:off x="566928" y="1417320"/>
+            <a:ext cx="11057839" cy="914400"/>
+          </a:xfrm>
+          <a:prstGeom prst="rect">
+            <a:avLst/>
+          </a:prstGeom>
+          <a:noFill/>
+          <a:ln/>
+        </p:spPr>
+        <p:txBody>
+          <a:bodyPr wrap="square" lIns="0" tIns="0" rIns="0" bIns="0" rtlCol="0" anchor="t"/>
+          <a:lstStyle/>
+          <a:p>
+            <a:pPr algn="l" indent="0" marL="0">
+              <a:lnSpc>
+                <a:spcPct val="105000"/>
+              </a:lnSpc>
+              <a:buNone/>
+            </a:pPr>
+            <a:r>
+              <a:rPr lang="en-US" sz="1450" b="1" dirty="0">
+                <a:solidFill>
+                  <a:srgbClr val="1B2A38"/>
+                </a:solidFill>
+                <a:latin typeface="Calibri" pitchFamily="34" charset="0"/>
+                <a:ea typeface="Calibri" pitchFamily="34" charset="-122"/>
+                <a:cs typeface="Calibri" pitchFamily="34" charset="-120"/>
+              </a:rPr>
+              <a:t>On SPEP, β–γ bridging with low albumin is characteristic of:</a:t>
+            </a:r>
+            <a:endParaRPr lang="en-US" sz="1450" dirty="0"/>
+          </a:p>
+        </p:txBody>
+      </p:sp>
+      <p:sp>
+        <p:nvSpPr>
+          <p:cNvPr id="5" name="Text 3"/>
+          <p:cNvSpPr/>
+          <p:nvPr/>
+        </p:nvSpPr>
+        <p:spPr>
+          <a:xfrm>
+            <a:off x="658368" y="2395728"/>
+            <a:ext cx="6192390" cy="3017520"/>
+          </a:xfrm>
+          <a:prstGeom prst="rect">
+            <a:avLst/>
+          </a:prstGeom>
+          <a:noFill/>
+          <a:ln/>
+        </p:spPr>
+        <p:txBody>
+          <a:bodyPr wrap="square" lIns="0" tIns="0" rIns="0" bIns="0" rtlCol="0" anchor="t"/>
+          <a:lstStyle/>
+          <a:p>
+            <a:pPr algn="l" indent="0" marL="0">
+              <a:spcAft>
+                <a:spcPts val="600"/>
+              </a:spcAft>
+              <a:buNone/>
+            </a:pPr>
+            <a:r>
+              <a:rPr lang="en-US" sz="1350" dirty="0">
+                <a:solidFill>
+                  <a:srgbClr val="33444F"/>
+                </a:solidFill>
+                <a:latin typeface="Calibri" pitchFamily="34" charset="0"/>
+                <a:ea typeface="Calibri" pitchFamily="34" charset="-122"/>
+                <a:cs typeface="Calibri" pitchFamily="34" charset="-120"/>
+              </a:rPr>
+              <a:t>A. Acute inflammation</a:t>
+            </a:r>
+            <a:endParaRPr lang="en-US" sz="1350" dirty="0"/>
+          </a:p>
+          <a:p>
+            <a:pPr algn="l" indent="0" marL="0">
+              <a:spcAft>
+                <a:spcPts val="600"/>
+              </a:spcAft>
+              <a:buNone/>
+            </a:pPr>
+            <a:r>
+              <a:rPr lang="en-US" sz="1350" b="1" dirty="0">
+                <a:solidFill>
+                  <a:srgbClr val="0D4A92"/>
+                </a:solidFill>
+                <a:latin typeface="Calibri" pitchFamily="34" charset="0"/>
+                <a:ea typeface="Calibri" pitchFamily="34" charset="-122"/>
+                <a:cs typeface="Calibri" pitchFamily="34" charset="-120"/>
+              </a:rPr>
+              <a:t>B. Cirrhosis / chronic liver disease</a:t>
+            </a:r>
+            <a:endParaRPr lang="en-US" sz="1350" dirty="0"/>
+          </a:p>
+          <a:p>
+            <a:pPr algn="l" indent="0" marL="0">
+              <a:spcAft>
+                <a:spcPts val="600"/>
+              </a:spcAft>
+              <a:buNone/>
+            </a:pPr>
+            <a:r>
+              <a:rPr lang="en-US" sz="1350" dirty="0">
+                <a:solidFill>
+                  <a:srgbClr val="33444F"/>
+                </a:solidFill>
+                <a:latin typeface="Calibri" pitchFamily="34" charset="0"/>
+                <a:ea typeface="Calibri" pitchFamily="34" charset="-122"/>
+                <a:cs typeface="Calibri" pitchFamily="34" charset="-120"/>
+              </a:rPr>
+              <a:t>C. Nephrotic syndrome</a:t>
+            </a:r>
+            <a:endParaRPr lang="en-US" sz="1350" dirty="0"/>
+          </a:p>
+          <a:p>
+            <a:pPr algn="l" indent="0" marL="0">
+              <a:spcAft>
+                <a:spcPts val="600"/>
+              </a:spcAft>
+              <a:buNone/>
+            </a:pPr>
+            <a:r>
+              <a:rPr lang="en-US" sz="1350" dirty="0">
+                <a:solidFill>
+                  <a:srgbClr val="33444F"/>
+                </a:solidFill>
+                <a:latin typeface="Calibri" pitchFamily="34" charset="0"/>
+                <a:ea typeface="Calibri" pitchFamily="34" charset="-122"/>
+                <a:cs typeface="Calibri" pitchFamily="34" charset="-120"/>
+              </a:rPr>
+              <a:t>D. Multiple myeloma</a:t>
+            </a:r>
+            <a:endParaRPr lang="en-US" sz="1350" dirty="0"/>
+          </a:p>
+          <a:p>
+            <a:pPr algn="l" indent="0" marL="0">
+              <a:spcAft>
+                <a:spcPts val="600"/>
+              </a:spcAft>
+              <a:buNone/>
+            </a:pPr>
+            <a:r>
+              <a:rPr lang="en-US" sz="1350" dirty="0">
+                <a:solidFill>
+                  <a:srgbClr val="33444F"/>
+                </a:solidFill>
+                <a:latin typeface="Calibri" pitchFamily="34" charset="0"/>
+                <a:ea typeface="Calibri" pitchFamily="34" charset="-122"/>
+                <a:cs typeface="Calibri" pitchFamily="34" charset="-120"/>
+              </a:rPr>
+              <a:t>E. Iron deficiency</a:t>
+            </a:r>
+            <a:endParaRPr lang="en-US" sz="1350" dirty="0"/>
+          </a:p>
+        </p:txBody>
+      </p:sp>
+      <p:sp>
+        <p:nvSpPr>
+          <p:cNvPr id="6" name="Shape 4"/>
+          <p:cNvSpPr/>
+          <p:nvPr/>
+        </p:nvSpPr>
+        <p:spPr>
+          <a:xfrm>
+            <a:off x="7201632" y="2395728"/>
+            <a:ext cx="4423136" cy="3246120"/>
+          </a:xfrm>
+          <a:prstGeom prst="roundRect">
+            <a:avLst>
+              <a:gd name="adj" fmla="val 2535"/>
+            </a:avLst>
+          </a:prstGeom>
+          <a:solidFill>
+            <a:srgbClr val="E7EFFA"/>
+          </a:solidFill>
+          <a:ln/>
+          <a:effectLst>
+            <a:outerShdw sx="100000" sy="100000" kx="0" ky="0" algn="bl" rotWithShape="0" blurRad="88900" dist="25400" dir="5400000">
+              <a:srgbClr val="22303C">
+                <a:alpha val="12000"/>
+              </a:srgbClr>
+            </a:outerShdw>
+          </a:effectLst>
+        </p:spPr>
+      </p:sp>
+      <p:sp>
+        <p:nvSpPr>
+          <p:cNvPr id="7" name="Text 5"/>
+          <p:cNvSpPr/>
+          <p:nvPr/>
+        </p:nvSpPr>
+        <p:spPr>
+          <a:xfrm>
+            <a:off x="7439376" y="2578608"/>
+            <a:ext cx="3965936" cy="457200"/>
+          </a:xfrm>
+          <a:prstGeom prst="rect">
+            <a:avLst/>
+          </a:prstGeom>
+          <a:noFill/>
+          <a:ln/>
+        </p:spPr>
+        <p:txBody>
+          <a:bodyPr wrap="square" lIns="0" tIns="0" rIns="0" bIns="0" rtlCol="0" anchor="ctr"/>
+          <a:lstStyle/>
+          <a:p>
+            <a:pPr indent="0" marL="0">
+              <a:buNone/>
+            </a:pPr>
+            <a:r>
+              <a:rPr lang="en-US" sz="1500" b="1" dirty="0">
+                <a:solidFill>
+                  <a:srgbClr val="1565C0"/>
+                </a:solidFill>
+                <a:latin typeface="Calibri" pitchFamily="34" charset="0"/>
+                <a:ea typeface="Calibri" pitchFamily="34" charset="-122"/>
+                <a:cs typeface="Calibri" pitchFamily="34" charset="-120"/>
+              </a:rPr>
+              <a:t>ANSWER  </a:t>
+            </a:r>
+            <a:pPr indent="0" marL="0">
+              <a:buNone/>
+            </a:pPr>
+            <a:r>
+              <a:rPr lang="en-US" sz="1500" b="1" dirty="0">
+                <a:solidFill>
+                  <a:srgbClr val="1B2A38"/>
+                </a:solidFill>
+                <a:latin typeface="Calibri" pitchFamily="34" charset="0"/>
+                <a:ea typeface="Calibri" pitchFamily="34" charset="-122"/>
+                <a:cs typeface="Calibri" pitchFamily="34" charset="-120"/>
+              </a:rPr>
+              <a:t>B — Cirrhosis</a:t>
+            </a:r>
+            <a:endParaRPr lang="en-US" sz="1500" dirty="0"/>
+          </a:p>
+        </p:txBody>
+      </p:sp>
+      <p:sp>
+        <p:nvSpPr>
+          <p:cNvPr id="8" name="Text 6"/>
+          <p:cNvSpPr/>
+          <p:nvPr/>
+        </p:nvSpPr>
+        <p:spPr>
+          <a:xfrm>
+            <a:off x="7439376" y="3127248"/>
+            <a:ext cx="3947648" cy="2377440"/>
+          </a:xfrm>
+          <a:prstGeom prst="rect">
+            <a:avLst/>
+          </a:prstGeom>
+          <a:noFill/>
+          <a:ln/>
+        </p:spPr>
+        <p:txBody>
+          <a:bodyPr wrap="square" lIns="0" tIns="0" rIns="0" bIns="0" rtlCol="0" anchor="t"/>
+          <a:lstStyle/>
+          <a:p>
+            <a:pPr algn="l" indent="0" marL="0">
+              <a:lnSpc>
+                <a:spcPct val="108000"/>
+              </a:lnSpc>
+              <a:buNone/>
+            </a:pPr>
+            <a:r>
+              <a:rPr lang="en-US" sz="1250" dirty="0">
+                <a:solidFill>
+                  <a:srgbClr val="33444F"/>
+                </a:solidFill>
+                <a:latin typeface="Calibri" pitchFamily="34" charset="0"/>
+                <a:ea typeface="Calibri" pitchFamily="34" charset="-122"/>
+                <a:cs typeface="Calibri" pitchFamily="34" charset="-120"/>
+              </a:rPr>
+              <a:t>Polyclonal IgA in liver disease fills the trough between β and γ (bridging); albumin falls with reduced synthesis.</a:t>
+            </a:r>
+            <a:endParaRPr lang="en-US" sz="1250" dirty="0"/>
+          </a:p>
+        </p:txBody>
+      </p:sp>
+      <p:sp>
+        <p:nvSpPr>
+          <p:cNvPr id="9" name="Text 7"/>
+          <p:cNvSpPr/>
+          <p:nvPr/>
+        </p:nvSpPr>
+        <p:spPr>
+          <a:xfrm>
+            <a:off x="566928" y="6473952"/>
+            <a:ext cx="7772400" cy="274320"/>
+          </a:xfrm>
+          <a:prstGeom prst="rect">
+            <a:avLst/>
+          </a:prstGeom>
+          <a:noFill/>
+          <a:ln/>
+        </p:spPr>
+        <p:txBody>
+          <a:bodyPr wrap="square" lIns="0" tIns="0" rIns="0" bIns="0" rtlCol="0" anchor="ctr"/>
+          <a:lstStyle/>
+          <a:p>
+            <a:pPr algn="l" indent="0" marL="0">
+              <a:buNone/>
+            </a:pPr>
+            <a:r>
+              <a:rPr lang="en-US" sz="850" dirty="0">
+                <a:solidFill>
+                  <a:srgbClr val="9AA8B4"/>
+                </a:solidFill>
+                <a:latin typeface="Calibri" pitchFamily="34" charset="0"/>
+                <a:ea typeface="Calibri" pitchFamily="34" charset="-122"/>
+                <a:cs typeface="Calibri" pitchFamily="34" charset="-120"/>
+              </a:rPr>
+              <a:t>Makassed General Hospital  ·  Department of Laboratory Medicine</a:t>
+            </a:r>
+            <a:endParaRPr lang="en-US" sz="850" dirty="0"/>
+          </a:p>
+        </p:txBody>
+      </p:sp>
+      <p:sp>
+        <p:nvSpPr>
+          <p:cNvPr id="10" name="Text 8"/>
+          <p:cNvSpPr/>
+          <p:nvPr/>
+        </p:nvSpPr>
+        <p:spPr>
+          <a:xfrm>
+            <a:off x="9814255" y="6473952"/>
+            <a:ext cx="1828800" cy="274320"/>
+          </a:xfrm>
+          <a:prstGeom prst="rect">
+            <a:avLst/>
+          </a:prstGeom>
+          <a:noFill/>
+          <a:ln/>
+        </p:spPr>
+        <p:txBody>
+          <a:bodyPr wrap="square" lIns="0" tIns="0" rIns="0" bIns="0" rtlCol="0" anchor="ctr"/>
+          <a:lstStyle/>
+          <a:p>
+            <a:pPr algn="r" indent="0" marL="0">
+              <a:buNone/>
+            </a:pPr>
+            <a:r>
+              <a:rPr lang="en-US" sz="850" dirty="0">
+                <a:solidFill>
+                  <a:srgbClr val="9AA8B4"/>
+                </a:solidFill>
+                <a:latin typeface="Calibri" pitchFamily="34" charset="0"/>
+                <a:ea typeface="Calibri" pitchFamily="34" charset="-122"/>
+                <a:cs typeface="Calibri" pitchFamily="34" charset="-120"/>
+              </a:rPr>
+              <a:t>CP Lecture Series</a:t>
+            </a:r>
+            <a:pPr algn="r" indent="0" marL="0">
+              <a:buNone/>
+            </a:pPr>
+            <a:r>
+              <a:rPr lang="en-US" sz="850" dirty="0">
+                <a:solidFill>
+                  <a:srgbClr val="DCE4EC"/>
+                </a:solidFill>
+                <a:latin typeface="Calibri" pitchFamily="34" charset="0"/>
+                <a:ea typeface="Calibri" pitchFamily="34" charset="-122"/>
+                <a:cs typeface="Calibri" pitchFamily="34" charset="-120"/>
+              </a:rPr>
+              <a:t>   ·   </a:t>
+            </a:r>
+            <a:pPr algn="r" indent="0" marL="0">
+              <a:buNone/>
+            </a:pPr>
+            <a:r>
+              <a:rPr lang="en-US" sz="850" b="1" dirty="0">
+                <a:solidFill>
+                  <a:srgbClr val="1565C0"/>
+                </a:solidFill>
+                <a:latin typeface="Calibri" pitchFamily="34" charset="0"/>
+                <a:ea typeface="Calibri" pitchFamily="34" charset="-122"/>
+                <a:cs typeface="Calibri" pitchFamily="34" charset="-120"/>
+              </a:rPr>
+              <a:t>19</a:t>
+            </a:r>
+            <a:endParaRPr lang="en-US" sz="850" dirty="0"/>
+          </a:p>
+        </p:txBody>
+      </p:sp>
+    </p:spTree>
+  </p:cSld>
+  <p:clrMapOvr>
+    <a:masterClrMapping/>
+  </p:clrMapOvr>
+</p:sld>
+</file>
+
+<file path=ppt/slides/slide23.xml><?xml version="1.0" encoding="utf-8"?>
+<p:sld xmlns:a="http://schemas.openxmlformats.org/drawingml/2006/main" xmlns:r="http://schemas.openxmlformats.org/officeDocument/2006/relationships" xmlns:p="http://schemas.openxmlformats.org/presentationml/2006/main">
+  <p:cSld name="Slide 23">
+    <p:bg>
+      <p:bgPr>
+        <a:solidFill>
+          <a:srgbClr val="FFFFFF"/>
+        </a:solidFill>
+      </p:bgPr>
+    </p:bg>
+    <p:spTree>
+      <p:nvGrpSpPr>
+        <p:cNvPr id="1" name=""/>
+        <p:cNvGrpSpPr/>
+        <p:nvPr/>
+      </p:nvGrpSpPr>
+      <p:grpSpPr>
+        <a:xfrm>
+          <a:off x="0" y="0"/>
+          <a:ext cx="0" cy="0"/>
+          <a:chOff x="0" y="0"/>
+          <a:chExt cx="0" cy="0"/>
+        </a:xfrm>
+      </p:grpSpPr>
+      <p:sp>
+        <p:nvSpPr>
+          <p:cNvPr id="2" name="Text 0"/>
+          <p:cNvSpPr/>
+          <p:nvPr/>
+        </p:nvSpPr>
+        <p:spPr>
+          <a:xfrm>
+            <a:off x="566928" y="329184"/>
+            <a:ext cx="10515600" cy="310896"/>
+          </a:xfrm>
+          <a:prstGeom prst="rect">
+            <a:avLst/>
+          </a:prstGeom>
+          <a:noFill/>
+          <a:ln/>
+        </p:spPr>
+        <p:txBody>
+          <a:bodyPr wrap="square" lIns="0" tIns="0" rIns="0" bIns="0" rtlCol="0" anchor="ctr"/>
+          <a:lstStyle/>
+          <a:p>
+            <a:pPr algn="l" indent="0" marL="0">
+              <a:buNone/>
+            </a:pPr>
+            <a:r>
+              <a:rPr lang="en-US" sz="1100" b="1" spc="150" kern="0" dirty="0">
+                <a:solidFill>
+                  <a:srgbClr val="1565C0"/>
+                </a:solidFill>
+                <a:latin typeface="Calibri" pitchFamily="34" charset="0"/>
+                <a:ea typeface="Calibri" pitchFamily="34" charset="-122"/>
+                <a:cs typeface="Calibri" pitchFamily="34" charset="-120"/>
+              </a:rPr>
+              <a:t>CLINICAL CHEMISTRY   ·   BOARD REVIEW  ·  Q3</a:t>
+            </a:r>
+            <a:endParaRPr lang="en-US" sz="1100" dirty="0"/>
+          </a:p>
+        </p:txBody>
+      </p:sp>
+      <p:sp>
+        <p:nvSpPr>
+          <p:cNvPr id="3" name="Text 1"/>
+          <p:cNvSpPr/>
+          <p:nvPr/>
+        </p:nvSpPr>
+        <p:spPr>
+          <a:xfrm>
+            <a:off x="566928" y="713232"/>
+            <a:ext cx="11064240" cy="749808"/>
+          </a:xfrm>
+          <a:prstGeom prst="rect">
+            <a:avLst/>
+          </a:prstGeom>
+          <a:noFill/>
+          <a:ln/>
+        </p:spPr>
+        <p:txBody>
+          <a:bodyPr wrap="square" lIns="0" tIns="0" rIns="0" bIns="0" rtlCol="0" anchor="ctr"/>
+          <a:lstStyle/>
+          <a:p>
+            <a:pPr algn="l" indent="0" marL="0">
+              <a:buNone/>
+            </a:pPr>
+            <a:r>
+              <a:rPr lang="en-US" sz="2600" b="1" dirty="0">
+                <a:solidFill>
+                  <a:srgbClr val="0E3A5F"/>
+                </a:solidFill>
+                <a:latin typeface="Calibri" pitchFamily="34" charset="0"/>
+                <a:ea typeface="Calibri" pitchFamily="34" charset="-122"/>
+                <a:cs typeface="Calibri" pitchFamily="34" charset="-120"/>
+              </a:rPr>
+              <a:t>Board-Style Review</a:t>
+            </a:r>
+            <a:endParaRPr lang="en-US" sz="2600" dirty="0"/>
+          </a:p>
+        </p:txBody>
+      </p:sp>
+      <p:sp>
+        <p:nvSpPr>
+          <p:cNvPr id="4" name="Text 2"/>
+          <p:cNvSpPr/>
+          <p:nvPr/>
+        </p:nvSpPr>
+        <p:spPr>
+          <a:xfrm>
+            <a:off x="566928" y="1417320"/>
+            <a:ext cx="11057839" cy="914400"/>
+          </a:xfrm>
+          <a:prstGeom prst="rect">
+            <a:avLst/>
+          </a:prstGeom>
+          <a:noFill/>
+          <a:ln/>
+        </p:spPr>
+        <p:txBody>
+          <a:bodyPr wrap="square" lIns="0" tIns="0" rIns="0" bIns="0" rtlCol="0" anchor="t"/>
+          <a:lstStyle/>
+          <a:p>
+            <a:pPr algn="l" indent="0" marL="0">
+              <a:lnSpc>
+                <a:spcPct val="105000"/>
+              </a:lnSpc>
+              <a:buNone/>
+            </a:pPr>
+            <a:r>
+              <a:rPr lang="en-US" sz="1450" b="1" dirty="0">
+                <a:solidFill>
+                  <a:srgbClr val="1B2A38"/>
+                </a:solidFill>
+                <a:latin typeface="Calibri" pitchFamily="34" charset="0"/>
+                <a:ea typeface="Calibri" pitchFamily="34" charset="-122"/>
+                <a:cs typeface="Calibri" pitchFamily="34" charset="-120"/>
+              </a:rPr>
+              <a:t>A discrete spike in the gamma region on SPEP should prompt which reflex test?</a:t>
+            </a:r>
+            <a:endParaRPr lang="en-US" sz="1450" dirty="0"/>
+          </a:p>
+        </p:txBody>
+      </p:sp>
+      <p:sp>
+        <p:nvSpPr>
+          <p:cNvPr id="5" name="Text 3"/>
+          <p:cNvSpPr/>
+          <p:nvPr/>
+        </p:nvSpPr>
+        <p:spPr>
+          <a:xfrm>
+            <a:off x="658368" y="2395728"/>
+            <a:ext cx="6192390" cy="3017520"/>
+          </a:xfrm>
+          <a:prstGeom prst="rect">
+            <a:avLst/>
+          </a:prstGeom>
+          <a:noFill/>
+          <a:ln/>
+        </p:spPr>
+        <p:txBody>
+          <a:bodyPr wrap="square" lIns="0" tIns="0" rIns="0" bIns="0" rtlCol="0" anchor="t"/>
+          <a:lstStyle/>
+          <a:p>
+            <a:pPr algn="l" indent="0" marL="0">
+              <a:spcAft>
+                <a:spcPts val="600"/>
+              </a:spcAft>
+              <a:buNone/>
+            </a:pPr>
+            <a:r>
+              <a:rPr lang="en-US" sz="1350" dirty="0">
+                <a:solidFill>
+                  <a:srgbClr val="33444F"/>
+                </a:solidFill>
+                <a:latin typeface="Calibri" pitchFamily="34" charset="0"/>
+                <a:ea typeface="Calibri" pitchFamily="34" charset="-122"/>
+                <a:cs typeface="Calibri" pitchFamily="34" charset="-120"/>
+              </a:rPr>
+              <a:t>A. Repeat SPEP</a:t>
+            </a:r>
+            <a:endParaRPr lang="en-US" sz="1350" dirty="0"/>
+          </a:p>
+          <a:p>
+            <a:pPr algn="l" indent="0" marL="0">
+              <a:spcAft>
+                <a:spcPts val="600"/>
+              </a:spcAft>
+              <a:buNone/>
+            </a:pPr>
+            <a:r>
+              <a:rPr lang="en-US" sz="1350" b="1" dirty="0">
+                <a:solidFill>
+                  <a:srgbClr val="0D4A92"/>
+                </a:solidFill>
+                <a:latin typeface="Calibri" pitchFamily="34" charset="0"/>
+                <a:ea typeface="Calibri" pitchFamily="34" charset="-122"/>
+                <a:cs typeface="Calibri" pitchFamily="34" charset="-120"/>
+              </a:rPr>
+              <a:t>B. Immunofixation electrophoresis</a:t>
+            </a:r>
+            <a:endParaRPr lang="en-US" sz="1350" dirty="0"/>
+          </a:p>
+          <a:p>
+            <a:pPr algn="l" indent="0" marL="0">
+              <a:spcAft>
+                <a:spcPts val="600"/>
+              </a:spcAft>
+              <a:buNone/>
+            </a:pPr>
+            <a:r>
+              <a:rPr lang="en-US" sz="1350" dirty="0">
+                <a:solidFill>
+                  <a:srgbClr val="33444F"/>
+                </a:solidFill>
+                <a:latin typeface="Calibri" pitchFamily="34" charset="0"/>
+                <a:ea typeface="Calibri" pitchFamily="34" charset="-122"/>
+                <a:cs typeface="Calibri" pitchFamily="34" charset="-120"/>
+              </a:rPr>
+              <a:t>C. C-reactive protein</a:t>
+            </a:r>
+            <a:endParaRPr lang="en-US" sz="1350" dirty="0"/>
+          </a:p>
+          <a:p>
+            <a:pPr algn="l" indent="0" marL="0">
+              <a:spcAft>
+                <a:spcPts val="600"/>
+              </a:spcAft>
+              <a:buNone/>
+            </a:pPr>
+            <a:r>
+              <a:rPr lang="en-US" sz="1350" dirty="0">
+                <a:solidFill>
+                  <a:srgbClr val="33444F"/>
+                </a:solidFill>
+                <a:latin typeface="Calibri" pitchFamily="34" charset="0"/>
+                <a:ea typeface="Calibri" pitchFamily="34" charset="-122"/>
+                <a:cs typeface="Calibri" pitchFamily="34" charset="-120"/>
+              </a:rPr>
+              <a:t>D. Serum iron</a:t>
+            </a:r>
+            <a:endParaRPr lang="en-US" sz="1350" dirty="0"/>
+          </a:p>
+          <a:p>
+            <a:pPr algn="l" indent="0" marL="0">
+              <a:spcAft>
+                <a:spcPts val="600"/>
+              </a:spcAft>
+              <a:buNone/>
+            </a:pPr>
+            <a:r>
+              <a:rPr lang="en-US" sz="1350" dirty="0">
+                <a:solidFill>
+                  <a:srgbClr val="33444F"/>
+                </a:solidFill>
+                <a:latin typeface="Calibri" pitchFamily="34" charset="0"/>
+                <a:ea typeface="Calibri" pitchFamily="34" charset="-122"/>
+                <a:cs typeface="Calibri" pitchFamily="34" charset="-120"/>
+              </a:rPr>
+              <a:t>E. Haptoglobin</a:t>
+            </a:r>
+            <a:endParaRPr lang="en-US" sz="1350" dirty="0"/>
+          </a:p>
+        </p:txBody>
+      </p:sp>
+      <p:sp>
+        <p:nvSpPr>
+          <p:cNvPr id="6" name="Shape 4"/>
+          <p:cNvSpPr/>
+          <p:nvPr/>
+        </p:nvSpPr>
+        <p:spPr>
+          <a:xfrm>
+            <a:off x="7201632" y="2395728"/>
+            <a:ext cx="4423136" cy="3246120"/>
+          </a:xfrm>
+          <a:prstGeom prst="roundRect">
+            <a:avLst>
+              <a:gd name="adj" fmla="val 2535"/>
+            </a:avLst>
+          </a:prstGeom>
+          <a:solidFill>
+            <a:srgbClr val="E7EFFA"/>
+          </a:solidFill>
+          <a:ln/>
+          <a:effectLst>
+            <a:outerShdw sx="100000" sy="100000" kx="0" ky="0" algn="bl" rotWithShape="0" blurRad="88900" dist="25400" dir="5400000">
+              <a:srgbClr val="22303C">
+                <a:alpha val="12000"/>
+              </a:srgbClr>
+            </a:outerShdw>
+          </a:effectLst>
+        </p:spPr>
+      </p:sp>
+      <p:sp>
+        <p:nvSpPr>
+          <p:cNvPr id="7" name="Text 5"/>
+          <p:cNvSpPr/>
+          <p:nvPr/>
+        </p:nvSpPr>
+        <p:spPr>
+          <a:xfrm>
+            <a:off x="7439376" y="2578608"/>
+            <a:ext cx="3965936" cy="457200"/>
+          </a:xfrm>
+          <a:prstGeom prst="rect">
+            <a:avLst/>
+          </a:prstGeom>
+          <a:noFill/>
+          <a:ln/>
+        </p:spPr>
+        <p:txBody>
+          <a:bodyPr wrap="square" lIns="0" tIns="0" rIns="0" bIns="0" rtlCol="0" anchor="ctr"/>
+          <a:lstStyle/>
+          <a:p>
+            <a:pPr indent="0" marL="0">
+              <a:buNone/>
+            </a:pPr>
+            <a:r>
+              <a:rPr lang="en-US" sz="1500" b="1" dirty="0">
+                <a:solidFill>
+                  <a:srgbClr val="1565C0"/>
+                </a:solidFill>
+                <a:latin typeface="Calibri" pitchFamily="34" charset="0"/>
+                <a:ea typeface="Calibri" pitchFamily="34" charset="-122"/>
+                <a:cs typeface="Calibri" pitchFamily="34" charset="-120"/>
+              </a:rPr>
+              <a:t>ANSWER  </a:t>
+            </a:r>
+            <a:pPr indent="0" marL="0">
+              <a:buNone/>
+            </a:pPr>
+            <a:r>
+              <a:rPr lang="en-US" sz="1500" b="1" dirty="0">
+                <a:solidFill>
+                  <a:srgbClr val="1B2A38"/>
+                </a:solidFill>
+                <a:latin typeface="Calibri" pitchFamily="34" charset="0"/>
+                <a:ea typeface="Calibri" pitchFamily="34" charset="-122"/>
+                <a:cs typeface="Calibri" pitchFamily="34" charset="-120"/>
+              </a:rPr>
+              <a:t>B — Immunofixation</a:t>
+            </a:r>
+            <a:endParaRPr lang="en-US" sz="1500" dirty="0"/>
+          </a:p>
+        </p:txBody>
+      </p:sp>
+      <p:sp>
+        <p:nvSpPr>
+          <p:cNvPr id="8" name="Text 6"/>
+          <p:cNvSpPr/>
+          <p:nvPr/>
+        </p:nvSpPr>
+        <p:spPr>
+          <a:xfrm>
+            <a:off x="7439376" y="3127248"/>
+            <a:ext cx="3947648" cy="2377440"/>
+          </a:xfrm>
+          <a:prstGeom prst="rect">
+            <a:avLst/>
+          </a:prstGeom>
+          <a:noFill/>
+          <a:ln/>
+        </p:spPr>
+        <p:txBody>
+          <a:bodyPr wrap="square" lIns="0" tIns="0" rIns="0" bIns="0" rtlCol="0" anchor="t"/>
+          <a:lstStyle/>
+          <a:p>
+            <a:pPr algn="l" indent="0" marL="0">
+              <a:lnSpc>
+                <a:spcPct val="108000"/>
+              </a:lnSpc>
+              <a:buNone/>
+            </a:pPr>
+            <a:r>
+              <a:rPr lang="en-US" sz="1250" dirty="0">
+                <a:solidFill>
+                  <a:srgbClr val="33444F"/>
+                </a:solidFill>
+                <a:latin typeface="Calibri" pitchFamily="34" charset="0"/>
+                <a:ea typeface="Calibri" pitchFamily="34" charset="-122"/>
+                <a:cs typeface="Calibri" pitchFamily="34" charset="-120"/>
+              </a:rPr>
+              <a:t>Immunofixation identifies the heavy- and light-chain type of the monoclonal protein, confirming the M-spike.</a:t>
+            </a:r>
+            <a:endParaRPr lang="en-US" sz="1250" dirty="0"/>
+          </a:p>
+        </p:txBody>
+      </p:sp>
+      <p:sp>
+        <p:nvSpPr>
+          <p:cNvPr id="9" name="Text 7"/>
+          <p:cNvSpPr/>
+          <p:nvPr/>
+        </p:nvSpPr>
+        <p:spPr>
+          <a:xfrm>
+            <a:off x="566928" y="6473952"/>
+            <a:ext cx="7772400" cy="274320"/>
+          </a:xfrm>
+          <a:prstGeom prst="rect">
+            <a:avLst/>
+          </a:prstGeom>
+          <a:noFill/>
+          <a:ln/>
+        </p:spPr>
+        <p:txBody>
+          <a:bodyPr wrap="square" lIns="0" tIns="0" rIns="0" bIns="0" rtlCol="0" anchor="ctr"/>
+          <a:lstStyle/>
+          <a:p>
+            <a:pPr algn="l" indent="0" marL="0">
+              <a:buNone/>
+            </a:pPr>
+            <a:r>
+              <a:rPr lang="en-US" sz="850" dirty="0">
+                <a:solidFill>
+                  <a:srgbClr val="9AA8B4"/>
+                </a:solidFill>
+                <a:latin typeface="Calibri" pitchFamily="34" charset="0"/>
+                <a:ea typeface="Calibri" pitchFamily="34" charset="-122"/>
+                <a:cs typeface="Calibri" pitchFamily="34" charset="-120"/>
+              </a:rPr>
+              <a:t>Makassed General Hospital  ·  Department of Laboratory Medicine</a:t>
+            </a:r>
+            <a:endParaRPr lang="en-US" sz="850" dirty="0"/>
+          </a:p>
+        </p:txBody>
+      </p:sp>
+      <p:sp>
+        <p:nvSpPr>
+          <p:cNvPr id="10" name="Text 8"/>
+          <p:cNvSpPr/>
+          <p:nvPr/>
+        </p:nvSpPr>
+        <p:spPr>
+          <a:xfrm>
+            <a:off x="9814255" y="6473952"/>
+            <a:ext cx="1828800" cy="274320"/>
+          </a:xfrm>
+          <a:prstGeom prst="rect">
+            <a:avLst/>
+          </a:prstGeom>
+          <a:noFill/>
+          <a:ln/>
+        </p:spPr>
+        <p:txBody>
+          <a:bodyPr wrap="square" lIns="0" tIns="0" rIns="0" bIns="0" rtlCol="0" anchor="ctr"/>
+          <a:lstStyle/>
+          <a:p>
+            <a:pPr algn="r" indent="0" marL="0">
+              <a:buNone/>
+            </a:pPr>
+            <a:r>
+              <a:rPr lang="en-US" sz="850" dirty="0">
+                <a:solidFill>
+                  <a:srgbClr val="9AA8B4"/>
+                </a:solidFill>
+                <a:latin typeface="Calibri" pitchFamily="34" charset="0"/>
+                <a:ea typeface="Calibri" pitchFamily="34" charset="-122"/>
+                <a:cs typeface="Calibri" pitchFamily="34" charset="-120"/>
+              </a:rPr>
+              <a:t>CP Lecture Series</a:t>
+            </a:r>
+            <a:pPr algn="r" indent="0" marL="0">
+              <a:buNone/>
+            </a:pPr>
+            <a:r>
+              <a:rPr lang="en-US" sz="850" dirty="0">
+                <a:solidFill>
+                  <a:srgbClr val="DCE4EC"/>
+                </a:solidFill>
+                <a:latin typeface="Calibri" pitchFamily="34" charset="0"/>
+                <a:ea typeface="Calibri" pitchFamily="34" charset="-122"/>
+                <a:cs typeface="Calibri" pitchFamily="34" charset="-120"/>
+              </a:rPr>
+              <a:t>   ·   </a:t>
+            </a:r>
+            <a:pPr algn="r" indent="0" marL="0">
+              <a:buNone/>
+            </a:pPr>
+            <a:r>
+              <a:rPr lang="en-US" sz="850" b="1" dirty="0">
+                <a:solidFill>
+                  <a:srgbClr val="1565C0"/>
+                </a:solidFill>
+                <a:latin typeface="Calibri" pitchFamily="34" charset="0"/>
+                <a:ea typeface="Calibri" pitchFamily="34" charset="-122"/>
+                <a:cs typeface="Calibri" pitchFamily="34" charset="-120"/>
+              </a:rPr>
+              <a:t>20</a:t>
+            </a:r>
+            <a:endParaRPr lang="en-US" sz="850" dirty="0"/>
+          </a:p>
+        </p:txBody>
+      </p:sp>
+    </p:spTree>
+  </p:cSld>
+  <p:clrMapOvr>
+    <a:masterClrMapping/>
+  </p:clrMapOvr>
+</p:sld>
+</file>
+
+<file path=ppt/slides/slide24.xml><?xml version="1.0" encoding="utf-8"?>
+<p:sld xmlns:a="http://schemas.openxmlformats.org/drawingml/2006/main" xmlns:r="http://schemas.openxmlformats.org/officeDocument/2006/relationships" xmlns:p="http://schemas.openxmlformats.org/presentationml/2006/main">
+  <p:cSld name="Slide 24">
+    <p:bg>
+      <p:bgPr>
+        <a:solidFill>
+          <a:srgbClr val="FFFFFF"/>
+        </a:solidFill>
+      </p:bgPr>
+    </p:bg>
+    <p:spTree>
+      <p:nvGrpSpPr>
+        <p:cNvPr id="1" name=""/>
+        <p:cNvGrpSpPr/>
+        <p:nvPr/>
+      </p:nvGrpSpPr>
+      <p:grpSpPr>
+        <a:xfrm>
+          <a:off x="0" y="0"/>
+          <a:ext cx="0" cy="0"/>
+          <a:chOff x="0" y="0"/>
+          <a:chExt cx="0" cy="0"/>
+        </a:xfrm>
+      </p:grpSpPr>
+      <p:sp>
+        <p:nvSpPr>
+          <p:cNvPr id="2" name="Text 0"/>
+          <p:cNvSpPr/>
+          <p:nvPr/>
+        </p:nvSpPr>
+        <p:spPr>
+          <a:xfrm>
+            <a:off x="566928" y="329184"/>
+            <a:ext cx="10515600" cy="310896"/>
+          </a:xfrm>
+          <a:prstGeom prst="rect">
+            <a:avLst/>
+          </a:prstGeom>
+          <a:noFill/>
+          <a:ln/>
+        </p:spPr>
+        <p:txBody>
+          <a:bodyPr wrap="square" lIns="0" tIns="0" rIns="0" bIns="0" rtlCol="0" anchor="ctr"/>
+          <a:lstStyle/>
+          <a:p>
+            <a:pPr algn="l" indent="0" marL="0">
+              <a:buNone/>
+            </a:pPr>
+            <a:r>
+              <a:rPr lang="en-US" sz="1100" b="1" spc="150" kern="0" dirty="0">
+                <a:solidFill>
+                  <a:srgbClr val="1565C0"/>
+                </a:solidFill>
+                <a:latin typeface="Calibri" pitchFamily="34" charset="0"/>
+                <a:ea typeface="Calibri" pitchFamily="34" charset="-122"/>
+                <a:cs typeface="Calibri" pitchFamily="34" charset="-120"/>
+              </a:rPr>
+              <a:t>CLINICAL CHEMISTRY   ·   BOARD REVIEW  ·  Q4</a:t>
+            </a:r>
+            <a:endParaRPr lang="en-US" sz="1100" dirty="0"/>
+          </a:p>
+        </p:txBody>
+      </p:sp>
+      <p:sp>
+        <p:nvSpPr>
+          <p:cNvPr id="3" name="Text 1"/>
+          <p:cNvSpPr/>
+          <p:nvPr/>
+        </p:nvSpPr>
+        <p:spPr>
+          <a:xfrm>
+            <a:off x="566928" y="713232"/>
+            <a:ext cx="11064240" cy="749808"/>
+          </a:xfrm>
+          <a:prstGeom prst="rect">
+            <a:avLst/>
+          </a:prstGeom>
+          <a:noFill/>
+          <a:ln/>
+        </p:spPr>
+        <p:txBody>
+          <a:bodyPr wrap="square" lIns="0" tIns="0" rIns="0" bIns="0" rtlCol="0" anchor="ctr"/>
+          <a:lstStyle/>
+          <a:p>
+            <a:pPr algn="l" indent="0" marL="0">
+              <a:buNone/>
+            </a:pPr>
+            <a:r>
+              <a:rPr lang="en-US" sz="2600" b="1" dirty="0">
+                <a:solidFill>
+                  <a:srgbClr val="0E3A5F"/>
+                </a:solidFill>
+                <a:latin typeface="Calibri" pitchFamily="34" charset="0"/>
+                <a:ea typeface="Calibri" pitchFamily="34" charset="-122"/>
+                <a:cs typeface="Calibri" pitchFamily="34" charset="-120"/>
+              </a:rPr>
+              <a:t>Board-Style Review</a:t>
+            </a:r>
+            <a:endParaRPr lang="en-US" sz="2600" dirty="0"/>
+          </a:p>
+        </p:txBody>
+      </p:sp>
+      <p:sp>
+        <p:nvSpPr>
+          <p:cNvPr id="4" name="Text 2"/>
+          <p:cNvSpPr/>
+          <p:nvPr/>
+        </p:nvSpPr>
+        <p:spPr>
+          <a:xfrm>
+            <a:off x="566928" y="1417320"/>
+            <a:ext cx="11057839" cy="914400"/>
+          </a:xfrm>
+          <a:prstGeom prst="rect">
+            <a:avLst/>
+          </a:prstGeom>
+          <a:noFill/>
+          <a:ln/>
+        </p:spPr>
+        <p:txBody>
+          <a:bodyPr wrap="square" lIns="0" tIns="0" rIns="0" bIns="0" rtlCol="0" anchor="t"/>
+          <a:lstStyle/>
+          <a:p>
+            <a:pPr algn="l" indent="0" marL="0">
+              <a:lnSpc>
+                <a:spcPct val="105000"/>
+              </a:lnSpc>
+              <a:buNone/>
+            </a:pPr>
+            <a:r>
+              <a:rPr lang="en-US" sz="1450" b="1" dirty="0">
+                <a:solidFill>
+                  <a:srgbClr val="1B2A38"/>
+                </a:solidFill>
+                <a:latin typeface="Calibri" pitchFamily="34" charset="0"/>
+                <a:ea typeface="Calibri" pitchFamily="34" charset="-122"/>
+                <a:cs typeface="Calibri" pitchFamily="34" charset="-120"/>
+              </a:rPr>
+              <a:t>A patient with suspected light-chain disease has a normal SPEP. Which test best detects clonal light-chain excess?</a:t>
+            </a:r>
+            <a:endParaRPr lang="en-US" sz="1450" dirty="0"/>
+          </a:p>
+        </p:txBody>
+      </p:sp>
+      <p:sp>
+        <p:nvSpPr>
+          <p:cNvPr id="5" name="Text 3"/>
+          <p:cNvSpPr/>
+          <p:nvPr/>
+        </p:nvSpPr>
+        <p:spPr>
+          <a:xfrm>
+            <a:off x="658368" y="2395728"/>
+            <a:ext cx="6192390" cy="3017520"/>
+          </a:xfrm>
+          <a:prstGeom prst="rect">
+            <a:avLst/>
+          </a:prstGeom>
+          <a:noFill/>
+          <a:ln/>
+        </p:spPr>
+        <p:txBody>
+          <a:bodyPr wrap="square" lIns="0" tIns="0" rIns="0" bIns="0" rtlCol="0" anchor="t"/>
+          <a:lstStyle/>
+          <a:p>
+            <a:pPr algn="l" indent="0" marL="0">
+              <a:spcAft>
+                <a:spcPts val="600"/>
+              </a:spcAft>
+              <a:buNone/>
+            </a:pPr>
+            <a:r>
+              <a:rPr lang="en-US" sz="1350" dirty="0">
+                <a:solidFill>
+                  <a:srgbClr val="33444F"/>
+                </a:solidFill>
+                <a:latin typeface="Calibri" pitchFamily="34" charset="0"/>
+                <a:ea typeface="Calibri" pitchFamily="34" charset="-122"/>
+                <a:cs typeface="Calibri" pitchFamily="34" charset="-120"/>
+              </a:rPr>
+              <a:t>A. Total protein</a:t>
+            </a:r>
+            <a:endParaRPr lang="en-US" sz="1350" dirty="0"/>
+          </a:p>
+          <a:p>
+            <a:pPr algn="l" indent="0" marL="0">
+              <a:spcAft>
+                <a:spcPts val="600"/>
+              </a:spcAft>
+              <a:buNone/>
+            </a:pPr>
+            <a:r>
+              <a:rPr lang="en-US" sz="1350" b="1" dirty="0">
+                <a:solidFill>
+                  <a:srgbClr val="0D4A92"/>
+                </a:solidFill>
+                <a:latin typeface="Calibri" pitchFamily="34" charset="0"/>
+                <a:ea typeface="Calibri" pitchFamily="34" charset="-122"/>
+                <a:cs typeface="Calibri" pitchFamily="34" charset="-120"/>
+              </a:rPr>
+              <a:t>B. Serum free light chains with κ/λ ratio</a:t>
+            </a:r>
+            <a:endParaRPr lang="en-US" sz="1350" dirty="0"/>
+          </a:p>
+          <a:p>
+            <a:pPr algn="l" indent="0" marL="0">
+              <a:spcAft>
+                <a:spcPts val="600"/>
+              </a:spcAft>
+              <a:buNone/>
+            </a:pPr>
+            <a:r>
+              <a:rPr lang="en-US" sz="1350" dirty="0">
+                <a:solidFill>
+                  <a:srgbClr val="33444F"/>
+                </a:solidFill>
+                <a:latin typeface="Calibri" pitchFamily="34" charset="0"/>
+                <a:ea typeface="Calibri" pitchFamily="34" charset="-122"/>
+                <a:cs typeface="Calibri" pitchFamily="34" charset="-120"/>
+              </a:rPr>
+              <a:t>C. Albumin</a:t>
+            </a:r>
+            <a:endParaRPr lang="en-US" sz="1350" dirty="0"/>
+          </a:p>
+          <a:p>
+            <a:pPr algn="l" indent="0" marL="0">
+              <a:spcAft>
+                <a:spcPts val="600"/>
+              </a:spcAft>
+              <a:buNone/>
+            </a:pPr>
+            <a:r>
+              <a:rPr lang="en-US" sz="1350" dirty="0">
+                <a:solidFill>
+                  <a:srgbClr val="33444F"/>
+                </a:solidFill>
+                <a:latin typeface="Calibri" pitchFamily="34" charset="0"/>
+                <a:ea typeface="Calibri" pitchFamily="34" charset="-122"/>
+                <a:cs typeface="Calibri" pitchFamily="34" charset="-120"/>
+              </a:rPr>
+              <a:t>D. Beta-2 microglobulin alone</a:t>
+            </a:r>
+            <a:endParaRPr lang="en-US" sz="1350" dirty="0"/>
+          </a:p>
+          <a:p>
+            <a:pPr algn="l" indent="0" marL="0">
+              <a:spcAft>
+                <a:spcPts val="600"/>
+              </a:spcAft>
+              <a:buNone/>
+            </a:pPr>
+            <a:r>
+              <a:rPr lang="en-US" sz="1350" dirty="0">
+                <a:solidFill>
+                  <a:srgbClr val="33444F"/>
+                </a:solidFill>
+                <a:latin typeface="Calibri" pitchFamily="34" charset="0"/>
+                <a:ea typeface="Calibri" pitchFamily="34" charset="-122"/>
+                <a:cs typeface="Calibri" pitchFamily="34" charset="-120"/>
+              </a:rPr>
+              <a:t>E. ESR</a:t>
+            </a:r>
+            <a:endParaRPr lang="en-US" sz="1350" dirty="0"/>
+          </a:p>
+        </p:txBody>
+      </p:sp>
+      <p:sp>
+        <p:nvSpPr>
+          <p:cNvPr id="6" name="Shape 4"/>
+          <p:cNvSpPr/>
+          <p:nvPr/>
+        </p:nvSpPr>
+        <p:spPr>
+          <a:xfrm>
+            <a:off x="7201632" y="2395728"/>
+            <a:ext cx="4423136" cy="3246120"/>
+          </a:xfrm>
+          <a:prstGeom prst="roundRect">
+            <a:avLst>
+              <a:gd name="adj" fmla="val 2535"/>
+            </a:avLst>
+          </a:prstGeom>
+          <a:solidFill>
+            <a:srgbClr val="E7EFFA"/>
+          </a:solidFill>
+          <a:ln/>
+          <a:effectLst>
+            <a:outerShdw sx="100000" sy="100000" kx="0" ky="0" algn="bl" rotWithShape="0" blurRad="88900" dist="25400" dir="5400000">
+              <a:srgbClr val="22303C">
+                <a:alpha val="12000"/>
+              </a:srgbClr>
+            </a:outerShdw>
+          </a:effectLst>
+        </p:spPr>
+      </p:sp>
+      <p:sp>
+        <p:nvSpPr>
+          <p:cNvPr id="7" name="Text 5"/>
+          <p:cNvSpPr/>
+          <p:nvPr/>
+        </p:nvSpPr>
+        <p:spPr>
+          <a:xfrm>
+            <a:off x="7439376" y="2578608"/>
+            <a:ext cx="3965936" cy="457200"/>
+          </a:xfrm>
+          <a:prstGeom prst="rect">
+            <a:avLst/>
+          </a:prstGeom>
+          <a:noFill/>
+          <a:ln/>
+        </p:spPr>
+        <p:txBody>
+          <a:bodyPr wrap="square" lIns="0" tIns="0" rIns="0" bIns="0" rtlCol="0" anchor="ctr"/>
+          <a:lstStyle/>
+          <a:p>
+            <a:pPr indent="0" marL="0">
+              <a:buNone/>
+            </a:pPr>
+            <a:r>
+              <a:rPr lang="en-US" sz="1500" b="1" dirty="0">
+                <a:solidFill>
+                  <a:srgbClr val="1565C0"/>
+                </a:solidFill>
+                <a:latin typeface="Calibri" pitchFamily="34" charset="0"/>
+                <a:ea typeface="Calibri" pitchFamily="34" charset="-122"/>
+                <a:cs typeface="Calibri" pitchFamily="34" charset="-120"/>
+              </a:rPr>
+              <a:t>ANSWER  </a:t>
+            </a:r>
+            <a:pPr indent="0" marL="0">
+              <a:buNone/>
+            </a:pPr>
+            <a:r>
+              <a:rPr lang="en-US" sz="1500" b="1" dirty="0">
+                <a:solidFill>
+                  <a:srgbClr val="1B2A38"/>
+                </a:solidFill>
+                <a:latin typeface="Calibri" pitchFamily="34" charset="0"/>
+                <a:ea typeface="Calibri" pitchFamily="34" charset="-122"/>
+                <a:cs typeface="Calibri" pitchFamily="34" charset="-120"/>
+              </a:rPr>
+              <a:t>B — Serum free light chains with ratio</a:t>
+            </a:r>
+            <a:endParaRPr lang="en-US" sz="1500" dirty="0"/>
+          </a:p>
+        </p:txBody>
+      </p:sp>
+      <p:sp>
+        <p:nvSpPr>
+          <p:cNvPr id="8" name="Text 6"/>
+          <p:cNvSpPr/>
+          <p:nvPr/>
+        </p:nvSpPr>
+        <p:spPr>
+          <a:xfrm>
+            <a:off x="7439376" y="3127248"/>
+            <a:ext cx="3947648" cy="2377440"/>
+          </a:xfrm>
+          <a:prstGeom prst="rect">
+            <a:avLst/>
+          </a:prstGeom>
+          <a:noFill/>
+          <a:ln/>
+        </p:spPr>
+        <p:txBody>
+          <a:bodyPr wrap="square" lIns="0" tIns="0" rIns="0" bIns="0" rtlCol="0" anchor="t"/>
+          <a:lstStyle/>
+          <a:p>
+            <a:pPr algn="l" indent="0" marL="0">
+              <a:lnSpc>
+                <a:spcPct val="108000"/>
+              </a:lnSpc>
+              <a:buNone/>
+            </a:pPr>
+            <a:r>
+              <a:rPr lang="en-US" sz="1250" dirty="0">
+                <a:solidFill>
+                  <a:srgbClr val="33444F"/>
+                </a:solidFill>
+                <a:latin typeface="Calibri" pitchFamily="34" charset="0"/>
+                <a:ea typeface="Calibri" pitchFamily="34" charset="-122"/>
+                <a:cs typeface="Calibri" pitchFamily="34" charset="-120"/>
+              </a:rPr>
+              <a:t>The serum free light-chain assay and ratio detect light-chain-only disease that a normal SPEP can miss; the ratio corrects for renal retention.</a:t>
+            </a:r>
+            <a:endParaRPr lang="en-US" sz="1250" dirty="0"/>
+          </a:p>
+        </p:txBody>
+      </p:sp>
+      <p:sp>
+        <p:nvSpPr>
+          <p:cNvPr id="9" name="Text 7"/>
+          <p:cNvSpPr/>
+          <p:nvPr/>
+        </p:nvSpPr>
+        <p:spPr>
+          <a:xfrm>
+            <a:off x="566928" y="6473952"/>
+            <a:ext cx="7772400" cy="274320"/>
+          </a:xfrm>
+          <a:prstGeom prst="rect">
+            <a:avLst/>
+          </a:prstGeom>
+          <a:noFill/>
+          <a:ln/>
+        </p:spPr>
+        <p:txBody>
+          <a:bodyPr wrap="square" lIns="0" tIns="0" rIns="0" bIns="0" rtlCol="0" anchor="ctr"/>
+          <a:lstStyle/>
+          <a:p>
+            <a:pPr algn="l" indent="0" marL="0">
+              <a:buNone/>
+            </a:pPr>
+            <a:r>
+              <a:rPr lang="en-US" sz="850" dirty="0">
+                <a:solidFill>
+                  <a:srgbClr val="9AA8B4"/>
+                </a:solidFill>
+                <a:latin typeface="Calibri" pitchFamily="34" charset="0"/>
+                <a:ea typeface="Calibri" pitchFamily="34" charset="-122"/>
+                <a:cs typeface="Calibri" pitchFamily="34" charset="-120"/>
+              </a:rPr>
+              <a:t>Makassed General Hospital  ·  Department of Laboratory Medicine</a:t>
+            </a:r>
+            <a:endParaRPr lang="en-US" sz="850" dirty="0"/>
+          </a:p>
+        </p:txBody>
+      </p:sp>
+      <p:sp>
+        <p:nvSpPr>
+          <p:cNvPr id="10" name="Text 8"/>
+          <p:cNvSpPr/>
+          <p:nvPr/>
+        </p:nvSpPr>
+        <p:spPr>
+          <a:xfrm>
+            <a:off x="9814255" y="6473952"/>
+            <a:ext cx="1828800" cy="274320"/>
+          </a:xfrm>
+          <a:prstGeom prst="rect">
+            <a:avLst/>
+          </a:prstGeom>
+          <a:noFill/>
+          <a:ln/>
+        </p:spPr>
+        <p:txBody>
+          <a:bodyPr wrap="square" lIns="0" tIns="0" rIns="0" bIns="0" rtlCol="0" anchor="ctr"/>
+          <a:lstStyle/>
+          <a:p>
+            <a:pPr algn="r" indent="0" marL="0">
+              <a:buNone/>
+            </a:pPr>
+            <a:r>
+              <a:rPr lang="en-US" sz="850" dirty="0">
+                <a:solidFill>
+                  <a:srgbClr val="9AA8B4"/>
+                </a:solidFill>
+                <a:latin typeface="Calibri" pitchFamily="34" charset="0"/>
+                <a:ea typeface="Calibri" pitchFamily="34" charset="-122"/>
+                <a:cs typeface="Calibri" pitchFamily="34" charset="-120"/>
+              </a:rPr>
+              <a:t>CP Lecture Series</a:t>
+            </a:r>
+            <a:pPr algn="r" indent="0" marL="0">
+              <a:buNone/>
+            </a:pPr>
+            <a:r>
+              <a:rPr lang="en-US" sz="850" dirty="0">
+                <a:solidFill>
+                  <a:srgbClr val="DCE4EC"/>
+                </a:solidFill>
+                <a:latin typeface="Calibri" pitchFamily="34" charset="0"/>
+                <a:ea typeface="Calibri" pitchFamily="34" charset="-122"/>
+                <a:cs typeface="Calibri" pitchFamily="34" charset="-120"/>
+              </a:rPr>
+              <a:t>   ·   </a:t>
+            </a:r>
+            <a:pPr algn="r" indent="0" marL="0">
+              <a:buNone/>
+            </a:pPr>
+            <a:r>
+              <a:rPr lang="en-US" sz="850" b="1" dirty="0">
+                <a:solidFill>
+                  <a:srgbClr val="1565C0"/>
+                </a:solidFill>
+                <a:latin typeface="Calibri" pitchFamily="34" charset="0"/>
+                <a:ea typeface="Calibri" pitchFamily="34" charset="-122"/>
+                <a:cs typeface="Calibri" pitchFamily="34" charset="-120"/>
+              </a:rPr>
+              <a:t>21</a:t>
+            </a:r>
+            <a:endParaRPr lang="en-US" sz="850" dirty="0"/>
+          </a:p>
+        </p:txBody>
+      </p:sp>
+    </p:spTree>
+  </p:cSld>
+  <p:clrMapOvr>
+    <a:masterClrMapping/>
+  </p:clrMapOvr>
+</p:sld>
+</file>
+
+<file path=ppt/slides/slide25.xml><?xml version="1.0" encoding="utf-8"?>
+<p:sld xmlns:a="http://schemas.openxmlformats.org/drawingml/2006/main" xmlns:r="http://schemas.openxmlformats.org/officeDocument/2006/relationships" xmlns:p="http://schemas.openxmlformats.org/presentationml/2006/main">
+  <p:cSld name="Slide 25">
+    <p:bg>
+      <p:bgPr>
+        <a:solidFill>
+          <a:srgbClr val="0A2A45"/>
+        </a:solidFill>
+      </p:bgPr>
+    </p:bg>
+    <p:spTree>
+      <p:nvGrpSpPr>
+        <p:cNvPr id="1" name=""/>
+        <p:cNvGrpSpPr/>
+        <p:nvPr/>
+      </p:nvGrpSpPr>
+      <p:grpSpPr>
+        <a:xfrm>
+          <a:off x="0" y="0"/>
+          <a:ext cx="0" cy="0"/>
+          <a:chOff x="0" y="0"/>
+          <a:chExt cx="0" cy="0"/>
+        </a:xfrm>
+      </p:grpSpPr>
+      <p:sp>
+        <p:nvSpPr>
+          <p:cNvPr id="2" name="Text 0"/>
+          <p:cNvSpPr/>
+          <p:nvPr/>
+        </p:nvSpPr>
+        <p:spPr>
+          <a:xfrm>
+            <a:off x="566928" y="329184"/>
+            <a:ext cx="10058400" cy="310896"/>
+          </a:xfrm>
+          <a:prstGeom prst="rect">
+            <a:avLst/>
+          </a:prstGeom>
+          <a:noFill/>
+          <a:ln/>
+        </p:spPr>
+        <p:txBody>
+          <a:bodyPr wrap="square" lIns="0" tIns="0" rIns="0" bIns="0" rtlCol="0" anchor="ctr"/>
+          <a:lstStyle/>
+          <a:p>
+            <a:pPr indent="0" marL="0">
+              <a:buNone/>
+            </a:pPr>
+            <a:r>
+              <a:rPr lang="en-US" sz="1100" b="1" spc="150" kern="0" dirty="0">
+                <a:solidFill>
+                  <a:srgbClr val="1565C0"/>
+                </a:solidFill>
+                <a:latin typeface="Calibri" pitchFamily="34" charset="0"/>
+                <a:ea typeface="Calibri" pitchFamily="34" charset="-122"/>
+                <a:cs typeface="Calibri" pitchFamily="34" charset="-120"/>
+              </a:rPr>
+              <a:t>CLINICAL CHEMISTRY</a:t>
+            </a:r>
+            <a:endParaRPr lang="en-US" sz="1100" dirty="0"/>
+          </a:p>
+        </p:txBody>
+      </p:sp>
+      <p:sp>
+        <p:nvSpPr>
+          <p:cNvPr id="3" name="Text 1"/>
+          <p:cNvSpPr/>
+          <p:nvPr/>
+        </p:nvSpPr>
+        <p:spPr>
+          <a:xfrm>
+            <a:off x="566928" y="676656"/>
+            <a:ext cx="10972800" cy="749808"/>
+          </a:xfrm>
+          <a:prstGeom prst="rect">
+            <a:avLst/>
+          </a:prstGeom>
+          <a:noFill/>
+          <a:ln/>
+        </p:spPr>
+        <p:txBody>
+          <a:bodyPr wrap="square" lIns="0" tIns="0" rIns="0" bIns="0" rtlCol="0" anchor="ctr"/>
+          <a:lstStyle/>
+          <a:p>
+            <a:pPr indent="0" marL="0">
+              <a:buNone/>
+            </a:pPr>
+            <a:r>
+              <a:rPr lang="en-US" sz="3000" b="1" dirty="0">
+                <a:solidFill>
+                  <a:srgbClr val="FFFFFF"/>
+                </a:solidFill>
+                <a:latin typeface="Calibri" pitchFamily="34" charset="0"/>
+                <a:ea typeface="Calibri" pitchFamily="34" charset="-122"/>
+                <a:cs typeface="Calibri" pitchFamily="34" charset="-120"/>
+              </a:rPr>
+              <a:t>Key Take-Home Points</a:t>
+            </a:r>
+            <a:endParaRPr lang="en-US" sz="3000" dirty="0"/>
+          </a:p>
+        </p:txBody>
+      </p:sp>
+      <p:sp>
+        <p:nvSpPr>
+          <p:cNvPr id="4" name="Shape 2"/>
+          <p:cNvSpPr/>
+          <p:nvPr/>
+        </p:nvSpPr>
+        <p:spPr>
+          <a:xfrm>
+            <a:off x="566928" y="1517904"/>
+            <a:ext cx="11057839" cy="841248"/>
+          </a:xfrm>
+          <a:prstGeom prst="roundRect">
+            <a:avLst>
+              <a:gd name="adj" fmla="val 7609"/>
+            </a:avLst>
+          </a:prstGeom>
+          <a:solidFill>
+            <a:srgbClr val="143651"/>
+          </a:solidFill>
+          <a:ln/>
+        </p:spPr>
+      </p:sp>
+      <p:sp>
+        <p:nvSpPr>
+          <p:cNvPr id="5" name="Shape 3"/>
+          <p:cNvSpPr/>
+          <p:nvPr/>
+        </p:nvSpPr>
+        <p:spPr>
+          <a:xfrm>
+            <a:off x="749808" y="1755648"/>
+            <a:ext cx="365760" cy="365760"/>
+          </a:xfrm>
+          <a:prstGeom prst="ellipse">
+            <a:avLst/>
+          </a:prstGeom>
+          <a:solidFill>
+            <a:srgbClr val="1565C0"/>
+          </a:solidFill>
+          <a:ln/>
+          <a:effectLst>
+            <a:outerShdw sx="100000" sy="100000" kx="0" ky="0" algn="bl" rotWithShape="0" blurRad="88900" dist="25400" dir="5400000">
+              <a:srgbClr val="22303C">
+                <a:alpha val="12000"/>
+              </a:srgbClr>
+            </a:outerShdw>
+          </a:effectLst>
+        </p:spPr>
+      </p:sp>
+      <p:sp>
+        <p:nvSpPr>
+          <p:cNvPr id="6" name="Text 4"/>
+          <p:cNvSpPr/>
+          <p:nvPr/>
+        </p:nvSpPr>
+        <p:spPr>
+          <a:xfrm>
+            <a:off x="749808" y="1755648"/>
+            <a:ext cx="365760" cy="365760"/>
+          </a:xfrm>
+          <a:prstGeom prst="rect">
+            <a:avLst/>
+          </a:prstGeom>
+          <a:noFill/>
+          <a:ln/>
+        </p:spPr>
+        <p:txBody>
+          <a:bodyPr wrap="square" lIns="0" tIns="0" rIns="0" bIns="0" rtlCol="0" anchor="ctr"/>
+          <a:lstStyle/>
+          <a:p>
+            <a:pPr algn="ctr" indent="0" marL="0">
+              <a:buNone/>
+            </a:pPr>
+            <a:r>
+              <a:rPr lang="en-US" sz="1500" b="1" dirty="0">
+                <a:solidFill>
+                  <a:srgbClr val="FFFFFF"/>
+                </a:solidFill>
+                <a:latin typeface="Calibri" pitchFamily="34" charset="0"/>
+                <a:ea typeface="Calibri" pitchFamily="34" charset="-122"/>
+                <a:cs typeface="Calibri" pitchFamily="34" charset="-120"/>
+              </a:rPr>
+              <a:t>1</a:t>
+            </a:r>
+            <a:endParaRPr lang="en-US" sz="1500" dirty="0"/>
+          </a:p>
+        </p:txBody>
+      </p:sp>
+      <p:sp>
+        <p:nvSpPr>
+          <p:cNvPr id="7" name="Text 5"/>
+          <p:cNvSpPr/>
+          <p:nvPr/>
+        </p:nvSpPr>
+        <p:spPr>
+          <a:xfrm>
+            <a:off x="1280160" y="1517904"/>
+            <a:ext cx="10143439" cy="841248"/>
+          </a:xfrm>
+          <a:prstGeom prst="rect">
+            <a:avLst/>
+          </a:prstGeom>
+          <a:noFill/>
+          <a:ln/>
+        </p:spPr>
+        <p:txBody>
+          <a:bodyPr wrap="square" lIns="0" tIns="0" rIns="0" bIns="0" rtlCol="0" anchor="ctr"/>
+          <a:lstStyle/>
+          <a:p>
+            <a:pPr algn="l" indent="0" marL="0">
+              <a:buNone/>
+            </a:pPr>
+            <a:r>
+              <a:rPr lang="en-US" sz="1350" dirty="0">
+                <a:solidFill>
+                  <a:srgbClr val="E7EEF4"/>
+                </a:solidFill>
+                <a:latin typeface="Calibri" pitchFamily="34" charset="0"/>
+                <a:ea typeface="Calibri" pitchFamily="34" charset="-122"/>
+                <a:cs typeface="Calibri" pitchFamily="34" charset="-120"/>
+              </a:rPr>
+              <a:t>TSH is the most sensitive thyroid screen; biotin and heterophile interferences can mimic thyroid disease — reconcile with the patient.</a:t>
+            </a:r>
+            <a:endParaRPr lang="en-US" sz="1350" dirty="0"/>
+          </a:p>
+        </p:txBody>
+      </p:sp>
+      <p:sp>
+        <p:nvSpPr>
+          <p:cNvPr id="8" name="Shape 6"/>
+          <p:cNvSpPr/>
+          <p:nvPr/>
+        </p:nvSpPr>
+        <p:spPr>
+          <a:xfrm>
+            <a:off x="566928" y="2505456"/>
+            <a:ext cx="11057839" cy="841248"/>
+          </a:xfrm>
+          <a:prstGeom prst="roundRect">
+            <a:avLst>
+              <a:gd name="adj" fmla="val 7609"/>
+            </a:avLst>
+          </a:prstGeom>
+          <a:solidFill>
+            <a:srgbClr val="143651"/>
+          </a:solidFill>
+          <a:ln/>
+        </p:spPr>
+      </p:sp>
+      <p:sp>
+        <p:nvSpPr>
+          <p:cNvPr id="9" name="Shape 7"/>
+          <p:cNvSpPr/>
+          <p:nvPr/>
+        </p:nvSpPr>
+        <p:spPr>
+          <a:xfrm>
+            <a:off x="749808" y="2743200"/>
+            <a:ext cx="365760" cy="365760"/>
+          </a:xfrm>
+          <a:prstGeom prst="ellipse">
+            <a:avLst/>
+          </a:prstGeom>
+          <a:solidFill>
+            <a:srgbClr val="1565C0"/>
+          </a:solidFill>
+          <a:ln/>
+          <a:effectLst>
+            <a:outerShdw sx="100000" sy="100000" kx="0" ky="0" algn="bl" rotWithShape="0" blurRad="88900" dist="25400" dir="5400000">
+              <a:srgbClr val="22303C">
+                <a:alpha val="12000"/>
+              </a:srgbClr>
+            </a:outerShdw>
+          </a:effectLst>
+        </p:spPr>
+      </p:sp>
+      <p:sp>
+        <p:nvSpPr>
+          <p:cNvPr id="10" name="Text 8"/>
+          <p:cNvSpPr/>
+          <p:nvPr/>
+        </p:nvSpPr>
+        <p:spPr>
+          <a:xfrm>
+            <a:off x="749808" y="2743200"/>
+            <a:ext cx="365760" cy="365760"/>
+          </a:xfrm>
+          <a:prstGeom prst="rect">
+            <a:avLst/>
+          </a:prstGeom>
+          <a:noFill/>
+          <a:ln/>
+        </p:spPr>
+        <p:txBody>
+          <a:bodyPr wrap="square" lIns="0" tIns="0" rIns="0" bIns="0" rtlCol="0" anchor="ctr"/>
+          <a:lstStyle/>
+          <a:p>
+            <a:pPr algn="ctr" indent="0" marL="0">
+              <a:buNone/>
+            </a:pPr>
+            <a:r>
+              <a:rPr lang="en-US" sz="1500" b="1" dirty="0">
+                <a:solidFill>
+                  <a:srgbClr val="FFFFFF"/>
+                </a:solidFill>
+                <a:latin typeface="Calibri" pitchFamily="34" charset="0"/>
+                <a:ea typeface="Calibri" pitchFamily="34" charset="-122"/>
+                <a:cs typeface="Calibri" pitchFamily="34" charset="-120"/>
+              </a:rPr>
+              <a:t>2</a:t>
+            </a:r>
+            <a:endParaRPr lang="en-US" sz="1500" dirty="0"/>
+          </a:p>
+        </p:txBody>
+      </p:sp>
+      <p:sp>
+        <p:nvSpPr>
+          <p:cNvPr id="11" name="Text 9"/>
+          <p:cNvSpPr/>
+          <p:nvPr/>
+        </p:nvSpPr>
+        <p:spPr>
+          <a:xfrm>
+            <a:off x="1280160" y="2505456"/>
+            <a:ext cx="10143439" cy="841248"/>
+          </a:xfrm>
+          <a:prstGeom prst="rect">
+            <a:avLst/>
+          </a:prstGeom>
+          <a:noFill/>
+          <a:ln/>
+        </p:spPr>
+        <p:txBody>
+          <a:bodyPr wrap="square" lIns="0" tIns="0" rIns="0" bIns="0" rtlCol="0" anchor="ctr"/>
+          <a:lstStyle/>
+          <a:p>
+            <a:pPr algn="l" indent="0" marL="0">
+              <a:buNone/>
+            </a:pPr>
+            <a:r>
+              <a:rPr lang="en-US" sz="1350" dirty="0">
+                <a:solidFill>
+                  <a:srgbClr val="E7EEF4"/>
+                </a:solidFill>
+                <a:latin typeface="Calibri" pitchFamily="34" charset="0"/>
+                <a:ea typeface="Calibri" pitchFamily="34" charset="-122"/>
+                <a:cs typeface="Calibri" pitchFamily="34" charset="-120"/>
+              </a:rPr>
+              <a:t>Pair effector hormones with their stimulators and prefer dynamic testing for adrenal axes.</a:t>
+            </a:r>
+            <a:endParaRPr lang="en-US" sz="1350" dirty="0"/>
+          </a:p>
+        </p:txBody>
+      </p:sp>
+      <p:sp>
+        <p:nvSpPr>
+          <p:cNvPr id="12" name="Shape 10"/>
+          <p:cNvSpPr/>
+          <p:nvPr/>
+        </p:nvSpPr>
+        <p:spPr>
+          <a:xfrm>
+            <a:off x="566928" y="3493008"/>
+            <a:ext cx="11057839" cy="841248"/>
+          </a:xfrm>
+          <a:prstGeom prst="roundRect">
+            <a:avLst>
+              <a:gd name="adj" fmla="val 7609"/>
+            </a:avLst>
+          </a:prstGeom>
+          <a:solidFill>
+            <a:srgbClr val="143651"/>
+          </a:solidFill>
+          <a:ln/>
+        </p:spPr>
+      </p:sp>
+      <p:sp>
+        <p:nvSpPr>
+          <p:cNvPr id="13" name="Shape 11"/>
+          <p:cNvSpPr/>
+          <p:nvPr/>
+        </p:nvSpPr>
+        <p:spPr>
+          <a:xfrm>
+            <a:off x="749808" y="3730752"/>
+            <a:ext cx="365760" cy="365760"/>
+          </a:xfrm>
+          <a:prstGeom prst="ellipse">
+            <a:avLst/>
+          </a:prstGeom>
+          <a:solidFill>
+            <a:srgbClr val="1565C0"/>
+          </a:solidFill>
+          <a:ln/>
+          <a:effectLst>
+            <a:outerShdw sx="100000" sy="100000" kx="0" ky="0" algn="bl" rotWithShape="0" blurRad="88900" dist="25400" dir="5400000">
+              <a:srgbClr val="22303C">
+                <a:alpha val="12000"/>
+              </a:srgbClr>
+            </a:outerShdw>
+          </a:effectLst>
+        </p:spPr>
+      </p:sp>
+      <p:sp>
+        <p:nvSpPr>
+          <p:cNvPr id="14" name="Text 12"/>
+          <p:cNvSpPr/>
+          <p:nvPr/>
+        </p:nvSpPr>
+        <p:spPr>
+          <a:xfrm>
+            <a:off x="749808" y="3730752"/>
+            <a:ext cx="365760" cy="365760"/>
+          </a:xfrm>
+          <a:prstGeom prst="rect">
+            <a:avLst/>
+          </a:prstGeom>
+          <a:noFill/>
+          <a:ln/>
+        </p:spPr>
+        <p:txBody>
+          <a:bodyPr wrap="square" lIns="0" tIns="0" rIns="0" bIns="0" rtlCol="0" anchor="ctr"/>
+          <a:lstStyle/>
+          <a:p>
+            <a:pPr algn="ctr" indent="0" marL="0">
+              <a:buNone/>
+            </a:pPr>
+            <a:r>
+              <a:rPr lang="en-US" sz="1500" b="1" dirty="0">
+                <a:solidFill>
+                  <a:srgbClr val="FFFFFF"/>
+                </a:solidFill>
+                <a:latin typeface="Calibri" pitchFamily="34" charset="0"/>
+                <a:ea typeface="Calibri" pitchFamily="34" charset="-122"/>
+                <a:cs typeface="Calibri" pitchFamily="34" charset="-120"/>
+              </a:rPr>
+              <a:t>3</a:t>
+            </a:r>
+            <a:endParaRPr lang="en-US" sz="1500" dirty="0"/>
+          </a:p>
+        </p:txBody>
+      </p:sp>
+      <p:sp>
+        <p:nvSpPr>
+          <p:cNvPr id="15" name="Text 13"/>
+          <p:cNvSpPr/>
+          <p:nvPr/>
+        </p:nvSpPr>
+        <p:spPr>
+          <a:xfrm>
+            <a:off x="1280160" y="3493008"/>
+            <a:ext cx="10143439" cy="841248"/>
+          </a:xfrm>
+          <a:prstGeom prst="rect">
+            <a:avLst/>
+          </a:prstGeom>
+          <a:noFill/>
+          <a:ln/>
+        </p:spPr>
+        <p:txBody>
+          <a:bodyPr wrap="square" lIns="0" tIns="0" rIns="0" bIns="0" rtlCol="0" anchor="ctr"/>
+          <a:lstStyle/>
+          <a:p>
+            <a:pPr algn="l" indent="0" marL="0">
+              <a:buNone/>
+            </a:pPr>
+            <a:r>
+              <a:rPr lang="en-US" sz="1350" dirty="0">
+                <a:solidFill>
+                  <a:srgbClr val="E7EEF4"/>
+                </a:solidFill>
+                <a:latin typeface="Calibri" pitchFamily="34" charset="0"/>
+                <a:ea typeface="Calibri" pitchFamily="34" charset="-122"/>
+                <a:cs typeface="Calibri" pitchFamily="34" charset="-120"/>
+              </a:rPr>
+              <a:t>Read SPEP by zone: α₁ (A1AT), α₂ (haptoglobin), β (transferrin/C3), γ (Ig); recognize acute-phase, nephrotic, and cirrhosis patterns.</a:t>
+            </a:r>
+            <a:endParaRPr lang="en-US" sz="1350" dirty="0"/>
+          </a:p>
+        </p:txBody>
+      </p:sp>
+      <p:sp>
+        <p:nvSpPr>
+          <p:cNvPr id="16" name="Shape 14"/>
+          <p:cNvSpPr/>
+          <p:nvPr/>
+        </p:nvSpPr>
+        <p:spPr>
+          <a:xfrm>
+            <a:off x="566928" y="4480560"/>
+            <a:ext cx="11057839" cy="841248"/>
+          </a:xfrm>
+          <a:prstGeom prst="roundRect">
+            <a:avLst>
+              <a:gd name="adj" fmla="val 7609"/>
+            </a:avLst>
+          </a:prstGeom>
+          <a:solidFill>
+            <a:srgbClr val="143651"/>
+          </a:solidFill>
+          <a:ln/>
+        </p:spPr>
+      </p:sp>
+      <p:sp>
+        <p:nvSpPr>
+          <p:cNvPr id="17" name="Shape 15"/>
+          <p:cNvSpPr/>
+          <p:nvPr/>
+        </p:nvSpPr>
+        <p:spPr>
+          <a:xfrm>
+            <a:off x="749808" y="4718304"/>
+            <a:ext cx="365760" cy="365760"/>
+          </a:xfrm>
+          <a:prstGeom prst="ellipse">
+            <a:avLst/>
+          </a:prstGeom>
+          <a:solidFill>
+            <a:srgbClr val="1565C0"/>
+          </a:solidFill>
+          <a:ln/>
+          <a:effectLst>
+            <a:outerShdw sx="100000" sy="100000" kx="0" ky="0" algn="bl" rotWithShape="0" blurRad="88900" dist="25400" dir="5400000">
+              <a:srgbClr val="22303C">
+                <a:alpha val="12000"/>
+              </a:srgbClr>
+            </a:outerShdw>
+          </a:effectLst>
+        </p:spPr>
+      </p:sp>
+      <p:sp>
+        <p:nvSpPr>
+          <p:cNvPr id="18" name="Text 16"/>
+          <p:cNvSpPr/>
+          <p:nvPr/>
+        </p:nvSpPr>
+        <p:spPr>
+          <a:xfrm>
+            <a:off x="749808" y="4718304"/>
+            <a:ext cx="365760" cy="365760"/>
+          </a:xfrm>
+          <a:prstGeom prst="rect">
+            <a:avLst/>
+          </a:prstGeom>
+          <a:noFill/>
+          <a:ln/>
+        </p:spPr>
+        <p:txBody>
+          <a:bodyPr wrap="square" lIns="0" tIns="0" rIns="0" bIns="0" rtlCol="0" anchor="ctr"/>
+          <a:lstStyle/>
+          <a:p>
+            <a:pPr algn="ctr" indent="0" marL="0">
+              <a:buNone/>
+            </a:pPr>
+            <a:r>
+              <a:rPr lang="en-US" sz="1500" b="1" dirty="0">
+                <a:solidFill>
+                  <a:srgbClr val="FFFFFF"/>
+                </a:solidFill>
+                <a:latin typeface="Calibri" pitchFamily="34" charset="0"/>
+                <a:ea typeface="Calibri" pitchFamily="34" charset="-122"/>
+                <a:cs typeface="Calibri" pitchFamily="34" charset="-120"/>
+              </a:rPr>
+              <a:t>4</a:t>
+            </a:r>
+            <a:endParaRPr lang="en-US" sz="1500" dirty="0"/>
+          </a:p>
+        </p:txBody>
+      </p:sp>
+      <p:sp>
+        <p:nvSpPr>
+          <p:cNvPr id="19" name="Text 17"/>
+          <p:cNvSpPr/>
+          <p:nvPr/>
+        </p:nvSpPr>
+        <p:spPr>
+          <a:xfrm>
+            <a:off x="1280160" y="4480560"/>
+            <a:ext cx="10143439" cy="841248"/>
+          </a:xfrm>
+          <a:prstGeom prst="rect">
+            <a:avLst/>
+          </a:prstGeom>
+          <a:noFill/>
+          <a:ln/>
+        </p:spPr>
+        <p:txBody>
+          <a:bodyPr wrap="square" lIns="0" tIns="0" rIns="0" bIns="0" rtlCol="0" anchor="ctr"/>
+          <a:lstStyle/>
+          <a:p>
+            <a:pPr algn="l" indent="0" marL="0">
+              <a:buNone/>
+            </a:pPr>
+            <a:r>
+              <a:rPr lang="en-US" sz="1350" dirty="0">
+                <a:solidFill>
+                  <a:srgbClr val="E7EEF4"/>
+                </a:solidFill>
+                <a:latin typeface="Calibri" pitchFamily="34" charset="0"/>
+                <a:ea typeface="Calibri" pitchFamily="34" charset="-122"/>
+                <a:cs typeface="Calibri" pitchFamily="34" charset="-120"/>
+              </a:rPr>
+              <a:t>A discrete spike → immunofixation; a normal SPEP does not exclude light-chain disease — use serum free light chains and the ratio.</a:t>
+            </a:r>
+            <a:endParaRPr lang="en-US" sz="1350" dirty="0"/>
+          </a:p>
+        </p:txBody>
+      </p:sp>
+      <p:sp>
+        <p:nvSpPr>
+          <p:cNvPr id="20" name="Shape 18"/>
+          <p:cNvSpPr/>
+          <p:nvPr/>
+        </p:nvSpPr>
+        <p:spPr>
+          <a:xfrm>
+            <a:off x="566928" y="5468112"/>
+            <a:ext cx="11057839" cy="841248"/>
+          </a:xfrm>
+          <a:prstGeom prst="roundRect">
+            <a:avLst>
+              <a:gd name="adj" fmla="val 7609"/>
+            </a:avLst>
+          </a:prstGeom>
+          <a:solidFill>
+            <a:srgbClr val="143651"/>
+          </a:solidFill>
+          <a:ln/>
+        </p:spPr>
+      </p:sp>
+      <p:sp>
+        <p:nvSpPr>
+          <p:cNvPr id="21" name="Shape 19"/>
+          <p:cNvSpPr/>
+          <p:nvPr/>
+        </p:nvSpPr>
+        <p:spPr>
+          <a:xfrm>
+            <a:off x="749808" y="5705856"/>
+            <a:ext cx="365760" cy="365760"/>
+          </a:xfrm>
+          <a:prstGeom prst="ellipse">
+            <a:avLst/>
+          </a:prstGeom>
+          <a:solidFill>
+            <a:srgbClr val="1565C0"/>
+          </a:solidFill>
+          <a:ln/>
+          <a:effectLst>
+            <a:outerShdw sx="100000" sy="100000" kx="0" ky="0" algn="bl" rotWithShape="0" blurRad="88900" dist="25400" dir="5400000">
+              <a:srgbClr val="22303C">
+                <a:alpha val="12000"/>
+              </a:srgbClr>
+            </a:outerShdw>
+          </a:effectLst>
+        </p:spPr>
+      </p:sp>
+      <p:sp>
+        <p:nvSpPr>
+          <p:cNvPr id="22" name="Text 20"/>
+          <p:cNvSpPr/>
+          <p:nvPr/>
+        </p:nvSpPr>
+        <p:spPr>
+          <a:xfrm>
+            <a:off x="749808" y="5705856"/>
+            <a:ext cx="365760" cy="365760"/>
+          </a:xfrm>
+          <a:prstGeom prst="rect">
+            <a:avLst/>
+          </a:prstGeom>
+          <a:noFill/>
+          <a:ln/>
+        </p:spPr>
+        <p:txBody>
+          <a:bodyPr wrap="square" lIns="0" tIns="0" rIns="0" bIns="0" rtlCol="0" anchor="ctr"/>
+          <a:lstStyle/>
+          <a:p>
+            <a:pPr algn="ctr" indent="0" marL="0">
+              <a:buNone/>
+            </a:pPr>
+            <a:r>
+              <a:rPr lang="en-US" sz="1500" b="1" dirty="0">
+                <a:solidFill>
+                  <a:srgbClr val="FFFFFF"/>
+                </a:solidFill>
+                <a:latin typeface="Calibri" pitchFamily="34" charset="0"/>
+                <a:ea typeface="Calibri" pitchFamily="34" charset="-122"/>
+                <a:cs typeface="Calibri" pitchFamily="34" charset="-120"/>
+              </a:rPr>
+              <a:t>5</a:t>
+            </a:r>
+            <a:endParaRPr lang="en-US" sz="1500" dirty="0"/>
+          </a:p>
+        </p:txBody>
+      </p:sp>
+      <p:sp>
+        <p:nvSpPr>
+          <p:cNvPr id="23" name="Text 21"/>
+          <p:cNvSpPr/>
+          <p:nvPr/>
+        </p:nvSpPr>
+        <p:spPr>
+          <a:xfrm>
+            <a:off x="1280160" y="5468112"/>
+            <a:ext cx="10143439" cy="841248"/>
+          </a:xfrm>
+          <a:prstGeom prst="rect">
+            <a:avLst/>
+          </a:prstGeom>
+          <a:noFill/>
+          <a:ln/>
+        </p:spPr>
+        <p:txBody>
+          <a:bodyPr wrap="square" lIns="0" tIns="0" rIns="0" bIns="0" rtlCol="0" anchor="ctr"/>
+          <a:lstStyle/>
+          <a:p>
+            <a:pPr algn="l" indent="0" marL="0">
+              <a:buNone/>
+            </a:pPr>
+            <a:r>
+              <a:rPr lang="en-US" sz="1350" dirty="0">
+                <a:solidFill>
+                  <a:srgbClr val="E7EEF4"/>
+                </a:solidFill>
+                <a:latin typeface="Calibri" pitchFamily="34" charset="0"/>
+                <a:ea typeface="Calibri" pitchFamily="34" charset="-122"/>
+                <a:cs typeface="Calibri" pitchFamily="34" charset="-120"/>
+              </a:rPr>
+              <a:t>Quantify M-protein and light chains for monitoring; interpret the ratio in renal impairment.</a:t>
+            </a:r>
+            <a:endParaRPr lang="en-US" sz="1350" dirty="0"/>
+          </a:p>
+        </p:txBody>
+      </p:sp>
+      <p:sp>
+        <p:nvSpPr>
+          <p:cNvPr id="24" name="Text 22"/>
+          <p:cNvSpPr/>
+          <p:nvPr/>
+        </p:nvSpPr>
+        <p:spPr>
+          <a:xfrm>
+            <a:off x="566928" y="6473952"/>
+            <a:ext cx="8229600" cy="274320"/>
+          </a:xfrm>
+          <a:prstGeom prst="rect">
+            <a:avLst/>
+          </a:prstGeom>
+          <a:noFill/>
+          <a:ln/>
+        </p:spPr>
+        <p:txBody>
+          <a:bodyPr wrap="square" lIns="0" tIns="0" rIns="0" bIns="0" rtlCol="0" anchor="ctr"/>
+          <a:lstStyle/>
+          <a:p>
+            <a:pPr indent="0" marL="0">
+              <a:buNone/>
+            </a:pPr>
+            <a:r>
+              <a:rPr lang="en-US" sz="850" dirty="0">
+                <a:solidFill>
+                  <a:srgbClr val="5E7488"/>
+                </a:solidFill>
+                <a:latin typeface="Calibri" pitchFamily="34" charset="0"/>
+                <a:ea typeface="Calibri" pitchFamily="34" charset="-122"/>
+                <a:cs typeface="Calibri" pitchFamily="34" charset="-120"/>
+              </a:rPr>
+              <a:t>Makassed General Hospital  ·  Department of Laboratory Medicine</a:t>
+            </a:r>
+            <a:endParaRPr lang="en-US" sz="850" dirty="0"/>
+          </a:p>
+        </p:txBody>
+      </p:sp>
+      <p:sp>
+        <p:nvSpPr>
+          <p:cNvPr id="25" name="Text 23"/>
+          <p:cNvSpPr/>
+          <p:nvPr/>
+        </p:nvSpPr>
+        <p:spPr>
+          <a:xfrm>
+            <a:off x="11002975" y="6473952"/>
+            <a:ext cx="640080" cy="274320"/>
+          </a:xfrm>
+          <a:prstGeom prst="rect">
+            <a:avLst/>
+          </a:prstGeom>
+          <a:noFill/>
+          <a:ln/>
+        </p:spPr>
+        <p:txBody>
+          <a:bodyPr wrap="square" lIns="0" tIns="0" rIns="0" bIns="0" rtlCol="0" anchor="ctr"/>
+          <a:lstStyle/>
+          <a:p>
+            <a:pPr algn="r" indent="0" marL="0">
+              <a:buNone/>
+            </a:pPr>
+            <a:r>
+              <a:rPr lang="en-US" sz="850" b="1" dirty="0">
+                <a:solidFill>
+                  <a:srgbClr val="1565C0"/>
+                </a:solidFill>
+                <a:latin typeface="Calibri" pitchFamily="34" charset="0"/>
+                <a:ea typeface="Calibri" pitchFamily="34" charset="-122"/>
+                <a:cs typeface="Calibri" pitchFamily="34" charset="-120"/>
+              </a:rPr>
+              <a:t>22</a:t>
+            </a:r>
+            <a:endParaRPr lang="en-US" sz="850" dirty="0"/>
+          </a:p>
+        </p:txBody>
+      </p:sp>
+    </p:spTree>
+  </p:cSld>
+  <p:clrMapOvr>
+    <a:masterClrMapping/>
+  </p:clrMapOvr>
+</p:sld>
+</file>
+
+<file path=ppt/slides/slide26.xml><?xml version="1.0" encoding="utf-8"?>
+<p:sld xmlns:a="http://schemas.openxmlformats.org/drawingml/2006/main" xmlns:r="http://schemas.openxmlformats.org/officeDocument/2006/relationships" xmlns:p="http://schemas.openxmlformats.org/presentationml/2006/main">
+  <p:cSld name="Slide 26">
+    <p:bg>
+      <p:bgPr>
+        <a:solidFill>
+          <a:srgbClr val="FFFFFF"/>
+        </a:solidFill>
+      </p:bgPr>
+    </p:bg>
+    <p:spTree>
+      <p:nvGrpSpPr>
+        <p:cNvPr id="1" name=""/>
+        <p:cNvGrpSpPr/>
+        <p:nvPr/>
+      </p:nvGrpSpPr>
+      <p:grpSpPr>
+        <a:xfrm>
+          <a:off x="0" y="0"/>
+          <a:ext cx="0" cy="0"/>
+          <a:chOff x="0" y="0"/>
+          <a:chExt cx="0" cy="0"/>
+        </a:xfrm>
+      </p:grpSpPr>
+      <p:sp>
+        <p:nvSpPr>
+          <p:cNvPr id="2" name="Text 0"/>
+          <p:cNvSpPr/>
+          <p:nvPr/>
+        </p:nvSpPr>
+        <p:spPr>
+          <a:xfrm>
+            <a:off x="566928" y="329184"/>
+            <a:ext cx="10515600" cy="310896"/>
+          </a:xfrm>
+          <a:prstGeom prst="rect">
+            <a:avLst/>
+          </a:prstGeom>
+          <a:noFill/>
+          <a:ln/>
+        </p:spPr>
+        <p:txBody>
+          <a:bodyPr wrap="square" lIns="0" tIns="0" rIns="0" bIns="0" rtlCol="0" anchor="ctr"/>
+          <a:lstStyle/>
+          <a:p>
+            <a:pPr algn="l" indent="0" marL="0">
+              <a:buNone/>
+            </a:pPr>
+            <a:r>
+              <a:rPr lang="en-US" sz="1100" b="1" spc="150" kern="0" dirty="0">
+                <a:solidFill>
+                  <a:srgbClr val="1565C0"/>
+                </a:solidFill>
+                <a:latin typeface="Calibri" pitchFamily="34" charset="0"/>
+                <a:ea typeface="Calibri" pitchFamily="34" charset="-122"/>
+                <a:cs typeface="Calibri" pitchFamily="34" charset="-120"/>
+              </a:rPr>
               <a:t>CLINICAL CHEMISTRY   ·   REFERENCES &amp; FURTHER READING</a:t>
             </a:r>
             <a:endParaRPr lang="en-US" sz="1100" dirty="0"/>
@@ -9605,7 +11894,7 @@
                 <a:ea typeface="Calibri" pitchFamily="34" charset="-122"/>
                 <a:cs typeface="Calibri" pitchFamily="34" charset="-120"/>
               </a:rPr>
-              <a:t>1.   Rifai N, et al. Tietz Textbook of Clinical Chemistry, 6th ed. Elsevier, 2018.</a:t>
+              <a:t>1.   Keren DF. Protein Electrophoresis in Clinical Diagnosis. ASCP Press (department teaching reference).</a:t>
             </a:r>
             <a:endParaRPr lang="en-US" sz="1150" dirty="0"/>
           </a:p>
@@ -9625,7 +11914,7 @@
                 <a:ea typeface="Calibri" pitchFamily="34" charset="-122"/>
                 <a:cs typeface="Calibri" pitchFamily="34" charset="-120"/>
               </a:rPr>
-              <a:t>2.   Rajkumar SV, et al. IMWG updated criteria for the diagnosis of multiple myeloma. Lancet Oncol. 2014.</a:t>
+              <a:t>2.   Rifai N, et al. Tietz Textbook of Clinical Chemistry, 6th ed. Elsevier, 2018.</a:t>
             </a:r>
             <a:endParaRPr lang="en-US" sz="1150" dirty="0"/>
           </a:p>
@@ -9645,7 +11934,7 @@
                 <a:ea typeface="Calibri" pitchFamily="34" charset="-122"/>
                 <a:cs typeface="Calibri" pitchFamily="34" charset="-120"/>
               </a:rPr>
-              <a:t>3.   Keren DF. Protein Electrophoresis in Clinical Diagnosis. ASCP Press.</a:t>
+              <a:t>3.   Rajkumar SV, et al. IMWG criteria for the diagnosis of multiple myeloma. Lancet Oncol. 2014.</a:t>
             </a:r>
             <a:endParaRPr lang="en-US" sz="1150" dirty="0"/>
           </a:p>
@@ -9665,7 +11954,7 @@
                 <a:ea typeface="Calibri" pitchFamily="34" charset="-122"/>
                 <a:cs typeface="Calibri" pitchFamily="34" charset="-120"/>
               </a:rPr>
-              <a:t>4.   CLSI documents on immunoassay interference.</a:t>
+              <a:t>4.   Clarke W (ed). Contemporary Practice in Clinical Chemistry, AACC Press.</a:t>
             </a:r>
             <a:endParaRPr lang="en-US" sz="1150" dirty="0"/>
           </a:p>
@@ -9771,7 +12060,7 @@
                 <a:ea typeface="Calibri" pitchFamily="34" charset="-122"/>
                 <a:cs typeface="Calibri" pitchFamily="34" charset="-120"/>
               </a:rPr>
-              <a:t>19</a:t>
+              <a:t>23</a:t>
             </a:r>
             <a:endParaRPr lang="en-US" sz="850" dirty="0"/>
           </a:p>
@@ -10283,7 +12572,7 @@
                 <a:ea typeface="Calibri" pitchFamily="34" charset="-122"/>
                 <a:cs typeface="Calibri" pitchFamily="34" charset="-120"/>
               </a:rPr>
-              <a:t>Read SPEP, UPEP, and immunofixation patterns.</a:t>
+              <a:t>Read SPEP zone-by-zone and identify acute-phase, nephrotic, and cirrhosis patterns.</a:t>
             </a:r>
             <a:endParaRPr lang="en-US" sz="1350" dirty="0"/>
           </a:p>
@@ -10417,7 +12706,7 @@
                 <a:ea typeface="Calibri" pitchFamily="34" charset="-122"/>
                 <a:cs typeface="Calibri" pitchFamily="34" charset="-120"/>
               </a:rPr>
-              <a:t>Use serum free light chains and the ratio in monoclonal gammopathy.</a:t>
+              <a:t>Distinguish polyclonal from monoclonal gammopathy and reflex to immunofixation.</a:t>
             </a:r>
             <a:endParaRPr lang="en-US" sz="1350" dirty="0"/>
           </a:p>
@@ -10551,7 +12840,7 @@
                 <a:ea typeface="Calibri" pitchFamily="34" charset="-122"/>
                 <a:cs typeface="Calibri" pitchFamily="34" charset="-120"/>
               </a:rPr>
-              <a:t>Recognize biotin, heterophile, and macro-analyte interferences in endocrine testing.</a:t>
+              <a:t>Use serum free light chains and the ratio in monoclonal gammopathy.</a:t>
             </a:r>
             <a:endParaRPr lang="en-US" sz="1350" dirty="0"/>
           </a:p>
@@ -10685,7 +12974,7 @@
                 <a:ea typeface="Calibri" pitchFamily="34" charset="-122"/>
                 <a:cs typeface="Calibri" pitchFamily="34" charset="-120"/>
               </a:rPr>
-              <a:t>Outline the laboratory workup of a monoclonal gammopathy.</a:t>
+              <a:t>Recognize biotin, heterophile, and macro-analyte interferences in endocrine testing.</a:t>
             </a:r>
             <a:endParaRPr lang="en-US" sz="1350" dirty="0"/>
           </a:p>
@@ -11324,7 +13613,7 @@
                 <a:ea typeface="Calibri" pitchFamily="34" charset="-122"/>
                 <a:cs typeface="Calibri" pitchFamily="34" charset="-120"/>
               </a:rPr>
-              <a:t>Protein electrophoresis</a:t>
+              <a:t>SPEP zones</a:t>
             </a:r>
             <a:pPr algn="l" indent="0" marL="0">
               <a:buNone/>
@@ -11338,7 +13627,7 @@
                 <a:ea typeface="Calibri" pitchFamily="34" charset="-122"/>
                 <a:cs typeface="Calibri" pitchFamily="34" charset="-120"/>
               </a:rPr>
-              <a:t>   —  SPEP/UPEP/IFE patterns</a:t>
+              <a:t>   —  proteins by region (Keren)</a:t>
             </a:r>
             <a:endParaRPr lang="en-US" sz="1400" dirty="0"/>
           </a:p>
@@ -11465,7 +13754,7 @@
                 <a:ea typeface="Calibri" pitchFamily="34" charset="-122"/>
                 <a:cs typeface="Calibri" pitchFamily="34" charset="-120"/>
               </a:rPr>
-              <a:t>Monoclonal gammopathy</a:t>
+              <a:t>Gammopathy workup</a:t>
             </a:r>
             <a:pPr algn="l" indent="0" marL="0">
               <a:buNone/>
@@ -11479,7 +13768,7 @@
                 <a:ea typeface="Calibri" pitchFamily="34" charset="-122"/>
                 <a:cs typeface="Calibri" pitchFamily="34" charset="-120"/>
               </a:rPr>
-              <a:t>   —  free light chains, IMWG workup</a:t>
+              <a:t>   —  patterns, IFE, free light chains</a:t>
             </a:r>
             <a:endParaRPr lang="en-US" sz="1400" dirty="0"/>
           </a:p>
@@ -11613,7 +13902,7 @@
                 <a:ea typeface="Calibri" pitchFamily="34" charset="-122"/>
                 <a:cs typeface="Calibri" pitchFamily="34" charset="-120"/>
               </a:rPr>
-              <a:t>Cases &amp; board</a:t>
+              <a:t>Cases &amp; board review</a:t>
             </a:r>
             <a:endParaRPr lang="en-US" sz="1400" dirty="0"/>
           </a:p>
@@ -12119,7 +14408,7 @@
                 <a:ea typeface="Calibri" pitchFamily="34" charset="-122"/>
                 <a:cs typeface="Calibri" pitchFamily="34" charset="-120"/>
               </a:rPr>
-              <a:t>Original schematic. TSH is the most sensitive screen because of the log-linear feedback relationship with free T4.</a:t>
+              <a:t>Original schematic. TSH is the most sensitive screen because of the log-linear feedback with free T4.</a:t>
             </a:r>
             <a:endParaRPr lang="en-US" sz="1150" dirty="0"/>
           </a:p>
@@ -12683,7 +14972,7 @@
                 <a:ea typeface="Calibri" pitchFamily="34" charset="-122"/>
                 <a:cs typeface="Calibri" pitchFamily="34" charset="-120"/>
               </a:rPr>
-              <a:t>Always reconcile with the clinical picture and repeat on another platform if discordant.</a:t>
+              <a:t>Reconcile with the clinical picture; repeat on another platform if discordant.</a:t>
             </a:r>
             <a:endParaRPr lang="en-US" sz="1250" dirty="0"/>
           </a:p>
@@ -13031,7 +15320,7 @@
                 <a:ea typeface="Calibri" pitchFamily="34" charset="-122"/>
                 <a:cs typeface="Calibri" pitchFamily="34" charset="-120"/>
               </a:rPr>
-              <a:t>Screening for hypercortisolism: late-night salivary cortisol, 1-mg dexamethasone suppression, 24-h urine free cortisol.</a:t>
+              <a:t>Hypercortisolism screen: late-night salivary cortisol, 1-mg dexamethasone suppression, 24-h urine free cortisol.</a:t>
             </a:r>
             <a:endParaRPr lang="en-US" sz="1250" dirty="0"/>
           </a:p>
@@ -13052,7 +15341,7 @@
                 <a:ea typeface="Calibri" pitchFamily="34" charset="-122"/>
                 <a:cs typeface="Calibri" pitchFamily="34" charset="-120"/>
               </a:rPr>
-              <a:t>Screening for adrenal insufficiency: morning cortisol ± ACTH stimulation.</a:t>
+              <a:t>Adrenal insufficiency: morning cortisol ± ACTH stimulation.</a:t>
             </a:r>
             <a:endParaRPr lang="en-US" sz="1250" dirty="0"/>
           </a:p>
@@ -13073,7 +15362,7 @@
                 <a:ea typeface="Calibri" pitchFamily="34" charset="-122"/>
                 <a:cs typeface="Calibri" pitchFamily="34" charset="-120"/>
               </a:rPr>
-              <a:t>Exogenous steroids and estrogen (raises CBG, total cortisol) confound results.</a:t>
+              <a:t>Estrogen raises CBG (total cortisol); exogenous steroids confound.</a:t>
             </a:r>
             <a:endParaRPr lang="en-US" sz="1250" dirty="0"/>
           </a:p>
@@ -13205,7 +15494,7 @@
                 <a:ea typeface="Calibri" pitchFamily="34" charset="-122"/>
                 <a:cs typeface="Calibri" pitchFamily="34" charset="-120"/>
               </a:rPr>
-              <a:t>Dynamic suppression/stimulation tests outperform single static levels.</a:t>
+              <a:t>Dynamic suppression/stimulation outperforms single static levels.</a:t>
             </a:r>
             <a:endParaRPr lang="en-US" sz="1250" dirty="0"/>
           </a:p>
@@ -13226,7 +15515,7 @@
                 <a:ea typeface="Calibri" pitchFamily="34" charset="-122"/>
                 <a:cs typeface="Calibri" pitchFamily="34" charset="-120"/>
               </a:rPr>
-              <a:t>Pre-analytics: ACTH is labile — chilled EDTA, rapid processing.</a:t>
+              <a:t>ACTH is labile — chilled EDTA, rapid processing.</a:t>
             </a:r>
             <a:endParaRPr lang="en-US" sz="1250" dirty="0"/>
           </a:p>
@@ -13247,7 +15536,7 @@
                 <a:ea typeface="Calibri" pitchFamily="34" charset="-122"/>
                 <a:cs typeface="Calibri" pitchFamily="34" charset="-120"/>
               </a:rPr>
-              <a:t>Interpret in the clinical context (pretest probability).</a:t>
+              <a:t>Interpret with pretest probability.</a:t>
             </a:r>
             <a:endParaRPr lang="en-US" sz="1250" dirty="0"/>
           </a:p>

--- a/decks/Chem_04_Endocrine-and-Protein-Testing.pptx
+++ b/decks/Chem_04_Endocrine-and-Protein-Testing.pptx
@@ -26,9 +26,13 @@
     <p:sldId id="274" r:id="rId20"/>
     <p:sldId id="275" r:id="rId21"/>
     <p:sldId id="276" r:id="rId22"/>
+    <p:sldId id="285" r:id="rId36"/>
     <p:sldId id="277" r:id="rId23"/>
+    <p:sldId id="284" r:id="rId35"/>
     <p:sldId id="278" r:id="rId24"/>
+    <p:sldId id="283" r:id="rId34"/>
     <p:sldId id="279" r:id="rId25"/>
+    <p:sldId id="282" r:id="rId33"/>
     <p:sldId id="280" r:id="rId26"/>
     <p:sldId id="281" r:id="rId27"/>
   </p:sldIdLst>
@@ -3121,6 +3125,10 @@
           </a:solidFill>
           <a:ln/>
         </p:spPr>
+        <p:txBody>
+          <a:bodyPr/>
+          <a:p/>
+        </p:txBody>
       </p:sp>
       <p:sp>
         <p:nvSpPr>
@@ -3143,6 +3151,10 @@
           </a:solidFill>
           <a:ln/>
         </p:spPr>
+        <p:txBody>
+          <a:bodyPr/>
+          <a:p/>
+        </p:txBody>
       </p:sp>
       <p:sp>
         <p:nvSpPr>
@@ -3165,6 +3177,10 @@
           </a:solidFill>
           <a:ln/>
         </p:spPr>
+        <p:txBody>
+          <a:bodyPr/>
+          <a:p/>
+        </p:txBody>
       </p:sp>
       <p:sp>
         <p:nvSpPr>
@@ -3187,6 +3203,10 @@
           </a:solidFill>
           <a:ln/>
         </p:spPr>
+        <p:txBody>
+          <a:bodyPr/>
+          <a:p/>
+        </p:txBody>
       </p:sp>
       <p:sp>
         <p:nvSpPr>
@@ -3608,6 +3628,10 @@
             </a:outerShdw>
           </a:effectLst>
         </p:spPr>
+        <p:txBody>
+          <a:bodyPr/>
+          <a:p/>
+        </p:txBody>
       </p:sp>
       <p:pic>
         <p:nvPicPr>
@@ -3916,6 +3940,10 @@
             </a:outerShdw>
           </a:effectLst>
         </p:spPr>
+        <p:txBody>
+          <a:bodyPr/>
+          <a:p/>
+        </p:txBody>
       </p:sp>
       <p:sp>
         <p:nvSpPr>
@@ -4090,6 +4118,10 @@
             </a:outerShdw>
           </a:effectLst>
         </p:spPr>
+        <p:txBody>
+          <a:bodyPr/>
+          <a:p/>
+        </p:txBody>
       </p:sp>
       <p:sp>
         <p:nvSpPr>
@@ -4480,6 +4512,10 @@
             </a:outerShdw>
           </a:effectLst>
         </p:spPr>
+        <p:txBody>
+          <a:bodyPr/>
+          <a:p/>
+        </p:txBody>
       </p:sp>
       <p:sp>
         <p:nvSpPr>
@@ -4654,6 +4690,10 @@
             </a:outerShdw>
           </a:effectLst>
         </p:spPr>
+        <p:txBody>
+          <a:bodyPr/>
+          <a:p/>
+        </p:txBody>
       </p:sp>
       <p:sp>
         <p:nvSpPr>
@@ -5044,6 +5084,10 @@
             </a:outerShdw>
           </a:effectLst>
         </p:spPr>
+        <p:txBody>
+          <a:bodyPr/>
+          <a:p/>
+        </p:txBody>
       </p:sp>
       <p:sp>
         <p:nvSpPr>
@@ -5218,6 +5262,10 @@
             </a:outerShdw>
           </a:effectLst>
         </p:spPr>
+        <p:txBody>
+          <a:bodyPr/>
+          <a:p/>
+        </p:txBody>
       </p:sp>
       <p:sp>
         <p:nvSpPr>
@@ -5523,6 +5571,10 @@
           </a:solidFill>
           <a:ln/>
         </p:spPr>
+        <p:txBody>
+          <a:bodyPr/>
+          <a:p/>
+        </p:txBody>
       </p:sp>
       <p:sp>
         <p:nvSpPr>
@@ -5545,6 +5597,10 @@
           </a:solidFill>
           <a:ln/>
         </p:spPr>
+        <p:txBody>
+          <a:bodyPr/>
+          <a:p/>
+        </p:txBody>
       </p:sp>
       <p:sp>
         <p:nvSpPr>
@@ -5801,6 +5857,10 @@
             </a:outerShdw>
           </a:effectLst>
         </p:spPr>
+        <p:txBody>
+          <a:bodyPr/>
+          <a:p/>
+        </p:txBody>
       </p:sp>
       <p:sp>
         <p:nvSpPr>
@@ -5911,6 +5971,10 @@
             </a:outerShdw>
           </a:effectLst>
         </p:spPr>
+        <p:txBody>
+          <a:bodyPr/>
+          <a:p/>
+        </p:txBody>
       </p:sp>
       <p:sp>
         <p:nvSpPr>
@@ -6340,6 +6404,10 @@
             </a:outerShdw>
           </a:effectLst>
         </p:spPr>
+        <p:txBody>
+          <a:bodyPr/>
+          <a:p/>
+        </p:txBody>
       </p:sp>
       <p:sp>
         <p:nvSpPr>
@@ -6666,6 +6734,10 @@
             </a:outerShdw>
           </a:effectLst>
         </p:spPr>
+        <p:txBody>
+          <a:bodyPr/>
+          <a:p/>
+        </p:txBody>
       </p:sp>
       <p:sp>
         <p:nvSpPr>
@@ -6776,6 +6848,10 @@
             </a:outerShdw>
           </a:effectLst>
         </p:spPr>
+        <p:txBody>
+          <a:bodyPr/>
+          <a:p/>
+        </p:txBody>
       </p:sp>
       <p:sp>
         <p:nvSpPr>
@@ -7205,6 +7281,10 @@
             </a:outerShdw>
           </a:effectLst>
         </p:spPr>
+        <p:txBody>
+          <a:bodyPr/>
+          <a:p/>
+        </p:txBody>
       </p:sp>
       <p:sp>
         <p:nvSpPr>
@@ -7531,6 +7611,10 @@
             </a:outerShdw>
           </a:effectLst>
         </p:spPr>
+        <p:txBody>
+          <a:bodyPr/>
+          <a:p/>
+        </p:txBody>
       </p:sp>
       <p:sp>
         <p:nvSpPr>
@@ -7641,6 +7725,10 @@
             </a:outerShdw>
           </a:effectLst>
         </p:spPr>
+        <p:txBody>
+          <a:bodyPr/>
+          <a:p/>
+        </p:txBody>
       </p:sp>
       <p:sp>
         <p:nvSpPr>
@@ -7964,6 +8052,10 @@
             </a:outerShdw>
           </a:effectLst>
         </p:spPr>
+        <p:txBody>
+          <a:bodyPr/>
+          <a:p/>
+        </p:txBody>
       </p:sp>
       <p:sp>
         <p:nvSpPr>
@@ -8071,6 +8163,10 @@
             </a:outerShdw>
           </a:effectLst>
         </p:spPr>
+        <p:txBody>
+          <a:bodyPr/>
+          <a:p/>
+        </p:txBody>
       </p:sp>
       <p:sp>
         <p:nvSpPr>
@@ -8178,6 +8274,10 @@
             </a:outerShdw>
           </a:effectLst>
         </p:spPr>
+        <p:txBody>
+          <a:bodyPr/>
+          <a:p/>
+        </p:txBody>
       </p:sp>
       <p:sp>
         <p:nvSpPr>
@@ -8285,6 +8385,10 @@
             </a:outerShdw>
           </a:effectLst>
         </p:spPr>
+        <p:txBody>
+          <a:bodyPr/>
+          <a:p/>
+        </p:txBody>
       </p:sp>
       <p:sp>
         <p:nvSpPr>
@@ -8721,6 +8825,10 @@
             </a:outerShdw>
           </a:effectLst>
         </p:spPr>
+        <p:txBody>
+          <a:bodyPr/>
+          <a:p/>
+        </p:txBody>
       </p:sp>
       <p:sp>
         <p:nvSpPr>
@@ -9129,9 +9237,9 @@
               <a:buNone/>
             </a:pPr>
             <a:r>
-              <a:rPr lang="en-US" sz="1350" b="1" dirty="0">
-                <a:solidFill>
-                  <a:srgbClr val="0D4A92"/>
+              <a:rPr lang="en-US" sz="1350" b="0" dirty="0">
+                <a:solidFill>
+                  <a:srgbClr val="33444F"/>
                 </a:solidFill>
                 <a:latin typeface="Calibri" pitchFamily="34" charset="0"/>
                 <a:ea typeface="Calibri" pitchFamily="34" charset="-122"/>
@@ -9180,130 +9288,6 @@
               <a:t>E. Reverse T3</a:t>
             </a:r>
             <a:endParaRPr lang="en-US" sz="1350" dirty="0"/>
-          </a:p>
-        </p:txBody>
-      </p:sp>
-      <p:sp>
-        <p:nvSpPr>
-          <p:cNvPr id="6" name="Shape 4"/>
-          <p:cNvSpPr/>
-          <p:nvPr/>
-        </p:nvSpPr>
-        <p:spPr>
-          <a:xfrm>
-            <a:off x="7201632" y="2395728"/>
-            <a:ext cx="4423136" cy="3246120"/>
-          </a:xfrm>
-          <a:prstGeom prst="roundRect">
-            <a:avLst>
-              <a:gd name="adj" fmla="val 2535"/>
-            </a:avLst>
-          </a:prstGeom>
-          <a:solidFill>
-            <a:srgbClr val="E7EFFA"/>
-          </a:solidFill>
-          <a:ln/>
-          <a:effectLst>
-            <a:outerShdw sx="100000" sy="100000" kx="0" ky="0" algn="bl" rotWithShape="0" blurRad="88900" dist="25400" dir="5400000">
-              <a:srgbClr val="22303C">
-                <a:alpha val="12000"/>
-              </a:srgbClr>
-            </a:outerShdw>
-          </a:effectLst>
-        </p:spPr>
-      </p:sp>
-      <p:sp>
-        <p:nvSpPr>
-          <p:cNvPr id="7" name="Text 5"/>
-          <p:cNvSpPr/>
-          <p:nvPr/>
-        </p:nvSpPr>
-        <p:spPr>
-          <a:xfrm>
-            <a:off x="7439376" y="2578608"/>
-            <a:ext cx="3965936" cy="457200"/>
-          </a:xfrm>
-          <a:prstGeom prst="rect">
-            <a:avLst/>
-          </a:prstGeom>
-          <a:noFill/>
-          <a:ln/>
-        </p:spPr>
-        <p:txBody>
-          <a:bodyPr wrap="square" lIns="0" tIns="0" rIns="0" bIns="0" rtlCol="0" anchor="ctr"/>
-          <a:lstStyle/>
-          <a:p>
-            <a:pPr indent="0" marL="0">
-              <a:buNone/>
-            </a:pPr>
-            <a:r>
-              <a:rPr lang="en-US" sz="1500" b="1" dirty="0">
-                <a:solidFill>
-                  <a:srgbClr val="1565C0"/>
-                </a:solidFill>
-                <a:latin typeface="Calibri" pitchFamily="34" charset="0"/>
-                <a:ea typeface="Calibri" pitchFamily="34" charset="-122"/>
-                <a:cs typeface="Calibri" pitchFamily="34" charset="-120"/>
-              </a:rPr>
-              <a:t>ANSWER  </a:t>
-            </a:r>
-            <a:pPr indent="0" marL="0">
-              <a:buNone/>
-            </a:pPr>
-            <a:r>
-              <a:rPr lang="en-US" sz="1500" b="1" dirty="0">
-                <a:solidFill>
-                  <a:srgbClr val="1B2A38"/>
-                </a:solidFill>
-                <a:latin typeface="Calibri" pitchFamily="34" charset="0"/>
-                <a:ea typeface="Calibri" pitchFamily="34" charset="-122"/>
-                <a:cs typeface="Calibri" pitchFamily="34" charset="-120"/>
-              </a:rPr>
-              <a:t>C — TSH</a:t>
-            </a:r>
-            <a:endParaRPr lang="en-US" sz="1500" dirty="0"/>
-          </a:p>
-        </p:txBody>
-      </p:sp>
-      <p:sp>
-        <p:nvSpPr>
-          <p:cNvPr id="8" name="Text 6"/>
-          <p:cNvSpPr/>
-          <p:nvPr/>
-        </p:nvSpPr>
-        <p:spPr>
-          <a:xfrm>
-            <a:off x="7439376" y="3127248"/>
-            <a:ext cx="3947648" cy="2377440"/>
-          </a:xfrm>
-          <a:prstGeom prst="rect">
-            <a:avLst/>
-          </a:prstGeom>
-          <a:noFill/>
-          <a:ln/>
-        </p:spPr>
-        <p:txBody>
-          <a:bodyPr wrap="square" lIns="0" tIns="0" rIns="0" bIns="0" rtlCol="0" anchor="t"/>
-          <a:lstStyle/>
-          <a:p>
-            <a:pPr algn="l" indent="0" marL="0">
-              <a:lnSpc>
-                <a:spcPct val="108000"/>
-              </a:lnSpc>
-              <a:buNone/>
-            </a:pPr>
-            <a:r>
-              <a:rPr lang="en-US" sz="1250" dirty="0">
-                <a:solidFill>
-                  <a:srgbClr val="33444F"/>
-                </a:solidFill>
-                <a:latin typeface="Calibri" pitchFamily="34" charset="0"/>
-                <a:ea typeface="Calibri" pitchFamily="34" charset="-122"/>
-                <a:cs typeface="Calibri" pitchFamily="34" charset="-120"/>
-              </a:rPr>
-              <a:t>Log-linear pituitary feedback makes TSH the most sensitive first-line screen (barring central disease or interference).</a:t>
-            </a:r>
-            <a:endParaRPr lang="en-US" sz="1250" dirty="0"/>
           </a:p>
         </p:txBody>
       </p:sp>
@@ -9613,9 +9597,9 @@
               <a:buNone/>
             </a:pPr>
             <a:r>
-              <a:rPr lang="en-US" sz="1350" b="1" dirty="0">
-                <a:solidFill>
-                  <a:srgbClr val="0D4A92"/>
+              <a:rPr lang="en-US" sz="1350" b="0" dirty="0">
+                <a:solidFill>
+                  <a:srgbClr val="33444F"/>
                 </a:solidFill>
                 <a:latin typeface="Calibri" pitchFamily="34" charset="0"/>
                 <a:ea typeface="Calibri" pitchFamily="34" charset="-122"/>
@@ -9684,130 +9668,6 @@
               <a:t>E. Iron deficiency</a:t>
             </a:r>
             <a:endParaRPr lang="en-US" sz="1350" dirty="0"/>
-          </a:p>
-        </p:txBody>
-      </p:sp>
-      <p:sp>
-        <p:nvSpPr>
-          <p:cNvPr id="6" name="Shape 4"/>
-          <p:cNvSpPr/>
-          <p:nvPr/>
-        </p:nvSpPr>
-        <p:spPr>
-          <a:xfrm>
-            <a:off x="7201632" y="2395728"/>
-            <a:ext cx="4423136" cy="3246120"/>
-          </a:xfrm>
-          <a:prstGeom prst="roundRect">
-            <a:avLst>
-              <a:gd name="adj" fmla="val 2535"/>
-            </a:avLst>
-          </a:prstGeom>
-          <a:solidFill>
-            <a:srgbClr val="E7EFFA"/>
-          </a:solidFill>
-          <a:ln/>
-          <a:effectLst>
-            <a:outerShdw sx="100000" sy="100000" kx="0" ky="0" algn="bl" rotWithShape="0" blurRad="88900" dist="25400" dir="5400000">
-              <a:srgbClr val="22303C">
-                <a:alpha val="12000"/>
-              </a:srgbClr>
-            </a:outerShdw>
-          </a:effectLst>
-        </p:spPr>
-      </p:sp>
-      <p:sp>
-        <p:nvSpPr>
-          <p:cNvPr id="7" name="Text 5"/>
-          <p:cNvSpPr/>
-          <p:nvPr/>
-        </p:nvSpPr>
-        <p:spPr>
-          <a:xfrm>
-            <a:off x="7439376" y="2578608"/>
-            <a:ext cx="3965936" cy="457200"/>
-          </a:xfrm>
-          <a:prstGeom prst="rect">
-            <a:avLst/>
-          </a:prstGeom>
-          <a:noFill/>
-          <a:ln/>
-        </p:spPr>
-        <p:txBody>
-          <a:bodyPr wrap="square" lIns="0" tIns="0" rIns="0" bIns="0" rtlCol="0" anchor="ctr"/>
-          <a:lstStyle/>
-          <a:p>
-            <a:pPr indent="0" marL="0">
-              <a:buNone/>
-            </a:pPr>
-            <a:r>
-              <a:rPr lang="en-US" sz="1500" b="1" dirty="0">
-                <a:solidFill>
-                  <a:srgbClr val="1565C0"/>
-                </a:solidFill>
-                <a:latin typeface="Calibri" pitchFamily="34" charset="0"/>
-                <a:ea typeface="Calibri" pitchFamily="34" charset="-122"/>
-                <a:cs typeface="Calibri" pitchFamily="34" charset="-120"/>
-              </a:rPr>
-              <a:t>ANSWER  </a:t>
-            </a:r>
-            <a:pPr indent="0" marL="0">
-              <a:buNone/>
-            </a:pPr>
-            <a:r>
-              <a:rPr lang="en-US" sz="1500" b="1" dirty="0">
-                <a:solidFill>
-                  <a:srgbClr val="1B2A38"/>
-                </a:solidFill>
-                <a:latin typeface="Calibri" pitchFamily="34" charset="0"/>
-                <a:ea typeface="Calibri" pitchFamily="34" charset="-122"/>
-                <a:cs typeface="Calibri" pitchFamily="34" charset="-120"/>
-              </a:rPr>
-              <a:t>B — Cirrhosis</a:t>
-            </a:r>
-            <a:endParaRPr lang="en-US" sz="1500" dirty="0"/>
-          </a:p>
-        </p:txBody>
-      </p:sp>
-      <p:sp>
-        <p:nvSpPr>
-          <p:cNvPr id="8" name="Text 6"/>
-          <p:cNvSpPr/>
-          <p:nvPr/>
-        </p:nvSpPr>
-        <p:spPr>
-          <a:xfrm>
-            <a:off x="7439376" y="3127248"/>
-            <a:ext cx="3947648" cy="2377440"/>
-          </a:xfrm>
-          <a:prstGeom prst="rect">
-            <a:avLst/>
-          </a:prstGeom>
-          <a:noFill/>
-          <a:ln/>
-        </p:spPr>
-        <p:txBody>
-          <a:bodyPr wrap="square" lIns="0" tIns="0" rIns="0" bIns="0" rtlCol="0" anchor="t"/>
-          <a:lstStyle/>
-          <a:p>
-            <a:pPr algn="l" indent="0" marL="0">
-              <a:lnSpc>
-                <a:spcPct val="108000"/>
-              </a:lnSpc>
-              <a:buNone/>
-            </a:pPr>
-            <a:r>
-              <a:rPr lang="en-US" sz="1250" dirty="0">
-                <a:solidFill>
-                  <a:srgbClr val="33444F"/>
-                </a:solidFill>
-                <a:latin typeface="Calibri" pitchFamily="34" charset="0"/>
-                <a:ea typeface="Calibri" pitchFamily="34" charset="-122"/>
-                <a:cs typeface="Calibri" pitchFamily="34" charset="-120"/>
-              </a:rPr>
-              <a:t>Polyclonal IgA in liver disease fills the trough between β and γ (bridging); albumin falls with reduced synthesis.</a:t>
-            </a:r>
-            <a:endParaRPr lang="en-US" sz="1250" dirty="0"/>
           </a:p>
         </p:txBody>
       </p:sp>
@@ -10117,9 +9977,9 @@
               <a:buNone/>
             </a:pPr>
             <a:r>
-              <a:rPr lang="en-US" sz="1350" b="1" dirty="0">
-                <a:solidFill>
-                  <a:srgbClr val="0D4A92"/>
+              <a:rPr lang="en-US" sz="1350" b="0" dirty="0">
+                <a:solidFill>
+                  <a:srgbClr val="33444F"/>
                 </a:solidFill>
                 <a:latin typeface="Calibri" pitchFamily="34" charset="0"/>
                 <a:ea typeface="Calibri" pitchFamily="34" charset="-122"/>
@@ -10188,130 +10048,6 @@
               <a:t>E. Haptoglobin</a:t>
             </a:r>
             <a:endParaRPr lang="en-US" sz="1350" dirty="0"/>
-          </a:p>
-        </p:txBody>
-      </p:sp>
-      <p:sp>
-        <p:nvSpPr>
-          <p:cNvPr id="6" name="Shape 4"/>
-          <p:cNvSpPr/>
-          <p:nvPr/>
-        </p:nvSpPr>
-        <p:spPr>
-          <a:xfrm>
-            <a:off x="7201632" y="2395728"/>
-            <a:ext cx="4423136" cy="3246120"/>
-          </a:xfrm>
-          <a:prstGeom prst="roundRect">
-            <a:avLst>
-              <a:gd name="adj" fmla="val 2535"/>
-            </a:avLst>
-          </a:prstGeom>
-          <a:solidFill>
-            <a:srgbClr val="E7EFFA"/>
-          </a:solidFill>
-          <a:ln/>
-          <a:effectLst>
-            <a:outerShdw sx="100000" sy="100000" kx="0" ky="0" algn="bl" rotWithShape="0" blurRad="88900" dist="25400" dir="5400000">
-              <a:srgbClr val="22303C">
-                <a:alpha val="12000"/>
-              </a:srgbClr>
-            </a:outerShdw>
-          </a:effectLst>
-        </p:spPr>
-      </p:sp>
-      <p:sp>
-        <p:nvSpPr>
-          <p:cNvPr id="7" name="Text 5"/>
-          <p:cNvSpPr/>
-          <p:nvPr/>
-        </p:nvSpPr>
-        <p:spPr>
-          <a:xfrm>
-            <a:off x="7439376" y="2578608"/>
-            <a:ext cx="3965936" cy="457200"/>
-          </a:xfrm>
-          <a:prstGeom prst="rect">
-            <a:avLst/>
-          </a:prstGeom>
-          <a:noFill/>
-          <a:ln/>
-        </p:spPr>
-        <p:txBody>
-          <a:bodyPr wrap="square" lIns="0" tIns="0" rIns="0" bIns="0" rtlCol="0" anchor="ctr"/>
-          <a:lstStyle/>
-          <a:p>
-            <a:pPr indent="0" marL="0">
-              <a:buNone/>
-            </a:pPr>
-            <a:r>
-              <a:rPr lang="en-US" sz="1500" b="1" dirty="0">
-                <a:solidFill>
-                  <a:srgbClr val="1565C0"/>
-                </a:solidFill>
-                <a:latin typeface="Calibri" pitchFamily="34" charset="0"/>
-                <a:ea typeface="Calibri" pitchFamily="34" charset="-122"/>
-                <a:cs typeface="Calibri" pitchFamily="34" charset="-120"/>
-              </a:rPr>
-              <a:t>ANSWER  </a:t>
-            </a:r>
-            <a:pPr indent="0" marL="0">
-              <a:buNone/>
-            </a:pPr>
-            <a:r>
-              <a:rPr lang="en-US" sz="1500" b="1" dirty="0">
-                <a:solidFill>
-                  <a:srgbClr val="1B2A38"/>
-                </a:solidFill>
-                <a:latin typeface="Calibri" pitchFamily="34" charset="0"/>
-                <a:ea typeface="Calibri" pitchFamily="34" charset="-122"/>
-                <a:cs typeface="Calibri" pitchFamily="34" charset="-120"/>
-              </a:rPr>
-              <a:t>B — Immunofixation</a:t>
-            </a:r>
-            <a:endParaRPr lang="en-US" sz="1500" dirty="0"/>
-          </a:p>
-        </p:txBody>
-      </p:sp>
-      <p:sp>
-        <p:nvSpPr>
-          <p:cNvPr id="8" name="Text 6"/>
-          <p:cNvSpPr/>
-          <p:nvPr/>
-        </p:nvSpPr>
-        <p:spPr>
-          <a:xfrm>
-            <a:off x="7439376" y="3127248"/>
-            <a:ext cx="3947648" cy="2377440"/>
-          </a:xfrm>
-          <a:prstGeom prst="rect">
-            <a:avLst/>
-          </a:prstGeom>
-          <a:noFill/>
-          <a:ln/>
-        </p:spPr>
-        <p:txBody>
-          <a:bodyPr wrap="square" lIns="0" tIns="0" rIns="0" bIns="0" rtlCol="0" anchor="t"/>
-          <a:lstStyle/>
-          <a:p>
-            <a:pPr algn="l" indent="0" marL="0">
-              <a:lnSpc>
-                <a:spcPct val="108000"/>
-              </a:lnSpc>
-              <a:buNone/>
-            </a:pPr>
-            <a:r>
-              <a:rPr lang="en-US" sz="1250" dirty="0">
-                <a:solidFill>
-                  <a:srgbClr val="33444F"/>
-                </a:solidFill>
-                <a:latin typeface="Calibri" pitchFamily="34" charset="0"/>
-                <a:ea typeface="Calibri" pitchFamily="34" charset="-122"/>
-                <a:cs typeface="Calibri" pitchFamily="34" charset="-120"/>
-              </a:rPr>
-              <a:t>Immunofixation identifies the heavy- and light-chain type of the monoclonal protein, confirming the M-spike.</a:t>
-            </a:r>
-            <a:endParaRPr lang="en-US" sz="1250" dirty="0"/>
           </a:p>
         </p:txBody>
       </p:sp>
@@ -10621,9 +10357,9 @@
               <a:buNone/>
             </a:pPr>
             <a:r>
-              <a:rPr lang="en-US" sz="1350" b="1" dirty="0">
-                <a:solidFill>
-                  <a:srgbClr val="0D4A92"/>
+              <a:rPr lang="en-US" sz="1350" b="0" dirty="0">
+                <a:solidFill>
+                  <a:srgbClr val="33444F"/>
                 </a:solidFill>
                 <a:latin typeface="Calibri" pitchFamily="34" charset="0"/>
                 <a:ea typeface="Calibri" pitchFamily="34" charset="-122"/>
@@ -10692,130 +10428,6 @@
               <a:t>E. ESR</a:t>
             </a:r>
             <a:endParaRPr lang="en-US" sz="1350" dirty="0"/>
-          </a:p>
-        </p:txBody>
-      </p:sp>
-      <p:sp>
-        <p:nvSpPr>
-          <p:cNvPr id="6" name="Shape 4"/>
-          <p:cNvSpPr/>
-          <p:nvPr/>
-        </p:nvSpPr>
-        <p:spPr>
-          <a:xfrm>
-            <a:off x="7201632" y="2395728"/>
-            <a:ext cx="4423136" cy="3246120"/>
-          </a:xfrm>
-          <a:prstGeom prst="roundRect">
-            <a:avLst>
-              <a:gd name="adj" fmla="val 2535"/>
-            </a:avLst>
-          </a:prstGeom>
-          <a:solidFill>
-            <a:srgbClr val="E7EFFA"/>
-          </a:solidFill>
-          <a:ln/>
-          <a:effectLst>
-            <a:outerShdw sx="100000" sy="100000" kx="0" ky="0" algn="bl" rotWithShape="0" blurRad="88900" dist="25400" dir="5400000">
-              <a:srgbClr val="22303C">
-                <a:alpha val="12000"/>
-              </a:srgbClr>
-            </a:outerShdw>
-          </a:effectLst>
-        </p:spPr>
-      </p:sp>
-      <p:sp>
-        <p:nvSpPr>
-          <p:cNvPr id="7" name="Text 5"/>
-          <p:cNvSpPr/>
-          <p:nvPr/>
-        </p:nvSpPr>
-        <p:spPr>
-          <a:xfrm>
-            <a:off x="7439376" y="2578608"/>
-            <a:ext cx="3965936" cy="457200"/>
-          </a:xfrm>
-          <a:prstGeom prst="rect">
-            <a:avLst/>
-          </a:prstGeom>
-          <a:noFill/>
-          <a:ln/>
-        </p:spPr>
-        <p:txBody>
-          <a:bodyPr wrap="square" lIns="0" tIns="0" rIns="0" bIns="0" rtlCol="0" anchor="ctr"/>
-          <a:lstStyle/>
-          <a:p>
-            <a:pPr indent="0" marL="0">
-              <a:buNone/>
-            </a:pPr>
-            <a:r>
-              <a:rPr lang="en-US" sz="1500" b="1" dirty="0">
-                <a:solidFill>
-                  <a:srgbClr val="1565C0"/>
-                </a:solidFill>
-                <a:latin typeface="Calibri" pitchFamily="34" charset="0"/>
-                <a:ea typeface="Calibri" pitchFamily="34" charset="-122"/>
-                <a:cs typeface="Calibri" pitchFamily="34" charset="-120"/>
-              </a:rPr>
-              <a:t>ANSWER  </a:t>
-            </a:r>
-            <a:pPr indent="0" marL="0">
-              <a:buNone/>
-            </a:pPr>
-            <a:r>
-              <a:rPr lang="en-US" sz="1500" b="1" dirty="0">
-                <a:solidFill>
-                  <a:srgbClr val="1B2A38"/>
-                </a:solidFill>
-                <a:latin typeface="Calibri" pitchFamily="34" charset="0"/>
-                <a:ea typeface="Calibri" pitchFamily="34" charset="-122"/>
-                <a:cs typeface="Calibri" pitchFamily="34" charset="-120"/>
-              </a:rPr>
-              <a:t>B — Serum free light chains with ratio</a:t>
-            </a:r>
-            <a:endParaRPr lang="en-US" sz="1500" dirty="0"/>
-          </a:p>
-        </p:txBody>
-      </p:sp>
-      <p:sp>
-        <p:nvSpPr>
-          <p:cNvPr id="8" name="Text 6"/>
-          <p:cNvSpPr/>
-          <p:nvPr/>
-        </p:nvSpPr>
-        <p:spPr>
-          <a:xfrm>
-            <a:off x="7439376" y="3127248"/>
-            <a:ext cx="3947648" cy="2377440"/>
-          </a:xfrm>
-          <a:prstGeom prst="rect">
-            <a:avLst/>
-          </a:prstGeom>
-          <a:noFill/>
-          <a:ln/>
-        </p:spPr>
-        <p:txBody>
-          <a:bodyPr wrap="square" lIns="0" tIns="0" rIns="0" bIns="0" rtlCol="0" anchor="t"/>
-          <a:lstStyle/>
-          <a:p>
-            <a:pPr algn="l" indent="0" marL="0">
-              <a:lnSpc>
-                <a:spcPct val="108000"/>
-              </a:lnSpc>
-              <a:buNone/>
-            </a:pPr>
-            <a:r>
-              <a:rPr lang="en-US" sz="1250" dirty="0">
-                <a:solidFill>
-                  <a:srgbClr val="33444F"/>
-                </a:solidFill>
-                <a:latin typeface="Calibri" pitchFamily="34" charset="0"/>
-                <a:ea typeface="Calibri" pitchFamily="34" charset="-122"/>
-                <a:cs typeface="Calibri" pitchFamily="34" charset="-120"/>
-              </a:rPr>
-              <a:t>The serum free light-chain assay and ratio detect light-chain-only disease that a normal SPEP can miss; the ratio corrects for renal retention.</a:t>
-            </a:r>
-            <a:endParaRPr lang="en-US" sz="1250" dirty="0"/>
           </a:p>
         </p:txBody>
       </p:sp>
@@ -11056,6 +10668,10 @@
           </a:solidFill>
           <a:ln/>
         </p:spPr>
+        <p:txBody>
+          <a:bodyPr/>
+          <a:p/>
+        </p:txBody>
       </p:sp>
       <p:sp>
         <p:nvSpPr>
@@ -11083,6 +10699,10 @@
             </a:outerShdw>
           </a:effectLst>
         </p:spPr>
+        <p:txBody>
+          <a:bodyPr/>
+          <a:p/>
+        </p:txBody>
       </p:sp>
       <p:sp>
         <p:nvSpPr>
@@ -11183,6 +10803,10 @@
           </a:solidFill>
           <a:ln/>
         </p:spPr>
+        <p:txBody>
+          <a:bodyPr/>
+          <a:p/>
+        </p:txBody>
       </p:sp>
       <p:sp>
         <p:nvSpPr>
@@ -11210,6 +10834,10 @@
             </a:outerShdw>
           </a:effectLst>
         </p:spPr>
+        <p:txBody>
+          <a:bodyPr/>
+          <a:p/>
+        </p:txBody>
       </p:sp>
       <p:sp>
         <p:nvSpPr>
@@ -11310,6 +10938,10 @@
           </a:solidFill>
           <a:ln/>
         </p:spPr>
+        <p:txBody>
+          <a:bodyPr/>
+          <a:p/>
+        </p:txBody>
       </p:sp>
       <p:sp>
         <p:nvSpPr>
@@ -11337,6 +10969,10 @@
             </a:outerShdw>
           </a:effectLst>
         </p:spPr>
+        <p:txBody>
+          <a:bodyPr/>
+          <a:p/>
+        </p:txBody>
       </p:sp>
       <p:sp>
         <p:nvSpPr>
@@ -11437,6 +11073,10 @@
           </a:solidFill>
           <a:ln/>
         </p:spPr>
+        <p:txBody>
+          <a:bodyPr/>
+          <a:p/>
+        </p:txBody>
       </p:sp>
       <p:sp>
         <p:nvSpPr>
@@ -11464,6 +11104,10 @@
             </a:outerShdw>
           </a:effectLst>
         </p:spPr>
+        <p:txBody>
+          <a:bodyPr/>
+          <a:p/>
+        </p:txBody>
       </p:sp>
       <p:sp>
         <p:nvSpPr>
@@ -11564,6 +11208,10 @@
           </a:solidFill>
           <a:ln/>
         </p:spPr>
+        <p:txBody>
+          <a:bodyPr/>
+          <a:p/>
+        </p:txBody>
       </p:sp>
       <p:sp>
         <p:nvSpPr>
@@ -11591,6 +11239,10 @@
             </a:outerShdw>
           </a:effectLst>
         </p:spPr>
+        <p:txBody>
+          <a:bodyPr/>
+          <a:p/>
+        </p:txBody>
       </p:sp>
       <p:sp>
         <p:nvSpPr>
@@ -12074,6 +11726,1488 @@
 </p:sld>
 </file>
 
+<file path=ppt/slides/slide27.xml><?xml version="1.0" encoding="utf-8"?>
+<p:sld xmlns:a="http://schemas.openxmlformats.org/drawingml/2006/main" xmlns:p="http://schemas.openxmlformats.org/presentationml/2006/main" xmlns:r="http://schemas.openxmlformats.org/officeDocument/2006/relationships">
+  <p:cSld>
+    <p:spTree>
+      <p:nvGrpSpPr>
+        <p:cNvPr id="1" name=""/>
+        <p:cNvGrpSpPr/>
+        <p:nvPr/>
+      </p:nvGrpSpPr>
+      <p:grpSpPr/>
+      <p:sp>
+        <p:nvSpPr>
+          <p:cNvPr id="2" name="Text 0"/>
+          <p:cNvSpPr/>
+          <p:nvPr/>
+        </p:nvSpPr>
+        <p:spPr>
+          <a:xfrm>
+            <a:off x="566928" y="329184"/>
+            <a:ext cx="10515600" cy="310896"/>
+          </a:xfrm>
+          <a:prstGeom prst="rect">
+            <a:avLst/>
+          </a:prstGeom>
+          <a:noFill/>
+          <a:ln/>
+        </p:spPr>
+        <p:txBody>
+          <a:bodyPr wrap="square" lIns="0" tIns="0" rIns="0" bIns="0" rtlCol="0" anchor="ctr"/>
+          <a:lstStyle/>
+          <a:p>
+            <a:pPr algn="l" indent="0" marL="0">
+              <a:buNone/>
+            </a:pPr>
+            <a:r>
+              <a:rPr lang="en-US" sz="1100" b="1" spc="150" kern="0" dirty="0">
+                <a:solidFill>
+                  <a:srgbClr val="1565C0"/>
+                </a:solidFill>
+                <a:latin typeface="Calibri" pitchFamily="34" charset="0"/>
+                <a:ea typeface="Calibri" pitchFamily="34" charset="-122"/>
+                <a:cs typeface="Calibri" pitchFamily="34" charset="-120"/>
+              </a:rPr>
+              <a:t>CLINICAL CHEMISTRY   ·   BOARD REVIEW  ·  Q4</a:t>
+            </a:r>
+            <a:endParaRPr lang="en-US" sz="1100" dirty="0"/>
+          </a:p>
+        </p:txBody>
+      </p:sp>
+      <p:sp>
+        <p:nvSpPr>
+          <p:cNvPr id="3" name="Text 1"/>
+          <p:cNvSpPr/>
+          <p:nvPr/>
+        </p:nvSpPr>
+        <p:spPr>
+          <a:xfrm>
+            <a:off x="566928" y="713232"/>
+            <a:ext cx="11064240" cy="749808"/>
+          </a:xfrm>
+          <a:prstGeom prst="rect">
+            <a:avLst/>
+          </a:prstGeom>
+          <a:noFill/>
+          <a:ln/>
+        </p:spPr>
+        <p:txBody>
+          <a:bodyPr wrap="square" lIns="0" tIns="0" rIns="0" bIns="0" rtlCol="0" anchor="ctr"/>
+          <a:lstStyle/>
+          <a:p>
+            <a:pPr algn="l" indent="0" marL="0">
+              <a:buNone/>
+            </a:pPr>
+            <a:r>
+              <a:rPr lang="en-US" sz="2600" b="1" dirty="0">
+                <a:solidFill>
+                  <a:srgbClr val="0E3A5F"/>
+                </a:solidFill>
+                <a:latin typeface="Calibri" pitchFamily="34" charset="0"/>
+                <a:ea typeface="Calibri" pitchFamily="34" charset="-122"/>
+                <a:cs typeface="Calibri" pitchFamily="34" charset="-120"/>
+              </a:rPr>
+              <a:t>Board-Style Review</a:t>
+            </a:r>
+            <a:endParaRPr lang="en-US" sz="2600" dirty="0"/>
+          </a:p>
+        </p:txBody>
+      </p:sp>
+      <p:sp>
+        <p:nvSpPr>
+          <p:cNvPr id="4" name="Text 2"/>
+          <p:cNvSpPr/>
+          <p:nvPr/>
+        </p:nvSpPr>
+        <p:spPr>
+          <a:xfrm>
+            <a:off x="566928" y="1417320"/>
+            <a:ext cx="11057839" cy="914400"/>
+          </a:xfrm>
+          <a:prstGeom prst="rect">
+            <a:avLst/>
+          </a:prstGeom>
+          <a:noFill/>
+          <a:ln/>
+        </p:spPr>
+        <p:txBody>
+          <a:bodyPr wrap="square" lIns="0" tIns="0" rIns="0" bIns="0" rtlCol="0" anchor="t"/>
+          <a:lstStyle/>
+          <a:p>
+            <a:pPr algn="l" indent="0" marL="0">
+              <a:lnSpc>
+                <a:spcPct val="105000"/>
+              </a:lnSpc>
+              <a:buNone/>
+            </a:pPr>
+            <a:r>
+              <a:rPr lang="en-US" sz="1450" b="1" dirty="0">
+                <a:solidFill>
+                  <a:srgbClr val="1B2A38"/>
+                </a:solidFill>
+                <a:latin typeface="Calibri" pitchFamily="34" charset="0"/>
+                <a:ea typeface="Calibri" pitchFamily="34" charset="-122"/>
+                <a:cs typeface="Calibri" pitchFamily="34" charset="-120"/>
+              </a:rPr>
+              <a:t>A patient with suspected light-chain disease has a normal SPEP. Which test best detects clonal light-chain excess?</a:t>
+            </a:r>
+            <a:endParaRPr lang="en-US" sz="1450" dirty="0"/>
+          </a:p>
+        </p:txBody>
+      </p:sp>
+      <p:sp>
+        <p:nvSpPr>
+          <p:cNvPr id="5" name="Text 3"/>
+          <p:cNvSpPr/>
+          <p:nvPr/>
+        </p:nvSpPr>
+        <p:spPr>
+          <a:xfrm>
+            <a:off x="658368" y="2395728"/>
+            <a:ext cx="6192390" cy="3017520"/>
+          </a:xfrm>
+          <a:prstGeom prst="rect">
+            <a:avLst/>
+          </a:prstGeom>
+          <a:noFill/>
+          <a:ln/>
+        </p:spPr>
+        <p:txBody>
+          <a:bodyPr wrap="square" lIns="0" tIns="0" rIns="0" bIns="0" rtlCol="0" anchor="t"/>
+          <a:lstStyle/>
+          <a:p>
+            <a:pPr algn="l" indent="0" marL="0">
+              <a:spcAft>
+                <a:spcPts val="600"/>
+              </a:spcAft>
+              <a:buNone/>
+            </a:pPr>
+            <a:r>
+              <a:rPr lang="en-US" sz="1350" dirty="0">
+                <a:solidFill>
+                  <a:srgbClr val="33444F"/>
+                </a:solidFill>
+                <a:latin typeface="Calibri" pitchFamily="34" charset="0"/>
+                <a:ea typeface="Calibri" pitchFamily="34" charset="-122"/>
+                <a:cs typeface="Calibri" pitchFamily="34" charset="-120"/>
+              </a:rPr>
+              <a:t>A. Total protein</a:t>
+            </a:r>
+            <a:endParaRPr lang="en-US" sz="1350" dirty="0"/>
+          </a:p>
+          <a:p>
+            <a:pPr algn="l" indent="0" marL="0">
+              <a:spcAft>
+                <a:spcPts val="600"/>
+              </a:spcAft>
+              <a:buNone/>
+            </a:pPr>
+            <a:r>
+              <a:rPr lang="en-US" sz="1350" b="1" dirty="0">
+                <a:solidFill>
+                  <a:srgbClr val="0D4A92"/>
+                </a:solidFill>
+                <a:latin typeface="Calibri" pitchFamily="34" charset="0"/>
+                <a:ea typeface="Calibri" pitchFamily="34" charset="-122"/>
+                <a:cs typeface="Calibri" pitchFamily="34" charset="-120"/>
+              </a:rPr>
+              <a:t>B. Serum free light chains with κ/λ ratio</a:t>
+            </a:r>
+            <a:endParaRPr lang="en-US" sz="1350" dirty="0"/>
+          </a:p>
+          <a:p>
+            <a:pPr algn="l" indent="0" marL="0">
+              <a:spcAft>
+                <a:spcPts val="600"/>
+              </a:spcAft>
+              <a:buNone/>
+            </a:pPr>
+            <a:r>
+              <a:rPr lang="en-US" sz="1350" dirty="0">
+                <a:solidFill>
+                  <a:srgbClr val="33444F"/>
+                </a:solidFill>
+                <a:latin typeface="Calibri" pitchFamily="34" charset="0"/>
+                <a:ea typeface="Calibri" pitchFamily="34" charset="-122"/>
+                <a:cs typeface="Calibri" pitchFamily="34" charset="-120"/>
+              </a:rPr>
+              <a:t>C. Albumin</a:t>
+            </a:r>
+            <a:endParaRPr lang="en-US" sz="1350" dirty="0"/>
+          </a:p>
+          <a:p>
+            <a:pPr algn="l" indent="0" marL="0">
+              <a:spcAft>
+                <a:spcPts val="600"/>
+              </a:spcAft>
+              <a:buNone/>
+            </a:pPr>
+            <a:r>
+              <a:rPr lang="en-US" sz="1350" dirty="0">
+                <a:solidFill>
+                  <a:srgbClr val="33444F"/>
+                </a:solidFill>
+                <a:latin typeface="Calibri" pitchFamily="34" charset="0"/>
+                <a:ea typeface="Calibri" pitchFamily="34" charset="-122"/>
+                <a:cs typeface="Calibri" pitchFamily="34" charset="-120"/>
+              </a:rPr>
+              <a:t>D. Beta-2 microglobulin alone</a:t>
+            </a:r>
+            <a:endParaRPr lang="en-US" sz="1350" dirty="0"/>
+          </a:p>
+          <a:p>
+            <a:pPr algn="l" indent="0" marL="0">
+              <a:spcAft>
+                <a:spcPts val="600"/>
+              </a:spcAft>
+              <a:buNone/>
+            </a:pPr>
+            <a:r>
+              <a:rPr lang="en-US" sz="1350" dirty="0">
+                <a:solidFill>
+                  <a:srgbClr val="33444F"/>
+                </a:solidFill>
+                <a:latin typeface="Calibri" pitchFamily="34" charset="0"/>
+                <a:ea typeface="Calibri" pitchFamily="34" charset="-122"/>
+                <a:cs typeface="Calibri" pitchFamily="34" charset="-120"/>
+              </a:rPr>
+              <a:t>E. ESR</a:t>
+            </a:r>
+            <a:endParaRPr lang="en-US" sz="1350" dirty="0"/>
+          </a:p>
+        </p:txBody>
+      </p:sp>
+      <p:sp>
+        <p:nvSpPr>
+          <p:cNvPr id="6" name="Shape 4"/>
+          <p:cNvSpPr/>
+          <p:nvPr/>
+        </p:nvSpPr>
+        <p:spPr>
+          <a:xfrm>
+            <a:off x="7201632" y="2395728"/>
+            <a:ext cx="4423136" cy="3246120"/>
+          </a:xfrm>
+          <a:prstGeom prst="roundRect">
+            <a:avLst>
+              <a:gd name="adj" fmla="val 2535"/>
+            </a:avLst>
+          </a:prstGeom>
+          <a:solidFill>
+            <a:srgbClr val="E7EFFA"/>
+          </a:solidFill>
+          <a:ln/>
+          <a:effectLst>
+            <a:outerShdw sx="100000" sy="100000" kx="0" ky="0" algn="bl" rotWithShape="0" blurRad="88900" dist="25400" dir="5400000">
+              <a:srgbClr val="22303C">
+                <a:alpha val="12000"/>
+              </a:srgbClr>
+            </a:outerShdw>
+          </a:effectLst>
+        </p:spPr>
+        <p:txBody>
+          <a:bodyPr/>
+          <a:p/>
+        </p:txBody>
+      </p:sp>
+      <p:sp>
+        <p:nvSpPr>
+          <p:cNvPr id="7" name="Text 5"/>
+          <p:cNvSpPr/>
+          <p:nvPr/>
+        </p:nvSpPr>
+        <p:spPr>
+          <a:xfrm>
+            <a:off x="7439376" y="2578608"/>
+            <a:ext cx="3965936" cy="457200"/>
+          </a:xfrm>
+          <a:prstGeom prst="rect">
+            <a:avLst/>
+          </a:prstGeom>
+          <a:noFill/>
+          <a:ln/>
+        </p:spPr>
+        <p:txBody>
+          <a:bodyPr wrap="square" lIns="0" tIns="0" rIns="0" bIns="0" rtlCol="0" anchor="ctr"/>
+          <a:lstStyle/>
+          <a:p>
+            <a:pPr indent="0" marL="0">
+              <a:buNone/>
+            </a:pPr>
+            <a:r>
+              <a:rPr lang="en-US" sz="1500" b="1" dirty="0">
+                <a:solidFill>
+                  <a:srgbClr val="1565C0"/>
+                </a:solidFill>
+                <a:latin typeface="Calibri" pitchFamily="34" charset="0"/>
+                <a:ea typeface="Calibri" pitchFamily="34" charset="-122"/>
+                <a:cs typeface="Calibri" pitchFamily="34" charset="-120"/>
+              </a:rPr>
+              <a:t>ANSWER  </a:t>
+            </a:r>
+            <a:pPr indent="0" marL="0">
+              <a:buNone/>
+            </a:pPr>
+            <a:r>
+              <a:rPr lang="en-US" sz="1500" b="1" dirty="0">
+                <a:solidFill>
+                  <a:srgbClr val="1B2A38"/>
+                </a:solidFill>
+                <a:latin typeface="Calibri" pitchFamily="34" charset="0"/>
+                <a:ea typeface="Calibri" pitchFamily="34" charset="-122"/>
+                <a:cs typeface="Calibri" pitchFamily="34" charset="-120"/>
+              </a:rPr>
+              <a:t>B — Serum free light chains with ratio</a:t>
+            </a:r>
+            <a:endParaRPr lang="en-US" sz="1500" dirty="0"/>
+          </a:p>
+        </p:txBody>
+      </p:sp>
+      <p:sp>
+        <p:nvSpPr>
+          <p:cNvPr id="8" name="Text 6"/>
+          <p:cNvSpPr/>
+          <p:nvPr/>
+        </p:nvSpPr>
+        <p:spPr>
+          <a:xfrm>
+            <a:off x="7439376" y="3127248"/>
+            <a:ext cx="3947648" cy="2377440"/>
+          </a:xfrm>
+          <a:prstGeom prst="rect">
+            <a:avLst/>
+          </a:prstGeom>
+          <a:noFill/>
+          <a:ln/>
+        </p:spPr>
+        <p:txBody>
+          <a:bodyPr wrap="square" lIns="0" tIns="0" rIns="0" bIns="0" rtlCol="0" anchor="t"/>
+          <a:lstStyle/>
+          <a:p>
+            <a:pPr algn="l" indent="0" marL="0">
+              <a:lnSpc>
+                <a:spcPct val="108000"/>
+              </a:lnSpc>
+              <a:buNone/>
+            </a:pPr>
+            <a:r>
+              <a:rPr lang="en-US" sz="1250" dirty="0">
+                <a:solidFill>
+                  <a:srgbClr val="33444F"/>
+                </a:solidFill>
+                <a:latin typeface="Calibri" pitchFamily="34" charset="0"/>
+                <a:ea typeface="Calibri" pitchFamily="34" charset="-122"/>
+                <a:cs typeface="Calibri" pitchFamily="34" charset="-120"/>
+              </a:rPr>
+              <a:t>The serum free light-chain assay and ratio detect light-chain-only disease that a normal SPEP can miss; the ratio corrects for renal retention.</a:t>
+            </a:r>
+            <a:endParaRPr lang="en-US" sz="1250" dirty="0"/>
+          </a:p>
+        </p:txBody>
+      </p:sp>
+      <p:sp>
+        <p:nvSpPr>
+          <p:cNvPr id="9" name="Text 7"/>
+          <p:cNvSpPr/>
+          <p:nvPr/>
+        </p:nvSpPr>
+        <p:spPr>
+          <a:xfrm>
+            <a:off x="566928" y="6473952"/>
+            <a:ext cx="7772400" cy="274320"/>
+          </a:xfrm>
+          <a:prstGeom prst="rect">
+            <a:avLst/>
+          </a:prstGeom>
+          <a:noFill/>
+          <a:ln/>
+        </p:spPr>
+        <p:txBody>
+          <a:bodyPr wrap="square" lIns="0" tIns="0" rIns="0" bIns="0" rtlCol="0" anchor="ctr"/>
+          <a:lstStyle/>
+          <a:p>
+            <a:pPr algn="l" indent="0" marL="0">
+              <a:buNone/>
+            </a:pPr>
+            <a:r>
+              <a:rPr lang="en-US" sz="850" dirty="0">
+                <a:solidFill>
+                  <a:srgbClr val="9AA8B4"/>
+                </a:solidFill>
+                <a:latin typeface="Calibri" pitchFamily="34" charset="0"/>
+                <a:ea typeface="Calibri" pitchFamily="34" charset="-122"/>
+                <a:cs typeface="Calibri" pitchFamily="34" charset="-120"/>
+              </a:rPr>
+              <a:t>Makassed General Hospital  ·  Department of Laboratory Medicine</a:t>
+            </a:r>
+            <a:endParaRPr lang="en-US" sz="850" dirty="0"/>
+          </a:p>
+        </p:txBody>
+      </p:sp>
+      <p:sp>
+        <p:nvSpPr>
+          <p:cNvPr id="10" name="Text 8"/>
+          <p:cNvSpPr/>
+          <p:nvPr/>
+        </p:nvSpPr>
+        <p:spPr>
+          <a:xfrm>
+            <a:off x="9814255" y="6473952"/>
+            <a:ext cx="1828800" cy="274320"/>
+          </a:xfrm>
+          <a:prstGeom prst="rect">
+            <a:avLst/>
+          </a:prstGeom>
+          <a:noFill/>
+          <a:ln/>
+        </p:spPr>
+        <p:txBody>
+          <a:bodyPr wrap="square" lIns="0" tIns="0" rIns="0" bIns="0" rtlCol="0" anchor="ctr"/>
+          <a:lstStyle/>
+          <a:p>
+            <a:pPr algn="r" indent="0" marL="0">
+              <a:buNone/>
+            </a:pPr>
+            <a:r>
+              <a:rPr lang="en-US" sz="850" dirty="0">
+                <a:solidFill>
+                  <a:srgbClr val="9AA8B4"/>
+                </a:solidFill>
+                <a:latin typeface="Calibri" pitchFamily="34" charset="0"/>
+                <a:ea typeface="Calibri" pitchFamily="34" charset="-122"/>
+                <a:cs typeface="Calibri" pitchFamily="34" charset="-120"/>
+              </a:rPr>
+              <a:t>CP Lecture Series</a:t>
+            </a:r>
+            <a:pPr algn="r" indent="0" marL="0">
+              <a:buNone/>
+            </a:pPr>
+            <a:r>
+              <a:rPr lang="en-US" sz="850" dirty="0">
+                <a:solidFill>
+                  <a:srgbClr val="DCE4EC"/>
+                </a:solidFill>
+                <a:latin typeface="Calibri" pitchFamily="34" charset="0"/>
+                <a:ea typeface="Calibri" pitchFamily="34" charset="-122"/>
+                <a:cs typeface="Calibri" pitchFamily="34" charset="-120"/>
+              </a:rPr>
+              <a:t>   ·   </a:t>
+            </a:r>
+            <a:pPr algn="r" indent="0" marL="0">
+              <a:buNone/>
+            </a:pPr>
+            <a:r>
+              <a:rPr lang="en-US" sz="850" b="1" dirty="0">
+                <a:solidFill>
+                  <a:srgbClr val="1565C0"/>
+                </a:solidFill>
+                <a:latin typeface="Calibri" pitchFamily="34" charset="0"/>
+                <a:ea typeface="Calibri" pitchFamily="34" charset="-122"/>
+                <a:cs typeface="Calibri" pitchFamily="34" charset="-120"/>
+              </a:rPr>
+              <a:t>21</a:t>
+            </a:r>
+            <a:endParaRPr lang="en-US" sz="850" dirty="0"/>
+          </a:p>
+        </p:txBody>
+      </p:sp>
+    </p:spTree>
+  </p:cSld>
+  <p:clrMapOvr>
+    <a:masterClrMapping/>
+  </p:clrMapOvr>
+</p:sld>
+</file>
+
+<file path=ppt/slides/slide28.xml><?xml version="1.0" encoding="utf-8"?>
+<p:sld xmlns:a="http://schemas.openxmlformats.org/drawingml/2006/main" xmlns:p="http://schemas.openxmlformats.org/presentationml/2006/main" xmlns:r="http://schemas.openxmlformats.org/officeDocument/2006/relationships">
+  <p:cSld>
+    <p:spTree>
+      <p:nvGrpSpPr>
+        <p:cNvPr id="1" name=""/>
+        <p:cNvGrpSpPr/>
+        <p:nvPr/>
+      </p:nvGrpSpPr>
+      <p:grpSpPr/>
+      <p:sp>
+        <p:nvSpPr>
+          <p:cNvPr id="2" name="Text 0"/>
+          <p:cNvSpPr/>
+          <p:nvPr/>
+        </p:nvSpPr>
+        <p:spPr>
+          <a:xfrm>
+            <a:off x="566928" y="329184"/>
+            <a:ext cx="10515600" cy="310896"/>
+          </a:xfrm>
+          <a:prstGeom prst="rect">
+            <a:avLst/>
+          </a:prstGeom>
+          <a:noFill/>
+          <a:ln/>
+        </p:spPr>
+        <p:txBody>
+          <a:bodyPr wrap="square" lIns="0" tIns="0" rIns="0" bIns="0" rtlCol="0" anchor="ctr"/>
+          <a:lstStyle/>
+          <a:p>
+            <a:pPr algn="l" indent="0" marL="0">
+              <a:buNone/>
+            </a:pPr>
+            <a:r>
+              <a:rPr lang="en-US" sz="1100" b="1" spc="150" kern="0" dirty="0">
+                <a:solidFill>
+                  <a:srgbClr val="1565C0"/>
+                </a:solidFill>
+                <a:latin typeface="Calibri" pitchFamily="34" charset="0"/>
+                <a:ea typeface="Calibri" pitchFamily="34" charset="-122"/>
+                <a:cs typeface="Calibri" pitchFamily="34" charset="-120"/>
+              </a:rPr>
+              <a:t>CLINICAL CHEMISTRY   ·   BOARD REVIEW  ·  Q3</a:t>
+            </a:r>
+            <a:endParaRPr lang="en-US" sz="1100" dirty="0"/>
+          </a:p>
+        </p:txBody>
+      </p:sp>
+      <p:sp>
+        <p:nvSpPr>
+          <p:cNvPr id="3" name="Text 1"/>
+          <p:cNvSpPr/>
+          <p:nvPr/>
+        </p:nvSpPr>
+        <p:spPr>
+          <a:xfrm>
+            <a:off x="566928" y="713232"/>
+            <a:ext cx="11064240" cy="749808"/>
+          </a:xfrm>
+          <a:prstGeom prst="rect">
+            <a:avLst/>
+          </a:prstGeom>
+          <a:noFill/>
+          <a:ln/>
+        </p:spPr>
+        <p:txBody>
+          <a:bodyPr wrap="square" lIns="0" tIns="0" rIns="0" bIns="0" rtlCol="0" anchor="ctr"/>
+          <a:lstStyle/>
+          <a:p>
+            <a:pPr algn="l" indent="0" marL="0">
+              <a:buNone/>
+            </a:pPr>
+            <a:r>
+              <a:rPr lang="en-US" sz="2600" b="1" dirty="0">
+                <a:solidFill>
+                  <a:srgbClr val="0E3A5F"/>
+                </a:solidFill>
+                <a:latin typeface="Calibri" pitchFamily="34" charset="0"/>
+                <a:ea typeface="Calibri" pitchFamily="34" charset="-122"/>
+                <a:cs typeface="Calibri" pitchFamily="34" charset="-120"/>
+              </a:rPr>
+              <a:t>Board-Style Review</a:t>
+            </a:r>
+            <a:endParaRPr lang="en-US" sz="2600" dirty="0"/>
+          </a:p>
+        </p:txBody>
+      </p:sp>
+      <p:sp>
+        <p:nvSpPr>
+          <p:cNvPr id="4" name="Text 2"/>
+          <p:cNvSpPr/>
+          <p:nvPr/>
+        </p:nvSpPr>
+        <p:spPr>
+          <a:xfrm>
+            <a:off x="566928" y="1417320"/>
+            <a:ext cx="11057839" cy="914400"/>
+          </a:xfrm>
+          <a:prstGeom prst="rect">
+            <a:avLst/>
+          </a:prstGeom>
+          <a:noFill/>
+          <a:ln/>
+        </p:spPr>
+        <p:txBody>
+          <a:bodyPr wrap="square" lIns="0" tIns="0" rIns="0" bIns="0" rtlCol="0" anchor="t"/>
+          <a:lstStyle/>
+          <a:p>
+            <a:pPr algn="l" indent="0" marL="0">
+              <a:lnSpc>
+                <a:spcPct val="105000"/>
+              </a:lnSpc>
+              <a:buNone/>
+            </a:pPr>
+            <a:r>
+              <a:rPr lang="en-US" sz="1450" b="1" dirty="0">
+                <a:solidFill>
+                  <a:srgbClr val="1B2A38"/>
+                </a:solidFill>
+                <a:latin typeface="Calibri" pitchFamily="34" charset="0"/>
+                <a:ea typeface="Calibri" pitchFamily="34" charset="-122"/>
+                <a:cs typeface="Calibri" pitchFamily="34" charset="-120"/>
+              </a:rPr>
+              <a:t>A discrete spike in the gamma region on SPEP should prompt which reflex test?</a:t>
+            </a:r>
+            <a:endParaRPr lang="en-US" sz="1450" dirty="0"/>
+          </a:p>
+        </p:txBody>
+      </p:sp>
+      <p:sp>
+        <p:nvSpPr>
+          <p:cNvPr id="5" name="Text 3"/>
+          <p:cNvSpPr/>
+          <p:nvPr/>
+        </p:nvSpPr>
+        <p:spPr>
+          <a:xfrm>
+            <a:off x="658368" y="2395728"/>
+            <a:ext cx="6192390" cy="3017520"/>
+          </a:xfrm>
+          <a:prstGeom prst="rect">
+            <a:avLst/>
+          </a:prstGeom>
+          <a:noFill/>
+          <a:ln/>
+        </p:spPr>
+        <p:txBody>
+          <a:bodyPr wrap="square" lIns="0" tIns="0" rIns="0" bIns="0" rtlCol="0" anchor="t"/>
+          <a:lstStyle/>
+          <a:p>
+            <a:pPr algn="l" indent="0" marL="0">
+              <a:spcAft>
+                <a:spcPts val="600"/>
+              </a:spcAft>
+              <a:buNone/>
+            </a:pPr>
+            <a:r>
+              <a:rPr lang="en-US" sz="1350" dirty="0">
+                <a:solidFill>
+                  <a:srgbClr val="33444F"/>
+                </a:solidFill>
+                <a:latin typeface="Calibri" pitchFamily="34" charset="0"/>
+                <a:ea typeface="Calibri" pitchFamily="34" charset="-122"/>
+                <a:cs typeface="Calibri" pitchFamily="34" charset="-120"/>
+              </a:rPr>
+              <a:t>A. Repeat SPEP</a:t>
+            </a:r>
+            <a:endParaRPr lang="en-US" sz="1350" dirty="0"/>
+          </a:p>
+          <a:p>
+            <a:pPr algn="l" indent="0" marL="0">
+              <a:spcAft>
+                <a:spcPts val="600"/>
+              </a:spcAft>
+              <a:buNone/>
+            </a:pPr>
+            <a:r>
+              <a:rPr lang="en-US" sz="1350" b="1" dirty="0">
+                <a:solidFill>
+                  <a:srgbClr val="0D4A92"/>
+                </a:solidFill>
+                <a:latin typeface="Calibri" pitchFamily="34" charset="0"/>
+                <a:ea typeface="Calibri" pitchFamily="34" charset="-122"/>
+                <a:cs typeface="Calibri" pitchFamily="34" charset="-120"/>
+              </a:rPr>
+              <a:t>B. Immunofixation electrophoresis</a:t>
+            </a:r>
+            <a:endParaRPr lang="en-US" sz="1350" dirty="0"/>
+          </a:p>
+          <a:p>
+            <a:pPr algn="l" indent="0" marL="0">
+              <a:spcAft>
+                <a:spcPts val="600"/>
+              </a:spcAft>
+              <a:buNone/>
+            </a:pPr>
+            <a:r>
+              <a:rPr lang="en-US" sz="1350" dirty="0">
+                <a:solidFill>
+                  <a:srgbClr val="33444F"/>
+                </a:solidFill>
+                <a:latin typeface="Calibri" pitchFamily="34" charset="0"/>
+                <a:ea typeface="Calibri" pitchFamily="34" charset="-122"/>
+                <a:cs typeface="Calibri" pitchFamily="34" charset="-120"/>
+              </a:rPr>
+              <a:t>C. C-reactive protein</a:t>
+            </a:r>
+            <a:endParaRPr lang="en-US" sz="1350" dirty="0"/>
+          </a:p>
+          <a:p>
+            <a:pPr algn="l" indent="0" marL="0">
+              <a:spcAft>
+                <a:spcPts val="600"/>
+              </a:spcAft>
+              <a:buNone/>
+            </a:pPr>
+            <a:r>
+              <a:rPr lang="en-US" sz="1350" dirty="0">
+                <a:solidFill>
+                  <a:srgbClr val="33444F"/>
+                </a:solidFill>
+                <a:latin typeface="Calibri" pitchFamily="34" charset="0"/>
+                <a:ea typeface="Calibri" pitchFamily="34" charset="-122"/>
+                <a:cs typeface="Calibri" pitchFamily="34" charset="-120"/>
+              </a:rPr>
+              <a:t>D. Serum iron</a:t>
+            </a:r>
+            <a:endParaRPr lang="en-US" sz="1350" dirty="0"/>
+          </a:p>
+          <a:p>
+            <a:pPr algn="l" indent="0" marL="0">
+              <a:spcAft>
+                <a:spcPts val="600"/>
+              </a:spcAft>
+              <a:buNone/>
+            </a:pPr>
+            <a:r>
+              <a:rPr lang="en-US" sz="1350" dirty="0">
+                <a:solidFill>
+                  <a:srgbClr val="33444F"/>
+                </a:solidFill>
+                <a:latin typeface="Calibri" pitchFamily="34" charset="0"/>
+                <a:ea typeface="Calibri" pitchFamily="34" charset="-122"/>
+                <a:cs typeface="Calibri" pitchFamily="34" charset="-120"/>
+              </a:rPr>
+              <a:t>E. Haptoglobin</a:t>
+            </a:r>
+            <a:endParaRPr lang="en-US" sz="1350" dirty="0"/>
+          </a:p>
+        </p:txBody>
+      </p:sp>
+      <p:sp>
+        <p:nvSpPr>
+          <p:cNvPr id="6" name="Shape 4"/>
+          <p:cNvSpPr/>
+          <p:nvPr/>
+        </p:nvSpPr>
+        <p:spPr>
+          <a:xfrm>
+            <a:off x="7201632" y="2395728"/>
+            <a:ext cx="4423136" cy="3246120"/>
+          </a:xfrm>
+          <a:prstGeom prst="roundRect">
+            <a:avLst>
+              <a:gd name="adj" fmla="val 2535"/>
+            </a:avLst>
+          </a:prstGeom>
+          <a:solidFill>
+            <a:srgbClr val="E7EFFA"/>
+          </a:solidFill>
+          <a:ln/>
+          <a:effectLst>
+            <a:outerShdw sx="100000" sy="100000" kx="0" ky="0" algn="bl" rotWithShape="0" blurRad="88900" dist="25400" dir="5400000">
+              <a:srgbClr val="22303C">
+                <a:alpha val="12000"/>
+              </a:srgbClr>
+            </a:outerShdw>
+          </a:effectLst>
+        </p:spPr>
+        <p:txBody>
+          <a:bodyPr/>
+          <a:p/>
+        </p:txBody>
+      </p:sp>
+      <p:sp>
+        <p:nvSpPr>
+          <p:cNvPr id="7" name="Text 5"/>
+          <p:cNvSpPr/>
+          <p:nvPr/>
+        </p:nvSpPr>
+        <p:spPr>
+          <a:xfrm>
+            <a:off x="7439376" y="2578608"/>
+            <a:ext cx="3965936" cy="457200"/>
+          </a:xfrm>
+          <a:prstGeom prst="rect">
+            <a:avLst/>
+          </a:prstGeom>
+          <a:noFill/>
+          <a:ln/>
+        </p:spPr>
+        <p:txBody>
+          <a:bodyPr wrap="square" lIns="0" tIns="0" rIns="0" bIns="0" rtlCol="0" anchor="ctr"/>
+          <a:lstStyle/>
+          <a:p>
+            <a:pPr indent="0" marL="0">
+              <a:buNone/>
+            </a:pPr>
+            <a:r>
+              <a:rPr lang="en-US" sz="1500" b="1" dirty="0">
+                <a:solidFill>
+                  <a:srgbClr val="1565C0"/>
+                </a:solidFill>
+                <a:latin typeface="Calibri" pitchFamily="34" charset="0"/>
+                <a:ea typeface="Calibri" pitchFamily="34" charset="-122"/>
+                <a:cs typeface="Calibri" pitchFamily="34" charset="-120"/>
+              </a:rPr>
+              <a:t>ANSWER  </a:t>
+            </a:r>
+            <a:pPr indent="0" marL="0">
+              <a:buNone/>
+            </a:pPr>
+            <a:r>
+              <a:rPr lang="en-US" sz="1500" b="1" dirty="0">
+                <a:solidFill>
+                  <a:srgbClr val="1B2A38"/>
+                </a:solidFill>
+                <a:latin typeface="Calibri" pitchFamily="34" charset="0"/>
+                <a:ea typeface="Calibri" pitchFamily="34" charset="-122"/>
+                <a:cs typeface="Calibri" pitchFamily="34" charset="-120"/>
+              </a:rPr>
+              <a:t>B — Immunofixation</a:t>
+            </a:r>
+            <a:endParaRPr lang="en-US" sz="1500" dirty="0"/>
+          </a:p>
+        </p:txBody>
+      </p:sp>
+      <p:sp>
+        <p:nvSpPr>
+          <p:cNvPr id="8" name="Text 6"/>
+          <p:cNvSpPr/>
+          <p:nvPr/>
+        </p:nvSpPr>
+        <p:spPr>
+          <a:xfrm>
+            <a:off x="7439376" y="3127248"/>
+            <a:ext cx="3947648" cy="2377440"/>
+          </a:xfrm>
+          <a:prstGeom prst="rect">
+            <a:avLst/>
+          </a:prstGeom>
+          <a:noFill/>
+          <a:ln/>
+        </p:spPr>
+        <p:txBody>
+          <a:bodyPr wrap="square" lIns="0" tIns="0" rIns="0" bIns="0" rtlCol="0" anchor="t"/>
+          <a:lstStyle/>
+          <a:p>
+            <a:pPr algn="l" indent="0" marL="0">
+              <a:lnSpc>
+                <a:spcPct val="108000"/>
+              </a:lnSpc>
+              <a:buNone/>
+            </a:pPr>
+            <a:r>
+              <a:rPr lang="en-US" sz="1250" dirty="0">
+                <a:solidFill>
+                  <a:srgbClr val="33444F"/>
+                </a:solidFill>
+                <a:latin typeface="Calibri" pitchFamily="34" charset="0"/>
+                <a:ea typeface="Calibri" pitchFamily="34" charset="-122"/>
+                <a:cs typeface="Calibri" pitchFamily="34" charset="-120"/>
+              </a:rPr>
+              <a:t>Immunofixation identifies the heavy- and light-chain type of the monoclonal protein, confirming the M-spike.</a:t>
+            </a:r>
+            <a:endParaRPr lang="en-US" sz="1250" dirty="0"/>
+          </a:p>
+        </p:txBody>
+      </p:sp>
+      <p:sp>
+        <p:nvSpPr>
+          <p:cNvPr id="9" name="Text 7"/>
+          <p:cNvSpPr/>
+          <p:nvPr/>
+        </p:nvSpPr>
+        <p:spPr>
+          <a:xfrm>
+            <a:off x="566928" y="6473952"/>
+            <a:ext cx="7772400" cy="274320"/>
+          </a:xfrm>
+          <a:prstGeom prst="rect">
+            <a:avLst/>
+          </a:prstGeom>
+          <a:noFill/>
+          <a:ln/>
+        </p:spPr>
+        <p:txBody>
+          <a:bodyPr wrap="square" lIns="0" tIns="0" rIns="0" bIns="0" rtlCol="0" anchor="ctr"/>
+          <a:lstStyle/>
+          <a:p>
+            <a:pPr algn="l" indent="0" marL="0">
+              <a:buNone/>
+            </a:pPr>
+            <a:r>
+              <a:rPr lang="en-US" sz="850" dirty="0">
+                <a:solidFill>
+                  <a:srgbClr val="9AA8B4"/>
+                </a:solidFill>
+                <a:latin typeface="Calibri" pitchFamily="34" charset="0"/>
+                <a:ea typeface="Calibri" pitchFamily="34" charset="-122"/>
+                <a:cs typeface="Calibri" pitchFamily="34" charset="-120"/>
+              </a:rPr>
+              <a:t>Makassed General Hospital  ·  Department of Laboratory Medicine</a:t>
+            </a:r>
+            <a:endParaRPr lang="en-US" sz="850" dirty="0"/>
+          </a:p>
+        </p:txBody>
+      </p:sp>
+      <p:sp>
+        <p:nvSpPr>
+          <p:cNvPr id="10" name="Text 8"/>
+          <p:cNvSpPr/>
+          <p:nvPr/>
+        </p:nvSpPr>
+        <p:spPr>
+          <a:xfrm>
+            <a:off x="9814255" y="6473952"/>
+            <a:ext cx="1828800" cy="274320"/>
+          </a:xfrm>
+          <a:prstGeom prst="rect">
+            <a:avLst/>
+          </a:prstGeom>
+          <a:noFill/>
+          <a:ln/>
+        </p:spPr>
+        <p:txBody>
+          <a:bodyPr wrap="square" lIns="0" tIns="0" rIns="0" bIns="0" rtlCol="0" anchor="ctr"/>
+          <a:lstStyle/>
+          <a:p>
+            <a:pPr algn="r" indent="0" marL="0">
+              <a:buNone/>
+            </a:pPr>
+            <a:r>
+              <a:rPr lang="en-US" sz="850" dirty="0">
+                <a:solidFill>
+                  <a:srgbClr val="9AA8B4"/>
+                </a:solidFill>
+                <a:latin typeface="Calibri" pitchFamily="34" charset="0"/>
+                <a:ea typeface="Calibri" pitchFamily="34" charset="-122"/>
+                <a:cs typeface="Calibri" pitchFamily="34" charset="-120"/>
+              </a:rPr>
+              <a:t>CP Lecture Series</a:t>
+            </a:r>
+            <a:pPr algn="r" indent="0" marL="0">
+              <a:buNone/>
+            </a:pPr>
+            <a:r>
+              <a:rPr lang="en-US" sz="850" dirty="0">
+                <a:solidFill>
+                  <a:srgbClr val="DCE4EC"/>
+                </a:solidFill>
+                <a:latin typeface="Calibri" pitchFamily="34" charset="0"/>
+                <a:ea typeface="Calibri" pitchFamily="34" charset="-122"/>
+                <a:cs typeface="Calibri" pitchFamily="34" charset="-120"/>
+              </a:rPr>
+              <a:t>   ·   </a:t>
+            </a:r>
+            <a:pPr algn="r" indent="0" marL="0">
+              <a:buNone/>
+            </a:pPr>
+            <a:r>
+              <a:rPr lang="en-US" sz="850" b="1" dirty="0">
+                <a:solidFill>
+                  <a:srgbClr val="1565C0"/>
+                </a:solidFill>
+                <a:latin typeface="Calibri" pitchFamily="34" charset="0"/>
+                <a:ea typeface="Calibri" pitchFamily="34" charset="-122"/>
+                <a:cs typeface="Calibri" pitchFamily="34" charset="-120"/>
+              </a:rPr>
+              <a:t>20</a:t>
+            </a:r>
+            <a:endParaRPr lang="en-US" sz="850" dirty="0"/>
+          </a:p>
+        </p:txBody>
+      </p:sp>
+    </p:spTree>
+  </p:cSld>
+  <p:clrMapOvr>
+    <a:masterClrMapping/>
+  </p:clrMapOvr>
+</p:sld>
+</file>
+
+<file path=ppt/slides/slide29.xml><?xml version="1.0" encoding="utf-8"?>
+<p:sld xmlns:a="http://schemas.openxmlformats.org/drawingml/2006/main" xmlns:p="http://schemas.openxmlformats.org/presentationml/2006/main" xmlns:r="http://schemas.openxmlformats.org/officeDocument/2006/relationships">
+  <p:cSld>
+    <p:spTree>
+      <p:nvGrpSpPr>
+        <p:cNvPr id="1" name=""/>
+        <p:cNvGrpSpPr/>
+        <p:nvPr/>
+      </p:nvGrpSpPr>
+      <p:grpSpPr/>
+      <p:sp>
+        <p:nvSpPr>
+          <p:cNvPr id="2" name="Text 0"/>
+          <p:cNvSpPr/>
+          <p:nvPr/>
+        </p:nvSpPr>
+        <p:spPr>
+          <a:xfrm>
+            <a:off x="566928" y="329184"/>
+            <a:ext cx="10515600" cy="310896"/>
+          </a:xfrm>
+          <a:prstGeom prst="rect">
+            <a:avLst/>
+          </a:prstGeom>
+          <a:noFill/>
+          <a:ln/>
+        </p:spPr>
+        <p:txBody>
+          <a:bodyPr wrap="square" lIns="0" tIns="0" rIns="0" bIns="0" rtlCol="0" anchor="ctr"/>
+          <a:lstStyle/>
+          <a:p>
+            <a:pPr algn="l" indent="0" marL="0">
+              <a:buNone/>
+            </a:pPr>
+            <a:r>
+              <a:rPr lang="en-US" sz="1100" b="1" spc="150" kern="0" dirty="0">
+                <a:solidFill>
+                  <a:srgbClr val="1565C0"/>
+                </a:solidFill>
+                <a:latin typeface="Calibri" pitchFamily="34" charset="0"/>
+                <a:ea typeface="Calibri" pitchFamily="34" charset="-122"/>
+                <a:cs typeface="Calibri" pitchFamily="34" charset="-120"/>
+              </a:rPr>
+              <a:t>CLINICAL CHEMISTRY   ·   BOARD REVIEW  ·  Q2</a:t>
+            </a:r>
+            <a:endParaRPr lang="en-US" sz="1100" dirty="0"/>
+          </a:p>
+        </p:txBody>
+      </p:sp>
+      <p:sp>
+        <p:nvSpPr>
+          <p:cNvPr id="3" name="Text 1"/>
+          <p:cNvSpPr/>
+          <p:nvPr/>
+        </p:nvSpPr>
+        <p:spPr>
+          <a:xfrm>
+            <a:off x="566928" y="713232"/>
+            <a:ext cx="11064240" cy="749808"/>
+          </a:xfrm>
+          <a:prstGeom prst="rect">
+            <a:avLst/>
+          </a:prstGeom>
+          <a:noFill/>
+          <a:ln/>
+        </p:spPr>
+        <p:txBody>
+          <a:bodyPr wrap="square" lIns="0" tIns="0" rIns="0" bIns="0" rtlCol="0" anchor="ctr"/>
+          <a:lstStyle/>
+          <a:p>
+            <a:pPr algn="l" indent="0" marL="0">
+              <a:buNone/>
+            </a:pPr>
+            <a:r>
+              <a:rPr lang="en-US" sz="2600" b="1" dirty="0">
+                <a:solidFill>
+                  <a:srgbClr val="0E3A5F"/>
+                </a:solidFill>
+                <a:latin typeface="Calibri" pitchFamily="34" charset="0"/>
+                <a:ea typeface="Calibri" pitchFamily="34" charset="-122"/>
+                <a:cs typeface="Calibri" pitchFamily="34" charset="-120"/>
+              </a:rPr>
+              <a:t>Board-Style Review</a:t>
+            </a:r>
+            <a:endParaRPr lang="en-US" sz="2600" dirty="0"/>
+          </a:p>
+        </p:txBody>
+      </p:sp>
+      <p:sp>
+        <p:nvSpPr>
+          <p:cNvPr id="4" name="Text 2"/>
+          <p:cNvSpPr/>
+          <p:nvPr/>
+        </p:nvSpPr>
+        <p:spPr>
+          <a:xfrm>
+            <a:off x="566928" y="1417320"/>
+            <a:ext cx="11057839" cy="914400"/>
+          </a:xfrm>
+          <a:prstGeom prst="rect">
+            <a:avLst/>
+          </a:prstGeom>
+          <a:noFill/>
+          <a:ln/>
+        </p:spPr>
+        <p:txBody>
+          <a:bodyPr wrap="square" lIns="0" tIns="0" rIns="0" bIns="0" rtlCol="0" anchor="t"/>
+          <a:lstStyle/>
+          <a:p>
+            <a:pPr algn="l" indent="0" marL="0">
+              <a:lnSpc>
+                <a:spcPct val="105000"/>
+              </a:lnSpc>
+              <a:buNone/>
+            </a:pPr>
+            <a:r>
+              <a:rPr lang="en-US" sz="1450" b="1" dirty="0">
+                <a:solidFill>
+                  <a:srgbClr val="1B2A38"/>
+                </a:solidFill>
+                <a:latin typeface="Calibri" pitchFamily="34" charset="0"/>
+                <a:ea typeface="Calibri" pitchFamily="34" charset="-122"/>
+                <a:cs typeface="Calibri" pitchFamily="34" charset="-120"/>
+              </a:rPr>
+              <a:t>On SPEP, β–γ bridging with low albumin is characteristic of:</a:t>
+            </a:r>
+            <a:endParaRPr lang="en-US" sz="1450" dirty="0"/>
+          </a:p>
+        </p:txBody>
+      </p:sp>
+      <p:sp>
+        <p:nvSpPr>
+          <p:cNvPr id="5" name="Text 3"/>
+          <p:cNvSpPr/>
+          <p:nvPr/>
+        </p:nvSpPr>
+        <p:spPr>
+          <a:xfrm>
+            <a:off x="658368" y="2395728"/>
+            <a:ext cx="6192390" cy="3017520"/>
+          </a:xfrm>
+          <a:prstGeom prst="rect">
+            <a:avLst/>
+          </a:prstGeom>
+          <a:noFill/>
+          <a:ln/>
+        </p:spPr>
+        <p:txBody>
+          <a:bodyPr wrap="square" lIns="0" tIns="0" rIns="0" bIns="0" rtlCol="0" anchor="t"/>
+          <a:lstStyle/>
+          <a:p>
+            <a:pPr algn="l" indent="0" marL="0">
+              <a:spcAft>
+                <a:spcPts val="600"/>
+              </a:spcAft>
+              <a:buNone/>
+            </a:pPr>
+            <a:r>
+              <a:rPr lang="en-US" sz="1350" dirty="0">
+                <a:solidFill>
+                  <a:srgbClr val="33444F"/>
+                </a:solidFill>
+                <a:latin typeface="Calibri" pitchFamily="34" charset="0"/>
+                <a:ea typeface="Calibri" pitchFamily="34" charset="-122"/>
+                <a:cs typeface="Calibri" pitchFamily="34" charset="-120"/>
+              </a:rPr>
+              <a:t>A. Acute inflammation</a:t>
+            </a:r>
+            <a:endParaRPr lang="en-US" sz="1350" dirty="0"/>
+          </a:p>
+          <a:p>
+            <a:pPr algn="l" indent="0" marL="0">
+              <a:spcAft>
+                <a:spcPts val="600"/>
+              </a:spcAft>
+              <a:buNone/>
+            </a:pPr>
+            <a:r>
+              <a:rPr lang="en-US" sz="1350" b="1" dirty="0">
+                <a:solidFill>
+                  <a:srgbClr val="0D4A92"/>
+                </a:solidFill>
+                <a:latin typeface="Calibri" pitchFamily="34" charset="0"/>
+                <a:ea typeface="Calibri" pitchFamily="34" charset="-122"/>
+                <a:cs typeface="Calibri" pitchFamily="34" charset="-120"/>
+              </a:rPr>
+              <a:t>B. Cirrhosis / chronic liver disease</a:t>
+            </a:r>
+            <a:endParaRPr lang="en-US" sz="1350" dirty="0"/>
+          </a:p>
+          <a:p>
+            <a:pPr algn="l" indent="0" marL="0">
+              <a:spcAft>
+                <a:spcPts val="600"/>
+              </a:spcAft>
+              <a:buNone/>
+            </a:pPr>
+            <a:r>
+              <a:rPr lang="en-US" sz="1350" dirty="0">
+                <a:solidFill>
+                  <a:srgbClr val="33444F"/>
+                </a:solidFill>
+                <a:latin typeface="Calibri" pitchFamily="34" charset="0"/>
+                <a:ea typeface="Calibri" pitchFamily="34" charset="-122"/>
+                <a:cs typeface="Calibri" pitchFamily="34" charset="-120"/>
+              </a:rPr>
+              <a:t>C. Nephrotic syndrome</a:t>
+            </a:r>
+            <a:endParaRPr lang="en-US" sz="1350" dirty="0"/>
+          </a:p>
+          <a:p>
+            <a:pPr algn="l" indent="0" marL="0">
+              <a:spcAft>
+                <a:spcPts val="600"/>
+              </a:spcAft>
+              <a:buNone/>
+            </a:pPr>
+            <a:r>
+              <a:rPr lang="en-US" sz="1350" dirty="0">
+                <a:solidFill>
+                  <a:srgbClr val="33444F"/>
+                </a:solidFill>
+                <a:latin typeface="Calibri" pitchFamily="34" charset="0"/>
+                <a:ea typeface="Calibri" pitchFamily="34" charset="-122"/>
+                <a:cs typeface="Calibri" pitchFamily="34" charset="-120"/>
+              </a:rPr>
+              <a:t>D. Multiple myeloma</a:t>
+            </a:r>
+            <a:endParaRPr lang="en-US" sz="1350" dirty="0"/>
+          </a:p>
+          <a:p>
+            <a:pPr algn="l" indent="0" marL="0">
+              <a:spcAft>
+                <a:spcPts val="600"/>
+              </a:spcAft>
+              <a:buNone/>
+            </a:pPr>
+            <a:r>
+              <a:rPr lang="en-US" sz="1350" dirty="0">
+                <a:solidFill>
+                  <a:srgbClr val="33444F"/>
+                </a:solidFill>
+                <a:latin typeface="Calibri" pitchFamily="34" charset="0"/>
+                <a:ea typeface="Calibri" pitchFamily="34" charset="-122"/>
+                <a:cs typeface="Calibri" pitchFamily="34" charset="-120"/>
+              </a:rPr>
+              <a:t>E. Iron deficiency</a:t>
+            </a:r>
+            <a:endParaRPr lang="en-US" sz="1350" dirty="0"/>
+          </a:p>
+        </p:txBody>
+      </p:sp>
+      <p:sp>
+        <p:nvSpPr>
+          <p:cNvPr id="6" name="Shape 4"/>
+          <p:cNvSpPr/>
+          <p:nvPr/>
+        </p:nvSpPr>
+        <p:spPr>
+          <a:xfrm>
+            <a:off x="7201632" y="2395728"/>
+            <a:ext cx="4423136" cy="3246120"/>
+          </a:xfrm>
+          <a:prstGeom prst="roundRect">
+            <a:avLst>
+              <a:gd name="adj" fmla="val 2535"/>
+            </a:avLst>
+          </a:prstGeom>
+          <a:solidFill>
+            <a:srgbClr val="E7EFFA"/>
+          </a:solidFill>
+          <a:ln/>
+          <a:effectLst>
+            <a:outerShdw sx="100000" sy="100000" kx="0" ky="0" algn="bl" rotWithShape="0" blurRad="88900" dist="25400" dir="5400000">
+              <a:srgbClr val="22303C">
+                <a:alpha val="12000"/>
+              </a:srgbClr>
+            </a:outerShdw>
+          </a:effectLst>
+        </p:spPr>
+        <p:txBody>
+          <a:bodyPr/>
+          <a:p/>
+        </p:txBody>
+      </p:sp>
+      <p:sp>
+        <p:nvSpPr>
+          <p:cNvPr id="7" name="Text 5"/>
+          <p:cNvSpPr/>
+          <p:nvPr/>
+        </p:nvSpPr>
+        <p:spPr>
+          <a:xfrm>
+            <a:off x="7439376" y="2578608"/>
+            <a:ext cx="3965936" cy="457200"/>
+          </a:xfrm>
+          <a:prstGeom prst="rect">
+            <a:avLst/>
+          </a:prstGeom>
+          <a:noFill/>
+          <a:ln/>
+        </p:spPr>
+        <p:txBody>
+          <a:bodyPr wrap="square" lIns="0" tIns="0" rIns="0" bIns="0" rtlCol="0" anchor="ctr"/>
+          <a:lstStyle/>
+          <a:p>
+            <a:pPr indent="0" marL="0">
+              <a:buNone/>
+            </a:pPr>
+            <a:r>
+              <a:rPr lang="en-US" sz="1500" b="1" dirty="0">
+                <a:solidFill>
+                  <a:srgbClr val="1565C0"/>
+                </a:solidFill>
+                <a:latin typeface="Calibri" pitchFamily="34" charset="0"/>
+                <a:ea typeface="Calibri" pitchFamily="34" charset="-122"/>
+                <a:cs typeface="Calibri" pitchFamily="34" charset="-120"/>
+              </a:rPr>
+              <a:t>ANSWER  </a:t>
+            </a:r>
+            <a:pPr indent="0" marL="0">
+              <a:buNone/>
+            </a:pPr>
+            <a:r>
+              <a:rPr lang="en-US" sz="1500" b="1" dirty="0">
+                <a:solidFill>
+                  <a:srgbClr val="1B2A38"/>
+                </a:solidFill>
+                <a:latin typeface="Calibri" pitchFamily="34" charset="0"/>
+                <a:ea typeface="Calibri" pitchFamily="34" charset="-122"/>
+                <a:cs typeface="Calibri" pitchFamily="34" charset="-120"/>
+              </a:rPr>
+              <a:t>B — Cirrhosis</a:t>
+            </a:r>
+            <a:endParaRPr lang="en-US" sz="1500" dirty="0"/>
+          </a:p>
+        </p:txBody>
+      </p:sp>
+      <p:sp>
+        <p:nvSpPr>
+          <p:cNvPr id="8" name="Text 6"/>
+          <p:cNvSpPr/>
+          <p:nvPr/>
+        </p:nvSpPr>
+        <p:spPr>
+          <a:xfrm>
+            <a:off x="7439376" y="3127248"/>
+            <a:ext cx="3947648" cy="2377440"/>
+          </a:xfrm>
+          <a:prstGeom prst="rect">
+            <a:avLst/>
+          </a:prstGeom>
+          <a:noFill/>
+          <a:ln/>
+        </p:spPr>
+        <p:txBody>
+          <a:bodyPr wrap="square" lIns="0" tIns="0" rIns="0" bIns="0" rtlCol="0" anchor="t"/>
+          <a:lstStyle/>
+          <a:p>
+            <a:pPr algn="l" indent="0" marL="0">
+              <a:lnSpc>
+                <a:spcPct val="108000"/>
+              </a:lnSpc>
+              <a:buNone/>
+            </a:pPr>
+            <a:r>
+              <a:rPr lang="en-US" sz="1250" dirty="0">
+                <a:solidFill>
+                  <a:srgbClr val="33444F"/>
+                </a:solidFill>
+                <a:latin typeface="Calibri" pitchFamily="34" charset="0"/>
+                <a:ea typeface="Calibri" pitchFamily="34" charset="-122"/>
+                <a:cs typeface="Calibri" pitchFamily="34" charset="-120"/>
+              </a:rPr>
+              <a:t>Polyclonal IgA in liver disease fills the trough between β and γ (bridging); albumin falls with reduced synthesis.</a:t>
+            </a:r>
+            <a:endParaRPr lang="en-US" sz="1250" dirty="0"/>
+          </a:p>
+        </p:txBody>
+      </p:sp>
+      <p:sp>
+        <p:nvSpPr>
+          <p:cNvPr id="9" name="Text 7"/>
+          <p:cNvSpPr/>
+          <p:nvPr/>
+        </p:nvSpPr>
+        <p:spPr>
+          <a:xfrm>
+            <a:off x="566928" y="6473952"/>
+            <a:ext cx="7772400" cy="274320"/>
+          </a:xfrm>
+          <a:prstGeom prst="rect">
+            <a:avLst/>
+          </a:prstGeom>
+          <a:noFill/>
+          <a:ln/>
+        </p:spPr>
+        <p:txBody>
+          <a:bodyPr wrap="square" lIns="0" tIns="0" rIns="0" bIns="0" rtlCol="0" anchor="ctr"/>
+          <a:lstStyle/>
+          <a:p>
+            <a:pPr algn="l" indent="0" marL="0">
+              <a:buNone/>
+            </a:pPr>
+            <a:r>
+              <a:rPr lang="en-US" sz="850" dirty="0">
+                <a:solidFill>
+                  <a:srgbClr val="9AA8B4"/>
+                </a:solidFill>
+                <a:latin typeface="Calibri" pitchFamily="34" charset="0"/>
+                <a:ea typeface="Calibri" pitchFamily="34" charset="-122"/>
+                <a:cs typeface="Calibri" pitchFamily="34" charset="-120"/>
+              </a:rPr>
+              <a:t>Makassed General Hospital  ·  Department of Laboratory Medicine</a:t>
+            </a:r>
+            <a:endParaRPr lang="en-US" sz="850" dirty="0"/>
+          </a:p>
+        </p:txBody>
+      </p:sp>
+      <p:sp>
+        <p:nvSpPr>
+          <p:cNvPr id="10" name="Text 8"/>
+          <p:cNvSpPr/>
+          <p:nvPr/>
+        </p:nvSpPr>
+        <p:spPr>
+          <a:xfrm>
+            <a:off x="9814255" y="6473952"/>
+            <a:ext cx="1828800" cy="274320"/>
+          </a:xfrm>
+          <a:prstGeom prst="rect">
+            <a:avLst/>
+          </a:prstGeom>
+          <a:noFill/>
+          <a:ln/>
+        </p:spPr>
+        <p:txBody>
+          <a:bodyPr wrap="square" lIns="0" tIns="0" rIns="0" bIns="0" rtlCol="0" anchor="ctr"/>
+          <a:lstStyle/>
+          <a:p>
+            <a:pPr algn="r" indent="0" marL="0">
+              <a:buNone/>
+            </a:pPr>
+            <a:r>
+              <a:rPr lang="en-US" sz="850" dirty="0">
+                <a:solidFill>
+                  <a:srgbClr val="9AA8B4"/>
+                </a:solidFill>
+                <a:latin typeface="Calibri" pitchFamily="34" charset="0"/>
+                <a:ea typeface="Calibri" pitchFamily="34" charset="-122"/>
+                <a:cs typeface="Calibri" pitchFamily="34" charset="-120"/>
+              </a:rPr>
+              <a:t>CP Lecture Series</a:t>
+            </a:r>
+            <a:pPr algn="r" indent="0" marL="0">
+              <a:buNone/>
+            </a:pPr>
+            <a:r>
+              <a:rPr lang="en-US" sz="850" dirty="0">
+                <a:solidFill>
+                  <a:srgbClr val="DCE4EC"/>
+                </a:solidFill>
+                <a:latin typeface="Calibri" pitchFamily="34" charset="0"/>
+                <a:ea typeface="Calibri" pitchFamily="34" charset="-122"/>
+                <a:cs typeface="Calibri" pitchFamily="34" charset="-120"/>
+              </a:rPr>
+              <a:t>   ·   </a:t>
+            </a:r>
+            <a:pPr algn="r" indent="0" marL="0">
+              <a:buNone/>
+            </a:pPr>
+            <a:r>
+              <a:rPr lang="en-US" sz="850" b="1" dirty="0">
+                <a:solidFill>
+                  <a:srgbClr val="1565C0"/>
+                </a:solidFill>
+                <a:latin typeface="Calibri" pitchFamily="34" charset="0"/>
+                <a:ea typeface="Calibri" pitchFamily="34" charset="-122"/>
+                <a:cs typeface="Calibri" pitchFamily="34" charset="-120"/>
+              </a:rPr>
+              <a:t>19</a:t>
+            </a:r>
+            <a:endParaRPr lang="en-US" sz="850" dirty="0"/>
+          </a:p>
+        </p:txBody>
+      </p:sp>
+    </p:spTree>
+  </p:cSld>
+  <p:clrMapOvr>
+    <a:masterClrMapping/>
+  </p:clrMapOvr>
+</p:sld>
+</file>
+
 <file path=ppt/slides/slide3.xml><?xml version="1.0" encoding="utf-8"?>
 <p:sld xmlns:a="http://schemas.openxmlformats.org/drawingml/2006/main" xmlns:r="http://schemas.openxmlformats.org/officeDocument/2006/relationships" xmlns:p="http://schemas.openxmlformats.org/presentationml/2006/main">
   <p:cSld name="Slide 3">
@@ -12204,6 +13338,10 @@
             </a:outerShdw>
           </a:effectLst>
         </p:spPr>
+        <p:txBody>
+          <a:bodyPr/>
+          <a:p/>
+        </p:txBody>
       </p:sp>
       <p:sp>
         <p:nvSpPr>
@@ -12231,6 +13369,10 @@
             </a:outerShdw>
           </a:effectLst>
         </p:spPr>
+        <p:txBody>
+          <a:bodyPr/>
+          <a:p/>
+        </p:txBody>
       </p:sp>
       <p:sp>
         <p:nvSpPr>
@@ -12338,6 +13480,10 @@
             </a:outerShdw>
           </a:effectLst>
         </p:spPr>
+        <p:txBody>
+          <a:bodyPr/>
+          <a:p/>
+        </p:txBody>
       </p:sp>
       <p:sp>
         <p:nvSpPr>
@@ -12365,6 +13511,10 @@
             </a:outerShdw>
           </a:effectLst>
         </p:spPr>
+        <p:txBody>
+          <a:bodyPr/>
+          <a:p/>
+        </p:txBody>
       </p:sp>
       <p:sp>
         <p:nvSpPr>
@@ -12472,6 +13622,10 @@
             </a:outerShdw>
           </a:effectLst>
         </p:spPr>
+        <p:txBody>
+          <a:bodyPr/>
+          <a:p/>
+        </p:txBody>
       </p:sp>
       <p:sp>
         <p:nvSpPr>
@@ -12499,6 +13653,10 @@
             </a:outerShdw>
           </a:effectLst>
         </p:spPr>
+        <p:txBody>
+          <a:bodyPr/>
+          <a:p/>
+        </p:txBody>
       </p:sp>
       <p:sp>
         <p:nvSpPr>
@@ -12606,6 +13764,10 @@
             </a:outerShdw>
           </a:effectLst>
         </p:spPr>
+        <p:txBody>
+          <a:bodyPr/>
+          <a:p/>
+        </p:txBody>
       </p:sp>
       <p:sp>
         <p:nvSpPr>
@@ -12633,6 +13795,10 @@
             </a:outerShdw>
           </a:effectLst>
         </p:spPr>
+        <p:txBody>
+          <a:bodyPr/>
+          <a:p/>
+        </p:txBody>
       </p:sp>
       <p:sp>
         <p:nvSpPr>
@@ -12740,6 +13906,10 @@
             </a:outerShdw>
           </a:effectLst>
         </p:spPr>
+        <p:txBody>
+          <a:bodyPr/>
+          <a:p/>
+        </p:txBody>
       </p:sp>
       <p:sp>
         <p:nvSpPr>
@@ -12767,6 +13937,10 @@
             </a:outerShdw>
           </a:effectLst>
         </p:spPr>
+        <p:txBody>
+          <a:bodyPr/>
+          <a:p/>
+        </p:txBody>
       </p:sp>
       <p:sp>
         <p:nvSpPr>
@@ -12874,6 +14048,10 @@
             </a:outerShdw>
           </a:effectLst>
         </p:spPr>
+        <p:txBody>
+          <a:bodyPr/>
+          <a:p/>
+        </p:txBody>
       </p:sp>
       <p:sp>
         <p:nvSpPr>
@@ -12901,6 +14079,10 @@
             </a:outerShdw>
           </a:effectLst>
         </p:spPr>
+        <p:txBody>
+          <a:bodyPr/>
+          <a:p/>
+        </p:txBody>
       </p:sp>
       <p:sp>
         <p:nvSpPr>
@@ -13081,6 +14263,500 @@
                 <a:cs typeface="Calibri" pitchFamily="34" charset="-120"/>
               </a:rPr>
               <a:t>3</a:t>
+            </a:r>
+            <a:endParaRPr lang="en-US" sz="850" dirty="0"/>
+          </a:p>
+        </p:txBody>
+      </p:sp>
+    </p:spTree>
+  </p:cSld>
+  <p:clrMapOvr>
+    <a:masterClrMapping/>
+  </p:clrMapOvr>
+</p:sld>
+</file>
+
+<file path=ppt/slides/slide30.xml><?xml version="1.0" encoding="utf-8"?>
+<p:sld xmlns:a="http://schemas.openxmlformats.org/drawingml/2006/main" xmlns:p="http://schemas.openxmlformats.org/presentationml/2006/main" xmlns:r="http://schemas.openxmlformats.org/officeDocument/2006/relationships">
+  <p:cSld>
+    <p:spTree>
+      <p:nvGrpSpPr>
+        <p:cNvPr id="1" name=""/>
+        <p:cNvGrpSpPr/>
+        <p:nvPr/>
+      </p:nvGrpSpPr>
+      <p:grpSpPr/>
+      <p:sp>
+        <p:nvSpPr>
+          <p:cNvPr id="2" name="Text 0"/>
+          <p:cNvSpPr/>
+          <p:nvPr/>
+        </p:nvSpPr>
+        <p:spPr>
+          <a:xfrm>
+            <a:off x="566928" y="329184"/>
+            <a:ext cx="10515600" cy="310896"/>
+          </a:xfrm>
+          <a:prstGeom prst="rect">
+            <a:avLst/>
+          </a:prstGeom>
+          <a:noFill/>
+          <a:ln/>
+        </p:spPr>
+        <p:txBody>
+          <a:bodyPr wrap="square" lIns="0" tIns="0" rIns="0" bIns="0" rtlCol="0" anchor="ctr"/>
+          <a:lstStyle/>
+          <a:p>
+            <a:pPr algn="l" indent="0" marL="0">
+              <a:buNone/>
+            </a:pPr>
+            <a:r>
+              <a:rPr lang="en-US" sz="1100" b="1" spc="150" kern="0" dirty="0">
+                <a:solidFill>
+                  <a:srgbClr val="1565C0"/>
+                </a:solidFill>
+                <a:latin typeface="Calibri" pitchFamily="34" charset="0"/>
+                <a:ea typeface="Calibri" pitchFamily="34" charset="-122"/>
+                <a:cs typeface="Calibri" pitchFamily="34" charset="-120"/>
+              </a:rPr>
+              <a:t>CLINICAL CHEMISTRY   ·   BOARD REVIEW  ·  Q1</a:t>
+            </a:r>
+            <a:endParaRPr lang="en-US" sz="1100" dirty="0"/>
+          </a:p>
+        </p:txBody>
+      </p:sp>
+      <p:sp>
+        <p:nvSpPr>
+          <p:cNvPr id="3" name="Text 1"/>
+          <p:cNvSpPr/>
+          <p:nvPr/>
+        </p:nvSpPr>
+        <p:spPr>
+          <a:xfrm>
+            <a:off x="566928" y="713232"/>
+            <a:ext cx="11064240" cy="749808"/>
+          </a:xfrm>
+          <a:prstGeom prst="rect">
+            <a:avLst/>
+          </a:prstGeom>
+          <a:noFill/>
+          <a:ln/>
+        </p:spPr>
+        <p:txBody>
+          <a:bodyPr wrap="square" lIns="0" tIns="0" rIns="0" bIns="0" rtlCol="0" anchor="ctr"/>
+          <a:lstStyle/>
+          <a:p>
+            <a:pPr algn="l" indent="0" marL="0">
+              <a:buNone/>
+            </a:pPr>
+            <a:r>
+              <a:rPr lang="en-US" sz="2600" b="1" dirty="0">
+                <a:solidFill>
+                  <a:srgbClr val="0E3A5F"/>
+                </a:solidFill>
+                <a:latin typeface="Calibri" pitchFamily="34" charset="0"/>
+                <a:ea typeface="Calibri" pitchFamily="34" charset="-122"/>
+                <a:cs typeface="Calibri" pitchFamily="34" charset="-120"/>
+              </a:rPr>
+              <a:t>Board-Style Review</a:t>
+            </a:r>
+            <a:endParaRPr lang="en-US" sz="2600" dirty="0"/>
+          </a:p>
+        </p:txBody>
+      </p:sp>
+      <p:sp>
+        <p:nvSpPr>
+          <p:cNvPr id="4" name="Text 2"/>
+          <p:cNvSpPr/>
+          <p:nvPr/>
+        </p:nvSpPr>
+        <p:spPr>
+          <a:xfrm>
+            <a:off x="566928" y="1417320"/>
+            <a:ext cx="11057839" cy="914400"/>
+          </a:xfrm>
+          <a:prstGeom prst="rect">
+            <a:avLst/>
+          </a:prstGeom>
+          <a:noFill/>
+          <a:ln/>
+        </p:spPr>
+        <p:txBody>
+          <a:bodyPr wrap="square" lIns="0" tIns="0" rIns="0" bIns="0" rtlCol="0" anchor="t"/>
+          <a:lstStyle/>
+          <a:p>
+            <a:pPr algn="l" indent="0" marL="0">
+              <a:lnSpc>
+                <a:spcPct val="105000"/>
+              </a:lnSpc>
+              <a:buNone/>
+            </a:pPr>
+            <a:r>
+              <a:rPr lang="en-US" sz="1450" b="1" dirty="0">
+                <a:solidFill>
+                  <a:srgbClr val="1B2A38"/>
+                </a:solidFill>
+                <a:latin typeface="Calibri" pitchFamily="34" charset="0"/>
+                <a:ea typeface="Calibri" pitchFamily="34" charset="-122"/>
+                <a:cs typeface="Calibri" pitchFamily="34" charset="-120"/>
+              </a:rPr>
+              <a:t>Which single test is the most sensitive initial screen for thyroid dysfunction in an ambulatory patient?</a:t>
+            </a:r>
+            <a:endParaRPr lang="en-US" sz="1450" dirty="0"/>
+          </a:p>
+        </p:txBody>
+      </p:sp>
+      <p:sp>
+        <p:nvSpPr>
+          <p:cNvPr id="5" name="Text 3"/>
+          <p:cNvSpPr/>
+          <p:nvPr/>
+        </p:nvSpPr>
+        <p:spPr>
+          <a:xfrm>
+            <a:off x="658368" y="2395728"/>
+            <a:ext cx="6192390" cy="3017520"/>
+          </a:xfrm>
+          <a:prstGeom prst="rect">
+            <a:avLst/>
+          </a:prstGeom>
+          <a:noFill/>
+          <a:ln/>
+        </p:spPr>
+        <p:txBody>
+          <a:bodyPr wrap="square" lIns="0" tIns="0" rIns="0" bIns="0" rtlCol="0" anchor="t"/>
+          <a:lstStyle/>
+          <a:p>
+            <a:pPr algn="l" indent="0" marL="0">
+              <a:spcAft>
+                <a:spcPts val="600"/>
+              </a:spcAft>
+              <a:buNone/>
+            </a:pPr>
+            <a:r>
+              <a:rPr lang="en-US" sz="1350" dirty="0">
+                <a:solidFill>
+                  <a:srgbClr val="33444F"/>
+                </a:solidFill>
+                <a:latin typeface="Calibri" pitchFamily="34" charset="0"/>
+                <a:ea typeface="Calibri" pitchFamily="34" charset="-122"/>
+                <a:cs typeface="Calibri" pitchFamily="34" charset="-120"/>
+              </a:rPr>
+              <a:t>A. Total T4</a:t>
+            </a:r>
+            <a:endParaRPr lang="en-US" sz="1350" dirty="0"/>
+          </a:p>
+          <a:p>
+            <a:pPr algn="l" indent="0" marL="0">
+              <a:spcAft>
+                <a:spcPts val="600"/>
+              </a:spcAft>
+              <a:buNone/>
+            </a:pPr>
+            <a:r>
+              <a:rPr lang="en-US" sz="1350" dirty="0">
+                <a:solidFill>
+                  <a:srgbClr val="33444F"/>
+                </a:solidFill>
+                <a:latin typeface="Calibri" pitchFamily="34" charset="0"/>
+                <a:ea typeface="Calibri" pitchFamily="34" charset="-122"/>
+                <a:cs typeface="Calibri" pitchFamily="34" charset="-120"/>
+              </a:rPr>
+              <a:t>B. Free T3</a:t>
+            </a:r>
+            <a:endParaRPr lang="en-US" sz="1350" dirty="0"/>
+          </a:p>
+          <a:p>
+            <a:pPr algn="l" indent="0" marL="0">
+              <a:spcAft>
+                <a:spcPts val="600"/>
+              </a:spcAft>
+              <a:buNone/>
+            </a:pPr>
+            <a:r>
+              <a:rPr lang="en-US" sz="1350" b="1" dirty="0">
+                <a:solidFill>
+                  <a:srgbClr val="0D4A92"/>
+                </a:solidFill>
+                <a:latin typeface="Calibri" pitchFamily="34" charset="0"/>
+                <a:ea typeface="Calibri" pitchFamily="34" charset="-122"/>
+                <a:cs typeface="Calibri" pitchFamily="34" charset="-120"/>
+              </a:rPr>
+              <a:t>C. TSH</a:t>
+            </a:r>
+            <a:endParaRPr lang="en-US" sz="1350" dirty="0"/>
+          </a:p>
+          <a:p>
+            <a:pPr algn="l" indent="0" marL="0">
+              <a:spcAft>
+                <a:spcPts val="600"/>
+              </a:spcAft>
+              <a:buNone/>
+            </a:pPr>
+            <a:r>
+              <a:rPr lang="en-US" sz="1350" dirty="0">
+                <a:solidFill>
+                  <a:srgbClr val="33444F"/>
+                </a:solidFill>
+                <a:latin typeface="Calibri" pitchFamily="34" charset="0"/>
+                <a:ea typeface="Calibri" pitchFamily="34" charset="-122"/>
+                <a:cs typeface="Calibri" pitchFamily="34" charset="-120"/>
+              </a:rPr>
+              <a:t>D. Thyroid antibodies</a:t>
+            </a:r>
+            <a:endParaRPr lang="en-US" sz="1350" dirty="0"/>
+          </a:p>
+          <a:p>
+            <a:pPr algn="l" indent="0" marL="0">
+              <a:spcAft>
+                <a:spcPts val="600"/>
+              </a:spcAft>
+              <a:buNone/>
+            </a:pPr>
+            <a:r>
+              <a:rPr lang="en-US" sz="1350" dirty="0">
+                <a:solidFill>
+                  <a:srgbClr val="33444F"/>
+                </a:solidFill>
+                <a:latin typeface="Calibri" pitchFamily="34" charset="0"/>
+                <a:ea typeface="Calibri" pitchFamily="34" charset="-122"/>
+                <a:cs typeface="Calibri" pitchFamily="34" charset="-120"/>
+              </a:rPr>
+              <a:t>E. Reverse T3</a:t>
+            </a:r>
+            <a:endParaRPr lang="en-US" sz="1350" dirty="0"/>
+          </a:p>
+        </p:txBody>
+      </p:sp>
+      <p:sp>
+        <p:nvSpPr>
+          <p:cNvPr id="6" name="Shape 4"/>
+          <p:cNvSpPr/>
+          <p:nvPr/>
+        </p:nvSpPr>
+        <p:spPr>
+          <a:xfrm>
+            <a:off x="7201632" y="2395728"/>
+            <a:ext cx="4423136" cy="3246120"/>
+          </a:xfrm>
+          <a:prstGeom prst="roundRect">
+            <a:avLst>
+              <a:gd name="adj" fmla="val 2535"/>
+            </a:avLst>
+          </a:prstGeom>
+          <a:solidFill>
+            <a:srgbClr val="E7EFFA"/>
+          </a:solidFill>
+          <a:ln/>
+          <a:effectLst>
+            <a:outerShdw sx="100000" sy="100000" kx="0" ky="0" algn="bl" rotWithShape="0" blurRad="88900" dist="25400" dir="5400000">
+              <a:srgbClr val="22303C">
+                <a:alpha val="12000"/>
+              </a:srgbClr>
+            </a:outerShdw>
+          </a:effectLst>
+        </p:spPr>
+        <p:txBody>
+          <a:bodyPr/>
+          <a:p/>
+        </p:txBody>
+      </p:sp>
+      <p:sp>
+        <p:nvSpPr>
+          <p:cNvPr id="7" name="Text 5"/>
+          <p:cNvSpPr/>
+          <p:nvPr/>
+        </p:nvSpPr>
+        <p:spPr>
+          <a:xfrm>
+            <a:off x="7439376" y="2578608"/>
+            <a:ext cx="3965936" cy="457200"/>
+          </a:xfrm>
+          <a:prstGeom prst="rect">
+            <a:avLst/>
+          </a:prstGeom>
+          <a:noFill/>
+          <a:ln/>
+        </p:spPr>
+        <p:txBody>
+          <a:bodyPr wrap="square" lIns="0" tIns="0" rIns="0" bIns="0" rtlCol="0" anchor="ctr"/>
+          <a:lstStyle/>
+          <a:p>
+            <a:pPr indent="0" marL="0">
+              <a:buNone/>
+            </a:pPr>
+            <a:r>
+              <a:rPr lang="en-US" sz="1500" b="1" dirty="0">
+                <a:solidFill>
+                  <a:srgbClr val="1565C0"/>
+                </a:solidFill>
+                <a:latin typeface="Calibri" pitchFamily="34" charset="0"/>
+                <a:ea typeface="Calibri" pitchFamily="34" charset="-122"/>
+                <a:cs typeface="Calibri" pitchFamily="34" charset="-120"/>
+              </a:rPr>
+              <a:t>ANSWER  </a:t>
+            </a:r>
+            <a:pPr indent="0" marL="0">
+              <a:buNone/>
+            </a:pPr>
+            <a:r>
+              <a:rPr lang="en-US" sz="1500" b="1" dirty="0">
+                <a:solidFill>
+                  <a:srgbClr val="1B2A38"/>
+                </a:solidFill>
+                <a:latin typeface="Calibri" pitchFamily="34" charset="0"/>
+                <a:ea typeface="Calibri" pitchFamily="34" charset="-122"/>
+                <a:cs typeface="Calibri" pitchFamily="34" charset="-120"/>
+              </a:rPr>
+              <a:t>C — TSH</a:t>
+            </a:r>
+            <a:endParaRPr lang="en-US" sz="1500" dirty="0"/>
+          </a:p>
+        </p:txBody>
+      </p:sp>
+      <p:sp>
+        <p:nvSpPr>
+          <p:cNvPr id="8" name="Text 6"/>
+          <p:cNvSpPr/>
+          <p:nvPr/>
+        </p:nvSpPr>
+        <p:spPr>
+          <a:xfrm>
+            <a:off x="7439376" y="3127248"/>
+            <a:ext cx="3947648" cy="2377440"/>
+          </a:xfrm>
+          <a:prstGeom prst="rect">
+            <a:avLst/>
+          </a:prstGeom>
+          <a:noFill/>
+          <a:ln/>
+        </p:spPr>
+        <p:txBody>
+          <a:bodyPr wrap="square" lIns="0" tIns="0" rIns="0" bIns="0" rtlCol="0" anchor="t"/>
+          <a:lstStyle/>
+          <a:p>
+            <a:pPr algn="l" indent="0" marL="0">
+              <a:lnSpc>
+                <a:spcPct val="108000"/>
+              </a:lnSpc>
+              <a:buNone/>
+            </a:pPr>
+            <a:r>
+              <a:rPr lang="en-US" sz="1250" dirty="0">
+                <a:solidFill>
+                  <a:srgbClr val="33444F"/>
+                </a:solidFill>
+                <a:latin typeface="Calibri" pitchFamily="34" charset="0"/>
+                <a:ea typeface="Calibri" pitchFamily="34" charset="-122"/>
+                <a:cs typeface="Calibri" pitchFamily="34" charset="-120"/>
+              </a:rPr>
+              <a:t>Log-linear pituitary feedback makes TSH the most sensitive first-line screen (barring central disease or interference).</a:t>
+            </a:r>
+            <a:endParaRPr lang="en-US" sz="1250" dirty="0"/>
+          </a:p>
+        </p:txBody>
+      </p:sp>
+      <p:sp>
+        <p:nvSpPr>
+          <p:cNvPr id="9" name="Text 7"/>
+          <p:cNvSpPr/>
+          <p:nvPr/>
+        </p:nvSpPr>
+        <p:spPr>
+          <a:xfrm>
+            <a:off x="566928" y="6473952"/>
+            <a:ext cx="7772400" cy="274320"/>
+          </a:xfrm>
+          <a:prstGeom prst="rect">
+            <a:avLst/>
+          </a:prstGeom>
+          <a:noFill/>
+          <a:ln/>
+        </p:spPr>
+        <p:txBody>
+          <a:bodyPr wrap="square" lIns="0" tIns="0" rIns="0" bIns="0" rtlCol="0" anchor="ctr"/>
+          <a:lstStyle/>
+          <a:p>
+            <a:pPr algn="l" indent="0" marL="0">
+              <a:buNone/>
+            </a:pPr>
+            <a:r>
+              <a:rPr lang="en-US" sz="850" dirty="0">
+                <a:solidFill>
+                  <a:srgbClr val="9AA8B4"/>
+                </a:solidFill>
+                <a:latin typeface="Calibri" pitchFamily="34" charset="0"/>
+                <a:ea typeface="Calibri" pitchFamily="34" charset="-122"/>
+                <a:cs typeface="Calibri" pitchFamily="34" charset="-120"/>
+              </a:rPr>
+              <a:t>Makassed General Hospital  ·  Department of Laboratory Medicine</a:t>
+            </a:r>
+            <a:endParaRPr lang="en-US" sz="850" dirty="0"/>
+          </a:p>
+        </p:txBody>
+      </p:sp>
+      <p:sp>
+        <p:nvSpPr>
+          <p:cNvPr id="10" name="Text 8"/>
+          <p:cNvSpPr/>
+          <p:nvPr/>
+        </p:nvSpPr>
+        <p:spPr>
+          <a:xfrm>
+            <a:off x="9814255" y="6473952"/>
+            <a:ext cx="1828800" cy="274320"/>
+          </a:xfrm>
+          <a:prstGeom prst="rect">
+            <a:avLst/>
+          </a:prstGeom>
+          <a:noFill/>
+          <a:ln/>
+        </p:spPr>
+        <p:txBody>
+          <a:bodyPr wrap="square" lIns="0" tIns="0" rIns="0" bIns="0" rtlCol="0" anchor="ctr"/>
+          <a:lstStyle/>
+          <a:p>
+            <a:pPr algn="r" indent="0" marL="0">
+              <a:buNone/>
+            </a:pPr>
+            <a:r>
+              <a:rPr lang="en-US" sz="850" dirty="0">
+                <a:solidFill>
+                  <a:srgbClr val="9AA8B4"/>
+                </a:solidFill>
+                <a:latin typeface="Calibri" pitchFamily="34" charset="0"/>
+                <a:ea typeface="Calibri" pitchFamily="34" charset="-122"/>
+                <a:cs typeface="Calibri" pitchFamily="34" charset="-120"/>
+              </a:rPr>
+              <a:t>CP Lecture Series</a:t>
+            </a:r>
+            <a:pPr algn="r" indent="0" marL="0">
+              <a:buNone/>
+            </a:pPr>
+            <a:r>
+              <a:rPr lang="en-US" sz="850" dirty="0">
+                <a:solidFill>
+                  <a:srgbClr val="DCE4EC"/>
+                </a:solidFill>
+                <a:latin typeface="Calibri" pitchFamily="34" charset="0"/>
+                <a:ea typeface="Calibri" pitchFamily="34" charset="-122"/>
+                <a:cs typeface="Calibri" pitchFamily="34" charset="-120"/>
+              </a:rPr>
+              <a:t>   ·   </a:t>
+            </a:r>
+            <a:pPr algn="r" indent="0" marL="0">
+              <a:buNone/>
+            </a:pPr>
+            <a:r>
+              <a:rPr lang="en-US" sz="850" b="1" dirty="0">
+                <a:solidFill>
+                  <a:srgbClr val="1565C0"/>
+                </a:solidFill>
+                <a:latin typeface="Calibri" pitchFamily="34" charset="0"/>
+                <a:ea typeface="Calibri" pitchFamily="34" charset="-122"/>
+                <a:cs typeface="Calibri" pitchFamily="34" charset="-120"/>
+              </a:rPr>
+              <a:t>18</a:t>
             </a:r>
             <a:endParaRPr lang="en-US" sz="850" dirty="0"/>
           </a:p>
@@ -13224,6 +14900,10 @@
             </a:outerShdw>
           </a:effectLst>
         </p:spPr>
+        <p:txBody>
+          <a:bodyPr/>
+          <a:p/>
+        </p:txBody>
       </p:sp>
       <p:sp>
         <p:nvSpPr>
@@ -13251,6 +14931,10 @@
             </a:outerShdw>
           </a:effectLst>
         </p:spPr>
+        <p:txBody>
+          <a:bodyPr/>
+          <a:p/>
+        </p:txBody>
       </p:sp>
       <p:sp>
         <p:nvSpPr>
@@ -13365,6 +15049,10 @@
           </a:solidFill>
           <a:ln/>
         </p:spPr>
+        <p:txBody>
+          <a:bodyPr/>
+          <a:p/>
+        </p:txBody>
       </p:sp>
       <p:sp>
         <p:nvSpPr>
@@ -13392,6 +15080,10 @@
             </a:outerShdw>
           </a:effectLst>
         </p:spPr>
+        <p:txBody>
+          <a:bodyPr/>
+          <a:p/>
+        </p:txBody>
       </p:sp>
       <p:sp>
         <p:nvSpPr>
@@ -13513,6 +15205,10 @@
             </a:outerShdw>
           </a:effectLst>
         </p:spPr>
+        <p:txBody>
+          <a:bodyPr/>
+          <a:p/>
+        </p:txBody>
       </p:sp>
       <p:sp>
         <p:nvSpPr>
@@ -13540,6 +15236,10 @@
             </a:outerShdw>
           </a:effectLst>
         </p:spPr>
+        <p:txBody>
+          <a:bodyPr/>
+          <a:p/>
+        </p:txBody>
       </p:sp>
       <p:sp>
         <p:nvSpPr>
@@ -13654,6 +15354,10 @@
           </a:solidFill>
           <a:ln/>
         </p:spPr>
+        <p:txBody>
+          <a:bodyPr/>
+          <a:p/>
+        </p:txBody>
       </p:sp>
       <p:sp>
         <p:nvSpPr>
@@ -13681,6 +15385,10 @@
             </a:outerShdw>
           </a:effectLst>
         </p:spPr>
+        <p:txBody>
+          <a:bodyPr/>
+          <a:p/>
+        </p:txBody>
       </p:sp>
       <p:sp>
         <p:nvSpPr>
@@ -13802,6 +15510,10 @@
             </a:outerShdw>
           </a:effectLst>
         </p:spPr>
+        <p:txBody>
+          <a:bodyPr/>
+          <a:p/>
+        </p:txBody>
       </p:sp>
       <p:sp>
         <p:nvSpPr>
@@ -13829,6 +15541,10 @@
             </a:outerShdw>
           </a:effectLst>
         </p:spPr>
+        <p:txBody>
+          <a:bodyPr/>
+          <a:p/>
+        </p:txBody>
       </p:sp>
       <p:sp>
         <p:nvSpPr>
@@ -14067,6 +15783,10 @@
           </a:solidFill>
           <a:ln/>
         </p:spPr>
+        <p:txBody>
+          <a:bodyPr/>
+          <a:p/>
+        </p:txBody>
       </p:sp>
       <p:sp>
         <p:nvSpPr>
@@ -14089,6 +15809,10 @@
           </a:solidFill>
           <a:ln/>
         </p:spPr>
+        <p:txBody>
+          <a:bodyPr/>
+          <a:p/>
+        </p:txBody>
       </p:sp>
       <p:sp>
         <p:nvSpPr>
@@ -14350,6 +16074,10 @@
             </a:outerShdw>
           </a:effectLst>
         </p:spPr>
+        <p:txBody>
+          <a:bodyPr/>
+          <a:p/>
+        </p:txBody>
       </p:sp>
       <p:pic>
         <p:nvPicPr>
@@ -14658,6 +16386,10 @@
             </a:outerShdw>
           </a:effectLst>
         </p:spPr>
+        <p:txBody>
+          <a:bodyPr/>
+          <a:p/>
+        </p:txBody>
       </p:sp>
       <p:sp>
         <p:nvSpPr>
@@ -14832,6 +16564,10 @@
             </a:outerShdw>
           </a:effectLst>
         </p:spPr>
+        <p:txBody>
+          <a:bodyPr/>
+          <a:p/>
+        </p:txBody>
       </p:sp>
       <p:sp>
         <p:nvSpPr>
@@ -15222,6 +16958,10 @@
             </a:outerShdw>
           </a:effectLst>
         </p:spPr>
+        <p:txBody>
+          <a:bodyPr/>
+          <a:p/>
+        </p:txBody>
       </p:sp>
       <p:sp>
         <p:nvSpPr>
@@ -15396,6 +17136,10 @@
             </a:outerShdw>
           </a:effectLst>
         </p:spPr>
+        <p:txBody>
+          <a:bodyPr/>
+          <a:p/>
+        </p:txBody>
       </p:sp>
       <p:sp>
         <p:nvSpPr>
@@ -15701,6 +17445,10 @@
           </a:solidFill>
           <a:ln/>
         </p:spPr>
+        <p:txBody>
+          <a:bodyPr/>
+          <a:p/>
+        </p:txBody>
       </p:sp>
       <p:sp>
         <p:nvSpPr>
@@ -15723,6 +17471,10 @@
           </a:solidFill>
           <a:ln/>
         </p:spPr>
+        <p:txBody>
+          <a:bodyPr/>
+          <a:p/>
+        </p:txBody>
       </p:sp>
       <p:sp>
         <p:nvSpPr>
